--- a/4th Sem/Computer Architecture and Organization/Memory Systems.pptx
+++ b/4th Sem/Computer Architecture and Organization/Memory Systems.pptx
@@ -131,7 +131,18 @@
   </p:defaultTextStyle>
   <p:extLst>
     <p:ext uri="{EFAFB233-063F-42B5-8137-9DF3F51BA10A}">
-      <p15:sldGuideLst xmlns:p15="http://schemas.microsoft.com/office/powerpoint/2012/main" xmlns=""/>
+      <p15:sldGuideLst xmlns:p15="http://schemas.microsoft.com/office/powerpoint/2012/main">
+        <p15:guide id="1" orient="horz" pos="2160">
+          <p15:clr>
+            <a:srgbClr val="A4A3A4"/>
+          </p15:clr>
+        </p15:guide>
+        <p15:guide id="2" pos="3840">
+          <p15:clr>
+            <a:srgbClr val="A4A3A4"/>
+          </p15:clr>
+        </p15:guide>
+      </p15:sldGuideLst>
     </p:ext>
   </p:extLst>
 </p:presentation>
@@ -179,7 +190,7 @@
           </a:lstStyle>
           <a:p>
             <a:r>
-              <a:rPr lang="en-US" smtClean="0"/>
+              <a:rPr lang="en-US"/>
               <a:t>Click to edit Master title style</a:t>
             </a:r>
             <a:endParaRPr lang="en-IN"/>
@@ -244,7 +255,7 @@
           </a:lstStyle>
           <a:p>
             <a:r>
-              <a:rPr lang="en-US" smtClean="0"/>
+              <a:rPr lang="en-US"/>
               <a:t>Click to edit Master subtitle style</a:t>
             </a:r>
             <a:endParaRPr lang="en-IN"/>
@@ -269,7 +280,7 @@
             <a:fld id="{F3AE2DF7-5B04-41E2-B24C-38A80C73CB40}" type="datetimeFigureOut">
               <a:rPr lang="en-IN" smtClean="0"/>
               <a:pPr/>
-              <a:t>24-02-2026</a:t>
+              <a:t>10-04-2026</a:t>
             </a:fld>
             <a:endParaRPr lang="en-IN"/>
           </a:p>
@@ -321,7 +332,7 @@
     </p:spTree>
     <p:extLst>
       <p:ext uri="{BB962C8B-B14F-4D97-AF65-F5344CB8AC3E}">
-        <p14:creationId xmlns:p14="http://schemas.microsoft.com/office/powerpoint/2010/main" xmlns="" val="1269343930"/>
+        <p14:creationId xmlns:p14="http://schemas.microsoft.com/office/powerpoint/2010/main" val="1269343930"/>
       </p:ext>
     </p:extLst>
   </p:cSld>
@@ -364,7 +375,7 @@
           <a:lstStyle/>
           <a:p>
             <a:r>
-              <a:rPr lang="en-US" smtClean="0"/>
+              <a:rPr lang="en-US"/>
               <a:t>Click to edit Master title style</a:t>
             </a:r>
             <a:endParaRPr lang="en-IN"/>
@@ -388,35 +399,35 @@
           <a:p>
             <a:pPr lvl="0"/>
             <a:r>
-              <a:rPr lang="en-US" smtClean="0"/>
+              <a:rPr lang="en-US"/>
               <a:t>Edit Master text styles</a:t>
             </a:r>
           </a:p>
           <a:p>
             <a:pPr lvl="1"/>
             <a:r>
-              <a:rPr lang="en-US" smtClean="0"/>
+              <a:rPr lang="en-US"/>
               <a:t>Second level</a:t>
             </a:r>
           </a:p>
           <a:p>
             <a:pPr lvl="2"/>
             <a:r>
-              <a:rPr lang="en-US" smtClean="0"/>
+              <a:rPr lang="en-US"/>
               <a:t>Third level</a:t>
             </a:r>
           </a:p>
           <a:p>
             <a:pPr lvl="3"/>
             <a:r>
-              <a:rPr lang="en-US" smtClean="0"/>
+              <a:rPr lang="en-US"/>
               <a:t>Fourth level</a:t>
             </a:r>
           </a:p>
           <a:p>
             <a:pPr lvl="4"/>
             <a:r>
-              <a:rPr lang="en-US" smtClean="0"/>
+              <a:rPr lang="en-US"/>
               <a:t>Fifth level</a:t>
             </a:r>
             <a:endParaRPr lang="en-IN"/>
@@ -441,7 +452,7 @@
             <a:fld id="{F3AE2DF7-5B04-41E2-B24C-38A80C73CB40}" type="datetimeFigureOut">
               <a:rPr lang="en-IN" smtClean="0"/>
               <a:pPr/>
-              <a:t>24-02-2026</a:t>
+              <a:t>10-04-2026</a:t>
             </a:fld>
             <a:endParaRPr lang="en-IN"/>
           </a:p>
@@ -493,7 +504,7 @@
     </p:spTree>
     <p:extLst>
       <p:ext uri="{BB962C8B-B14F-4D97-AF65-F5344CB8AC3E}">
-        <p14:creationId xmlns:p14="http://schemas.microsoft.com/office/powerpoint/2010/main" xmlns="" val="248923602"/>
+        <p14:creationId xmlns:p14="http://schemas.microsoft.com/office/powerpoint/2010/main" val="248923602"/>
       </p:ext>
     </p:extLst>
   </p:cSld>
@@ -541,7 +552,7 @@
           <a:lstStyle/>
           <a:p>
             <a:r>
-              <a:rPr lang="en-US" smtClean="0"/>
+              <a:rPr lang="en-US"/>
               <a:t>Click to edit Master title style</a:t>
             </a:r>
             <a:endParaRPr lang="en-IN"/>
@@ -570,35 +581,35 @@
           <a:p>
             <a:pPr lvl="0"/>
             <a:r>
-              <a:rPr lang="en-US" smtClean="0"/>
+              <a:rPr lang="en-US"/>
               <a:t>Edit Master text styles</a:t>
             </a:r>
           </a:p>
           <a:p>
             <a:pPr lvl="1"/>
             <a:r>
-              <a:rPr lang="en-US" smtClean="0"/>
+              <a:rPr lang="en-US"/>
               <a:t>Second level</a:t>
             </a:r>
           </a:p>
           <a:p>
             <a:pPr lvl="2"/>
             <a:r>
-              <a:rPr lang="en-US" smtClean="0"/>
+              <a:rPr lang="en-US"/>
               <a:t>Third level</a:t>
             </a:r>
           </a:p>
           <a:p>
             <a:pPr lvl="3"/>
             <a:r>
-              <a:rPr lang="en-US" smtClean="0"/>
+              <a:rPr lang="en-US"/>
               <a:t>Fourth level</a:t>
             </a:r>
           </a:p>
           <a:p>
             <a:pPr lvl="4"/>
             <a:r>
-              <a:rPr lang="en-US" smtClean="0"/>
+              <a:rPr lang="en-US"/>
               <a:t>Fifth level</a:t>
             </a:r>
             <a:endParaRPr lang="en-IN"/>
@@ -623,7 +634,7 @@
             <a:fld id="{F3AE2DF7-5B04-41E2-B24C-38A80C73CB40}" type="datetimeFigureOut">
               <a:rPr lang="en-IN" smtClean="0"/>
               <a:pPr/>
-              <a:t>24-02-2026</a:t>
+              <a:t>10-04-2026</a:t>
             </a:fld>
             <a:endParaRPr lang="en-IN"/>
           </a:p>
@@ -675,7 +686,7 @@
     </p:spTree>
     <p:extLst>
       <p:ext uri="{BB962C8B-B14F-4D97-AF65-F5344CB8AC3E}">
-        <p14:creationId xmlns:p14="http://schemas.microsoft.com/office/powerpoint/2010/main" xmlns="" val="2470829162"/>
+        <p14:creationId xmlns:p14="http://schemas.microsoft.com/office/powerpoint/2010/main" val="2470829162"/>
       </p:ext>
     </p:extLst>
   </p:cSld>
@@ -718,7 +729,7 @@
           <a:lstStyle/>
           <a:p>
             <a:r>
-              <a:rPr lang="en-US" smtClean="0"/>
+              <a:rPr lang="en-US"/>
               <a:t>Click to edit Master title style</a:t>
             </a:r>
             <a:endParaRPr lang="en-IN"/>
@@ -742,35 +753,35 @@
           <a:p>
             <a:pPr lvl="0"/>
             <a:r>
-              <a:rPr lang="en-US" smtClean="0"/>
+              <a:rPr lang="en-US"/>
               <a:t>Edit Master text styles</a:t>
             </a:r>
           </a:p>
           <a:p>
             <a:pPr lvl="1"/>
             <a:r>
-              <a:rPr lang="en-US" smtClean="0"/>
+              <a:rPr lang="en-US"/>
               <a:t>Second level</a:t>
             </a:r>
           </a:p>
           <a:p>
             <a:pPr lvl="2"/>
             <a:r>
-              <a:rPr lang="en-US" smtClean="0"/>
+              <a:rPr lang="en-US"/>
               <a:t>Third level</a:t>
             </a:r>
           </a:p>
           <a:p>
             <a:pPr lvl="3"/>
             <a:r>
-              <a:rPr lang="en-US" smtClean="0"/>
+              <a:rPr lang="en-US"/>
               <a:t>Fourth level</a:t>
             </a:r>
           </a:p>
           <a:p>
             <a:pPr lvl="4"/>
             <a:r>
-              <a:rPr lang="en-US" smtClean="0"/>
+              <a:rPr lang="en-US"/>
               <a:t>Fifth level</a:t>
             </a:r>
             <a:endParaRPr lang="en-IN"/>
@@ -795,7 +806,7 @@
             <a:fld id="{F3AE2DF7-5B04-41E2-B24C-38A80C73CB40}" type="datetimeFigureOut">
               <a:rPr lang="en-IN" smtClean="0"/>
               <a:pPr/>
-              <a:t>24-02-2026</a:t>
+              <a:t>10-04-2026</a:t>
             </a:fld>
             <a:endParaRPr lang="en-IN"/>
           </a:p>
@@ -847,7 +858,7 @@
     </p:spTree>
     <p:extLst>
       <p:ext uri="{BB962C8B-B14F-4D97-AF65-F5344CB8AC3E}">
-        <p14:creationId xmlns:p14="http://schemas.microsoft.com/office/powerpoint/2010/main" xmlns="" val="1366585744"/>
+        <p14:creationId xmlns:p14="http://schemas.microsoft.com/office/powerpoint/2010/main" val="1366585744"/>
       </p:ext>
     </p:extLst>
   </p:cSld>
@@ -899,7 +910,7 @@
           </a:lstStyle>
           <a:p>
             <a:r>
-              <a:rPr lang="en-US" smtClean="0"/>
+              <a:rPr lang="en-US"/>
               <a:t>Click to edit Master title style</a:t>
             </a:r>
             <a:endParaRPr lang="en-IN"/>
@@ -1019,7 +1030,7 @@
           <a:p>
             <a:pPr lvl="0"/>
             <a:r>
-              <a:rPr lang="en-US" smtClean="0"/>
+              <a:rPr lang="en-US"/>
               <a:t>Edit Master text styles</a:t>
             </a:r>
           </a:p>
@@ -1043,7 +1054,7 @@
             <a:fld id="{F3AE2DF7-5B04-41E2-B24C-38A80C73CB40}" type="datetimeFigureOut">
               <a:rPr lang="en-IN" smtClean="0"/>
               <a:pPr/>
-              <a:t>24-02-2026</a:t>
+              <a:t>10-04-2026</a:t>
             </a:fld>
             <a:endParaRPr lang="en-IN"/>
           </a:p>
@@ -1095,7 +1106,7 @@
     </p:spTree>
     <p:extLst>
       <p:ext uri="{BB962C8B-B14F-4D97-AF65-F5344CB8AC3E}">
-        <p14:creationId xmlns:p14="http://schemas.microsoft.com/office/powerpoint/2010/main" xmlns="" val="3186992944"/>
+        <p14:creationId xmlns:p14="http://schemas.microsoft.com/office/powerpoint/2010/main" val="3186992944"/>
       </p:ext>
     </p:extLst>
   </p:cSld>
@@ -1138,7 +1149,7 @@
           <a:lstStyle/>
           <a:p>
             <a:r>
-              <a:rPr lang="en-US" smtClean="0"/>
+              <a:rPr lang="en-US"/>
               <a:t>Click to edit Master title style</a:t>
             </a:r>
             <a:endParaRPr lang="en-IN"/>
@@ -1167,35 +1178,35 @@
           <a:p>
             <a:pPr lvl="0"/>
             <a:r>
-              <a:rPr lang="en-US" smtClean="0"/>
+              <a:rPr lang="en-US"/>
               <a:t>Edit Master text styles</a:t>
             </a:r>
           </a:p>
           <a:p>
             <a:pPr lvl="1"/>
             <a:r>
-              <a:rPr lang="en-US" smtClean="0"/>
+              <a:rPr lang="en-US"/>
               <a:t>Second level</a:t>
             </a:r>
           </a:p>
           <a:p>
             <a:pPr lvl="2"/>
             <a:r>
-              <a:rPr lang="en-US" smtClean="0"/>
+              <a:rPr lang="en-US"/>
               <a:t>Third level</a:t>
             </a:r>
           </a:p>
           <a:p>
             <a:pPr lvl="3"/>
             <a:r>
-              <a:rPr lang="en-US" smtClean="0"/>
+              <a:rPr lang="en-US"/>
               <a:t>Fourth level</a:t>
             </a:r>
           </a:p>
           <a:p>
             <a:pPr lvl="4"/>
             <a:r>
-              <a:rPr lang="en-US" smtClean="0"/>
+              <a:rPr lang="en-US"/>
               <a:t>Fifth level</a:t>
             </a:r>
             <a:endParaRPr lang="en-IN"/>
@@ -1224,35 +1235,35 @@
           <a:p>
             <a:pPr lvl="0"/>
             <a:r>
-              <a:rPr lang="en-US" smtClean="0"/>
+              <a:rPr lang="en-US"/>
               <a:t>Edit Master text styles</a:t>
             </a:r>
           </a:p>
           <a:p>
             <a:pPr lvl="1"/>
             <a:r>
-              <a:rPr lang="en-US" smtClean="0"/>
+              <a:rPr lang="en-US"/>
               <a:t>Second level</a:t>
             </a:r>
           </a:p>
           <a:p>
             <a:pPr lvl="2"/>
             <a:r>
-              <a:rPr lang="en-US" smtClean="0"/>
+              <a:rPr lang="en-US"/>
               <a:t>Third level</a:t>
             </a:r>
           </a:p>
           <a:p>
             <a:pPr lvl="3"/>
             <a:r>
-              <a:rPr lang="en-US" smtClean="0"/>
+              <a:rPr lang="en-US"/>
               <a:t>Fourth level</a:t>
             </a:r>
           </a:p>
           <a:p>
             <a:pPr lvl="4"/>
             <a:r>
-              <a:rPr lang="en-US" smtClean="0"/>
+              <a:rPr lang="en-US"/>
               <a:t>Fifth level</a:t>
             </a:r>
             <a:endParaRPr lang="en-IN"/>
@@ -1277,7 +1288,7 @@
             <a:fld id="{F3AE2DF7-5B04-41E2-B24C-38A80C73CB40}" type="datetimeFigureOut">
               <a:rPr lang="en-IN" smtClean="0"/>
               <a:pPr/>
-              <a:t>24-02-2026</a:t>
+              <a:t>10-04-2026</a:t>
             </a:fld>
             <a:endParaRPr lang="en-IN"/>
           </a:p>
@@ -1329,7 +1340,7 @@
     </p:spTree>
     <p:extLst>
       <p:ext uri="{BB962C8B-B14F-4D97-AF65-F5344CB8AC3E}">
-        <p14:creationId xmlns:p14="http://schemas.microsoft.com/office/powerpoint/2010/main" xmlns="" val="485880835"/>
+        <p14:creationId xmlns:p14="http://schemas.microsoft.com/office/powerpoint/2010/main" val="485880835"/>
       </p:ext>
     </p:extLst>
   </p:cSld>
@@ -1377,7 +1388,7 @@
           <a:lstStyle/>
           <a:p>
             <a:r>
-              <a:rPr lang="en-US" smtClean="0"/>
+              <a:rPr lang="en-US"/>
               <a:t>Click to edit Master title style</a:t>
             </a:r>
             <a:endParaRPr lang="en-IN"/>
@@ -1443,7 +1454,7 @@
           <a:p>
             <a:pPr lvl="0"/>
             <a:r>
-              <a:rPr lang="en-US" smtClean="0"/>
+              <a:rPr lang="en-US"/>
               <a:t>Edit Master text styles</a:t>
             </a:r>
           </a:p>
@@ -1471,35 +1482,35 @@
           <a:p>
             <a:pPr lvl="0"/>
             <a:r>
-              <a:rPr lang="en-US" smtClean="0"/>
+              <a:rPr lang="en-US"/>
               <a:t>Edit Master text styles</a:t>
             </a:r>
           </a:p>
           <a:p>
             <a:pPr lvl="1"/>
             <a:r>
-              <a:rPr lang="en-US" smtClean="0"/>
+              <a:rPr lang="en-US"/>
               <a:t>Second level</a:t>
             </a:r>
           </a:p>
           <a:p>
             <a:pPr lvl="2"/>
             <a:r>
-              <a:rPr lang="en-US" smtClean="0"/>
+              <a:rPr lang="en-US"/>
               <a:t>Third level</a:t>
             </a:r>
           </a:p>
           <a:p>
             <a:pPr lvl="3"/>
             <a:r>
-              <a:rPr lang="en-US" smtClean="0"/>
+              <a:rPr lang="en-US"/>
               <a:t>Fourth level</a:t>
             </a:r>
           </a:p>
           <a:p>
             <a:pPr lvl="4"/>
             <a:r>
-              <a:rPr lang="en-US" smtClean="0"/>
+              <a:rPr lang="en-US"/>
               <a:t>Fifth level</a:t>
             </a:r>
             <a:endParaRPr lang="en-IN"/>
@@ -1565,7 +1576,7 @@
           <a:p>
             <a:pPr lvl="0"/>
             <a:r>
-              <a:rPr lang="en-US" smtClean="0"/>
+              <a:rPr lang="en-US"/>
               <a:t>Edit Master text styles</a:t>
             </a:r>
           </a:p>
@@ -1593,35 +1604,35 @@
           <a:p>
             <a:pPr lvl="0"/>
             <a:r>
-              <a:rPr lang="en-US" smtClean="0"/>
+              <a:rPr lang="en-US"/>
               <a:t>Edit Master text styles</a:t>
             </a:r>
           </a:p>
           <a:p>
             <a:pPr lvl="1"/>
             <a:r>
-              <a:rPr lang="en-US" smtClean="0"/>
+              <a:rPr lang="en-US"/>
               <a:t>Second level</a:t>
             </a:r>
           </a:p>
           <a:p>
             <a:pPr lvl="2"/>
             <a:r>
-              <a:rPr lang="en-US" smtClean="0"/>
+              <a:rPr lang="en-US"/>
               <a:t>Third level</a:t>
             </a:r>
           </a:p>
           <a:p>
             <a:pPr lvl="3"/>
             <a:r>
-              <a:rPr lang="en-US" smtClean="0"/>
+              <a:rPr lang="en-US"/>
               <a:t>Fourth level</a:t>
             </a:r>
           </a:p>
           <a:p>
             <a:pPr lvl="4"/>
             <a:r>
-              <a:rPr lang="en-US" smtClean="0"/>
+              <a:rPr lang="en-US"/>
               <a:t>Fifth level</a:t>
             </a:r>
             <a:endParaRPr lang="en-IN"/>
@@ -1646,7 +1657,7 @@
             <a:fld id="{F3AE2DF7-5B04-41E2-B24C-38A80C73CB40}" type="datetimeFigureOut">
               <a:rPr lang="en-IN" smtClean="0"/>
               <a:pPr/>
-              <a:t>24-02-2026</a:t>
+              <a:t>10-04-2026</a:t>
             </a:fld>
             <a:endParaRPr lang="en-IN"/>
           </a:p>
@@ -1698,7 +1709,7 @@
     </p:spTree>
     <p:extLst>
       <p:ext uri="{BB962C8B-B14F-4D97-AF65-F5344CB8AC3E}">
-        <p14:creationId xmlns:p14="http://schemas.microsoft.com/office/powerpoint/2010/main" xmlns="" val="2716120613"/>
+        <p14:creationId xmlns:p14="http://schemas.microsoft.com/office/powerpoint/2010/main" val="2716120613"/>
       </p:ext>
     </p:extLst>
   </p:cSld>
@@ -1741,7 +1752,7 @@
           <a:lstStyle/>
           <a:p>
             <a:r>
-              <a:rPr lang="en-US" smtClean="0"/>
+              <a:rPr lang="en-US"/>
               <a:t>Click to edit Master title style</a:t>
             </a:r>
             <a:endParaRPr lang="en-IN"/>
@@ -1766,7 +1777,7 @@
             <a:fld id="{F3AE2DF7-5B04-41E2-B24C-38A80C73CB40}" type="datetimeFigureOut">
               <a:rPr lang="en-IN" smtClean="0"/>
               <a:pPr/>
-              <a:t>24-02-2026</a:t>
+              <a:t>10-04-2026</a:t>
             </a:fld>
             <a:endParaRPr lang="en-IN"/>
           </a:p>
@@ -1818,7 +1829,7 @@
     </p:spTree>
     <p:extLst>
       <p:ext uri="{BB962C8B-B14F-4D97-AF65-F5344CB8AC3E}">
-        <p14:creationId xmlns:p14="http://schemas.microsoft.com/office/powerpoint/2010/main" xmlns="" val="4105877548"/>
+        <p14:creationId xmlns:p14="http://schemas.microsoft.com/office/powerpoint/2010/main" val="4105877548"/>
       </p:ext>
     </p:extLst>
   </p:cSld>
@@ -1863,7 +1874,7 @@
             <a:fld id="{F3AE2DF7-5B04-41E2-B24C-38A80C73CB40}" type="datetimeFigureOut">
               <a:rPr lang="en-IN" smtClean="0"/>
               <a:pPr/>
-              <a:t>24-02-2026</a:t>
+              <a:t>10-04-2026</a:t>
             </a:fld>
             <a:endParaRPr lang="en-IN"/>
           </a:p>
@@ -1915,7 +1926,7 @@
     </p:spTree>
     <p:extLst>
       <p:ext uri="{BB962C8B-B14F-4D97-AF65-F5344CB8AC3E}">
-        <p14:creationId xmlns:p14="http://schemas.microsoft.com/office/powerpoint/2010/main" xmlns="" val="5521056"/>
+        <p14:creationId xmlns:p14="http://schemas.microsoft.com/office/powerpoint/2010/main" val="5521056"/>
       </p:ext>
     </p:extLst>
   </p:cSld>
@@ -1967,7 +1978,7 @@
           </a:lstStyle>
           <a:p>
             <a:r>
-              <a:rPr lang="en-US" smtClean="0"/>
+              <a:rPr lang="en-US"/>
               <a:t>Click to edit Master title style</a:t>
             </a:r>
             <a:endParaRPr lang="en-IN"/>
@@ -2024,35 +2035,35 @@
           <a:p>
             <a:pPr lvl="0"/>
             <a:r>
-              <a:rPr lang="en-US" smtClean="0"/>
+              <a:rPr lang="en-US"/>
               <a:t>Edit Master text styles</a:t>
             </a:r>
           </a:p>
           <a:p>
             <a:pPr lvl="1"/>
             <a:r>
-              <a:rPr lang="en-US" smtClean="0"/>
+              <a:rPr lang="en-US"/>
               <a:t>Second level</a:t>
             </a:r>
           </a:p>
           <a:p>
             <a:pPr lvl="2"/>
             <a:r>
-              <a:rPr lang="en-US" smtClean="0"/>
+              <a:rPr lang="en-US"/>
               <a:t>Third level</a:t>
             </a:r>
           </a:p>
           <a:p>
             <a:pPr lvl="3"/>
             <a:r>
-              <a:rPr lang="en-US" smtClean="0"/>
+              <a:rPr lang="en-US"/>
               <a:t>Fourth level</a:t>
             </a:r>
           </a:p>
           <a:p>
             <a:pPr lvl="4"/>
             <a:r>
-              <a:rPr lang="en-US" smtClean="0"/>
+              <a:rPr lang="en-US"/>
               <a:t>Fifth level</a:t>
             </a:r>
             <a:endParaRPr lang="en-IN"/>
@@ -2118,7 +2129,7 @@
           <a:p>
             <a:pPr lvl="0"/>
             <a:r>
-              <a:rPr lang="en-US" smtClean="0"/>
+              <a:rPr lang="en-US"/>
               <a:t>Edit Master text styles</a:t>
             </a:r>
           </a:p>
@@ -2142,7 +2153,7 @@
             <a:fld id="{F3AE2DF7-5B04-41E2-B24C-38A80C73CB40}" type="datetimeFigureOut">
               <a:rPr lang="en-IN" smtClean="0"/>
               <a:pPr/>
-              <a:t>24-02-2026</a:t>
+              <a:t>10-04-2026</a:t>
             </a:fld>
             <a:endParaRPr lang="en-IN"/>
           </a:p>
@@ -2194,7 +2205,7 @@
     </p:spTree>
     <p:extLst>
       <p:ext uri="{BB962C8B-B14F-4D97-AF65-F5344CB8AC3E}">
-        <p14:creationId xmlns:p14="http://schemas.microsoft.com/office/powerpoint/2010/main" xmlns="" val="3476080522"/>
+        <p14:creationId xmlns:p14="http://schemas.microsoft.com/office/powerpoint/2010/main" val="3476080522"/>
       </p:ext>
     </p:extLst>
   </p:cSld>
@@ -2246,7 +2257,7 @@
           </a:lstStyle>
           <a:p>
             <a:r>
-              <a:rPr lang="en-US" smtClean="0"/>
+              <a:rPr lang="en-US"/>
               <a:t>Click to edit Master title style</a:t>
             </a:r>
             <a:endParaRPr lang="en-IN"/>
@@ -2373,7 +2384,7 @@
           <a:p>
             <a:pPr lvl="0"/>
             <a:r>
-              <a:rPr lang="en-US" smtClean="0"/>
+              <a:rPr lang="en-US"/>
               <a:t>Edit Master text styles</a:t>
             </a:r>
           </a:p>
@@ -2397,7 +2408,7 @@
             <a:fld id="{F3AE2DF7-5B04-41E2-B24C-38A80C73CB40}" type="datetimeFigureOut">
               <a:rPr lang="en-IN" smtClean="0"/>
               <a:pPr/>
-              <a:t>24-02-2026</a:t>
+              <a:t>10-04-2026</a:t>
             </a:fld>
             <a:endParaRPr lang="en-IN"/>
           </a:p>
@@ -2449,7 +2460,7 @@
     </p:spTree>
     <p:extLst>
       <p:ext uri="{BB962C8B-B14F-4D97-AF65-F5344CB8AC3E}">
-        <p14:creationId xmlns:p14="http://schemas.microsoft.com/office/powerpoint/2010/main" xmlns="" val="3043726467"/>
+        <p14:creationId xmlns:p14="http://schemas.microsoft.com/office/powerpoint/2010/main" val="3043726467"/>
       </p:ext>
     </p:extLst>
   </p:cSld>
@@ -2507,7 +2518,7 @@
           <a:lstStyle/>
           <a:p>
             <a:r>
-              <a:rPr lang="en-US" smtClean="0"/>
+              <a:rPr lang="en-US"/>
               <a:t>Click to edit Master title style</a:t>
             </a:r>
             <a:endParaRPr lang="en-IN"/>
@@ -2541,35 +2552,35 @@
           <a:p>
             <a:pPr lvl="0"/>
             <a:r>
-              <a:rPr lang="en-US" smtClean="0"/>
+              <a:rPr lang="en-US"/>
               <a:t>Edit Master text styles</a:t>
             </a:r>
           </a:p>
           <a:p>
             <a:pPr lvl="1"/>
             <a:r>
-              <a:rPr lang="en-US" smtClean="0"/>
+              <a:rPr lang="en-US"/>
               <a:t>Second level</a:t>
             </a:r>
           </a:p>
           <a:p>
             <a:pPr lvl="2"/>
             <a:r>
-              <a:rPr lang="en-US" smtClean="0"/>
+              <a:rPr lang="en-US"/>
               <a:t>Third level</a:t>
             </a:r>
           </a:p>
           <a:p>
             <a:pPr lvl="3"/>
             <a:r>
-              <a:rPr lang="en-US" smtClean="0"/>
+              <a:rPr lang="en-US"/>
               <a:t>Fourth level</a:t>
             </a:r>
           </a:p>
           <a:p>
             <a:pPr lvl="4"/>
             <a:r>
-              <a:rPr lang="en-US" smtClean="0"/>
+              <a:rPr lang="en-US"/>
               <a:t>Fifth level</a:t>
             </a:r>
             <a:endParaRPr lang="en-IN"/>
@@ -2612,7 +2623,7 @@
             <a:fld id="{F3AE2DF7-5B04-41E2-B24C-38A80C73CB40}" type="datetimeFigureOut">
               <a:rPr lang="en-IN" smtClean="0"/>
               <a:pPr/>
-              <a:t>24-02-2026</a:t>
+              <a:t>10-04-2026</a:t>
             </a:fld>
             <a:endParaRPr lang="en-IN"/>
           </a:p>
@@ -2700,7 +2711,7 @@
     </p:spTree>
     <p:extLst>
       <p:ext uri="{BB962C8B-B14F-4D97-AF65-F5344CB8AC3E}">
-        <p14:creationId xmlns:p14="http://schemas.microsoft.com/office/powerpoint/2010/main" xmlns="" val="2926802235"/>
+        <p14:creationId xmlns:p14="http://schemas.microsoft.com/office/powerpoint/2010/main" val="2926802235"/>
       </p:ext>
     </p:extLst>
   </p:cSld>
@@ -3041,7 +3052,7 @@
           <a:lstStyle/>
           <a:p>
             <a:r>
-              <a:rPr lang="en-IN" b="1" dirty="0" smtClean="0">
+              <a:rPr lang="en-IN" b="1" dirty="0">
                 <a:latin typeface="Times New Roman" pitchFamily="18" charset="0"/>
                 <a:cs typeface="Times New Roman" pitchFamily="18" charset="0"/>
               </a:rPr>
@@ -3050,7 +3061,7 @@
           </a:p>
           <a:p>
             <a:r>
-              <a:rPr lang="en-IN" dirty="0" smtClean="0">
+              <a:rPr lang="en-IN" dirty="0">
                 <a:latin typeface="Times New Roman" pitchFamily="18" charset="0"/>
                 <a:cs typeface="Times New Roman" pitchFamily="18" charset="0"/>
               </a:rPr>
@@ -3059,7 +3070,7 @@
           </a:p>
           <a:p>
             <a:r>
-              <a:rPr lang="en-IN" dirty="0" smtClean="0">
+              <a:rPr lang="en-IN" dirty="0">
                 <a:latin typeface="Times New Roman" pitchFamily="18" charset="0"/>
                 <a:cs typeface="Times New Roman" pitchFamily="18" charset="0"/>
               </a:rPr>
@@ -3068,7 +3079,7 @@
           </a:p>
           <a:p>
             <a:r>
-              <a:rPr lang="en-IN" dirty="0" smtClean="0">
+              <a:rPr lang="en-IN" dirty="0">
                 <a:latin typeface="Times New Roman" pitchFamily="18" charset="0"/>
                 <a:cs typeface="Times New Roman" pitchFamily="18" charset="0"/>
               </a:rPr>
@@ -3077,7 +3088,7 @@
           </a:p>
           <a:p>
             <a:r>
-              <a:rPr lang="en-IN" dirty="0" smtClean="0">
+              <a:rPr lang="en-IN" dirty="0">
                 <a:latin typeface="Times New Roman" pitchFamily="18" charset="0"/>
                 <a:cs typeface="Times New Roman" pitchFamily="18" charset="0"/>
               </a:rPr>
@@ -3086,7 +3097,7 @@
           </a:p>
           <a:p>
             <a:r>
-              <a:rPr lang="en-IN" dirty="0" smtClean="0">
+              <a:rPr lang="en-IN" dirty="0">
                 <a:latin typeface="Times New Roman" pitchFamily="18" charset="0"/>
                 <a:cs typeface="Times New Roman" pitchFamily="18" charset="0"/>
               </a:rPr>
@@ -3095,7 +3106,7 @@
           </a:p>
           <a:p>
             <a:r>
-              <a:rPr lang="en-IN" dirty="0" smtClean="0">
+              <a:rPr lang="en-IN" dirty="0">
                 <a:latin typeface="Times New Roman" pitchFamily="18" charset="0"/>
                 <a:cs typeface="Times New Roman" pitchFamily="18" charset="0"/>
               </a:rPr>
@@ -3104,7 +3115,7 @@
           </a:p>
           <a:p>
             <a:r>
-              <a:rPr lang="en-IN" dirty="0" smtClean="0">
+              <a:rPr lang="en-IN" dirty="0">
                 <a:latin typeface="Times New Roman" pitchFamily="18" charset="0"/>
                 <a:cs typeface="Times New Roman" pitchFamily="18" charset="0"/>
               </a:rPr>
@@ -3116,7 +3127,7 @@
               <a:buAutoNum type="arabicPeriod"/>
             </a:pPr>
             <a:r>
-              <a:rPr lang="en-IN" dirty="0" smtClean="0">
+              <a:rPr lang="en-IN" dirty="0">
                 <a:latin typeface="Times New Roman" pitchFamily="18" charset="0"/>
                 <a:cs typeface="Times New Roman" pitchFamily="18" charset="0"/>
               </a:rPr>
@@ -3128,7 +3139,7 @@
               <a:buAutoNum type="arabicPeriod"/>
             </a:pPr>
             <a:r>
-              <a:rPr lang="en-IN" dirty="0" smtClean="0">
+              <a:rPr lang="en-IN" dirty="0">
                 <a:latin typeface="Times New Roman" pitchFamily="18" charset="0"/>
                 <a:cs typeface="Times New Roman" pitchFamily="18" charset="0"/>
               </a:rPr>
@@ -3140,7 +3151,7 @@
               <a:buAutoNum type="arabicPeriod"/>
             </a:pPr>
             <a:r>
-              <a:rPr lang="en-IN" dirty="0" smtClean="0">
+              <a:rPr lang="en-IN" dirty="0">
                 <a:latin typeface="Times New Roman" pitchFamily="18" charset="0"/>
                 <a:cs typeface="Times New Roman" pitchFamily="18" charset="0"/>
               </a:rPr>
@@ -3150,7 +3161,7 @@
           <a:p>
             <a:pPr marL="342900" indent="-342900"/>
             <a:r>
-              <a:rPr lang="en-IN" dirty="0" smtClean="0">
+              <a:rPr lang="en-IN" dirty="0">
                 <a:latin typeface="Times New Roman" pitchFamily="18" charset="0"/>
                 <a:cs typeface="Times New Roman" pitchFamily="18" charset="0"/>
               </a:rPr>
@@ -3200,7 +3211,7 @@
     </p:spTree>
     <p:extLst>
       <p:ext uri="{BB962C8B-B14F-4D97-AF65-F5344CB8AC3E}">
-        <p14:creationId xmlns:p14="http://schemas.microsoft.com/office/powerpoint/2010/main" xmlns="" val="2490162677"/>
+        <p14:creationId xmlns:p14="http://schemas.microsoft.com/office/powerpoint/2010/main" val="2490162677"/>
       </p:ext>
     </p:extLst>
   </p:cSld>
@@ -3236,7 +3247,7 @@
           <p:nvPr>
             <p:extLst>
               <p:ext uri="{D42A27DB-BD31-4B8C-83A1-F6EECF244321}">
-                <p14:modId xmlns:p14="http://schemas.microsoft.com/office/powerpoint/2010/main" xmlns="" val="601363310"/>
+                <p14:modId xmlns:p14="http://schemas.microsoft.com/office/powerpoint/2010/main" val="601363310"/>
               </p:ext>
             </p:extLst>
           </p:nvPr>
@@ -3255,7 +3266,7 @@
                 <a:gridCol w="1272536">
                   <a:extLst>
                     <a:ext uri="{9D8B030D-6E8A-4147-A177-3AD203B41FA5}">
-                      <a16:colId xmlns:a16="http://schemas.microsoft.com/office/drawing/2014/main" xmlns="" val="1477692829"/>
+                      <a16:colId xmlns:a16="http://schemas.microsoft.com/office/drawing/2014/main" val="1477692829"/>
                     </a:ext>
                   </a:extLst>
                 </a:gridCol>
@@ -3294,7 +3305,7 @@
                 </a:tc>
                 <a:extLst>
                   <a:ext uri="{0D108BD9-81ED-4DB2-BD59-A6C34878D82A}">
-                    <a16:rowId xmlns:a16="http://schemas.microsoft.com/office/drawing/2014/main" xmlns="" val="1005663328"/>
+                    <a16:rowId xmlns:a16="http://schemas.microsoft.com/office/drawing/2014/main" val="1005663328"/>
                   </a:ext>
                 </a:extLst>
               </a:tr>
@@ -3332,7 +3343,7 @@
                 </a:tc>
                 <a:extLst>
                   <a:ext uri="{0D108BD9-81ED-4DB2-BD59-A6C34878D82A}">
-                    <a16:rowId xmlns:a16="http://schemas.microsoft.com/office/drawing/2014/main" xmlns="" val="3621341412"/>
+                    <a16:rowId xmlns:a16="http://schemas.microsoft.com/office/drawing/2014/main" val="3621341412"/>
                   </a:ext>
                 </a:extLst>
               </a:tr>
@@ -3370,7 +3381,7 @@
                 </a:tc>
                 <a:extLst>
                   <a:ext uri="{0D108BD9-81ED-4DB2-BD59-A6C34878D82A}">
-                    <a16:rowId xmlns:a16="http://schemas.microsoft.com/office/drawing/2014/main" xmlns="" val="3612299088"/>
+                    <a16:rowId xmlns:a16="http://schemas.microsoft.com/office/drawing/2014/main" val="3612299088"/>
                   </a:ext>
                 </a:extLst>
               </a:tr>
@@ -3408,7 +3419,7 @@
                 </a:tc>
                 <a:extLst>
                   <a:ext uri="{0D108BD9-81ED-4DB2-BD59-A6C34878D82A}">
-                    <a16:rowId xmlns:a16="http://schemas.microsoft.com/office/drawing/2014/main" xmlns="" val="369869390"/>
+                    <a16:rowId xmlns:a16="http://schemas.microsoft.com/office/drawing/2014/main" val="369869390"/>
                   </a:ext>
                 </a:extLst>
               </a:tr>
@@ -3446,7 +3457,7 @@
                 </a:tc>
                 <a:extLst>
                   <a:ext uri="{0D108BD9-81ED-4DB2-BD59-A6C34878D82A}">
-                    <a16:rowId xmlns:a16="http://schemas.microsoft.com/office/drawing/2014/main" xmlns="" val="1627091714"/>
+                    <a16:rowId xmlns:a16="http://schemas.microsoft.com/office/drawing/2014/main" val="1627091714"/>
                   </a:ext>
                 </a:extLst>
               </a:tr>
@@ -3484,7 +3495,7 @@
                 </a:tc>
                 <a:extLst>
                   <a:ext uri="{0D108BD9-81ED-4DB2-BD59-A6C34878D82A}">
-                    <a16:rowId xmlns:a16="http://schemas.microsoft.com/office/drawing/2014/main" xmlns="" val="3138670259"/>
+                    <a16:rowId xmlns:a16="http://schemas.microsoft.com/office/drawing/2014/main" val="3138670259"/>
                   </a:ext>
                 </a:extLst>
               </a:tr>
@@ -3522,7 +3533,7 @@
                 </a:tc>
                 <a:extLst>
                   <a:ext uri="{0D108BD9-81ED-4DB2-BD59-A6C34878D82A}">
-                    <a16:rowId xmlns:a16="http://schemas.microsoft.com/office/drawing/2014/main" xmlns="" val="2151251418"/>
+                    <a16:rowId xmlns:a16="http://schemas.microsoft.com/office/drawing/2014/main" val="2151251418"/>
                   </a:ext>
                 </a:extLst>
               </a:tr>
@@ -3560,7 +3571,7 @@
                 </a:tc>
                 <a:extLst>
                   <a:ext uri="{0D108BD9-81ED-4DB2-BD59-A6C34878D82A}">
-                    <a16:rowId xmlns:a16="http://schemas.microsoft.com/office/drawing/2014/main" xmlns="" val="1946674120"/>
+                    <a16:rowId xmlns:a16="http://schemas.microsoft.com/office/drawing/2014/main" val="1946674120"/>
                   </a:ext>
                 </a:extLst>
               </a:tr>
@@ -3577,7 +3588,7 @@
           <p:nvPr>
             <p:extLst>
               <p:ext uri="{D42A27DB-BD31-4B8C-83A1-F6EECF244321}">
-                <p14:modId xmlns:p14="http://schemas.microsoft.com/office/powerpoint/2010/main" xmlns="" val="3851166514"/>
+                <p14:modId xmlns:p14="http://schemas.microsoft.com/office/powerpoint/2010/main" val="3851166514"/>
               </p:ext>
             </p:extLst>
           </p:nvPr>
@@ -3596,7 +3607,7 @@
                 <a:gridCol w="533575">
                   <a:extLst>
                     <a:ext uri="{9D8B030D-6E8A-4147-A177-3AD203B41FA5}">
-                      <a16:colId xmlns:a16="http://schemas.microsoft.com/office/drawing/2014/main" xmlns="" val="2655909902"/>
+                      <a16:colId xmlns:a16="http://schemas.microsoft.com/office/drawing/2014/main" val="2655909902"/>
                     </a:ext>
                   </a:extLst>
                 </a:gridCol>
@@ -3635,7 +3646,7 @@
                 </a:tc>
                 <a:extLst>
                   <a:ext uri="{0D108BD9-81ED-4DB2-BD59-A6C34878D82A}">
-                    <a16:rowId xmlns:a16="http://schemas.microsoft.com/office/drawing/2014/main" xmlns="" val="1459057787"/>
+                    <a16:rowId xmlns:a16="http://schemas.microsoft.com/office/drawing/2014/main" val="1459057787"/>
                   </a:ext>
                 </a:extLst>
               </a:tr>
@@ -3964,16 +3975,12 @@
           <a:lstStyle/>
           <a:p>
             <a:r>
-              <a:rPr lang="en-IN" dirty="0" smtClean="0">
+              <a:rPr lang="en-IN" dirty="0">
                 <a:latin typeface="Times New Roman" panose="02020603050405020304" pitchFamily="18" charset="0"/>
                 <a:cs typeface="Times New Roman" panose="02020603050405020304" pitchFamily="18" charset="0"/>
               </a:rPr>
               <a:t>Block frame 00</a:t>
             </a:r>
-            <a:endParaRPr lang="en-IN" dirty="0">
-              <a:latin typeface="Times New Roman" panose="02020603050405020304" pitchFamily="18" charset="0"/>
-              <a:cs typeface="Times New Roman" panose="02020603050405020304" pitchFamily="18" charset="0"/>
-            </a:endParaRPr>
           </a:p>
         </p:txBody>
       </p:sp>
@@ -4000,16 +4007,12 @@
           <a:lstStyle/>
           <a:p>
             <a:r>
-              <a:rPr lang="en-IN" dirty="0" smtClean="0">
+              <a:rPr lang="en-IN" dirty="0">
                 <a:latin typeface="Times New Roman" panose="02020603050405020304" pitchFamily="18" charset="0"/>
                 <a:cs typeface="Times New Roman" panose="02020603050405020304" pitchFamily="18" charset="0"/>
               </a:rPr>
               <a:t>Block frame 01</a:t>
             </a:r>
-            <a:endParaRPr lang="en-IN" dirty="0">
-              <a:latin typeface="Times New Roman" panose="02020603050405020304" pitchFamily="18" charset="0"/>
-              <a:cs typeface="Times New Roman" panose="02020603050405020304" pitchFamily="18" charset="0"/>
-            </a:endParaRPr>
           </a:p>
         </p:txBody>
       </p:sp>
@@ -4036,16 +4039,12 @@
           <a:lstStyle/>
           <a:p>
             <a:r>
-              <a:rPr lang="en-IN" dirty="0" smtClean="0">
+              <a:rPr lang="en-IN" dirty="0">
                 <a:latin typeface="Times New Roman" panose="02020603050405020304" pitchFamily="18" charset="0"/>
                 <a:cs typeface="Times New Roman" panose="02020603050405020304" pitchFamily="18" charset="0"/>
               </a:rPr>
               <a:t>Block frame 10</a:t>
             </a:r>
-            <a:endParaRPr lang="en-IN" dirty="0">
-              <a:latin typeface="Times New Roman" panose="02020603050405020304" pitchFamily="18" charset="0"/>
-              <a:cs typeface="Times New Roman" panose="02020603050405020304" pitchFamily="18" charset="0"/>
-            </a:endParaRPr>
           </a:p>
         </p:txBody>
       </p:sp>
@@ -4072,16 +4071,12 @@
           <a:lstStyle/>
           <a:p>
             <a:r>
-              <a:rPr lang="en-IN" dirty="0" smtClean="0">
+              <a:rPr lang="en-IN" dirty="0">
                 <a:latin typeface="Times New Roman" panose="02020603050405020304" pitchFamily="18" charset="0"/>
                 <a:cs typeface="Times New Roman" panose="02020603050405020304" pitchFamily="18" charset="0"/>
               </a:rPr>
               <a:t>Block frame 11</a:t>
             </a:r>
-            <a:endParaRPr lang="en-IN" dirty="0">
-              <a:latin typeface="Times New Roman" panose="02020603050405020304" pitchFamily="18" charset="0"/>
-              <a:cs typeface="Times New Roman" panose="02020603050405020304" pitchFamily="18" charset="0"/>
-            </a:endParaRPr>
           </a:p>
         </p:txBody>
       </p:sp>
@@ -4247,48 +4242,27 @@
               <a:t> </a:t>
             </a:r>
             <a:r>
-              <a:rPr lang="en-IN" u="sng" dirty="0" smtClean="0">
-                <a:latin typeface="Times New Roman" panose="02020603050405020304" pitchFamily="18" charset="0"/>
-                <a:cs typeface="Times New Roman" panose="02020603050405020304" pitchFamily="18" charset="0"/>
-              </a:rPr>
-              <a:t>Fig </a:t>
-            </a:r>
-            <a:r>
               <a:rPr lang="en-IN" u="sng" dirty="0">
                 <a:latin typeface="Times New Roman" panose="02020603050405020304" pitchFamily="18" charset="0"/>
                 <a:cs typeface="Times New Roman" panose="02020603050405020304" pitchFamily="18" charset="0"/>
               </a:rPr>
-              <a:t>1(a)</a:t>
+              <a:t>Fig 1(a)</a:t>
             </a:r>
             <a:r>
               <a:rPr lang="en-IN" dirty="0">
                 <a:latin typeface="Times New Roman" panose="02020603050405020304" pitchFamily="18" charset="0"/>
                 <a:cs typeface="Times New Roman" panose="02020603050405020304" pitchFamily="18" charset="0"/>
               </a:rPr>
-              <a:t> </a:t>
-            </a:r>
-            <a:r>
-              <a:rPr lang="en-IN" dirty="0" smtClean="0">
+              <a:t> CM with</a:t>
+            </a:r>
+          </a:p>
+          <a:p>
+            <a:r>
+              <a:rPr lang="en-IN" dirty="0">
                 <a:latin typeface="Times New Roman" panose="02020603050405020304" pitchFamily="18" charset="0"/>
                 <a:cs typeface="Times New Roman" panose="02020603050405020304" pitchFamily="18" charset="0"/>
               </a:rPr>
-              <a:t>CM with</a:t>
-            </a:r>
-          </a:p>
-          <a:p>
-            <a:r>
-              <a:rPr lang="en-IN" dirty="0" smtClean="0">
-                <a:latin typeface="Times New Roman" panose="02020603050405020304" pitchFamily="18" charset="0"/>
-                <a:cs typeface="Times New Roman" panose="02020603050405020304" pitchFamily="18" charset="0"/>
-              </a:rPr>
-              <a:t> </a:t>
-            </a:r>
-            <a:r>
-              <a:rPr lang="en-IN" dirty="0">
-                <a:latin typeface="Times New Roman" panose="02020603050405020304" pitchFamily="18" charset="0"/>
-                <a:cs typeface="Times New Roman" panose="02020603050405020304" pitchFamily="18" charset="0"/>
-              </a:rPr>
-              <a:t>4 block frames</a:t>
+              <a:t> 4 block frames</a:t>
             </a:r>
           </a:p>
         </p:txBody>
@@ -4323,14 +4297,14 @@
               <a:t> </a:t>
             </a:r>
             <a:r>
-              <a:rPr lang="en-IN" u="sng" dirty="0" smtClean="0">
+              <a:rPr lang="en-IN" u="sng" dirty="0">
                 <a:latin typeface="Times New Roman" panose="02020603050405020304" pitchFamily="18" charset="0"/>
                 <a:cs typeface="Times New Roman" panose="02020603050405020304" pitchFamily="18" charset="0"/>
               </a:rPr>
               <a:t>Fig 1(b)</a:t>
             </a:r>
             <a:r>
-              <a:rPr lang="en-IN" dirty="0" smtClean="0">
+              <a:rPr lang="en-IN" dirty="0">
                 <a:latin typeface="Times New Roman" panose="02020603050405020304" pitchFamily="18" charset="0"/>
                 <a:cs typeface="Times New Roman" panose="02020603050405020304" pitchFamily="18" charset="0"/>
               </a:rPr>
@@ -4339,16 +4313,12 @@
           </a:p>
           <a:p>
             <a:r>
-              <a:rPr lang="en-IN" dirty="0" smtClean="0">
+              <a:rPr lang="en-IN" dirty="0">
                 <a:latin typeface="Times New Roman" panose="02020603050405020304" pitchFamily="18" charset="0"/>
                 <a:cs typeface="Times New Roman" panose="02020603050405020304" pitchFamily="18" charset="0"/>
               </a:rPr>
               <a:t> 8 blocks </a:t>
             </a:r>
-            <a:endParaRPr lang="en-IN" dirty="0">
-              <a:latin typeface="Times New Roman" panose="02020603050405020304" pitchFamily="18" charset="0"/>
-              <a:cs typeface="Times New Roman" panose="02020603050405020304" pitchFamily="18" charset="0"/>
-            </a:endParaRPr>
           </a:p>
         </p:txBody>
       </p:sp>
@@ -4379,122 +4349,83 @@
                 <a:latin typeface="Times New Roman" panose="02020603050405020304" pitchFamily="18" charset="0"/>
                 <a:cs typeface="Times New Roman" panose="02020603050405020304" pitchFamily="18" charset="0"/>
               </a:rPr>
-              <a:t>Each block frame in CM has an address </a:t>
-            </a:r>
-            <a:r>
-              <a:rPr lang="en-IN" dirty="0" smtClean="0">
+              <a:t>Each block frame in CM has an address tag. </a:t>
+            </a:r>
+          </a:p>
+          <a:p>
+            <a:r>
+              <a:rPr lang="en-IN" dirty="0">
                 <a:latin typeface="Times New Roman" panose="02020603050405020304" pitchFamily="18" charset="0"/>
                 <a:cs typeface="Times New Roman" panose="02020603050405020304" pitchFamily="18" charset="0"/>
               </a:rPr>
-              <a:t>tag. </a:t>
-            </a:r>
-          </a:p>
-          <a:p>
-            <a:r>
-              <a:rPr lang="en-IN" dirty="0" smtClean="0">
+              <a:t>Information in this tag is checked to find hit or miss. </a:t>
+            </a:r>
+          </a:p>
+          <a:p>
+            <a:r>
+              <a:rPr lang="en-IN" dirty="0">
                 <a:latin typeface="Times New Roman" panose="02020603050405020304" pitchFamily="18" charset="0"/>
                 <a:cs typeface="Times New Roman" panose="02020603050405020304" pitchFamily="18" charset="0"/>
               </a:rPr>
-              <a:t>Information </a:t>
-            </a:r>
-            <a:r>
-              <a:rPr lang="en-IN" dirty="0">
+              <a:t>Direct mapped, fully associative, set associative are the three  categories of cache organization depending on the way of placing MM block in CM block frame</a:t>
+            </a:r>
+          </a:p>
+          <a:p>
+            <a:pPr lvl="0"/>
+            <a:r>
+              <a:rPr lang="en-IN" u="sng" dirty="0">
                 <a:latin typeface="Times New Roman" panose="02020603050405020304" pitchFamily="18" charset="0"/>
                 <a:cs typeface="Times New Roman" panose="02020603050405020304" pitchFamily="18" charset="0"/>
               </a:rPr>
-              <a:t>in this tag is checked to find </a:t>
-            </a:r>
-            <a:r>
-              <a:rPr lang="en-IN" dirty="0" smtClean="0">
+              <a:t>Direct mapped cache</a:t>
+            </a:r>
+            <a:r>
+              <a:rPr lang="en-IN" dirty="0">
                 <a:latin typeface="Times New Roman" panose="02020603050405020304" pitchFamily="18" charset="0"/>
                 <a:cs typeface="Times New Roman" panose="02020603050405020304" pitchFamily="18" charset="0"/>
               </a:rPr>
-              <a:t>hit </a:t>
-            </a:r>
+              <a:t>: </a:t>
+            </a:r>
+          </a:p>
+          <a:p>
+            <a:pPr lvl="0"/>
             <a:r>
               <a:rPr lang="en-IN" dirty="0">
                 <a:latin typeface="Times New Roman" panose="02020603050405020304" pitchFamily="18" charset="0"/>
                 <a:cs typeface="Times New Roman" panose="02020603050405020304" pitchFamily="18" charset="0"/>
               </a:rPr>
-              <a:t>or </a:t>
-            </a:r>
-            <a:r>
-              <a:rPr lang="en-IN" dirty="0" smtClean="0">
+              <a:t>A particular block of MM can be placed in a particular block frame of CM</a:t>
+            </a:r>
+          </a:p>
+          <a:p>
+            <a:pPr lvl="0"/>
+            <a:r>
+              <a:rPr lang="en-IN" dirty="0">
                 <a:latin typeface="Times New Roman" panose="02020603050405020304" pitchFamily="18" charset="0"/>
                 <a:cs typeface="Times New Roman" panose="02020603050405020304" pitchFamily="18" charset="0"/>
               </a:rPr>
-              <a:t>miss. </a:t>
-            </a:r>
-          </a:p>
-          <a:p>
-            <a:r>
-              <a:rPr lang="en-IN" dirty="0" smtClean="0">
+              <a:t>Direct mapping is one way set associative mapping and can be thought of as having m sets</a:t>
+            </a:r>
+          </a:p>
+          <a:p>
+            <a:pPr lvl="0"/>
+            <a:r>
+              <a:rPr lang="en-IN" dirty="0">
                 <a:latin typeface="Times New Roman" panose="02020603050405020304" pitchFamily="18" charset="0"/>
                 <a:cs typeface="Times New Roman" panose="02020603050405020304" pitchFamily="18" charset="0"/>
               </a:rPr>
-              <a:t>Direct mapped, fully associative, set associative are the three  categories of cache organization depending on the way of placing MM block in CM block frame</a:t>
+              <a:t>Address in CM is computed as (MM block number) mod (Number of block frames in CM). </a:t>
             </a:r>
           </a:p>
           <a:p>
             <a:pPr lvl="0"/>
             <a:r>
-              <a:rPr lang="en-IN" u="sng" dirty="0" smtClean="0">
+              <a:rPr lang="en-IN" dirty="0">
                 <a:latin typeface="Times New Roman" panose="02020603050405020304" pitchFamily="18" charset="0"/>
                 <a:cs typeface="Times New Roman" panose="02020603050405020304" pitchFamily="18" charset="0"/>
               </a:rPr>
-              <a:t>Direct mapped cache</a:t>
-            </a:r>
-            <a:r>
-              <a:rPr lang="en-IN" dirty="0" smtClean="0">
-                <a:latin typeface="Times New Roman" panose="02020603050405020304" pitchFamily="18" charset="0"/>
-                <a:cs typeface="Times New Roman" panose="02020603050405020304" pitchFamily="18" charset="0"/>
-              </a:rPr>
-              <a:t>: </a:t>
-            </a:r>
-          </a:p>
-          <a:p>
-            <a:pPr lvl="0"/>
-            <a:r>
-              <a:rPr lang="en-IN" dirty="0" smtClean="0">
-                <a:latin typeface="Times New Roman" panose="02020603050405020304" pitchFamily="18" charset="0"/>
-                <a:cs typeface="Times New Roman" panose="02020603050405020304" pitchFamily="18" charset="0"/>
-              </a:rPr>
-              <a:t>A particular block of MM can be placed in a particular block frame of CM</a:t>
-            </a:r>
-          </a:p>
-          <a:p>
-            <a:pPr lvl="0"/>
-            <a:r>
-              <a:rPr lang="en-IN" dirty="0" smtClean="0">
-                <a:latin typeface="Times New Roman" panose="02020603050405020304" pitchFamily="18" charset="0"/>
-                <a:cs typeface="Times New Roman" panose="02020603050405020304" pitchFamily="18" charset="0"/>
-              </a:rPr>
-              <a:t>Direct mapping is one way set associative mapping and can be thought of as having m sets</a:t>
-            </a:r>
-          </a:p>
-          <a:p>
-            <a:pPr lvl="0"/>
-            <a:r>
-              <a:rPr lang="en-IN" dirty="0" smtClean="0">
-                <a:latin typeface="Times New Roman" panose="02020603050405020304" pitchFamily="18" charset="0"/>
-                <a:cs typeface="Times New Roman" panose="02020603050405020304" pitchFamily="18" charset="0"/>
-              </a:rPr>
-              <a:t>Address in CM is computed as (MM block number) mod (Number of block frames in CM). </a:t>
-            </a:r>
-          </a:p>
-          <a:p>
-            <a:pPr lvl="0"/>
-            <a:r>
-              <a:rPr lang="en-IN" dirty="0" smtClean="0">
-                <a:latin typeface="Times New Roman" panose="02020603050405020304" pitchFamily="18" charset="0"/>
-                <a:cs typeface="Times New Roman" panose="02020603050405020304" pitchFamily="18" charset="0"/>
-              </a:rPr>
               <a:t>For example, MM block 0 is mapped into CM block frame 0 as 0 mod 4  is 0, MM block 6 is mapped into CM block frame 2 as 6 mod 4 is 2.</a:t>
             </a:r>
-            <a:endParaRPr lang="en-IN" dirty="0">
-              <a:latin typeface="Times New Roman" panose="02020603050405020304" pitchFamily="18" charset="0"/>
-              <a:cs typeface="Times New Roman" panose="02020603050405020304" pitchFamily="18" charset="0"/>
-            </a:endParaRPr>
           </a:p>
         </p:txBody>
       </p:sp>
@@ -4522,129 +4453,97 @@
           <a:p>
             <a:pPr lvl="0"/>
             <a:r>
-              <a:rPr lang="en-IN" u="sng" dirty="0" smtClean="0">
-                <a:latin typeface="Times New Roman" panose="02020603050405020304" pitchFamily="18" charset="0"/>
-                <a:cs typeface="Times New Roman" panose="02020603050405020304" pitchFamily="18" charset="0"/>
-              </a:rPr>
-              <a:t>Fully </a:t>
-            </a:r>
-            <a:r>
               <a:rPr lang="en-IN" u="sng" dirty="0">
                 <a:latin typeface="Times New Roman" panose="02020603050405020304" pitchFamily="18" charset="0"/>
                 <a:cs typeface="Times New Roman" panose="02020603050405020304" pitchFamily="18" charset="0"/>
               </a:rPr>
-              <a:t>associative </a:t>
-            </a:r>
-            <a:r>
-              <a:rPr lang="en-IN" u="sng" dirty="0" smtClean="0">
+              <a:t>Fully associative cache</a:t>
+            </a:r>
+            <a:r>
+              <a:rPr lang="en-IN" dirty="0">
                 <a:latin typeface="Times New Roman" panose="02020603050405020304" pitchFamily="18" charset="0"/>
                 <a:cs typeface="Times New Roman" panose="02020603050405020304" pitchFamily="18" charset="0"/>
               </a:rPr>
-              <a:t>cache</a:t>
-            </a:r>
-            <a:r>
-              <a:rPr lang="en-IN" dirty="0" smtClean="0">
+              <a:t>:</a:t>
+            </a:r>
+          </a:p>
+          <a:p>
+            <a:pPr lvl="0"/>
+            <a:r>
+              <a:rPr lang="en-IN" dirty="0">
                 <a:latin typeface="Times New Roman" panose="02020603050405020304" pitchFamily="18" charset="0"/>
                 <a:cs typeface="Times New Roman" panose="02020603050405020304" pitchFamily="18" charset="0"/>
               </a:rPr>
-              <a:t>:</a:t>
-            </a:r>
-          </a:p>
-          <a:p>
-            <a:pPr lvl="0"/>
-            <a:r>
-              <a:rPr lang="en-IN" dirty="0" smtClean="0">
+              <a:t>A MM block can be placed in any block frame of CM i.e. anywhere in CM. If fully associative cache memory has m block frames, it is m-way set associative. It can be thought of as having a single set.</a:t>
+            </a:r>
+          </a:p>
+          <a:p>
+            <a:r>
+              <a:rPr lang="en-IN" u="sng" dirty="0">
                 <a:latin typeface="Times New Roman" panose="02020603050405020304" pitchFamily="18" charset="0"/>
                 <a:cs typeface="Times New Roman" panose="02020603050405020304" pitchFamily="18" charset="0"/>
               </a:rPr>
-              <a:t>A </a:t>
+              <a:t>Set associative cache</a:t>
             </a:r>
             <a:r>
               <a:rPr lang="en-IN" dirty="0">
                 <a:latin typeface="Times New Roman" panose="02020603050405020304" pitchFamily="18" charset="0"/>
                 <a:cs typeface="Times New Roman" panose="02020603050405020304" pitchFamily="18" charset="0"/>
               </a:rPr>
-              <a:t>MM block can be placed in any block frame of CM i.e. anywhere in CM</a:t>
-            </a:r>
-            <a:r>
-              <a:rPr lang="en-IN" dirty="0" smtClean="0">
+              <a:t>:</a:t>
+            </a:r>
+          </a:p>
+          <a:p>
+            <a:r>
+              <a:rPr lang="en-IN" dirty="0">
                 <a:latin typeface="Times New Roman" panose="02020603050405020304" pitchFamily="18" charset="0"/>
                 <a:cs typeface="Times New Roman" panose="02020603050405020304" pitchFamily="18" charset="0"/>
               </a:rPr>
-              <a:t>. If fully associative cache memory has m block frames, it is m-way set associative. It can be thought of as having a single set.</a:t>
-            </a:r>
-          </a:p>
-          <a:p>
-            <a:r>
-              <a:rPr lang="en-IN" u="sng" dirty="0" smtClean="0">
+              <a:t>CM is divided into few sets and each set contains a few block frames. </a:t>
+            </a:r>
+          </a:p>
+          <a:p>
+            <a:r>
+              <a:rPr lang="en-IN" dirty="0">
                 <a:latin typeface="Times New Roman" panose="02020603050405020304" pitchFamily="18" charset="0"/>
                 <a:cs typeface="Times New Roman" panose="02020603050405020304" pitchFamily="18" charset="0"/>
               </a:rPr>
-              <a:t>Set associative cache</a:t>
-            </a:r>
-            <a:r>
-              <a:rPr lang="en-IN" dirty="0" smtClean="0">
+              <a:t>A MM block can be placed in any block frame within a particular set. This particular set address is computed as (MM block number) mod (Number of sets in CM). </a:t>
+            </a:r>
+          </a:p>
+          <a:p>
+            <a:r>
+              <a:rPr lang="en-IN" dirty="0">
                 <a:latin typeface="Times New Roman" panose="02020603050405020304" pitchFamily="18" charset="0"/>
                 <a:cs typeface="Times New Roman" panose="02020603050405020304" pitchFamily="18" charset="0"/>
               </a:rPr>
-              <a:t>:</a:t>
-            </a:r>
-          </a:p>
-          <a:p>
-            <a:r>
-              <a:rPr lang="en-IN" dirty="0" smtClean="0">
+              <a:t>Fig 2 shows a 2-way set associative CM in which CM is divided into 2 sets (Set 0 and Set 1). </a:t>
+            </a:r>
+          </a:p>
+          <a:p>
+            <a:r>
+              <a:rPr lang="en-IN" dirty="0">
                 <a:latin typeface="Times New Roman" panose="02020603050405020304" pitchFamily="18" charset="0"/>
                 <a:cs typeface="Times New Roman" panose="02020603050405020304" pitchFamily="18" charset="0"/>
               </a:rPr>
-              <a:t>CM is divided into few sets and each set contains a few block frames. </a:t>
-            </a:r>
-          </a:p>
-          <a:p>
-            <a:r>
-              <a:rPr lang="en-IN" dirty="0" smtClean="0">
+              <a:t>Each set has 2 block frames due to which this CM is known as 2-way set associative. </a:t>
+            </a:r>
+          </a:p>
+          <a:p>
+            <a:r>
+              <a:rPr lang="en-IN" dirty="0">
                 <a:latin typeface="Times New Roman" panose="02020603050405020304" pitchFamily="18" charset="0"/>
                 <a:cs typeface="Times New Roman" panose="02020603050405020304" pitchFamily="18" charset="0"/>
               </a:rPr>
-              <a:t>A MM block can be placed in any block frame within a particular set. This particular set address is computed as (MM block number) mod (Number of sets in CM). </a:t>
-            </a:r>
-          </a:p>
-          <a:p>
-            <a:r>
-              <a:rPr lang="en-IN" dirty="0" smtClean="0">
-                <a:latin typeface="Times New Roman" panose="02020603050405020304" pitchFamily="18" charset="0"/>
-                <a:cs typeface="Times New Roman" panose="02020603050405020304" pitchFamily="18" charset="0"/>
-              </a:rPr>
-              <a:t>Fig 2 shows a 2-way set associative CM in which CM is divided into 2 sets (Set 0 and Set 1). </a:t>
-            </a:r>
-          </a:p>
-          <a:p>
-            <a:r>
-              <a:rPr lang="en-IN" dirty="0" smtClean="0">
-                <a:latin typeface="Times New Roman" panose="02020603050405020304" pitchFamily="18" charset="0"/>
-                <a:cs typeface="Times New Roman" panose="02020603050405020304" pitchFamily="18" charset="0"/>
-              </a:rPr>
-              <a:t>Each set has 2 block frames due to which this CM is known as 2-way set associative. </a:t>
-            </a:r>
-          </a:p>
-          <a:p>
-            <a:r>
-              <a:rPr lang="en-IN" dirty="0" smtClean="0">
-                <a:latin typeface="Times New Roman" panose="02020603050405020304" pitchFamily="18" charset="0"/>
-                <a:cs typeface="Times New Roman" panose="02020603050405020304" pitchFamily="18" charset="0"/>
-              </a:rPr>
               <a:t>For example, MM block 0 is mapped into CM Set 0 as 0 mod 2 is 0, MM block 5 is mapped into CM Set 1 as 5 mod 2 is 1. </a:t>
             </a:r>
-            <a:endParaRPr lang="en-IN" dirty="0">
-              <a:latin typeface="Times New Roman" panose="02020603050405020304" pitchFamily="18" charset="0"/>
-              <a:cs typeface="Times New Roman" panose="02020603050405020304" pitchFamily="18" charset="0"/>
-            </a:endParaRPr>
           </a:p>
         </p:txBody>
       </p:sp>
     </p:spTree>
     <p:extLst>
       <p:ext uri="{BB962C8B-B14F-4D97-AF65-F5344CB8AC3E}">
-        <p14:creationId xmlns:p14="http://schemas.microsoft.com/office/powerpoint/2010/main" xmlns="" val="3634152833"/>
+        <p14:creationId xmlns:p14="http://schemas.microsoft.com/office/powerpoint/2010/main" val="3634152833"/>
       </p:ext>
     </p:extLst>
   </p:cSld>
@@ -4801,16 +4700,12 @@
           <a:lstStyle/>
           <a:p>
             <a:r>
-              <a:rPr lang="en-IN" dirty="0" smtClean="0">
+              <a:rPr lang="en-IN" dirty="0">
                 <a:latin typeface="Times New Roman" panose="02020603050405020304" pitchFamily="18" charset="0"/>
                 <a:cs typeface="Times New Roman" panose="02020603050405020304" pitchFamily="18" charset="0"/>
               </a:rPr>
               <a:t>Block frame 00</a:t>
             </a:r>
-            <a:endParaRPr lang="en-IN" dirty="0">
-              <a:latin typeface="Times New Roman" panose="02020603050405020304" pitchFamily="18" charset="0"/>
-              <a:cs typeface="Times New Roman" panose="02020603050405020304" pitchFamily="18" charset="0"/>
-            </a:endParaRPr>
           </a:p>
         </p:txBody>
       </p:sp>
@@ -4837,16 +4732,12 @@
           <a:lstStyle/>
           <a:p>
             <a:r>
-              <a:rPr lang="en-IN" dirty="0" smtClean="0">
+              <a:rPr lang="en-IN" dirty="0">
                 <a:latin typeface="Times New Roman" panose="02020603050405020304" pitchFamily="18" charset="0"/>
                 <a:cs typeface="Times New Roman" panose="02020603050405020304" pitchFamily="18" charset="0"/>
               </a:rPr>
               <a:t>Block frame 01</a:t>
             </a:r>
-            <a:endParaRPr lang="en-IN" dirty="0">
-              <a:latin typeface="Times New Roman" panose="02020603050405020304" pitchFamily="18" charset="0"/>
-              <a:cs typeface="Times New Roman" panose="02020603050405020304" pitchFamily="18" charset="0"/>
-            </a:endParaRPr>
           </a:p>
         </p:txBody>
       </p:sp>
@@ -4873,16 +4764,12 @@
           <a:lstStyle/>
           <a:p>
             <a:r>
-              <a:rPr lang="en-IN" dirty="0" smtClean="0">
+              <a:rPr lang="en-IN" dirty="0">
                 <a:latin typeface="Times New Roman" panose="02020603050405020304" pitchFamily="18" charset="0"/>
                 <a:cs typeface="Times New Roman" panose="02020603050405020304" pitchFamily="18" charset="0"/>
               </a:rPr>
               <a:t>Block frame 10</a:t>
             </a:r>
-            <a:endParaRPr lang="en-IN" dirty="0">
-              <a:latin typeface="Times New Roman" panose="02020603050405020304" pitchFamily="18" charset="0"/>
-              <a:cs typeface="Times New Roman" panose="02020603050405020304" pitchFamily="18" charset="0"/>
-            </a:endParaRPr>
           </a:p>
         </p:txBody>
       </p:sp>
@@ -4909,16 +4796,12 @@
           <a:lstStyle/>
           <a:p>
             <a:r>
-              <a:rPr lang="en-IN" dirty="0" smtClean="0">
+              <a:rPr lang="en-IN" dirty="0">
                 <a:latin typeface="Times New Roman" panose="02020603050405020304" pitchFamily="18" charset="0"/>
                 <a:cs typeface="Times New Roman" panose="02020603050405020304" pitchFamily="18" charset="0"/>
               </a:rPr>
               <a:t>Block frame 11</a:t>
             </a:r>
-            <a:endParaRPr lang="en-IN" dirty="0">
-              <a:latin typeface="Times New Roman" panose="02020603050405020304" pitchFamily="18" charset="0"/>
-              <a:cs typeface="Times New Roman" panose="02020603050405020304" pitchFamily="18" charset="0"/>
-            </a:endParaRPr>
           </a:p>
         </p:txBody>
       </p:sp>
@@ -5150,16 +5033,12 @@
           <a:lstStyle/>
           <a:p>
             <a:r>
-              <a:rPr lang="en-IN" dirty="0" smtClean="0">
+              <a:rPr lang="en-IN" dirty="0">
                 <a:latin typeface="Times New Roman" panose="02020603050405020304" pitchFamily="18" charset="0"/>
                 <a:cs typeface="Times New Roman" panose="02020603050405020304" pitchFamily="18" charset="0"/>
               </a:rPr>
               <a:t>Set 0</a:t>
             </a:r>
-            <a:endParaRPr lang="en-IN" dirty="0">
-              <a:latin typeface="Times New Roman" panose="02020603050405020304" pitchFamily="18" charset="0"/>
-              <a:cs typeface="Times New Roman" panose="02020603050405020304" pitchFamily="18" charset="0"/>
-            </a:endParaRPr>
           </a:p>
         </p:txBody>
       </p:sp>
@@ -5227,16 +5106,12 @@
           <a:lstStyle/>
           <a:p>
             <a:r>
-              <a:rPr lang="en-IN" dirty="0" smtClean="0">
+              <a:rPr lang="en-IN" dirty="0">
                 <a:latin typeface="Times New Roman" panose="02020603050405020304" pitchFamily="18" charset="0"/>
                 <a:cs typeface="Times New Roman" panose="02020603050405020304" pitchFamily="18" charset="0"/>
               </a:rPr>
               <a:t>Set 1</a:t>
             </a:r>
-            <a:endParaRPr lang="en-IN" dirty="0">
-              <a:latin typeface="Times New Roman" panose="02020603050405020304" pitchFamily="18" charset="0"/>
-              <a:cs typeface="Times New Roman" panose="02020603050405020304" pitchFamily="18" charset="0"/>
-            </a:endParaRPr>
           </a:p>
         </p:txBody>
       </p:sp>
@@ -5263,16 +5138,12 @@
           <a:lstStyle/>
           <a:p>
             <a:r>
-              <a:rPr lang="en-IN" dirty="0" smtClean="0">
+              <a:rPr lang="en-IN" dirty="0">
                 <a:latin typeface="Times New Roman" panose="02020603050405020304" pitchFamily="18" charset="0"/>
                 <a:cs typeface="Times New Roman" panose="02020603050405020304" pitchFamily="18" charset="0"/>
               </a:rPr>
               <a:t>Tag</a:t>
             </a:r>
-            <a:endParaRPr lang="en-IN" dirty="0">
-              <a:latin typeface="Times New Roman" panose="02020603050405020304" pitchFamily="18" charset="0"/>
-              <a:cs typeface="Times New Roman" panose="02020603050405020304" pitchFamily="18" charset="0"/>
-            </a:endParaRPr>
           </a:p>
         </p:txBody>
       </p:sp>
@@ -5532,7 +5403,7 @@
           <a:lstStyle/>
           <a:p>
             <a:r>
-              <a:rPr lang="en-IN" u="sng" dirty="0" smtClean="0">
+              <a:rPr lang="en-IN" u="sng" dirty="0">
                 <a:latin typeface="Times New Roman" pitchFamily="18" charset="0"/>
                 <a:cs typeface="Times New Roman" pitchFamily="18" charset="0"/>
               </a:rPr>
@@ -5541,7 +5412,7 @@
           </a:p>
           <a:p>
             <a:r>
-              <a:rPr lang="en-IN" dirty="0" smtClean="0">
+              <a:rPr lang="en-IN" dirty="0">
                 <a:latin typeface="Times New Roman" pitchFamily="18" charset="0"/>
                 <a:cs typeface="Times New Roman" pitchFamily="18" charset="0"/>
               </a:rPr>
@@ -5550,7 +5421,7 @@
           </a:p>
           <a:p>
             <a:r>
-              <a:rPr lang="en-IN" dirty="0" smtClean="0">
+              <a:rPr lang="en-IN" dirty="0">
                 <a:latin typeface="Times New Roman" pitchFamily="18" charset="0"/>
                 <a:cs typeface="Times New Roman" pitchFamily="18" charset="0"/>
               </a:rPr>
@@ -5559,7 +5430,7 @@
           </a:p>
           <a:p>
             <a:r>
-              <a:rPr lang="en-IN" dirty="0" smtClean="0">
+              <a:rPr lang="en-IN" dirty="0">
                 <a:latin typeface="Times New Roman" pitchFamily="18" charset="0"/>
                 <a:cs typeface="Times New Roman" pitchFamily="18" charset="0"/>
               </a:rPr>
@@ -5568,7 +5439,7 @@
           </a:p>
           <a:p>
             <a:r>
-              <a:rPr lang="en-IN" dirty="0" smtClean="0">
+              <a:rPr lang="en-IN" dirty="0">
                 <a:latin typeface="Times New Roman" pitchFamily="18" charset="0"/>
                 <a:cs typeface="Times New Roman" pitchFamily="18" charset="0"/>
               </a:rPr>
@@ -5576,59 +5447,55 @@
             </a:r>
           </a:p>
           <a:p>
-            <a:endParaRPr lang="en-IN" dirty="0" smtClean="0">
-              <a:latin typeface="Times New Roman" pitchFamily="18" charset="0"/>
-              <a:cs typeface="Times New Roman" pitchFamily="18" charset="0"/>
-            </a:endParaRPr>
-          </a:p>
-          <a:p>
-            <a:r>
-              <a:rPr lang="en-IN" u="sng" dirty="0" smtClean="0">
-                <a:latin typeface="Times New Roman" pitchFamily="18" charset="0"/>
-                <a:cs typeface="Times New Roman" pitchFamily="18" charset="0"/>
-              </a:rPr>
-              <a:t>Write</a:t>
-            </a:r>
-            <a:r>
-              <a:rPr lang="en-IN" dirty="0" smtClean="0">
-                <a:latin typeface="Times New Roman" pitchFamily="18" charset="0"/>
-                <a:cs typeface="Times New Roman" pitchFamily="18" charset="0"/>
-              </a:rPr>
-              <a:t>: Modifying data is not possible until the tag is checked for hit. So write takes longer time than read. Processor specifies the size of write usually between 1 to 8 bytes so that only that portion of a block can be changed whereas read can access more bytes than necessary without any fear.</a:t>
-            </a:r>
-          </a:p>
-          <a:p>
-            <a:endParaRPr lang="en-IN" dirty="0" smtClean="0">
-              <a:latin typeface="Times New Roman" pitchFamily="18" charset="0"/>
-              <a:cs typeface="Times New Roman" pitchFamily="18" charset="0"/>
-            </a:endParaRPr>
-          </a:p>
-          <a:p>
-            <a:r>
-              <a:rPr lang="en-IN" u="sng" dirty="0" smtClean="0">
-                <a:latin typeface="Times New Roman" pitchFamily="18" charset="0"/>
-                <a:cs typeface="Times New Roman" pitchFamily="18" charset="0"/>
-              </a:rPr>
-              <a:t>Read</a:t>
-            </a:r>
-            <a:r>
-              <a:rPr lang="en-IN" dirty="0" smtClean="0">
-                <a:latin typeface="Times New Roman" pitchFamily="18" charset="0"/>
-                <a:cs typeface="Times New Roman" pitchFamily="18" charset="0"/>
-              </a:rPr>
-              <a:t>: Block can be read at the same time that the tag is read and compared. Block read begins as soon as the block address is available. If hit, data is passed on to CPU otherwise ignore read. </a:t>
-            </a:r>
             <a:endParaRPr lang="en-IN" dirty="0">
               <a:latin typeface="Times New Roman" pitchFamily="18" charset="0"/>
               <a:cs typeface="Times New Roman" pitchFamily="18" charset="0"/>
             </a:endParaRPr>
+          </a:p>
+          <a:p>
+            <a:r>
+              <a:rPr lang="en-IN" u="sng" dirty="0">
+                <a:latin typeface="Times New Roman" pitchFamily="18" charset="0"/>
+                <a:cs typeface="Times New Roman" pitchFamily="18" charset="0"/>
+              </a:rPr>
+              <a:t>Write</a:t>
+            </a:r>
+            <a:r>
+              <a:rPr lang="en-IN" dirty="0">
+                <a:latin typeface="Times New Roman" pitchFamily="18" charset="0"/>
+                <a:cs typeface="Times New Roman" pitchFamily="18" charset="0"/>
+              </a:rPr>
+              <a:t>: Modifying data is not possible until the tag is checked for hit. So write takes longer time than read. Processor specifies the size of write usually between 1 to 8 bytes so that only that portion of a block can be changed whereas read can access more bytes than necessary without any fear.</a:t>
+            </a:r>
+          </a:p>
+          <a:p>
+            <a:endParaRPr lang="en-IN" dirty="0">
+              <a:latin typeface="Times New Roman" pitchFamily="18" charset="0"/>
+              <a:cs typeface="Times New Roman" pitchFamily="18" charset="0"/>
+            </a:endParaRPr>
+          </a:p>
+          <a:p>
+            <a:r>
+              <a:rPr lang="en-IN" u="sng" dirty="0">
+                <a:latin typeface="Times New Roman" pitchFamily="18" charset="0"/>
+                <a:cs typeface="Times New Roman" pitchFamily="18" charset="0"/>
+              </a:rPr>
+              <a:t>Read</a:t>
+            </a:r>
+            <a:r>
+              <a:rPr lang="en-IN" dirty="0">
+                <a:latin typeface="Times New Roman" pitchFamily="18" charset="0"/>
+                <a:cs typeface="Times New Roman" pitchFamily="18" charset="0"/>
+              </a:rPr>
+              <a:t>: Block can be read at the same time that the tag is read and compared. Block read begins as soon as the block address is available. If hit, data is passed on to CPU otherwise ignore read. </a:t>
+            </a:r>
           </a:p>
         </p:txBody>
       </p:sp>
     </p:spTree>
     <p:extLst>
       <p:ext uri="{BB962C8B-B14F-4D97-AF65-F5344CB8AC3E}">
-        <p14:creationId xmlns:p14="http://schemas.microsoft.com/office/powerpoint/2010/main" xmlns="" val="3090127745"/>
+        <p14:creationId xmlns:p14="http://schemas.microsoft.com/office/powerpoint/2010/main" val="3090127745"/>
       </p:ext>
     </p:extLst>
   </p:cSld>
@@ -5674,8 +5541,20 @@
                 <a:tableStyleId>{5C22544A-7EE6-4342-B048-85BDC9FD1C3A}</a:tableStyleId>
               </a:tblPr>
               <a:tblGrid>
-                <a:gridCol w="5600700"/>
-                <a:gridCol w="5600700"/>
+                <a:gridCol w="5600700">
+                  <a:extLst>
+                    <a:ext uri="{9D8B030D-6E8A-4147-A177-3AD203B41FA5}">
+                      <a16:colId xmlns:a16="http://schemas.microsoft.com/office/drawing/2014/main" val="20000"/>
+                    </a:ext>
+                  </a:extLst>
+                </a:gridCol>
+                <a:gridCol w="5600700">
+                  <a:extLst>
+                    <a:ext uri="{9D8B030D-6E8A-4147-A177-3AD203B41FA5}">
+                      <a16:colId xmlns:a16="http://schemas.microsoft.com/office/drawing/2014/main" val="20001"/>
+                    </a:ext>
+                  </a:extLst>
+                </a:gridCol>
               </a:tblGrid>
               <a:tr h="370840">
                 <a:tc>
@@ -5684,16 +5563,12 @@
                     <a:lstStyle/>
                     <a:p>
                       <a:r>
-                        <a:rPr lang="en-IN" dirty="0" smtClean="0">
+                        <a:rPr lang="en-IN" dirty="0">
                           <a:latin typeface="Times New Roman" pitchFamily="18" charset="0"/>
                           <a:cs typeface="Times New Roman" pitchFamily="18" charset="0"/>
                         </a:rPr>
                         <a:t>Write through</a:t>
                       </a:r>
-                      <a:endParaRPr lang="en-IN" dirty="0">
-                        <a:latin typeface="Times New Roman" pitchFamily="18" charset="0"/>
-                        <a:cs typeface="Times New Roman" pitchFamily="18" charset="0"/>
-                      </a:endParaRPr>
                     </a:p>
                   </a:txBody>
                   <a:tcPr/>
@@ -5704,20 +5579,21 @@
                     <a:lstStyle/>
                     <a:p>
                       <a:r>
-                        <a:rPr lang="en-IN" dirty="0" smtClean="0">
+                        <a:rPr lang="en-IN" dirty="0">
                           <a:latin typeface="Times New Roman" pitchFamily="18" charset="0"/>
                           <a:cs typeface="Times New Roman" pitchFamily="18" charset="0"/>
                         </a:rPr>
                         <a:t>Write back</a:t>
                       </a:r>
-                      <a:endParaRPr lang="en-IN" dirty="0">
-                        <a:latin typeface="Times New Roman" pitchFamily="18" charset="0"/>
-                        <a:cs typeface="Times New Roman" pitchFamily="18" charset="0"/>
-                      </a:endParaRPr>
                     </a:p>
                   </a:txBody>
                   <a:tcPr/>
                 </a:tc>
+                <a:extLst>
+                  <a:ext uri="{0D108BD9-81ED-4DB2-BD59-A6C34878D82A}">
+                    <a16:rowId xmlns:a16="http://schemas.microsoft.com/office/drawing/2014/main" val="10000"/>
+                  </a:ext>
+                </a:extLst>
               </a:tr>
               <a:tr h="370840">
                 <a:tc>
@@ -5726,7 +5602,7 @@
                     <a:lstStyle/>
                     <a:p>
                       <a:r>
-                        <a:rPr lang="en-IN" dirty="0" smtClean="0">
+                        <a:rPr lang="en-IN" dirty="0">
                           <a:latin typeface="Times New Roman" pitchFamily="18" charset="0"/>
                           <a:cs typeface="Times New Roman" pitchFamily="18" charset="0"/>
                         </a:rPr>
@@ -5735,14 +5611,14 @@
                     </a:p>
                     <a:p>
                       <a:r>
-                        <a:rPr lang="en-IN" dirty="0" smtClean="0">
+                        <a:rPr lang="en-IN" dirty="0">
                           <a:latin typeface="Times New Roman" pitchFamily="18" charset="0"/>
                           <a:cs typeface="Times New Roman" pitchFamily="18" charset="0"/>
                         </a:rPr>
                         <a:t>Read misses</a:t>
                       </a:r>
                       <a:r>
-                        <a:rPr lang="en-IN" baseline="0" dirty="0" smtClean="0">
+                        <a:rPr lang="en-IN" baseline="0" dirty="0">
                           <a:latin typeface="Times New Roman" pitchFamily="18" charset="0"/>
                           <a:cs typeface="Times New Roman" pitchFamily="18" charset="0"/>
                         </a:rPr>
@@ -5751,7 +5627,7 @@
                     </a:p>
                     <a:p>
                       <a:r>
-                        <a:rPr lang="en-IN" baseline="0" dirty="0" smtClean="0">
+                        <a:rPr lang="en-IN" baseline="0" dirty="0">
                           <a:latin typeface="Times New Roman" pitchFamily="18" charset="0"/>
                           <a:cs typeface="Times New Roman" pitchFamily="18" charset="0"/>
                         </a:rPr>
@@ -5760,7 +5636,7 @@
                     </a:p>
                     <a:p>
                       <a:r>
-                        <a:rPr lang="en-IN" baseline="0" dirty="0" smtClean="0">
+                        <a:rPr lang="en-IN" baseline="0" dirty="0">
                           <a:latin typeface="Times New Roman" pitchFamily="18" charset="0"/>
                           <a:cs typeface="Times New Roman" pitchFamily="18" charset="0"/>
                         </a:rPr>
@@ -5769,7 +5645,7 @@
                     </a:p>
                     <a:p>
                       <a:r>
-                        <a:rPr lang="en-IN" baseline="0" dirty="0" smtClean="0">
+                        <a:rPr lang="en-IN" baseline="0" dirty="0">
                           <a:latin typeface="Times New Roman" pitchFamily="18" charset="0"/>
                           <a:cs typeface="Times New Roman" pitchFamily="18" charset="0"/>
                         </a:rPr>
@@ -5778,7 +5654,7 @@
                     </a:p>
                     <a:p>
                       <a:r>
-                        <a:rPr lang="en-IN" baseline="0" dirty="0" smtClean="0">
+                        <a:rPr lang="en-IN" baseline="0" dirty="0">
                           <a:latin typeface="Times New Roman" pitchFamily="18" charset="0"/>
                           <a:cs typeface="Times New Roman" pitchFamily="18" charset="0"/>
                         </a:rPr>
@@ -5798,14 +5674,14 @@
                     <a:lstStyle/>
                     <a:p>
                       <a:r>
-                        <a:rPr lang="en-IN" dirty="0" smtClean="0">
+                        <a:rPr lang="en-IN" dirty="0">
                           <a:latin typeface="Times New Roman" pitchFamily="18" charset="0"/>
                           <a:cs typeface="Times New Roman" pitchFamily="18" charset="0"/>
                         </a:rPr>
                         <a:t>Information</a:t>
                       </a:r>
                       <a:r>
-                        <a:rPr lang="en-IN" baseline="0" dirty="0" smtClean="0">
+                        <a:rPr lang="en-IN" baseline="0" dirty="0">
                           <a:latin typeface="Times New Roman" pitchFamily="18" charset="0"/>
                           <a:cs typeface="Times New Roman" pitchFamily="18" charset="0"/>
                         </a:rPr>
@@ -5814,7 +5690,7 @@
                     </a:p>
                     <a:p>
                       <a:r>
-                        <a:rPr lang="en-IN" baseline="0" dirty="0" smtClean="0">
+                        <a:rPr lang="en-IN" baseline="0" dirty="0">
                           <a:latin typeface="Times New Roman" pitchFamily="18" charset="0"/>
                           <a:cs typeface="Times New Roman" pitchFamily="18" charset="0"/>
                         </a:rPr>
@@ -5823,7 +5699,7 @@
                     </a:p>
                     <a:p>
                       <a:r>
-                        <a:rPr lang="en-IN" baseline="0" dirty="0" smtClean="0">
+                        <a:rPr lang="en-IN" baseline="0" dirty="0">
                           <a:latin typeface="Times New Roman" pitchFamily="18" charset="0"/>
                           <a:cs typeface="Times New Roman" pitchFamily="18" charset="0"/>
                         </a:rPr>
@@ -5832,7 +5708,7 @@
                     </a:p>
                     <a:p>
                       <a:r>
-                        <a:rPr lang="en-IN" dirty="0" smtClean="0">
+                        <a:rPr lang="en-IN" dirty="0">
                           <a:latin typeface="Times New Roman" pitchFamily="18" charset="0"/>
                           <a:cs typeface="Times New Roman" pitchFamily="18" charset="0"/>
                         </a:rPr>
@@ -5841,7 +5717,7 @@
                     </a:p>
                     <a:p>
                       <a:r>
-                        <a:rPr lang="en-IN" dirty="0" smtClean="0">
+                        <a:rPr lang="en-IN" dirty="0">
                           <a:latin typeface="Times New Roman" pitchFamily="18" charset="0"/>
                           <a:cs typeface="Times New Roman" pitchFamily="18" charset="0"/>
                         </a:rPr>
@@ -5850,14 +5726,14 @@
                     </a:p>
                     <a:p>
                       <a:r>
-                        <a:rPr lang="en-IN" dirty="0" smtClean="0">
+                        <a:rPr lang="en-IN" dirty="0">
                           <a:latin typeface="Times New Roman" pitchFamily="18" charset="0"/>
                           <a:cs typeface="Times New Roman" pitchFamily="18" charset="0"/>
                         </a:rPr>
                         <a:t>Since some writes do not go to memory, write back needs less memory bandwidth, making write back attractive</a:t>
                       </a:r>
                       <a:r>
-                        <a:rPr lang="en-IN" baseline="0" dirty="0" smtClean="0">
+                        <a:rPr lang="en-IN" baseline="0" dirty="0">
                           <a:latin typeface="Times New Roman" pitchFamily="18" charset="0"/>
                           <a:cs typeface="Times New Roman" pitchFamily="18" charset="0"/>
                         </a:rPr>
@@ -5871,6 +5747,11 @@
                   </a:txBody>
                   <a:tcPr/>
                 </a:tc>
+                <a:extLst>
+                  <a:ext uri="{0D108BD9-81ED-4DB2-BD59-A6C34878D82A}">
+                    <a16:rowId xmlns:a16="http://schemas.microsoft.com/office/drawing/2014/main" val="10001"/>
+                  </a:ext>
+                </a:extLst>
               </a:tr>
             </a:tbl>
           </a:graphicData>
@@ -5895,8 +5776,20 @@
                 <a:tableStyleId>{5C22544A-7EE6-4342-B048-85BDC9FD1C3A}</a:tableStyleId>
               </a:tblPr>
               <a:tblGrid>
-                <a:gridCol w="2709333"/>
-                <a:gridCol w="2709333"/>
+                <a:gridCol w="2709333">
+                  <a:extLst>
+                    <a:ext uri="{9D8B030D-6E8A-4147-A177-3AD203B41FA5}">
+                      <a16:colId xmlns:a16="http://schemas.microsoft.com/office/drawing/2014/main" val="20000"/>
+                    </a:ext>
+                  </a:extLst>
+                </a:gridCol>
+                <a:gridCol w="2709333">
+                  <a:extLst>
+                    <a:ext uri="{9D8B030D-6E8A-4147-A177-3AD203B41FA5}">
+                      <a16:colId xmlns:a16="http://schemas.microsoft.com/office/drawing/2014/main" val="20001"/>
+                    </a:ext>
+                  </a:extLst>
+                </a:gridCol>
               </a:tblGrid>
               <a:tr h="370840">
                 <a:tc gridSpan="2">
@@ -5905,16 +5798,12 @@
                     <a:lstStyle/>
                     <a:p>
                       <a:r>
-                        <a:rPr lang="en-IN" dirty="0" smtClean="0">
+                        <a:rPr lang="en-IN" dirty="0">
                           <a:latin typeface="Times New Roman" pitchFamily="18" charset="0"/>
                           <a:cs typeface="Times New Roman" pitchFamily="18" charset="0"/>
                         </a:rPr>
                         <a:t>Actions on write miss</a:t>
                       </a:r>
-                      <a:endParaRPr lang="en-IN" dirty="0">
-                        <a:latin typeface="Times New Roman" pitchFamily="18" charset="0"/>
-                        <a:cs typeface="Times New Roman" pitchFamily="18" charset="0"/>
-                      </a:endParaRPr>
                     </a:p>
                   </a:txBody>
                   <a:tcPr/>
@@ -5929,6 +5818,11 @@
                   </a:txBody>
                   <a:tcPr/>
                 </a:tc>
+                <a:extLst>
+                  <a:ext uri="{0D108BD9-81ED-4DB2-BD59-A6C34878D82A}">
+                    <a16:rowId xmlns:a16="http://schemas.microsoft.com/office/drawing/2014/main" val="10000"/>
+                  </a:ext>
+                </a:extLst>
               </a:tr>
               <a:tr h="370840">
                 <a:tc>
@@ -5937,16 +5831,12 @@
                     <a:lstStyle/>
                     <a:p>
                       <a:r>
-                        <a:rPr lang="en-IN" dirty="0" smtClean="0">
+                        <a:rPr lang="en-IN" dirty="0">
                           <a:latin typeface="Times New Roman" pitchFamily="18" charset="0"/>
                           <a:cs typeface="Times New Roman" pitchFamily="18" charset="0"/>
                         </a:rPr>
                         <a:t>Write allocate also called fetch on write</a:t>
                       </a:r>
-                      <a:endParaRPr lang="en-IN" dirty="0">
-                        <a:latin typeface="Times New Roman" pitchFamily="18" charset="0"/>
-                        <a:cs typeface="Times New Roman" pitchFamily="18" charset="0"/>
-                      </a:endParaRPr>
                     </a:p>
                   </a:txBody>
                   <a:tcPr/>
@@ -5957,20 +5847,21 @@
                     <a:lstStyle/>
                     <a:p>
                       <a:r>
-                        <a:rPr lang="en-IN" dirty="0" smtClean="0">
+                        <a:rPr lang="en-IN" dirty="0">
                           <a:latin typeface="Times New Roman" pitchFamily="18" charset="0"/>
                           <a:cs typeface="Times New Roman" pitchFamily="18" charset="0"/>
                         </a:rPr>
                         <a:t>No write allocate also called write around</a:t>
                       </a:r>
-                      <a:endParaRPr lang="en-IN" dirty="0">
-                        <a:latin typeface="Times New Roman" pitchFamily="18" charset="0"/>
-                        <a:cs typeface="Times New Roman" pitchFamily="18" charset="0"/>
-                      </a:endParaRPr>
                     </a:p>
                   </a:txBody>
                   <a:tcPr/>
                 </a:tc>
+                <a:extLst>
+                  <a:ext uri="{0D108BD9-81ED-4DB2-BD59-A6C34878D82A}">
+                    <a16:rowId xmlns:a16="http://schemas.microsoft.com/office/drawing/2014/main" val="10001"/>
+                  </a:ext>
+                </a:extLst>
               </a:tr>
               <a:tr h="370840">
                 <a:tc>
@@ -5979,16 +5870,12 @@
                     <a:lstStyle/>
                     <a:p>
                       <a:r>
-                        <a:rPr lang="en-IN" dirty="0" smtClean="0">
+                        <a:rPr lang="en-IN" dirty="0">
                           <a:latin typeface="Times New Roman" pitchFamily="18" charset="0"/>
                           <a:cs typeface="Times New Roman" pitchFamily="18" charset="0"/>
                         </a:rPr>
                         <a:t>Block is loaded on a write miss followed by the write hit action</a:t>
                       </a:r>
-                      <a:endParaRPr lang="en-IN" dirty="0">
-                        <a:latin typeface="Times New Roman" pitchFamily="18" charset="0"/>
-                        <a:cs typeface="Times New Roman" pitchFamily="18" charset="0"/>
-                      </a:endParaRPr>
                     </a:p>
                   </a:txBody>
                   <a:tcPr/>
@@ -5999,20 +5886,21 @@
                     <a:lstStyle/>
                     <a:p>
                       <a:r>
-                        <a:rPr lang="en-IN" dirty="0" smtClean="0">
+                        <a:rPr lang="en-IN" dirty="0">
                           <a:latin typeface="Times New Roman" pitchFamily="18" charset="0"/>
                           <a:cs typeface="Times New Roman" pitchFamily="18" charset="0"/>
                         </a:rPr>
                         <a:t>Block is modified in the lower level and not loaded in cache</a:t>
                       </a:r>
-                      <a:endParaRPr lang="en-IN" dirty="0">
-                        <a:latin typeface="Times New Roman" pitchFamily="18" charset="0"/>
-                        <a:cs typeface="Times New Roman" pitchFamily="18" charset="0"/>
-                      </a:endParaRPr>
                     </a:p>
                   </a:txBody>
                   <a:tcPr/>
                 </a:tc>
+                <a:extLst>
+                  <a:ext uri="{0D108BD9-81ED-4DB2-BD59-A6C34878D82A}">
+                    <a16:rowId xmlns:a16="http://schemas.microsoft.com/office/drawing/2014/main" val="10002"/>
+                  </a:ext>
+                </a:extLst>
               </a:tr>
             </a:tbl>
           </a:graphicData>
@@ -6041,25 +5929,11 @@
           <a:lstStyle/>
           <a:p>
             <a:r>
-              <a:rPr lang="en-IN" dirty="0" smtClean="0">
+              <a:rPr lang="en-IN" dirty="0">
                 <a:latin typeface="Times New Roman" panose="02020603050405020304" pitchFamily="18" charset="0"/>
                 <a:cs typeface="Times New Roman" panose="02020603050405020304" pitchFamily="18" charset="0"/>
               </a:rPr>
-              <a:t>Cache miss: </a:t>
-            </a:r>
-            <a:r>
-              <a:rPr lang="en-IN" dirty="0">
-                <a:latin typeface="Times New Roman" panose="02020603050405020304" pitchFamily="18" charset="0"/>
-                <a:cs typeface="Times New Roman" panose="02020603050405020304" pitchFamily="18" charset="0"/>
-              </a:rPr>
-              <a:t>Three types of cache misses are compulsory miss, conflict miss and capacity miss. First access to a memory block causes compulsory </a:t>
-            </a:r>
-            <a:r>
-              <a:rPr lang="en-IN" dirty="0" smtClean="0">
-                <a:latin typeface="Times New Roman" panose="02020603050405020304" pitchFamily="18" charset="0"/>
-                <a:cs typeface="Times New Roman" panose="02020603050405020304" pitchFamily="18" charset="0"/>
-              </a:rPr>
-              <a:t>miss. If the cache can not contain all the blocks needed during execution of program, capacity misses will occur because of blocks being discarded and later retrieved. Conflict/collision/interference miss occurs if the block placement strategy is direct mapped or set associative.</a:t>
+              <a:t>Cache miss: Three types of cache misses are compulsory miss, conflict miss and capacity miss. First access to a memory block causes compulsory miss. If the cache can not contain all the blocks needed during execution of program, capacity misses will occur because of blocks being discarded and later retrieved. Conflict/collision/interference miss occurs if the block placement strategy is direct mapped or set associative.</a:t>
             </a:r>
           </a:p>
         </p:txBody>
@@ -6112,7 +5986,7 @@
           <a:lstStyle/>
           <a:p>
             <a:r>
-              <a:rPr lang="en-IN" dirty="0" smtClean="0">
+              <a:rPr lang="en-IN" dirty="0">
                 <a:latin typeface="Times New Roman" panose="02020603050405020304" pitchFamily="18" charset="0"/>
                 <a:cs typeface="Times New Roman" panose="02020603050405020304" pitchFamily="18" charset="0"/>
               </a:rPr>
@@ -6133,7 +6007,7 @@
           <p:nvPr>
             <p:extLst>
               <p:ext uri="{D42A27DB-BD31-4B8C-83A1-F6EECF244321}">
-                <p14:modId xmlns:p14="http://schemas.microsoft.com/office/powerpoint/2010/main" xmlns="" val="119473249"/>
+                <p14:modId xmlns:p14="http://schemas.microsoft.com/office/powerpoint/2010/main" val="119473249"/>
               </p:ext>
             </p:extLst>
           </p:nvPr>
@@ -6152,35 +6026,35 @@
                 <a:gridCol w="2394428">
                   <a:extLst>
                     <a:ext uri="{9D8B030D-6E8A-4147-A177-3AD203B41FA5}">
-                      <a16:colId xmlns:a16="http://schemas.microsoft.com/office/drawing/2014/main" xmlns="" val="813694444"/>
+                      <a16:colId xmlns:a16="http://schemas.microsoft.com/office/drawing/2014/main" val="813694444"/>
                     </a:ext>
                   </a:extLst>
                 </a:gridCol>
                 <a:gridCol w="1608401">
                   <a:extLst>
                     <a:ext uri="{9D8B030D-6E8A-4147-A177-3AD203B41FA5}">
-                      <a16:colId xmlns:a16="http://schemas.microsoft.com/office/drawing/2014/main" xmlns="" val="1473376284"/>
+                      <a16:colId xmlns:a16="http://schemas.microsoft.com/office/drawing/2014/main" val="1473376284"/>
                     </a:ext>
                   </a:extLst>
                 </a:gridCol>
                 <a:gridCol w="1125416">
                   <a:extLst>
                     <a:ext uri="{9D8B030D-6E8A-4147-A177-3AD203B41FA5}">
-                      <a16:colId xmlns:a16="http://schemas.microsoft.com/office/drawing/2014/main" xmlns="" val="3267197052"/>
+                      <a16:colId xmlns:a16="http://schemas.microsoft.com/office/drawing/2014/main" val="3267197052"/>
                     </a:ext>
                   </a:extLst>
                 </a:gridCol>
                 <a:gridCol w="633046">
                   <a:extLst>
                     <a:ext uri="{9D8B030D-6E8A-4147-A177-3AD203B41FA5}">
-                      <a16:colId xmlns:a16="http://schemas.microsoft.com/office/drawing/2014/main" xmlns="" val="3445615410"/>
+                      <a16:colId xmlns:a16="http://schemas.microsoft.com/office/drawing/2014/main" val="3445615410"/>
                     </a:ext>
                   </a:extLst>
                 </a:gridCol>
                 <a:gridCol w="633048">
                   <a:extLst>
                     <a:ext uri="{9D8B030D-6E8A-4147-A177-3AD203B41FA5}">
-                      <a16:colId xmlns:a16="http://schemas.microsoft.com/office/drawing/2014/main" xmlns="" val="1524115876"/>
+                      <a16:colId xmlns:a16="http://schemas.microsoft.com/office/drawing/2014/main" val="1524115876"/>
                     </a:ext>
                   </a:extLst>
                 </a:gridCol>
@@ -6343,7 +6217,7 @@
                 </a:tc>
                 <a:extLst>
                   <a:ext uri="{0D108BD9-81ED-4DB2-BD59-A6C34878D82A}">
-                    <a16:rowId xmlns:a16="http://schemas.microsoft.com/office/drawing/2014/main" xmlns="" val="1121074225"/>
+                    <a16:rowId xmlns:a16="http://schemas.microsoft.com/office/drawing/2014/main" val="1121074225"/>
                   </a:ext>
                 </a:extLst>
               </a:tr>
@@ -6521,7 +6395,7 @@
                 </a:tc>
                 <a:extLst>
                   <a:ext uri="{0D108BD9-81ED-4DB2-BD59-A6C34878D82A}">
-                    <a16:rowId xmlns:a16="http://schemas.microsoft.com/office/drawing/2014/main" xmlns="" val="892868183"/>
+                    <a16:rowId xmlns:a16="http://schemas.microsoft.com/office/drawing/2014/main" val="892868183"/>
                   </a:ext>
                 </a:extLst>
               </a:tr>
@@ -6552,14 +6426,14 @@
           <a:lstStyle/>
           <a:p>
             <a:r>
-              <a:rPr lang="en-IN" dirty="0" smtClean="0">
+              <a:rPr lang="en-IN" dirty="0">
                 <a:latin typeface="Times New Roman" panose="02020603050405020304" pitchFamily="18" charset="0"/>
                 <a:cs typeface="Times New Roman" panose="02020603050405020304" pitchFamily="18" charset="0"/>
               </a:rPr>
               <a:t>Fig 2(a): </a:t>
             </a:r>
             <a:r>
-              <a:rPr lang="en-IN" u="sng" dirty="0" smtClean="0">
+              <a:rPr lang="en-IN" u="sng" dirty="0">
                 <a:latin typeface="Times New Roman" panose="02020603050405020304" pitchFamily="18" charset="0"/>
                 <a:cs typeface="Times New Roman" panose="02020603050405020304" pitchFamily="18" charset="0"/>
               </a:rPr>
@@ -6603,42 +6477,41 @@
                 <a:latin typeface="Times New Roman" panose="02020603050405020304" pitchFamily="18" charset="0"/>
                 <a:cs typeface="Times New Roman" panose="02020603050405020304" pitchFamily="18" charset="0"/>
               </a:rPr>
-              <a:t> </a:t>
-            </a:r>
-            <a:r>
-              <a:rPr lang="en-IN" dirty="0" smtClean="0">
+              <a:t> 1st CPU request is for MM block 0. CM block frame address is computed as 0 mod 4 =0. So CM block frame 00 is now occupied by MM block 0. </a:t>
+            </a:r>
+          </a:p>
+          <a:p>
+            <a:pPr marL="285750" indent="-285750">
+              <a:buFont typeface="Arial" panose="020B0604020202020204" pitchFamily="34" charset="0"/>
+              <a:buChar char="•"/>
+            </a:pPr>
+            <a:r>
+              <a:rPr lang="en-IN" dirty="0">
                 <a:latin typeface="Times New Roman" panose="02020603050405020304" pitchFamily="18" charset="0"/>
                 <a:cs typeface="Times New Roman" panose="02020603050405020304" pitchFamily="18" charset="0"/>
               </a:rPr>
-              <a:t>1st </a:t>
-            </a:r>
-            <a:r>
-              <a:rPr lang="en-IN" dirty="0">
+              <a:t>2nd CPU request is for MM block 4. CM block frame address is computed as 4 mod 4 =0. But the CM block frame 00 is already occupied by MM block 0. </a:t>
+            </a:r>
+            <a:r>
+              <a:rPr lang="en-IN" b="1" dirty="0">
                 <a:latin typeface="Times New Roman" panose="02020603050405020304" pitchFamily="18" charset="0"/>
                 <a:cs typeface="Times New Roman" panose="02020603050405020304" pitchFamily="18" charset="0"/>
               </a:rPr>
-              <a:t>CPU request is for MM block 0. CM block frame address is computed as 0 mod 4 =0. So CM block frame </a:t>
-            </a:r>
-            <a:r>
-              <a:rPr lang="en-IN" dirty="0" smtClean="0">
+              <a:t>Conflict miss</a:t>
+            </a:r>
+            <a:r>
+              <a:rPr lang="en-IN" dirty="0">
                 <a:latin typeface="Times New Roman" panose="02020603050405020304" pitchFamily="18" charset="0"/>
                 <a:cs typeface="Times New Roman" panose="02020603050405020304" pitchFamily="18" charset="0"/>
               </a:rPr>
-              <a:t>00 </a:t>
-            </a:r>
-            <a:r>
-              <a:rPr lang="en-IN" dirty="0">
+              <a:t> occurs </a:t>
+            </a:r>
+            <a:r>
+              <a:rPr lang="en-IN" b="1" dirty="0">
                 <a:latin typeface="Times New Roman" panose="02020603050405020304" pitchFamily="18" charset="0"/>
                 <a:cs typeface="Times New Roman" panose="02020603050405020304" pitchFamily="18" charset="0"/>
               </a:rPr>
-              <a:t>is now occupied by MM block </a:t>
-            </a:r>
-            <a:r>
-              <a:rPr lang="en-IN" dirty="0" smtClean="0">
-                <a:latin typeface="Times New Roman" panose="02020603050405020304" pitchFamily="18" charset="0"/>
-                <a:cs typeface="Times New Roman" panose="02020603050405020304" pitchFamily="18" charset="0"/>
-              </a:rPr>
-              <a:t>0. </a:t>
+              <a:t>between MM block 0 and MM block 4.</a:t>
             </a:r>
             <a:endParaRPr lang="en-IN" dirty="0">
               <a:latin typeface="Times New Roman" panose="02020603050405020304" pitchFamily="18" charset="0"/>
@@ -6655,54 +6528,8 @@
                 <a:latin typeface="Times New Roman" panose="02020603050405020304" pitchFamily="18" charset="0"/>
                 <a:cs typeface="Times New Roman" panose="02020603050405020304" pitchFamily="18" charset="0"/>
               </a:rPr>
-              <a:t>2nd CPU request is for MM block 4. CM block frame address is computed as 4 mod 4 =0. But the CM block frame 00 </a:t>
-            </a:r>
-            <a:r>
-              <a:rPr lang="en-IN" dirty="0" smtClean="0">
-                <a:latin typeface="Times New Roman" panose="02020603050405020304" pitchFamily="18" charset="0"/>
-                <a:cs typeface="Times New Roman" panose="02020603050405020304" pitchFamily="18" charset="0"/>
-              </a:rPr>
-              <a:t>is </a:t>
-            </a:r>
-            <a:r>
-              <a:rPr lang="en-IN" dirty="0">
-                <a:latin typeface="Times New Roman" panose="02020603050405020304" pitchFamily="18" charset="0"/>
-                <a:cs typeface="Times New Roman" panose="02020603050405020304" pitchFamily="18" charset="0"/>
-              </a:rPr>
-              <a:t>already occupied by MM block </a:t>
-            </a:r>
-            <a:r>
-              <a:rPr lang="en-IN" dirty="0" smtClean="0">
-                <a:latin typeface="Times New Roman" panose="02020603050405020304" pitchFamily="18" charset="0"/>
-                <a:cs typeface="Times New Roman" panose="02020603050405020304" pitchFamily="18" charset="0"/>
-              </a:rPr>
-              <a:t>0. </a:t>
-            </a:r>
-            <a:r>
-              <a:rPr lang="en-IN" b="1" dirty="0" smtClean="0">
-                <a:latin typeface="Times New Roman" panose="02020603050405020304" pitchFamily="18" charset="0"/>
-                <a:cs typeface="Times New Roman" panose="02020603050405020304" pitchFamily="18" charset="0"/>
-              </a:rPr>
-              <a:t>Conflict miss</a:t>
-            </a:r>
-            <a:r>
-              <a:rPr lang="en-IN" dirty="0" smtClean="0">
-                <a:latin typeface="Times New Roman" panose="02020603050405020304" pitchFamily="18" charset="0"/>
-                <a:cs typeface="Times New Roman" panose="02020603050405020304" pitchFamily="18" charset="0"/>
-              </a:rPr>
-              <a:t> occurs </a:t>
-            </a:r>
-            <a:r>
-              <a:rPr lang="en-IN" b="1" dirty="0" smtClean="0">
-                <a:latin typeface="Times New Roman" panose="02020603050405020304" pitchFamily="18" charset="0"/>
-                <a:cs typeface="Times New Roman" panose="02020603050405020304" pitchFamily="18" charset="0"/>
-              </a:rPr>
-              <a:t>between MM block 0 and MM block 4.</a:t>
-            </a:r>
-            <a:endParaRPr lang="en-IN" dirty="0" smtClean="0">
-              <a:latin typeface="Times New Roman" panose="02020603050405020304" pitchFamily="18" charset="0"/>
-              <a:cs typeface="Times New Roman" panose="02020603050405020304" pitchFamily="18" charset="0"/>
-            </a:endParaRPr>
+              <a:t>3rd CPU request is for MM block 5. CM block frame address is computed as 5 mod 4 =1. So CM block frame 01 is now occupied by MM block 5. </a:t>
+            </a:r>
           </a:p>
           <a:p>
             <a:pPr marL="285750" indent="-285750">
@@ -6710,44 +6537,33 @@
               <a:buChar char="•"/>
             </a:pPr>
             <a:r>
-              <a:rPr lang="en-IN" dirty="0" smtClean="0">
+              <a:rPr lang="en-IN" dirty="0">
                 <a:latin typeface="Times New Roman" panose="02020603050405020304" pitchFamily="18" charset="0"/>
                 <a:cs typeface="Times New Roman" panose="02020603050405020304" pitchFamily="18" charset="0"/>
               </a:rPr>
-              <a:t>3rd </a:t>
-            </a:r>
-            <a:r>
-              <a:rPr lang="en-IN" dirty="0">
+              <a:t>4th CPU request is for MM block 1. CM block frame address is computed as 1 mod 4 =1. But the CM block frame 01 is already occupied by MM block 5. C</a:t>
+            </a:r>
+            <a:r>
+              <a:rPr lang="en-IN" b="1" dirty="0">
                 <a:latin typeface="Times New Roman" panose="02020603050405020304" pitchFamily="18" charset="0"/>
                 <a:cs typeface="Times New Roman" panose="02020603050405020304" pitchFamily="18" charset="0"/>
               </a:rPr>
-              <a:t>CPU request is for MM block 5. CM block frame address is computed as 5 mod 4 =1. So CM block frame 01 </a:t>
-            </a:r>
-            <a:r>
-              <a:rPr lang="en-IN" dirty="0" smtClean="0">
+              <a:t>onflict miss</a:t>
+            </a:r>
+            <a:r>
+              <a:rPr lang="en-IN" dirty="0">
                 <a:latin typeface="Times New Roman" panose="02020603050405020304" pitchFamily="18" charset="0"/>
                 <a:cs typeface="Times New Roman" panose="02020603050405020304" pitchFamily="18" charset="0"/>
               </a:rPr>
-              <a:t>is </a:t>
-            </a:r>
-            <a:r>
-              <a:rPr lang="en-IN" dirty="0">
+              <a:t> occurs </a:t>
+            </a:r>
+            <a:r>
+              <a:rPr lang="en-IN" b="1" dirty="0">
                 <a:latin typeface="Times New Roman" panose="02020603050405020304" pitchFamily="18" charset="0"/>
                 <a:cs typeface="Times New Roman" panose="02020603050405020304" pitchFamily="18" charset="0"/>
               </a:rPr>
-              <a:t>now occupied by MM block </a:t>
-            </a:r>
-            <a:r>
-              <a:rPr lang="en-IN" dirty="0" smtClean="0">
-                <a:latin typeface="Times New Roman" panose="02020603050405020304" pitchFamily="18" charset="0"/>
-                <a:cs typeface="Times New Roman" panose="02020603050405020304" pitchFamily="18" charset="0"/>
-              </a:rPr>
-              <a:t>5. </a:t>
-            </a:r>
-            <a:endParaRPr lang="en-IN" dirty="0">
-              <a:latin typeface="Times New Roman" panose="02020603050405020304" pitchFamily="18" charset="0"/>
-              <a:cs typeface="Times New Roman" panose="02020603050405020304" pitchFamily="18" charset="0"/>
-            </a:endParaRPr>
+              <a:t>between MM block 1 and MM block 5</a:t>
+            </a:r>
           </a:p>
           <a:p>
             <a:pPr marL="285750" indent="-285750">
@@ -6759,95 +6575,8 @@
                 <a:latin typeface="Times New Roman" panose="02020603050405020304" pitchFamily="18" charset="0"/>
                 <a:cs typeface="Times New Roman" panose="02020603050405020304" pitchFamily="18" charset="0"/>
               </a:rPr>
-              <a:t>4th CPU request is for MM block 1. CM block frame address is computed as 1 mod 4 =1. But the CM block frame </a:t>
-            </a:r>
-            <a:r>
-              <a:rPr lang="en-IN" dirty="0" smtClean="0">
-                <a:latin typeface="Times New Roman" panose="02020603050405020304" pitchFamily="18" charset="0"/>
-                <a:cs typeface="Times New Roman" panose="02020603050405020304" pitchFamily="18" charset="0"/>
-              </a:rPr>
-              <a:t>01 </a:t>
-            </a:r>
-            <a:r>
-              <a:rPr lang="en-IN" dirty="0">
-                <a:latin typeface="Times New Roman" panose="02020603050405020304" pitchFamily="18" charset="0"/>
-                <a:cs typeface="Times New Roman" panose="02020603050405020304" pitchFamily="18" charset="0"/>
-              </a:rPr>
-              <a:t>is already occupied by MM block </a:t>
-            </a:r>
-            <a:r>
-              <a:rPr lang="en-IN" dirty="0" smtClean="0">
-                <a:latin typeface="Times New Roman" panose="02020603050405020304" pitchFamily="18" charset="0"/>
-                <a:cs typeface="Times New Roman" panose="02020603050405020304" pitchFamily="18" charset="0"/>
-              </a:rPr>
-              <a:t>5. C</a:t>
-            </a:r>
-            <a:r>
-              <a:rPr lang="en-IN" b="1" dirty="0" smtClean="0">
-                <a:latin typeface="Times New Roman" panose="02020603050405020304" pitchFamily="18" charset="0"/>
-                <a:cs typeface="Times New Roman" panose="02020603050405020304" pitchFamily="18" charset="0"/>
-              </a:rPr>
-              <a:t>onflict </a:t>
-            </a:r>
-            <a:r>
-              <a:rPr lang="en-IN" b="1" dirty="0">
-                <a:latin typeface="Times New Roman" panose="02020603050405020304" pitchFamily="18" charset="0"/>
-                <a:cs typeface="Times New Roman" panose="02020603050405020304" pitchFamily="18" charset="0"/>
-              </a:rPr>
-              <a:t>miss</a:t>
-            </a:r>
-            <a:r>
-              <a:rPr lang="en-IN" dirty="0">
-                <a:latin typeface="Times New Roman" panose="02020603050405020304" pitchFamily="18" charset="0"/>
-                <a:cs typeface="Times New Roman" panose="02020603050405020304" pitchFamily="18" charset="0"/>
-              </a:rPr>
-              <a:t> occurs </a:t>
-            </a:r>
-            <a:r>
-              <a:rPr lang="en-IN" b="1" dirty="0">
-                <a:latin typeface="Times New Roman" panose="02020603050405020304" pitchFamily="18" charset="0"/>
-                <a:cs typeface="Times New Roman" panose="02020603050405020304" pitchFamily="18" charset="0"/>
-              </a:rPr>
-              <a:t>between MM block 1 </a:t>
-            </a:r>
-            <a:r>
-              <a:rPr lang="en-IN" b="1" dirty="0" smtClean="0">
-                <a:latin typeface="Times New Roman" panose="02020603050405020304" pitchFamily="18" charset="0"/>
-                <a:cs typeface="Times New Roman" panose="02020603050405020304" pitchFamily="18" charset="0"/>
-              </a:rPr>
-              <a:t>and </a:t>
-            </a:r>
-            <a:r>
-              <a:rPr lang="en-IN" b="1" dirty="0">
-                <a:latin typeface="Times New Roman" panose="02020603050405020304" pitchFamily="18" charset="0"/>
-                <a:cs typeface="Times New Roman" panose="02020603050405020304" pitchFamily="18" charset="0"/>
-              </a:rPr>
-              <a:t>MM block </a:t>
-            </a:r>
-            <a:r>
-              <a:rPr lang="en-IN" b="1" dirty="0" smtClean="0">
-                <a:latin typeface="Times New Roman" panose="02020603050405020304" pitchFamily="18" charset="0"/>
-                <a:cs typeface="Times New Roman" panose="02020603050405020304" pitchFamily="18" charset="0"/>
-              </a:rPr>
-              <a:t>5</a:t>
-            </a:r>
-          </a:p>
-          <a:p>
-            <a:pPr marL="285750" indent="-285750">
-              <a:buFont typeface="Arial" panose="020B0604020202020204" pitchFamily="34" charset="0"/>
-              <a:buChar char="•"/>
-            </a:pPr>
-            <a:r>
-              <a:rPr lang="en-IN" dirty="0" smtClean="0">
-                <a:latin typeface="Times New Roman" panose="02020603050405020304" pitchFamily="18" charset="0"/>
-                <a:cs typeface="Times New Roman" panose="02020603050405020304" pitchFamily="18" charset="0"/>
-              </a:rPr>
               <a:t>5th CPU request is for MM block 3. CM block frame address is computed as 3 mod 4 =3. So CM block frame is now occupied by MM block 3. </a:t>
             </a:r>
-            <a:endParaRPr lang="en-IN" dirty="0">
-              <a:latin typeface="Times New Roman" panose="02020603050405020304" pitchFamily="18" charset="0"/>
-              <a:cs typeface="Times New Roman" panose="02020603050405020304" pitchFamily="18" charset="0"/>
-            </a:endParaRPr>
           </a:p>
         </p:txBody>
       </p:sp>
@@ -6885,7 +6614,7 @@
           <p:nvPr>
             <p:extLst>
               <p:ext uri="{D42A27DB-BD31-4B8C-83A1-F6EECF244321}">
-                <p14:modId xmlns:p14="http://schemas.microsoft.com/office/powerpoint/2010/main" xmlns="" val="2187787818"/>
+                <p14:modId xmlns:p14="http://schemas.microsoft.com/office/powerpoint/2010/main" val="2187787818"/>
               </p:ext>
             </p:extLst>
           </p:nvPr>
@@ -6904,35 +6633,35 @@
                 <a:gridCol w="2230266">
                   <a:extLst>
                     <a:ext uri="{9D8B030D-6E8A-4147-A177-3AD203B41FA5}">
-                      <a16:colId xmlns:a16="http://schemas.microsoft.com/office/drawing/2014/main" xmlns="" val="1072136049"/>
+                      <a16:colId xmlns:a16="http://schemas.microsoft.com/office/drawing/2014/main" val="1072136049"/>
                     </a:ext>
                   </a:extLst>
                 </a:gridCol>
                 <a:gridCol w="422031">
                   <a:extLst>
                     <a:ext uri="{9D8B030D-6E8A-4147-A177-3AD203B41FA5}">
-                      <a16:colId xmlns:a16="http://schemas.microsoft.com/office/drawing/2014/main" xmlns="" val="599829614"/>
+                      <a16:colId xmlns:a16="http://schemas.microsoft.com/office/drawing/2014/main" val="599829614"/>
                     </a:ext>
                   </a:extLst>
                 </a:gridCol>
                 <a:gridCol w="562708">
                   <a:extLst>
                     <a:ext uri="{9D8B030D-6E8A-4147-A177-3AD203B41FA5}">
-                      <a16:colId xmlns:a16="http://schemas.microsoft.com/office/drawing/2014/main" xmlns="" val="3617617615"/>
+                      <a16:colId xmlns:a16="http://schemas.microsoft.com/office/drawing/2014/main" val="3617617615"/>
                     </a:ext>
                   </a:extLst>
                 </a:gridCol>
                 <a:gridCol w="492369">
                   <a:extLst>
                     <a:ext uri="{9D8B030D-6E8A-4147-A177-3AD203B41FA5}">
-                      <a16:colId xmlns:a16="http://schemas.microsoft.com/office/drawing/2014/main" xmlns="" val="2972038144"/>
+                      <a16:colId xmlns:a16="http://schemas.microsoft.com/office/drawing/2014/main" val="2972038144"/>
                     </a:ext>
                   </a:extLst>
                 </a:gridCol>
                 <a:gridCol w="675249">
                   <a:extLst>
                     <a:ext uri="{9D8B030D-6E8A-4147-A177-3AD203B41FA5}">
-                      <a16:colId xmlns:a16="http://schemas.microsoft.com/office/drawing/2014/main" xmlns="" val="619299006"/>
+                      <a16:colId xmlns:a16="http://schemas.microsoft.com/office/drawing/2014/main" val="619299006"/>
                     </a:ext>
                   </a:extLst>
                 </a:gridCol>
@@ -7095,7 +6824,7 @@
                 </a:tc>
                 <a:extLst>
                   <a:ext uri="{0D108BD9-81ED-4DB2-BD59-A6C34878D82A}">
-                    <a16:rowId xmlns:a16="http://schemas.microsoft.com/office/drawing/2014/main" xmlns="" val="562752598"/>
+                    <a16:rowId xmlns:a16="http://schemas.microsoft.com/office/drawing/2014/main" val="562752598"/>
                   </a:ext>
                 </a:extLst>
               </a:tr>
@@ -7145,7 +6874,7 @@
                         </a:spcAft>
                       </a:pPr>
                       <a:r>
-                        <a:rPr lang="en-IN" sz="1800" strike="sngStrike" dirty="0" smtClean="0">
+                        <a:rPr lang="en-IN" sz="1800" strike="sngStrike" dirty="0">
                           <a:effectLst/>
                           <a:latin typeface="Times New Roman" panose="02020603050405020304" pitchFamily="18" charset="0"/>
                           <a:cs typeface="Times New Roman" panose="02020603050405020304" pitchFamily="18" charset="0"/>
@@ -7153,7 +6882,7 @@
                         <a:t>0 </a:t>
                       </a:r>
                       <a:r>
-                        <a:rPr lang="en-IN" sz="1800" strike="noStrike" dirty="0" smtClean="0">
+                        <a:rPr lang="en-IN" sz="1800" strike="noStrike" dirty="0">
                           <a:effectLst/>
                           <a:latin typeface="Times New Roman" panose="02020603050405020304" pitchFamily="18" charset="0"/>
                           <a:cs typeface="Times New Roman" panose="02020603050405020304" pitchFamily="18" charset="0"/>
@@ -7265,7 +6994,7 @@
                 </a:tc>
                 <a:extLst>
                   <a:ext uri="{0D108BD9-81ED-4DB2-BD59-A6C34878D82A}">
-                    <a16:rowId xmlns:a16="http://schemas.microsoft.com/office/drawing/2014/main" xmlns="" val="646832634"/>
+                    <a16:rowId xmlns:a16="http://schemas.microsoft.com/office/drawing/2014/main" val="646832634"/>
                   </a:ext>
                 </a:extLst>
               </a:tr>
@@ -7300,28 +7029,14 @@
                 <a:latin typeface="Times New Roman" panose="02020603050405020304" pitchFamily="18" charset="0"/>
                 <a:cs typeface="Times New Roman" panose="02020603050405020304" pitchFamily="18" charset="0"/>
               </a:rPr>
-              <a:t>Fig 2(b</a:t>
-            </a:r>
-            <a:r>
-              <a:rPr lang="en-IN" dirty="0" smtClean="0">
-                <a:latin typeface="Times New Roman" panose="02020603050405020304" pitchFamily="18" charset="0"/>
-                <a:cs typeface="Times New Roman" panose="02020603050405020304" pitchFamily="18" charset="0"/>
-              </a:rPr>
-              <a:t>): </a:t>
+              <a:t>Fig 2(b): </a:t>
             </a:r>
             <a:r>
               <a:rPr lang="en-IN" u="sng" dirty="0">
                 <a:latin typeface="Times New Roman" panose="02020603050405020304" pitchFamily="18" charset="0"/>
                 <a:cs typeface="Times New Roman" panose="02020603050405020304" pitchFamily="18" charset="0"/>
               </a:rPr>
-              <a:t>CM in Fig 1(a) is considered as fully associative and it is redrawn in Fig 2(b</a:t>
-            </a:r>
-            <a:r>
-              <a:rPr lang="en-IN" u="sng" dirty="0" smtClean="0">
-                <a:latin typeface="Times New Roman" panose="02020603050405020304" pitchFamily="18" charset="0"/>
-                <a:cs typeface="Times New Roman" panose="02020603050405020304" pitchFamily="18" charset="0"/>
-              </a:rPr>
-              <a:t>)</a:t>
+              <a:t>CM in Fig 1(a) is considered as fully associative and it is redrawn in Fig 2(b)</a:t>
             </a:r>
             <a:endParaRPr lang="en-IN" dirty="0">
               <a:latin typeface="Times New Roman" panose="02020603050405020304" pitchFamily="18" charset="0"/>
@@ -7361,19 +7076,8 @@
                 <a:latin typeface="Times New Roman" panose="02020603050405020304" pitchFamily="18" charset="0"/>
                 <a:cs typeface="Times New Roman" panose="02020603050405020304" pitchFamily="18" charset="0"/>
               </a:rPr>
-              <a:t>1st CPU request is for MM block 0. So CM block frame 00 is now occupied by MM block </a:t>
-            </a:r>
-            <a:r>
-              <a:rPr lang="en-IN" dirty="0" smtClean="0">
-                <a:latin typeface="Times New Roman" panose="02020603050405020304" pitchFamily="18" charset="0"/>
-                <a:cs typeface="Times New Roman" panose="02020603050405020304" pitchFamily="18" charset="0"/>
-              </a:rPr>
-              <a:t>0. </a:t>
-            </a:r>
-            <a:endParaRPr lang="en-IN" dirty="0">
-              <a:latin typeface="Times New Roman" panose="02020603050405020304" pitchFamily="18" charset="0"/>
-              <a:cs typeface="Times New Roman" panose="02020603050405020304" pitchFamily="18" charset="0"/>
-            </a:endParaRPr>
+              <a:t>1st CPU request is for MM block 0. So CM block frame 00 is now occupied by MM block 0. </a:t>
+            </a:r>
           </a:p>
           <a:p>
             <a:pPr marL="285750" indent="-285750">
@@ -7385,21 +7089,7 @@
                 <a:latin typeface="Times New Roman" panose="02020603050405020304" pitchFamily="18" charset="0"/>
                 <a:cs typeface="Times New Roman" panose="02020603050405020304" pitchFamily="18" charset="0"/>
               </a:rPr>
-              <a:t>2nd CPU request is for MM block 4. So CM block frame 01 is now occupied by MM block </a:t>
-            </a:r>
-            <a:r>
-              <a:rPr lang="en-IN" dirty="0" smtClean="0">
-                <a:latin typeface="Times New Roman" panose="02020603050405020304" pitchFamily="18" charset="0"/>
-                <a:cs typeface="Times New Roman" panose="02020603050405020304" pitchFamily="18" charset="0"/>
-              </a:rPr>
-              <a:t>4. </a:t>
-            </a:r>
-            <a:r>
-              <a:rPr lang="en-IN" dirty="0">
-                <a:latin typeface="Times New Roman" panose="02020603050405020304" pitchFamily="18" charset="0"/>
-                <a:cs typeface="Times New Roman" panose="02020603050405020304" pitchFamily="18" charset="0"/>
-              </a:rPr>
-              <a:t>So no conflict miss occurs in 2nd CPU request like direct mapped.</a:t>
+              <a:t>2nd CPU request is for MM block 4. So CM block frame 01 is now occupied by MM block 4. So no conflict miss occurs in 2nd CPU request like direct mapped.</a:t>
             </a:r>
           </a:p>
           <a:p>
@@ -7412,19 +7102,8 @@
                 <a:latin typeface="Times New Roman" panose="02020603050405020304" pitchFamily="18" charset="0"/>
                 <a:cs typeface="Times New Roman" panose="02020603050405020304" pitchFamily="18" charset="0"/>
               </a:rPr>
-              <a:t>3rd CPU request is for MM block 5. So CM block frame 10 is now occupied by MM block </a:t>
-            </a:r>
-            <a:r>
-              <a:rPr lang="en-IN" dirty="0" smtClean="0">
-                <a:latin typeface="Times New Roman" panose="02020603050405020304" pitchFamily="18" charset="0"/>
-                <a:cs typeface="Times New Roman" panose="02020603050405020304" pitchFamily="18" charset="0"/>
-              </a:rPr>
-              <a:t>5. </a:t>
-            </a:r>
-            <a:endParaRPr lang="en-IN" dirty="0">
-              <a:latin typeface="Times New Roman" panose="02020603050405020304" pitchFamily="18" charset="0"/>
-              <a:cs typeface="Times New Roman" panose="02020603050405020304" pitchFamily="18" charset="0"/>
-            </a:endParaRPr>
+              <a:t>3rd CPU request is for MM block 5. So CM block frame 10 is now occupied by MM block 5. </a:t>
+            </a:r>
           </a:p>
           <a:p>
             <a:pPr marL="285750" indent="-285750">
@@ -7436,21 +7115,7 @@
                 <a:latin typeface="Times New Roman" panose="02020603050405020304" pitchFamily="18" charset="0"/>
                 <a:cs typeface="Times New Roman" panose="02020603050405020304" pitchFamily="18" charset="0"/>
               </a:rPr>
-              <a:t>4th CPU request is for MM block 1. CM block frame 11 is now occupied by MM block </a:t>
-            </a:r>
-            <a:r>
-              <a:rPr lang="en-IN" dirty="0" smtClean="0">
-                <a:latin typeface="Times New Roman" panose="02020603050405020304" pitchFamily="18" charset="0"/>
-                <a:cs typeface="Times New Roman" panose="02020603050405020304" pitchFamily="18" charset="0"/>
-              </a:rPr>
-              <a:t>1. </a:t>
-            </a:r>
-            <a:r>
-              <a:rPr lang="en-IN" dirty="0">
-                <a:latin typeface="Times New Roman" panose="02020603050405020304" pitchFamily="18" charset="0"/>
-                <a:cs typeface="Times New Roman" panose="02020603050405020304" pitchFamily="18" charset="0"/>
-              </a:rPr>
-              <a:t>So no conflict miss occurs in 4th CPU request like direct mapped.</a:t>
+              <a:t>4th CPU request is for MM block 1. CM block frame 11 is now occupied by MM block 1. So no conflict miss occurs in 4th CPU request like direct mapped.</a:t>
             </a:r>
           </a:p>
           <a:p>
@@ -7499,7 +7164,7 @@
     </p:spTree>
     <p:extLst>
       <p:ext uri="{BB962C8B-B14F-4D97-AF65-F5344CB8AC3E}">
-        <p14:creationId xmlns:p14="http://schemas.microsoft.com/office/powerpoint/2010/main" xmlns="" val="1803255669"/>
+        <p14:creationId xmlns:p14="http://schemas.microsoft.com/office/powerpoint/2010/main" val="1803255669"/>
       </p:ext>
     </p:extLst>
   </p:cSld>
@@ -7535,7 +7200,7 @@
           <p:nvPr>
             <p:extLst>
               <p:ext uri="{D42A27DB-BD31-4B8C-83A1-F6EECF244321}">
-                <p14:modId xmlns:p14="http://schemas.microsoft.com/office/powerpoint/2010/main" xmlns="" val="1606663090"/>
+                <p14:modId xmlns:p14="http://schemas.microsoft.com/office/powerpoint/2010/main" val="1606663090"/>
               </p:ext>
             </p:extLst>
           </p:nvPr>
@@ -7554,35 +7219,35 @@
                 <a:gridCol w="2230267">
                   <a:extLst>
                     <a:ext uri="{9D8B030D-6E8A-4147-A177-3AD203B41FA5}">
-                      <a16:colId xmlns:a16="http://schemas.microsoft.com/office/drawing/2014/main" xmlns="" val="1723478643"/>
+                      <a16:colId xmlns:a16="http://schemas.microsoft.com/office/drawing/2014/main" val="1723478643"/>
                     </a:ext>
                   </a:extLst>
                 </a:gridCol>
                 <a:gridCol w="422031">
                   <a:extLst>
                     <a:ext uri="{9D8B030D-6E8A-4147-A177-3AD203B41FA5}">
-                      <a16:colId xmlns:a16="http://schemas.microsoft.com/office/drawing/2014/main" xmlns="" val="3742137293"/>
+                      <a16:colId xmlns:a16="http://schemas.microsoft.com/office/drawing/2014/main" val="3742137293"/>
                     </a:ext>
                   </a:extLst>
                 </a:gridCol>
                 <a:gridCol w="450166">
                   <a:extLst>
                     <a:ext uri="{9D8B030D-6E8A-4147-A177-3AD203B41FA5}">
-                      <a16:colId xmlns:a16="http://schemas.microsoft.com/office/drawing/2014/main" xmlns="" val="3239309300"/>
+                      <a16:colId xmlns:a16="http://schemas.microsoft.com/office/drawing/2014/main" val="3239309300"/>
                     </a:ext>
                   </a:extLst>
                 </a:gridCol>
                 <a:gridCol w="478302">
                   <a:extLst>
                     <a:ext uri="{9D8B030D-6E8A-4147-A177-3AD203B41FA5}">
-                      <a16:colId xmlns:a16="http://schemas.microsoft.com/office/drawing/2014/main" xmlns="" val="2253918801"/>
+                      <a16:colId xmlns:a16="http://schemas.microsoft.com/office/drawing/2014/main" val="2253918801"/>
                     </a:ext>
                   </a:extLst>
                 </a:gridCol>
                 <a:gridCol w="548639">
                   <a:extLst>
                     <a:ext uri="{9D8B030D-6E8A-4147-A177-3AD203B41FA5}">
-                      <a16:colId xmlns:a16="http://schemas.microsoft.com/office/drawing/2014/main" xmlns="" val="720110714"/>
+                      <a16:colId xmlns:a16="http://schemas.microsoft.com/office/drawing/2014/main" val="720110714"/>
                     </a:ext>
                   </a:extLst>
                 </a:gridCol>
@@ -7638,15 +7303,7 @@
                           <a:latin typeface="Times New Roman" panose="02020603050405020304" pitchFamily="18" charset="0"/>
                           <a:cs typeface="Times New Roman" panose="02020603050405020304" pitchFamily="18" charset="0"/>
                         </a:rPr>
-                        <a:t>Set </a:t>
-                      </a:r>
-                      <a:r>
-                        <a:rPr lang="en-IN" sz="1800" dirty="0" smtClean="0">
-                          <a:effectLst/>
-                          <a:latin typeface="Times New Roman" panose="02020603050405020304" pitchFamily="18" charset="0"/>
-                          <a:cs typeface="Times New Roman" panose="02020603050405020304" pitchFamily="18" charset="0"/>
-                        </a:rPr>
-                        <a:t>0</a:t>
+                        <a:t>Set 0</a:t>
                       </a:r>
                       <a:endParaRPr lang="en-IN" sz="1800" dirty="0">
                         <a:effectLst/>
@@ -7687,15 +7344,7 @@
                           <a:latin typeface="Times New Roman" panose="02020603050405020304" pitchFamily="18" charset="0"/>
                           <a:cs typeface="Times New Roman" panose="02020603050405020304" pitchFamily="18" charset="0"/>
                         </a:rPr>
-                        <a:t>Set </a:t>
-                      </a:r>
-                      <a:r>
-                        <a:rPr lang="en-IN" sz="1800" dirty="0" smtClean="0">
-                          <a:effectLst/>
-                          <a:latin typeface="Times New Roman" panose="02020603050405020304" pitchFamily="18" charset="0"/>
-                          <a:cs typeface="Times New Roman" panose="02020603050405020304" pitchFamily="18" charset="0"/>
-                        </a:rPr>
-                        <a:t>1</a:t>
+                        <a:t>Set 1</a:t>
                       </a:r>
                       <a:endParaRPr lang="en-IN" sz="1800" dirty="0">
                         <a:effectLst/>
@@ -7719,7 +7368,7 @@
                 </a:tc>
                 <a:extLst>
                   <a:ext uri="{0D108BD9-81ED-4DB2-BD59-A6C34878D82A}">
-                    <a16:rowId xmlns:a16="http://schemas.microsoft.com/office/drawing/2014/main" xmlns="" val="1514820315"/>
+                    <a16:rowId xmlns:a16="http://schemas.microsoft.com/office/drawing/2014/main" val="1514820315"/>
                   </a:ext>
                 </a:extLst>
               </a:tr>
@@ -7881,7 +7530,7 @@
                 </a:tc>
                 <a:extLst>
                   <a:ext uri="{0D108BD9-81ED-4DB2-BD59-A6C34878D82A}">
-                    <a16:rowId xmlns:a16="http://schemas.microsoft.com/office/drawing/2014/main" xmlns="" val="3090004948"/>
+                    <a16:rowId xmlns:a16="http://schemas.microsoft.com/office/drawing/2014/main" val="3090004948"/>
                   </a:ext>
                 </a:extLst>
               </a:tr>
@@ -8043,7 +7692,7 @@
                 </a:tc>
                 <a:extLst>
                   <a:ext uri="{0D108BD9-81ED-4DB2-BD59-A6C34878D82A}">
-                    <a16:rowId xmlns:a16="http://schemas.microsoft.com/office/drawing/2014/main" xmlns="" val="3380003649"/>
+                    <a16:rowId xmlns:a16="http://schemas.microsoft.com/office/drawing/2014/main" val="3380003649"/>
                   </a:ext>
                 </a:extLst>
               </a:tr>
@@ -8074,7 +7723,7 @@
           <a:lstStyle/>
           <a:p>
             <a:r>
-              <a:rPr lang="en-IN" dirty="0" smtClean="0">
+              <a:rPr lang="en-IN" dirty="0">
                 <a:latin typeface="Times New Roman" panose="02020603050405020304" pitchFamily="18" charset="0"/>
                 <a:cs typeface="Times New Roman" panose="02020603050405020304" pitchFamily="18" charset="0"/>
               </a:rPr>
@@ -8085,26 +7734,15 @@
                 <a:latin typeface="Times New Roman" panose="02020603050405020304" pitchFamily="18" charset="0"/>
                 <a:cs typeface="Times New Roman" panose="02020603050405020304" pitchFamily="18" charset="0"/>
               </a:rPr>
-              <a:t>CM in Fig 2 is redrawn in Fig 2(c</a:t>
-            </a:r>
-            <a:r>
-              <a:rPr lang="en-IN" u="sng" dirty="0" smtClean="0">
+              <a:t>CM in Fig 2 is redrawn in Fig 2(c)</a:t>
+            </a:r>
+            <a:r>
+              <a:rPr lang="en-IN" dirty="0">
                 <a:latin typeface="Times New Roman" panose="02020603050405020304" pitchFamily="18" charset="0"/>
                 <a:cs typeface="Times New Roman" panose="02020603050405020304" pitchFamily="18" charset="0"/>
               </a:rPr>
-              <a:t>)</a:t>
-            </a:r>
-            <a:r>
-              <a:rPr lang="en-IN" dirty="0" smtClean="0">
-                <a:latin typeface="Times New Roman" panose="02020603050405020304" pitchFamily="18" charset="0"/>
-                <a:cs typeface="Times New Roman" panose="02020603050405020304" pitchFamily="18" charset="0"/>
-              </a:rPr>
               <a:t> </a:t>
             </a:r>
-            <a:endParaRPr lang="en-IN" dirty="0">
-              <a:latin typeface="Times New Roman" panose="02020603050405020304" pitchFamily="18" charset="0"/>
-              <a:cs typeface="Times New Roman" panose="02020603050405020304" pitchFamily="18" charset="0"/>
-            </a:endParaRPr>
           </a:p>
         </p:txBody>
       </p:sp>
@@ -8139,33 +7777,8 @@
                 <a:latin typeface="Times New Roman" panose="02020603050405020304" pitchFamily="18" charset="0"/>
                 <a:cs typeface="Times New Roman" panose="02020603050405020304" pitchFamily="18" charset="0"/>
               </a:rPr>
-              <a:t>1st CPU request is for MM block 0. Set address is computed as 0 mod 2 =0. So CM block frame 00 in Set </a:t>
-            </a:r>
-            <a:r>
-              <a:rPr lang="en-IN" dirty="0" smtClean="0">
-                <a:latin typeface="Times New Roman" panose="02020603050405020304" pitchFamily="18" charset="0"/>
-                <a:cs typeface="Times New Roman" panose="02020603050405020304" pitchFamily="18" charset="0"/>
-              </a:rPr>
-              <a:t>0 is </a:t>
-            </a:r>
-            <a:r>
-              <a:rPr lang="en-IN" dirty="0">
-                <a:latin typeface="Times New Roman" panose="02020603050405020304" pitchFamily="18" charset="0"/>
-                <a:cs typeface="Times New Roman" panose="02020603050405020304" pitchFamily="18" charset="0"/>
-              </a:rPr>
-              <a:t>now occupied by MM block </a:t>
-            </a:r>
-            <a:r>
-              <a:rPr lang="en-IN" dirty="0" smtClean="0">
-                <a:latin typeface="Times New Roman" panose="02020603050405020304" pitchFamily="18" charset="0"/>
-                <a:cs typeface="Times New Roman" panose="02020603050405020304" pitchFamily="18" charset="0"/>
-              </a:rPr>
-              <a:t>0. </a:t>
-            </a:r>
-            <a:endParaRPr lang="en-IN" dirty="0">
-              <a:latin typeface="Times New Roman" panose="02020603050405020304" pitchFamily="18" charset="0"/>
-              <a:cs typeface="Times New Roman" panose="02020603050405020304" pitchFamily="18" charset="0"/>
-            </a:endParaRPr>
+              <a:t>1st CPU request is for MM block 0. Set address is computed as 0 mod 2 =0. So CM block frame 00 in Set 0 is now occupied by MM block 0. </a:t>
+            </a:r>
           </a:p>
           <a:p>
             <a:pPr marL="285750" indent="-285750">
@@ -8177,49 +7790,7 @@
                 <a:latin typeface="Times New Roman" panose="02020603050405020304" pitchFamily="18" charset="0"/>
                 <a:cs typeface="Times New Roman" panose="02020603050405020304" pitchFamily="18" charset="0"/>
               </a:rPr>
-              <a:t>2nd CPU request is for MM block 4. Set address is computed as 4 mod 2 =0. The CM block frame 01 </a:t>
-            </a:r>
-            <a:r>
-              <a:rPr lang="en-IN" dirty="0" smtClean="0">
-                <a:latin typeface="Times New Roman" panose="02020603050405020304" pitchFamily="18" charset="0"/>
-                <a:cs typeface="Times New Roman" panose="02020603050405020304" pitchFamily="18" charset="0"/>
-              </a:rPr>
-              <a:t>in </a:t>
-            </a:r>
-            <a:r>
-              <a:rPr lang="en-IN" dirty="0">
-                <a:latin typeface="Times New Roman" panose="02020603050405020304" pitchFamily="18" charset="0"/>
-                <a:cs typeface="Times New Roman" panose="02020603050405020304" pitchFamily="18" charset="0"/>
-              </a:rPr>
-              <a:t>Set </a:t>
-            </a:r>
-            <a:r>
-              <a:rPr lang="en-IN" dirty="0" smtClean="0">
-                <a:latin typeface="Times New Roman" panose="02020603050405020304" pitchFamily="18" charset="0"/>
-                <a:cs typeface="Times New Roman" panose="02020603050405020304" pitchFamily="18" charset="0"/>
-              </a:rPr>
-              <a:t>0 is </a:t>
-            </a:r>
-            <a:r>
-              <a:rPr lang="en-IN" dirty="0">
-                <a:latin typeface="Times New Roman" panose="02020603050405020304" pitchFamily="18" charset="0"/>
-                <a:cs typeface="Times New Roman" panose="02020603050405020304" pitchFamily="18" charset="0"/>
-              </a:rPr>
-              <a:t>occupied by MM block </a:t>
-            </a:r>
-            <a:r>
-              <a:rPr lang="en-IN" dirty="0" smtClean="0">
-                <a:latin typeface="Times New Roman" panose="02020603050405020304" pitchFamily="18" charset="0"/>
-                <a:cs typeface="Times New Roman" panose="02020603050405020304" pitchFamily="18" charset="0"/>
-              </a:rPr>
-              <a:t>4. </a:t>
-            </a:r>
-            <a:r>
-              <a:rPr lang="en-IN" dirty="0">
-                <a:latin typeface="Times New Roman" panose="02020603050405020304" pitchFamily="18" charset="0"/>
-                <a:cs typeface="Times New Roman" panose="02020603050405020304" pitchFamily="18" charset="0"/>
-              </a:rPr>
-              <a:t>So no conflict miss occurs in 2nd CPU request like direct mapped.</a:t>
+              <a:t>2nd CPU request is for MM block 4. Set address is computed as 4 mod 2 =0. The CM block frame 01 in Set 0 is occupied by MM block 4. So no conflict miss occurs in 2nd CPU request like direct mapped.</a:t>
             </a:r>
           </a:p>
           <a:p>
@@ -8232,33 +7803,8 @@
                 <a:latin typeface="Times New Roman" panose="02020603050405020304" pitchFamily="18" charset="0"/>
                 <a:cs typeface="Times New Roman" panose="02020603050405020304" pitchFamily="18" charset="0"/>
               </a:rPr>
-              <a:t>3rd CPU request is for MM block 5. Set address is computed as 5 mod 2 =1. So CM block frame 10 in Set </a:t>
-            </a:r>
-            <a:r>
-              <a:rPr lang="en-IN" dirty="0" smtClean="0">
-                <a:latin typeface="Times New Roman" panose="02020603050405020304" pitchFamily="18" charset="0"/>
-                <a:cs typeface="Times New Roman" panose="02020603050405020304" pitchFamily="18" charset="0"/>
-              </a:rPr>
-              <a:t>1 is </a:t>
-            </a:r>
-            <a:r>
-              <a:rPr lang="en-IN" dirty="0">
-                <a:latin typeface="Times New Roman" panose="02020603050405020304" pitchFamily="18" charset="0"/>
-                <a:cs typeface="Times New Roman" panose="02020603050405020304" pitchFamily="18" charset="0"/>
-              </a:rPr>
-              <a:t>now occupied by MM block </a:t>
-            </a:r>
-            <a:r>
-              <a:rPr lang="en-IN" dirty="0" smtClean="0">
-                <a:latin typeface="Times New Roman" panose="02020603050405020304" pitchFamily="18" charset="0"/>
-                <a:cs typeface="Times New Roman" panose="02020603050405020304" pitchFamily="18" charset="0"/>
-              </a:rPr>
-              <a:t>5. </a:t>
-            </a:r>
-            <a:endParaRPr lang="en-IN" dirty="0">
-              <a:latin typeface="Times New Roman" panose="02020603050405020304" pitchFamily="18" charset="0"/>
-              <a:cs typeface="Times New Roman" panose="02020603050405020304" pitchFamily="18" charset="0"/>
-            </a:endParaRPr>
+              <a:t>3rd CPU request is for MM block 5. Set address is computed as 5 mod 2 =1. So CM block frame 10 in Set 1 is now occupied by MM block 5. </a:t>
+            </a:r>
           </a:p>
           <a:p>
             <a:pPr marL="285750" indent="-285750">
@@ -8270,35 +7816,7 @@
                 <a:latin typeface="Times New Roman" panose="02020603050405020304" pitchFamily="18" charset="0"/>
                 <a:cs typeface="Times New Roman" panose="02020603050405020304" pitchFamily="18" charset="0"/>
               </a:rPr>
-              <a:t>4th CPU request is for MM block 1. Set address is computed as 1 mod 2 =1. The CM block frame 11 </a:t>
-            </a:r>
-            <a:r>
-              <a:rPr lang="en-IN" dirty="0" smtClean="0">
-                <a:latin typeface="Times New Roman" panose="02020603050405020304" pitchFamily="18" charset="0"/>
-                <a:cs typeface="Times New Roman" panose="02020603050405020304" pitchFamily="18" charset="0"/>
-              </a:rPr>
-              <a:t>in </a:t>
-            </a:r>
-            <a:r>
-              <a:rPr lang="en-IN" dirty="0">
-                <a:latin typeface="Times New Roman" panose="02020603050405020304" pitchFamily="18" charset="0"/>
-                <a:cs typeface="Times New Roman" panose="02020603050405020304" pitchFamily="18" charset="0"/>
-              </a:rPr>
-              <a:t>Set </a:t>
-            </a:r>
-            <a:r>
-              <a:rPr lang="en-IN" dirty="0" smtClean="0">
-                <a:latin typeface="Times New Roman" panose="02020603050405020304" pitchFamily="18" charset="0"/>
-                <a:cs typeface="Times New Roman" panose="02020603050405020304" pitchFamily="18" charset="0"/>
-              </a:rPr>
-              <a:t>1 is </a:t>
-            </a:r>
-            <a:r>
-              <a:rPr lang="en-IN" dirty="0">
-                <a:latin typeface="Times New Roman" panose="02020603050405020304" pitchFamily="18" charset="0"/>
-                <a:cs typeface="Times New Roman" panose="02020603050405020304" pitchFamily="18" charset="0"/>
-              </a:rPr>
-              <a:t>now occupied by MM block 1. So no conflict miss occurs in 4th CPU request like direct mapped.</a:t>
+              <a:t>4th CPU request is for MM block 1. Set address is computed as 1 mod 2 =1. The CM block frame 11 in Set 1 is now occupied by MM block 1. So no conflict miss occurs in 4th CPU request like direct mapped.</a:t>
             </a:r>
           </a:p>
           <a:p>
@@ -8311,21 +7829,7 @@
                 <a:latin typeface="Times New Roman" panose="02020603050405020304" pitchFamily="18" charset="0"/>
                 <a:cs typeface="Times New Roman" panose="02020603050405020304" pitchFamily="18" charset="0"/>
               </a:rPr>
-              <a:t>5th CPU request is for MM block 3. Set address is computed as 3 mod 2=1. But both the block frames (10 and 11 in Fig 2(c)) in Set </a:t>
-            </a:r>
-            <a:r>
-              <a:rPr lang="en-IN" dirty="0" smtClean="0">
-                <a:latin typeface="Times New Roman" panose="02020603050405020304" pitchFamily="18" charset="0"/>
-                <a:cs typeface="Times New Roman" panose="02020603050405020304" pitchFamily="18" charset="0"/>
-              </a:rPr>
-              <a:t>1 </a:t>
-            </a:r>
-            <a:r>
-              <a:rPr lang="en-IN" dirty="0">
-                <a:latin typeface="Times New Roman" panose="02020603050405020304" pitchFamily="18" charset="0"/>
-                <a:cs typeface="Times New Roman" panose="02020603050405020304" pitchFamily="18" charset="0"/>
-              </a:rPr>
-              <a:t>are occupied as shown in Fig 2(c). In such a situation </a:t>
+              <a:t>5th CPU request is for MM block 3. Set address is computed as 3 mod 2=1. But both the block frames (10 and 11 in Fig 2(c)) in Set 1 are occupied as shown in Fig 2(c). In such a situation </a:t>
             </a:r>
             <a:r>
               <a:rPr lang="en-IN" b="1" dirty="0">
@@ -8346,56 +7850,14 @@
                 <a:latin typeface="Times New Roman" panose="02020603050405020304" pitchFamily="18" charset="0"/>
                 <a:cs typeface="Times New Roman" panose="02020603050405020304" pitchFamily="18" charset="0"/>
               </a:rPr>
-              <a:t>between MM block 5, MM block 1 and MM block 3 </a:t>
-            </a:r>
-            <a:r>
-              <a:rPr lang="en-IN" b="1" dirty="0" smtClean="0">
+              <a:t>between MM block 5, MM block 1 and MM block 3 as all these 3 MM blocks are mapped into the same set. </a:t>
+            </a:r>
+            <a:r>
+              <a:rPr lang="en-IN" dirty="0">
                 <a:latin typeface="Times New Roman" panose="02020603050405020304" pitchFamily="18" charset="0"/>
                 <a:cs typeface="Times New Roman" panose="02020603050405020304" pitchFamily="18" charset="0"/>
               </a:rPr>
-              <a:t>as </a:t>
-            </a:r>
-            <a:r>
-              <a:rPr lang="en-IN" b="1" dirty="0">
-                <a:latin typeface="Times New Roman" panose="02020603050405020304" pitchFamily="18" charset="0"/>
-                <a:cs typeface="Times New Roman" panose="02020603050405020304" pitchFamily="18" charset="0"/>
-              </a:rPr>
-              <a:t>all these 3 MM blocks are mapped into the same </a:t>
-            </a:r>
-            <a:r>
-              <a:rPr lang="en-IN" b="1" dirty="0" smtClean="0">
-                <a:latin typeface="Times New Roman" panose="02020603050405020304" pitchFamily="18" charset="0"/>
-                <a:cs typeface="Times New Roman" panose="02020603050405020304" pitchFamily="18" charset="0"/>
-              </a:rPr>
-              <a:t>set. </a:t>
-            </a:r>
-            <a:r>
-              <a:rPr lang="en-IN" dirty="0" smtClean="0">
-                <a:latin typeface="Times New Roman" panose="02020603050405020304" pitchFamily="18" charset="0"/>
-                <a:cs typeface="Times New Roman" panose="02020603050405020304" pitchFamily="18" charset="0"/>
-              </a:rPr>
-              <a:t>So </a:t>
-            </a:r>
-            <a:r>
-              <a:rPr lang="en-IN" dirty="0">
-                <a:latin typeface="Times New Roman" panose="02020603050405020304" pitchFamily="18" charset="0"/>
-                <a:cs typeface="Times New Roman" panose="02020603050405020304" pitchFamily="18" charset="0"/>
-              </a:rPr>
-              <a:t>it is required to select a victim block in Set </a:t>
-            </a:r>
-            <a:r>
-              <a:rPr lang="en-IN" dirty="0" smtClean="0">
-                <a:latin typeface="Times New Roman" panose="02020603050405020304" pitchFamily="18" charset="0"/>
-                <a:cs typeface="Times New Roman" panose="02020603050405020304" pitchFamily="18" charset="0"/>
-              </a:rPr>
-              <a:t>1 </a:t>
-            </a:r>
-            <a:r>
-              <a:rPr lang="en-IN" dirty="0">
-                <a:latin typeface="Times New Roman" panose="02020603050405020304" pitchFamily="18" charset="0"/>
-                <a:cs typeface="Times New Roman" panose="02020603050405020304" pitchFamily="18" charset="0"/>
-              </a:rPr>
-              <a:t>of CM among the MM blocks 5 and 1, and replace this victim block by MM block 3. </a:t>
+              <a:t>So it is required to select a victim block in Set 1 of CM among the MM blocks 5 and 1, and replace this victim block by MM block 3. </a:t>
             </a:r>
           </a:p>
         </p:txBody>
@@ -8403,7 +7865,7 @@
     </p:spTree>
     <p:extLst>
       <p:ext uri="{BB962C8B-B14F-4D97-AF65-F5344CB8AC3E}">
-        <p14:creationId xmlns:p14="http://schemas.microsoft.com/office/powerpoint/2010/main" xmlns="" val="1909515611"/>
+        <p14:creationId xmlns:p14="http://schemas.microsoft.com/office/powerpoint/2010/main" val="1909515611"/>
       </p:ext>
     </p:extLst>
   </p:cSld>
@@ -8538,7 +8000,7 @@
           <p:nvPr>
             <p:extLst>
               <p:ext uri="{D42A27DB-BD31-4B8C-83A1-F6EECF244321}">
-                <p14:modId xmlns:p14="http://schemas.microsoft.com/office/powerpoint/2010/main" xmlns="" val="2503516009"/>
+                <p14:modId xmlns:p14="http://schemas.microsoft.com/office/powerpoint/2010/main" val="2503516009"/>
               </p:ext>
             </p:extLst>
           </p:nvPr>
@@ -8557,21 +8019,21 @@
                 <a:gridCol w="559265">
                   <a:extLst>
                     <a:ext uri="{9D8B030D-6E8A-4147-A177-3AD203B41FA5}">
-                      <a16:colId xmlns:a16="http://schemas.microsoft.com/office/drawing/2014/main" xmlns="" val="2685512471"/>
+                      <a16:colId xmlns:a16="http://schemas.microsoft.com/office/drawing/2014/main" val="2685512471"/>
                     </a:ext>
                   </a:extLst>
                 </a:gridCol>
                 <a:gridCol w="787790">
                   <a:extLst>
                     <a:ext uri="{9D8B030D-6E8A-4147-A177-3AD203B41FA5}">
-                      <a16:colId xmlns:a16="http://schemas.microsoft.com/office/drawing/2014/main" xmlns="" val="2995929708"/>
+                      <a16:colId xmlns:a16="http://schemas.microsoft.com/office/drawing/2014/main" val="2995929708"/>
                     </a:ext>
                   </a:extLst>
                 </a:gridCol>
                 <a:gridCol w="1674055">
                   <a:extLst>
                     <a:ext uri="{9D8B030D-6E8A-4147-A177-3AD203B41FA5}">
-                      <a16:colId xmlns:a16="http://schemas.microsoft.com/office/drawing/2014/main" xmlns="" val="2325764698"/>
+                      <a16:colId xmlns:a16="http://schemas.microsoft.com/office/drawing/2014/main" val="2325764698"/>
                     </a:ext>
                   </a:extLst>
                 </a:gridCol>
@@ -8672,7 +8134,7 @@
                 </a:tc>
                 <a:extLst>
                   <a:ext uri="{0D108BD9-81ED-4DB2-BD59-A6C34878D82A}">
-                    <a16:rowId xmlns:a16="http://schemas.microsoft.com/office/drawing/2014/main" xmlns="" val="3651375409"/>
+                    <a16:rowId xmlns:a16="http://schemas.microsoft.com/office/drawing/2014/main" val="3651375409"/>
                   </a:ext>
                 </a:extLst>
               </a:tr>
@@ -8689,7 +8151,7 @@
           <p:nvPr>
             <p:extLst>
               <p:ext uri="{D42A27DB-BD31-4B8C-83A1-F6EECF244321}">
-                <p14:modId xmlns:p14="http://schemas.microsoft.com/office/powerpoint/2010/main" xmlns="" val="2469289445"/>
+                <p14:modId xmlns:p14="http://schemas.microsoft.com/office/powerpoint/2010/main" val="2469289445"/>
               </p:ext>
             </p:extLst>
           </p:nvPr>
@@ -8708,7 +8170,7 @@
                 <a:gridCol w="1744394">
                   <a:extLst>
                     <a:ext uri="{9D8B030D-6E8A-4147-A177-3AD203B41FA5}">
-                      <a16:colId xmlns:a16="http://schemas.microsoft.com/office/drawing/2014/main" xmlns="" val="1424668033"/>
+                      <a16:colId xmlns:a16="http://schemas.microsoft.com/office/drawing/2014/main" val="1424668033"/>
                     </a:ext>
                   </a:extLst>
                 </a:gridCol>
@@ -8747,7 +8209,7 @@
                 </a:tc>
                 <a:extLst>
                   <a:ext uri="{0D108BD9-81ED-4DB2-BD59-A6C34878D82A}">
-                    <a16:rowId xmlns:a16="http://schemas.microsoft.com/office/drawing/2014/main" xmlns="" val="3804261517"/>
+                    <a16:rowId xmlns:a16="http://schemas.microsoft.com/office/drawing/2014/main" val="3804261517"/>
                   </a:ext>
                 </a:extLst>
               </a:tr>
@@ -8764,7 +8226,7 @@
           <p:nvPr>
             <p:extLst>
               <p:ext uri="{D42A27DB-BD31-4B8C-83A1-F6EECF244321}">
-                <p14:modId xmlns:p14="http://schemas.microsoft.com/office/powerpoint/2010/main" xmlns="" val="3902093163"/>
+                <p14:modId xmlns:p14="http://schemas.microsoft.com/office/powerpoint/2010/main" val="3902093163"/>
               </p:ext>
             </p:extLst>
           </p:nvPr>
@@ -8783,7 +8245,7 @@
                 <a:gridCol w="2560320">
                   <a:extLst>
                     <a:ext uri="{9D8B030D-6E8A-4147-A177-3AD203B41FA5}">
-                      <a16:colId xmlns:a16="http://schemas.microsoft.com/office/drawing/2014/main" xmlns="" val="60904111"/>
+                      <a16:colId xmlns:a16="http://schemas.microsoft.com/office/drawing/2014/main" val="60904111"/>
                     </a:ext>
                   </a:extLst>
                 </a:gridCol>
@@ -8820,7 +8282,7 @@
                 </a:tc>
                 <a:extLst>
                   <a:ext uri="{0D108BD9-81ED-4DB2-BD59-A6C34878D82A}">
-                    <a16:rowId xmlns:a16="http://schemas.microsoft.com/office/drawing/2014/main" xmlns="" val="2911721302"/>
+                    <a16:rowId xmlns:a16="http://schemas.microsoft.com/office/drawing/2014/main" val="2911721302"/>
                   </a:ext>
                 </a:extLst>
               </a:tr>
@@ -8837,7 +8299,7 @@
           <p:nvPr>
             <p:extLst>
               <p:ext uri="{D42A27DB-BD31-4B8C-83A1-F6EECF244321}">
-                <p14:modId xmlns:p14="http://schemas.microsoft.com/office/powerpoint/2010/main" xmlns="" val="3269381818"/>
+                <p14:modId xmlns:p14="http://schemas.microsoft.com/office/powerpoint/2010/main" val="3269381818"/>
               </p:ext>
             </p:extLst>
           </p:nvPr>
@@ -8856,14 +8318,14 @@
                 <a:gridCol w="590992">
                   <a:extLst>
                     <a:ext uri="{9D8B030D-6E8A-4147-A177-3AD203B41FA5}">
-                      <a16:colId xmlns:a16="http://schemas.microsoft.com/office/drawing/2014/main" xmlns="" val="2043730043"/>
+                      <a16:colId xmlns:a16="http://schemas.microsoft.com/office/drawing/2014/main" val="2043730043"/>
                     </a:ext>
                   </a:extLst>
                 </a:gridCol>
                 <a:gridCol w="1353061">
                   <a:extLst>
                     <a:ext uri="{9D8B030D-6E8A-4147-A177-3AD203B41FA5}">
-                      <a16:colId xmlns:a16="http://schemas.microsoft.com/office/drawing/2014/main" xmlns="" val="3661569085"/>
+                      <a16:colId xmlns:a16="http://schemas.microsoft.com/office/drawing/2014/main" val="3661569085"/>
                     </a:ext>
                   </a:extLst>
                 </a:gridCol>
@@ -8933,7 +8395,7 @@
                 </a:tc>
                 <a:extLst>
                   <a:ext uri="{0D108BD9-81ED-4DB2-BD59-A6C34878D82A}">
-                    <a16:rowId xmlns:a16="http://schemas.microsoft.com/office/drawing/2014/main" xmlns="" val="2231937405"/>
+                    <a16:rowId xmlns:a16="http://schemas.microsoft.com/office/drawing/2014/main" val="2231937405"/>
                   </a:ext>
                 </a:extLst>
               </a:tr>
@@ -9098,16 +8560,12 @@
           <a:lstStyle/>
           <a:p>
             <a:r>
-              <a:rPr lang="en-IN" dirty="0" smtClean="0">
+              <a:rPr lang="en-IN" dirty="0">
                 <a:latin typeface="Times New Roman" panose="02020603050405020304" pitchFamily="18" charset="0"/>
                 <a:cs typeface="Times New Roman" panose="02020603050405020304" pitchFamily="18" charset="0"/>
               </a:rPr>
               <a:t>Fig 3</a:t>
             </a:r>
-            <a:endParaRPr lang="en-IN" dirty="0">
-              <a:latin typeface="Times New Roman" panose="02020603050405020304" pitchFamily="18" charset="0"/>
-              <a:cs typeface="Times New Roman" panose="02020603050405020304" pitchFamily="18" charset="0"/>
-            </a:endParaRPr>
           </a:p>
         </p:txBody>
       </p:sp>
@@ -9138,14 +8596,7 @@
                 <a:latin typeface="Times New Roman" panose="02020603050405020304" pitchFamily="18" charset="0"/>
                 <a:cs typeface="Times New Roman" panose="02020603050405020304" pitchFamily="18" charset="0"/>
               </a:rPr>
-              <a:t>Tag field is used to find hit or miss  and block offset field is used to access the desired byte of CPU from a MM block</a:t>
-            </a:r>
-            <a:r>
-              <a:rPr lang="en-IN" dirty="0" smtClean="0">
-                <a:latin typeface="Times New Roman" panose="02020603050405020304" pitchFamily="18" charset="0"/>
-                <a:cs typeface="Times New Roman" panose="02020603050405020304" pitchFamily="18" charset="0"/>
-              </a:rPr>
-              <a:t>.</a:t>
+              <a:t>Tag field is used to find hit or miss  and block offset field is used to access the desired byte of CPU from a MM block.</a:t>
             </a:r>
           </a:p>
           <a:p>
@@ -9161,21 +8612,7 @@
                 <a:latin typeface="Times New Roman" panose="02020603050405020304" pitchFamily="18" charset="0"/>
                 <a:cs typeface="Times New Roman" panose="02020603050405020304" pitchFamily="18" charset="0"/>
               </a:rPr>
-              <a:t>The block offset field value remains same (i.e. 1001010110) </a:t>
-            </a:r>
-            <a:r>
-              <a:rPr lang="en-IN" dirty="0" smtClean="0">
-                <a:latin typeface="Times New Roman" panose="02020603050405020304" pitchFamily="18" charset="0"/>
-                <a:cs typeface="Times New Roman" panose="02020603050405020304" pitchFamily="18" charset="0"/>
-              </a:rPr>
-              <a:t>for fully associative CM, direct </a:t>
-            </a:r>
-            <a:r>
-              <a:rPr lang="en-IN" dirty="0">
-                <a:latin typeface="Times New Roman" panose="02020603050405020304" pitchFamily="18" charset="0"/>
-                <a:cs typeface="Times New Roman" panose="02020603050405020304" pitchFamily="18" charset="0"/>
-              </a:rPr>
-              <a:t>mapped CM and set associative CM. </a:t>
+              <a:t>The block offset field value remains same (i.e. 1001010110) for fully associative CM, direct mapped CM and set associative CM. </a:t>
             </a:r>
           </a:p>
           <a:p>
@@ -9186,7 +8623,7 @@
     </p:spTree>
     <p:extLst>
       <p:ext uri="{BB962C8B-B14F-4D97-AF65-F5344CB8AC3E}">
-        <p14:creationId xmlns:p14="http://schemas.microsoft.com/office/powerpoint/2010/main" xmlns="" val="4041823870"/>
+        <p14:creationId xmlns:p14="http://schemas.microsoft.com/office/powerpoint/2010/main" val="4041823870"/>
       </p:ext>
     </p:extLst>
   </p:cSld>
@@ -9244,20 +8681,13 @@
                 <a:latin typeface="Times New Roman" panose="02020603050405020304" pitchFamily="18" charset="0"/>
                 <a:cs typeface="Times New Roman" panose="02020603050405020304" pitchFamily="18" charset="0"/>
               </a:rPr>
-              <a:t>I</a:t>
-            </a:r>
-            <a:r>
-              <a:rPr lang="en-IN" dirty="0" smtClean="0">
-                <a:latin typeface="Times New Roman" panose="02020603050405020304" pitchFamily="18" charset="0"/>
-                <a:cs typeface="Times New Roman" panose="02020603050405020304" pitchFamily="18" charset="0"/>
-              </a:rPr>
-              <a:t>ndex field selects the block frame in CM for direct mapped cache and the set in CM for set associative cache. </a:t>
+              <a:t>Index field selects the block frame in CM for direct mapped cache and the set in CM for set associative cache. </a:t>
             </a:r>
           </a:p>
           <a:p>
             <a:pPr lvl="0"/>
             <a:r>
-              <a:rPr lang="en-IN" dirty="0" smtClean="0">
+              <a:rPr lang="en-IN" dirty="0">
                 <a:latin typeface="Times New Roman" panose="02020603050405020304" pitchFamily="18" charset="0"/>
                 <a:cs typeface="Times New Roman" panose="02020603050405020304" pitchFamily="18" charset="0"/>
               </a:rPr>
@@ -9270,7 +8700,7 @@
               <a:buChar char="•"/>
             </a:pPr>
             <a:r>
-              <a:rPr lang="en-IN" dirty="0" smtClean="0">
+              <a:rPr lang="en-IN" dirty="0">
                 <a:latin typeface="Times New Roman" panose="02020603050405020304" pitchFamily="18" charset="0"/>
                 <a:cs typeface="Times New Roman" panose="02020603050405020304" pitchFamily="18" charset="0"/>
               </a:rPr>
@@ -9283,7 +8713,7 @@
               <a:buChar char="•"/>
             </a:pPr>
             <a:r>
-              <a:rPr lang="en-IN" dirty="0" smtClean="0">
+              <a:rPr lang="en-IN" dirty="0">
                 <a:latin typeface="Times New Roman" panose="02020603050405020304" pitchFamily="18" charset="0"/>
                 <a:cs typeface="Times New Roman" panose="02020603050405020304" pitchFamily="18" charset="0"/>
               </a:rPr>
@@ -9296,7 +8726,7 @@
               <a:buChar char="•"/>
             </a:pPr>
             <a:r>
-              <a:rPr lang="en-IN" dirty="0" smtClean="0">
+              <a:rPr lang="en-IN" dirty="0">
                 <a:latin typeface="Times New Roman" panose="02020603050405020304" pitchFamily="18" charset="0"/>
                 <a:cs typeface="Times New Roman" panose="02020603050405020304" pitchFamily="18" charset="0"/>
               </a:rPr>
@@ -9312,7 +8742,7 @@
           </a:p>
           <a:p>
             <a:r>
-              <a:rPr lang="en-IN" u="sng" dirty="0" smtClean="0">
+              <a:rPr lang="en-IN" u="sng" dirty="0">
                 <a:latin typeface="Times New Roman" panose="02020603050405020304" pitchFamily="18" charset="0"/>
                 <a:cs typeface="Times New Roman" panose="02020603050405020304" pitchFamily="18" charset="0"/>
               </a:rPr>
@@ -9432,7 +8862,7 @@
           </a:p>
           <a:p>
             <a:pPr lvl="0"/>
-            <a:endParaRPr lang="en-IN" dirty="0" smtClean="0">
+            <a:endParaRPr lang="en-IN" dirty="0">
               <a:latin typeface="Times New Roman" panose="02020603050405020304" pitchFamily="18" charset="0"/>
               <a:cs typeface="Times New Roman" panose="02020603050405020304" pitchFamily="18" charset="0"/>
             </a:endParaRPr>
@@ -9448,7 +8878,7 @@
     </p:spTree>
     <p:extLst>
       <p:ext uri="{BB962C8B-B14F-4D97-AF65-F5344CB8AC3E}">
-        <p14:creationId xmlns:p14="http://schemas.microsoft.com/office/powerpoint/2010/main" xmlns="" val="2329245457"/>
+        <p14:creationId xmlns:p14="http://schemas.microsoft.com/office/powerpoint/2010/main" val="2329245457"/>
       </p:ext>
     </p:extLst>
   </p:cSld>
@@ -9484,7 +8914,7 @@
           <p:nvPr>
             <p:extLst>
               <p:ext uri="{D42A27DB-BD31-4B8C-83A1-F6EECF244321}">
-                <p14:modId xmlns:p14="http://schemas.microsoft.com/office/powerpoint/2010/main" xmlns="" val="3988900213"/>
+                <p14:modId xmlns:p14="http://schemas.microsoft.com/office/powerpoint/2010/main" val="3988900213"/>
               </p:ext>
             </p:extLst>
           </p:nvPr>
@@ -9503,63 +8933,63 @@
                 <a:gridCol w="2302486">
                   <a:extLst>
                     <a:ext uri="{9D8B030D-6E8A-4147-A177-3AD203B41FA5}">
-                      <a16:colId xmlns:a16="http://schemas.microsoft.com/office/drawing/2014/main" xmlns="" val="4057842945"/>
+                      <a16:colId xmlns:a16="http://schemas.microsoft.com/office/drawing/2014/main" val="4057842945"/>
                     </a:ext>
                   </a:extLst>
                 </a:gridCol>
                 <a:gridCol w="604911">
                   <a:extLst>
                     <a:ext uri="{9D8B030D-6E8A-4147-A177-3AD203B41FA5}">
-                      <a16:colId xmlns:a16="http://schemas.microsoft.com/office/drawing/2014/main" xmlns="" val="4199556451"/>
+                      <a16:colId xmlns:a16="http://schemas.microsoft.com/office/drawing/2014/main" val="4199556451"/>
                     </a:ext>
                   </a:extLst>
                 </a:gridCol>
                 <a:gridCol w="590843">
                   <a:extLst>
                     <a:ext uri="{9D8B030D-6E8A-4147-A177-3AD203B41FA5}">
-                      <a16:colId xmlns:a16="http://schemas.microsoft.com/office/drawing/2014/main" xmlns="" val="1900014889"/>
+                      <a16:colId xmlns:a16="http://schemas.microsoft.com/office/drawing/2014/main" val="1900014889"/>
                     </a:ext>
                   </a:extLst>
                 </a:gridCol>
                 <a:gridCol w="534572">
                   <a:extLst>
                     <a:ext uri="{9D8B030D-6E8A-4147-A177-3AD203B41FA5}">
-                      <a16:colId xmlns:a16="http://schemas.microsoft.com/office/drawing/2014/main" xmlns="" val="2561740121"/>
+                      <a16:colId xmlns:a16="http://schemas.microsoft.com/office/drawing/2014/main" val="2561740121"/>
                     </a:ext>
                   </a:extLst>
                 </a:gridCol>
                 <a:gridCol w="647114">
                   <a:extLst>
                     <a:ext uri="{9D8B030D-6E8A-4147-A177-3AD203B41FA5}">
-                      <a16:colId xmlns:a16="http://schemas.microsoft.com/office/drawing/2014/main" xmlns="" val="4273008466"/>
+                      <a16:colId xmlns:a16="http://schemas.microsoft.com/office/drawing/2014/main" val="4273008466"/>
                     </a:ext>
                   </a:extLst>
                 </a:gridCol>
                 <a:gridCol w="618979">
                   <a:extLst>
                     <a:ext uri="{9D8B030D-6E8A-4147-A177-3AD203B41FA5}">
-                      <a16:colId xmlns:a16="http://schemas.microsoft.com/office/drawing/2014/main" xmlns="" val="1527602897"/>
+                      <a16:colId xmlns:a16="http://schemas.microsoft.com/office/drawing/2014/main" val="1527602897"/>
                     </a:ext>
                   </a:extLst>
                 </a:gridCol>
                 <a:gridCol w="703384">
                   <a:extLst>
                     <a:ext uri="{9D8B030D-6E8A-4147-A177-3AD203B41FA5}">
-                      <a16:colId xmlns:a16="http://schemas.microsoft.com/office/drawing/2014/main" xmlns="" val="3394966677"/>
+                      <a16:colId xmlns:a16="http://schemas.microsoft.com/office/drawing/2014/main" val="3394966677"/>
                     </a:ext>
                   </a:extLst>
                 </a:gridCol>
                 <a:gridCol w="731520">
                   <a:extLst>
                     <a:ext uri="{9D8B030D-6E8A-4147-A177-3AD203B41FA5}">
-                      <a16:colId xmlns:a16="http://schemas.microsoft.com/office/drawing/2014/main" xmlns="" val="4282956810"/>
+                      <a16:colId xmlns:a16="http://schemas.microsoft.com/office/drawing/2014/main" val="4282956810"/>
                     </a:ext>
                   </a:extLst>
                 </a:gridCol>
                 <a:gridCol w="815925">
                   <a:extLst>
                     <a:ext uri="{9D8B030D-6E8A-4147-A177-3AD203B41FA5}">
-                      <a16:colId xmlns:a16="http://schemas.microsoft.com/office/drawing/2014/main" xmlns="" val="2034046688"/>
+                      <a16:colId xmlns:a16="http://schemas.microsoft.com/office/drawing/2014/main" val="2034046688"/>
                     </a:ext>
                   </a:extLst>
                 </a:gridCol>
@@ -9846,7 +9276,7 @@
                 </a:tc>
                 <a:extLst>
                   <a:ext uri="{0D108BD9-81ED-4DB2-BD59-A6C34878D82A}">
-                    <a16:rowId xmlns:a16="http://schemas.microsoft.com/office/drawing/2014/main" xmlns="" val="3386170467"/>
+                    <a16:rowId xmlns:a16="http://schemas.microsoft.com/office/drawing/2014/main" val="3386170467"/>
                   </a:ext>
                 </a:extLst>
               </a:tr>
@@ -10132,7 +9562,7 @@
                 </a:tc>
                 <a:extLst>
                   <a:ext uri="{0D108BD9-81ED-4DB2-BD59-A6C34878D82A}">
-                    <a16:rowId xmlns:a16="http://schemas.microsoft.com/office/drawing/2014/main" xmlns="" val="1771359451"/>
+                    <a16:rowId xmlns:a16="http://schemas.microsoft.com/office/drawing/2014/main" val="1771359451"/>
                   </a:ext>
                 </a:extLst>
               </a:tr>
@@ -10149,7 +9579,7 @@
           <p:nvPr>
             <p:extLst>
               <p:ext uri="{D42A27DB-BD31-4B8C-83A1-F6EECF244321}">
-                <p14:modId xmlns:p14="http://schemas.microsoft.com/office/powerpoint/2010/main" xmlns="" val="3961294687"/>
+                <p14:modId xmlns:p14="http://schemas.microsoft.com/office/powerpoint/2010/main" val="3961294687"/>
               </p:ext>
             </p:extLst>
           </p:nvPr>
@@ -10168,63 +9598,63 @@
                 <a:gridCol w="2204012">
                   <a:extLst>
                     <a:ext uri="{9D8B030D-6E8A-4147-A177-3AD203B41FA5}">
-                      <a16:colId xmlns:a16="http://schemas.microsoft.com/office/drawing/2014/main" xmlns="" val="4057842945"/>
+                      <a16:colId xmlns:a16="http://schemas.microsoft.com/office/drawing/2014/main" val="4057842945"/>
                     </a:ext>
                   </a:extLst>
                 </a:gridCol>
                 <a:gridCol w="886265">
                   <a:extLst>
                     <a:ext uri="{9D8B030D-6E8A-4147-A177-3AD203B41FA5}">
-                      <a16:colId xmlns:a16="http://schemas.microsoft.com/office/drawing/2014/main" xmlns="" val="4199556451"/>
+                      <a16:colId xmlns:a16="http://schemas.microsoft.com/office/drawing/2014/main" val="4199556451"/>
                     </a:ext>
                   </a:extLst>
                 </a:gridCol>
                 <a:gridCol w="872197">
                   <a:extLst>
                     <a:ext uri="{9D8B030D-6E8A-4147-A177-3AD203B41FA5}">
-                      <a16:colId xmlns:a16="http://schemas.microsoft.com/office/drawing/2014/main" xmlns="" val="1900014889"/>
+                      <a16:colId xmlns:a16="http://schemas.microsoft.com/office/drawing/2014/main" val="1900014889"/>
                     </a:ext>
                   </a:extLst>
                 </a:gridCol>
                 <a:gridCol w="633046">
                   <a:extLst>
                     <a:ext uri="{9D8B030D-6E8A-4147-A177-3AD203B41FA5}">
-                      <a16:colId xmlns:a16="http://schemas.microsoft.com/office/drawing/2014/main" xmlns="" val="2561740121"/>
+                      <a16:colId xmlns:a16="http://schemas.microsoft.com/office/drawing/2014/main" val="2561740121"/>
                     </a:ext>
                   </a:extLst>
                 </a:gridCol>
                 <a:gridCol w="478302">
                   <a:extLst>
                     <a:ext uri="{9D8B030D-6E8A-4147-A177-3AD203B41FA5}">
-                      <a16:colId xmlns:a16="http://schemas.microsoft.com/office/drawing/2014/main" xmlns="" val="4273008466"/>
+                      <a16:colId xmlns:a16="http://schemas.microsoft.com/office/drawing/2014/main" val="4273008466"/>
                     </a:ext>
                   </a:extLst>
                 </a:gridCol>
                 <a:gridCol w="745587">
                   <a:extLst>
                     <a:ext uri="{9D8B030D-6E8A-4147-A177-3AD203B41FA5}">
-                      <a16:colId xmlns:a16="http://schemas.microsoft.com/office/drawing/2014/main" xmlns="" val="1527602897"/>
+                      <a16:colId xmlns:a16="http://schemas.microsoft.com/office/drawing/2014/main" val="1527602897"/>
                     </a:ext>
                   </a:extLst>
                 </a:gridCol>
                 <a:gridCol w="703385">
                   <a:extLst>
                     <a:ext uri="{9D8B030D-6E8A-4147-A177-3AD203B41FA5}">
-                      <a16:colId xmlns:a16="http://schemas.microsoft.com/office/drawing/2014/main" xmlns="" val="3394966677"/>
+                      <a16:colId xmlns:a16="http://schemas.microsoft.com/office/drawing/2014/main" val="3394966677"/>
                     </a:ext>
                   </a:extLst>
                 </a:gridCol>
                 <a:gridCol w="478301">
                   <a:extLst>
                     <a:ext uri="{9D8B030D-6E8A-4147-A177-3AD203B41FA5}">
-                      <a16:colId xmlns:a16="http://schemas.microsoft.com/office/drawing/2014/main" xmlns="" val="4282956810"/>
+                      <a16:colId xmlns:a16="http://schemas.microsoft.com/office/drawing/2014/main" val="4282956810"/>
                     </a:ext>
                   </a:extLst>
                 </a:gridCol>
                 <a:gridCol w="548639">
                   <a:extLst>
                     <a:ext uri="{9D8B030D-6E8A-4147-A177-3AD203B41FA5}">
-                      <a16:colId xmlns:a16="http://schemas.microsoft.com/office/drawing/2014/main" xmlns="" val="2034046688"/>
+                      <a16:colId xmlns:a16="http://schemas.microsoft.com/office/drawing/2014/main" val="2034046688"/>
                     </a:ext>
                   </a:extLst>
                 </a:gridCol>
@@ -10511,7 +9941,7 @@
                 </a:tc>
                 <a:extLst>
                   <a:ext uri="{0D108BD9-81ED-4DB2-BD59-A6C34878D82A}">
-                    <a16:rowId xmlns:a16="http://schemas.microsoft.com/office/drawing/2014/main" xmlns="" val="3386170467"/>
+                    <a16:rowId xmlns:a16="http://schemas.microsoft.com/office/drawing/2014/main" val="3386170467"/>
                   </a:ext>
                 </a:extLst>
               </a:tr>
@@ -10889,7 +10319,7 @@
                 </a:tc>
                 <a:extLst>
                   <a:ext uri="{0D108BD9-81ED-4DB2-BD59-A6C34878D82A}">
-                    <a16:rowId xmlns:a16="http://schemas.microsoft.com/office/drawing/2014/main" xmlns="" val="1771359451"/>
+                    <a16:rowId xmlns:a16="http://schemas.microsoft.com/office/drawing/2014/main" val="1771359451"/>
                   </a:ext>
                 </a:extLst>
               </a:tr>
@@ -10928,19 +10358,8 @@
                 <a:latin typeface="Times New Roman" panose="02020603050405020304" pitchFamily="18" charset="0"/>
                 <a:cs typeface="Times New Roman" panose="02020603050405020304" pitchFamily="18" charset="0"/>
               </a:rPr>
-              <a:t>1st CPU request is for MM block 4. So compulsory miss occurs and CM block frame 000 is now occupied by MM block </a:t>
-            </a:r>
-            <a:r>
-              <a:rPr lang="en-IN" dirty="0" smtClean="0">
-                <a:latin typeface="Times New Roman" panose="02020603050405020304" pitchFamily="18" charset="0"/>
-                <a:cs typeface="Times New Roman" panose="02020603050405020304" pitchFamily="18" charset="0"/>
-              </a:rPr>
-              <a:t>4. </a:t>
-            </a:r>
-            <a:endParaRPr lang="en-IN" dirty="0">
-              <a:latin typeface="Times New Roman" panose="02020603050405020304" pitchFamily="18" charset="0"/>
-              <a:cs typeface="Times New Roman" panose="02020603050405020304" pitchFamily="18" charset="0"/>
-            </a:endParaRPr>
+              <a:t>1st CPU request is for MM block 4. So compulsory miss occurs and CM block frame 000 is now occupied by MM block 4. </a:t>
+            </a:r>
           </a:p>
           <a:p>
             <a:pPr marL="285750" indent="-285750">
@@ -10952,19 +10371,8 @@
                 <a:latin typeface="Times New Roman" panose="02020603050405020304" pitchFamily="18" charset="0"/>
                 <a:cs typeface="Times New Roman" panose="02020603050405020304" pitchFamily="18" charset="0"/>
               </a:rPr>
-              <a:t>2nd CPU request is for MM block 3. So again the compulsory miss occurs and CM block frame 001 is now occupied by MM block </a:t>
-            </a:r>
-            <a:r>
-              <a:rPr lang="en-IN" dirty="0" smtClean="0">
-                <a:latin typeface="Times New Roman" panose="02020603050405020304" pitchFamily="18" charset="0"/>
-                <a:cs typeface="Times New Roman" panose="02020603050405020304" pitchFamily="18" charset="0"/>
-              </a:rPr>
-              <a:t>3. </a:t>
-            </a:r>
-            <a:endParaRPr lang="en-IN" dirty="0">
-              <a:latin typeface="Times New Roman" panose="02020603050405020304" pitchFamily="18" charset="0"/>
-              <a:cs typeface="Times New Roman" panose="02020603050405020304" pitchFamily="18" charset="0"/>
-            </a:endParaRPr>
+              <a:t>2nd CPU request is for MM block 3. So again the compulsory miss occurs and CM block frame 001 is now occupied by MM block 3. </a:t>
+            </a:r>
           </a:p>
           <a:p>
             <a:pPr marL="285750" indent="-285750">
@@ -10976,19 +10384,8 @@
                 <a:latin typeface="Times New Roman" panose="02020603050405020304" pitchFamily="18" charset="0"/>
                 <a:cs typeface="Times New Roman" panose="02020603050405020304" pitchFamily="18" charset="0"/>
               </a:rPr>
-              <a:t>3rd CPU request is for MM block 25. So again the compulsory miss occurs and CM block frame 010 is now occupied by MM block </a:t>
-            </a:r>
-            <a:r>
-              <a:rPr lang="en-IN" dirty="0" smtClean="0">
-                <a:latin typeface="Times New Roman" panose="02020603050405020304" pitchFamily="18" charset="0"/>
-                <a:cs typeface="Times New Roman" panose="02020603050405020304" pitchFamily="18" charset="0"/>
-              </a:rPr>
-              <a:t>25. </a:t>
-            </a:r>
-            <a:endParaRPr lang="en-IN" dirty="0">
-              <a:latin typeface="Times New Roman" panose="02020603050405020304" pitchFamily="18" charset="0"/>
-              <a:cs typeface="Times New Roman" panose="02020603050405020304" pitchFamily="18" charset="0"/>
-            </a:endParaRPr>
+              <a:t>3rd CPU request is for MM block 25. So again the compulsory miss occurs and CM block frame 010 is now occupied by MM block 25. </a:t>
+            </a:r>
           </a:p>
           <a:p>
             <a:pPr marL="285750" indent="-285750">
@@ -11000,19 +10397,8 @@
                 <a:latin typeface="Times New Roman" panose="02020603050405020304" pitchFamily="18" charset="0"/>
                 <a:cs typeface="Times New Roman" panose="02020603050405020304" pitchFamily="18" charset="0"/>
               </a:rPr>
-              <a:t>4th CPU request is for MM block 8. So again the compulsory miss occurs and CM block frame 011 is now occupied by MM block </a:t>
-            </a:r>
-            <a:r>
-              <a:rPr lang="en-IN" dirty="0" smtClean="0">
-                <a:latin typeface="Times New Roman" panose="02020603050405020304" pitchFamily="18" charset="0"/>
-                <a:cs typeface="Times New Roman" panose="02020603050405020304" pitchFamily="18" charset="0"/>
-              </a:rPr>
-              <a:t>8. </a:t>
-            </a:r>
-            <a:endParaRPr lang="en-IN" dirty="0">
-              <a:latin typeface="Times New Roman" panose="02020603050405020304" pitchFamily="18" charset="0"/>
-              <a:cs typeface="Times New Roman" panose="02020603050405020304" pitchFamily="18" charset="0"/>
-            </a:endParaRPr>
+              <a:t>4th CPU request is for MM block 8. So again the compulsory miss occurs and CM block frame 011 is now occupied by MM block 8. </a:t>
+            </a:r>
           </a:p>
           <a:p>
             <a:pPr marL="285750" indent="-285750">
@@ -11024,19 +10410,8 @@
                 <a:latin typeface="Times New Roman" panose="02020603050405020304" pitchFamily="18" charset="0"/>
                 <a:cs typeface="Times New Roman" panose="02020603050405020304" pitchFamily="18" charset="0"/>
               </a:rPr>
-              <a:t>5th CPU request is for MM block 19. So again the compulsory miss occurs and CM block frame 100 is now occupied by MM block </a:t>
-            </a:r>
-            <a:r>
-              <a:rPr lang="en-IN" dirty="0" smtClean="0">
-                <a:latin typeface="Times New Roman" panose="02020603050405020304" pitchFamily="18" charset="0"/>
-                <a:cs typeface="Times New Roman" panose="02020603050405020304" pitchFamily="18" charset="0"/>
-              </a:rPr>
-              <a:t>19. </a:t>
-            </a:r>
-            <a:endParaRPr lang="en-IN" dirty="0">
-              <a:latin typeface="Times New Roman" panose="02020603050405020304" pitchFamily="18" charset="0"/>
-              <a:cs typeface="Times New Roman" panose="02020603050405020304" pitchFamily="18" charset="0"/>
-            </a:endParaRPr>
+              <a:t>5th CPU request is for MM block 19. So again the compulsory miss occurs and CM block frame 100 is now occupied by MM block 19. </a:t>
+            </a:r>
           </a:p>
           <a:p>
             <a:pPr marL="285750" indent="-285750">
@@ -11048,14 +10423,7 @@
                 <a:latin typeface="Times New Roman" panose="02020603050405020304" pitchFamily="18" charset="0"/>
                 <a:cs typeface="Times New Roman" panose="02020603050405020304" pitchFamily="18" charset="0"/>
               </a:rPr>
-              <a:t>6th CPU request is for MM block 6. So again the compulsory miss occurs and CM block frame 101 is now occupied by MM block </a:t>
-            </a:r>
-            <a:r>
-              <a:rPr lang="en-IN" dirty="0" smtClean="0">
-                <a:latin typeface="Times New Roman" panose="02020603050405020304" pitchFamily="18" charset="0"/>
-                <a:cs typeface="Times New Roman" panose="02020603050405020304" pitchFamily="18" charset="0"/>
-              </a:rPr>
-              <a:t>6.</a:t>
+              <a:t>6th CPU request is for MM block 6. So again the compulsory miss occurs and CM block frame 101 is now occupied by MM block 6.</a:t>
             </a:r>
           </a:p>
           <a:p>
@@ -11068,19 +10436,8 @@
                 <a:latin typeface="Times New Roman" panose="02020603050405020304" pitchFamily="18" charset="0"/>
                 <a:cs typeface="Times New Roman" panose="02020603050405020304" pitchFamily="18" charset="0"/>
               </a:rPr>
-              <a:t>7th CPU request is for MM block 25. But this block is already available in CM block frame 010 and so hit </a:t>
-            </a:r>
-            <a:r>
-              <a:rPr lang="en-IN" dirty="0" smtClean="0">
-                <a:latin typeface="Times New Roman" panose="02020603050405020304" pitchFamily="18" charset="0"/>
-                <a:cs typeface="Times New Roman" panose="02020603050405020304" pitchFamily="18" charset="0"/>
-              </a:rPr>
-              <a:t>occurs.</a:t>
-            </a:r>
-            <a:endParaRPr lang="en-IN" dirty="0">
-              <a:latin typeface="Times New Roman" panose="02020603050405020304" pitchFamily="18" charset="0"/>
-              <a:cs typeface="Times New Roman" panose="02020603050405020304" pitchFamily="18" charset="0"/>
-            </a:endParaRPr>
+              <a:t>7th CPU request is for MM block 25. But this block is already available in CM block frame 010 and so hit occurs.</a:t>
+            </a:r>
           </a:p>
           <a:p>
             <a:pPr marL="285750" indent="-285750">
@@ -11092,26 +10449,15 @@
                 <a:latin typeface="Times New Roman" panose="02020603050405020304" pitchFamily="18" charset="0"/>
                 <a:cs typeface="Times New Roman" panose="02020603050405020304" pitchFamily="18" charset="0"/>
               </a:rPr>
-              <a:t>8th CPU request is for MM block 8. But this block is already available in CM block frame 011 and so hit occurs </a:t>
-            </a:r>
-            <a:r>
-              <a:rPr lang="en-IN" dirty="0" smtClean="0">
-                <a:latin typeface="Times New Roman" panose="02020603050405020304" pitchFamily="18" charset="0"/>
-                <a:cs typeface="Times New Roman" panose="02020603050405020304" pitchFamily="18" charset="0"/>
-              </a:rPr>
-              <a:t>.</a:t>
-            </a:r>
-            <a:endParaRPr lang="en-IN" dirty="0">
-              <a:latin typeface="Times New Roman" panose="02020603050405020304" pitchFamily="18" charset="0"/>
-              <a:cs typeface="Times New Roman" panose="02020603050405020304" pitchFamily="18" charset="0"/>
-            </a:endParaRPr>
+              <a:t>8th CPU request is for MM block 8. But this block is already available in CM block frame 011 and so hit occurs .</a:t>
+            </a:r>
           </a:p>
         </p:txBody>
       </p:sp>
     </p:spTree>
     <p:extLst>
       <p:ext uri="{BB962C8B-B14F-4D97-AF65-F5344CB8AC3E}">
-        <p14:creationId xmlns:p14="http://schemas.microsoft.com/office/powerpoint/2010/main" xmlns="" val="410560508"/>
+        <p14:creationId xmlns:p14="http://schemas.microsoft.com/office/powerpoint/2010/main" val="410560508"/>
       </p:ext>
     </p:extLst>
   </p:cSld>
@@ -11169,19 +10515,8 @@
                 <a:latin typeface="Times New Roman" panose="02020603050405020304" pitchFamily="18" charset="0"/>
                 <a:cs typeface="Times New Roman" panose="02020603050405020304" pitchFamily="18" charset="0"/>
               </a:rPr>
-              <a:t>9th CPU request is for MM block 16. So again the compulsory miss occurs and CM block frame 110 is now occupied by MM block </a:t>
-            </a:r>
-            <a:r>
-              <a:rPr lang="en-IN" dirty="0" smtClean="0">
-                <a:latin typeface="Times New Roman" panose="02020603050405020304" pitchFamily="18" charset="0"/>
-                <a:cs typeface="Times New Roman" panose="02020603050405020304" pitchFamily="18" charset="0"/>
-              </a:rPr>
-              <a:t>16.</a:t>
-            </a:r>
-            <a:endParaRPr lang="en-IN" dirty="0">
-              <a:latin typeface="Times New Roman" panose="02020603050405020304" pitchFamily="18" charset="0"/>
-              <a:cs typeface="Times New Roman" panose="02020603050405020304" pitchFamily="18" charset="0"/>
-            </a:endParaRPr>
+              <a:t>9th CPU request is for MM block 16. So again the compulsory miss occurs and CM block frame 110 is now occupied by MM block 16.</a:t>
+            </a:r>
           </a:p>
           <a:p>
             <a:pPr marL="285750" indent="-285750">
@@ -11193,14 +10528,7 @@
                 <a:latin typeface="Times New Roman" panose="02020603050405020304" pitchFamily="18" charset="0"/>
                 <a:cs typeface="Times New Roman" panose="02020603050405020304" pitchFamily="18" charset="0"/>
               </a:rPr>
-              <a:t>10th CPU request is for MM block 35. So again the compulsory miss occurs and CM block frame 111 is now occupied by MM block </a:t>
-            </a:r>
-            <a:r>
-              <a:rPr lang="en-IN" dirty="0" smtClean="0">
-                <a:latin typeface="Times New Roman" panose="02020603050405020304" pitchFamily="18" charset="0"/>
-                <a:cs typeface="Times New Roman" panose="02020603050405020304" pitchFamily="18" charset="0"/>
-              </a:rPr>
-              <a:t>35.</a:t>
+              <a:t>10th CPU request is for MM block 35. So again the compulsory miss occurs and CM block frame 111 is now occupied by MM block 35.</a:t>
             </a:r>
           </a:p>
           <a:p>
@@ -11227,33 +10555,8 @@
                 <a:latin typeface="Times New Roman" panose="02020603050405020304" pitchFamily="18" charset="0"/>
                 <a:cs typeface="Times New Roman" panose="02020603050405020304" pitchFamily="18" charset="0"/>
               </a:rPr>
-              <a:t>occurs. At this time LRU policy is used to search for a victim MM block </a:t>
-            </a:r>
-            <a:r>
-              <a:rPr lang="en-IN" dirty="0" smtClean="0">
-                <a:latin typeface="Times New Roman" panose="02020603050405020304" pitchFamily="18" charset="0"/>
-                <a:cs typeface="Times New Roman" panose="02020603050405020304" pitchFamily="18" charset="0"/>
-              </a:rPr>
-              <a:t>in </a:t>
-            </a:r>
-            <a:r>
-              <a:rPr lang="en-IN" dirty="0">
-                <a:latin typeface="Times New Roman" panose="02020603050405020304" pitchFamily="18" charset="0"/>
-                <a:cs typeface="Times New Roman" panose="02020603050405020304" pitchFamily="18" charset="0"/>
-              </a:rPr>
-              <a:t>CM. This victim block is a least recently used block i.e. the block corresponding to the oldest CPU request. In this example MM block 4 is such a block as block 4 was the 1st CPU request. So replace block 4 in CM block frame 000 by MM block </a:t>
-            </a:r>
-            <a:r>
-              <a:rPr lang="en-IN" dirty="0" smtClean="0">
-                <a:latin typeface="Times New Roman" panose="02020603050405020304" pitchFamily="18" charset="0"/>
-                <a:cs typeface="Times New Roman" panose="02020603050405020304" pitchFamily="18" charset="0"/>
-              </a:rPr>
-              <a:t>45.</a:t>
-            </a:r>
-            <a:endParaRPr lang="en-IN" dirty="0">
-              <a:latin typeface="Times New Roman" panose="02020603050405020304" pitchFamily="18" charset="0"/>
-              <a:cs typeface="Times New Roman" panose="02020603050405020304" pitchFamily="18" charset="0"/>
-            </a:endParaRPr>
+              <a:t>occurs. At this time LRU policy is used to search for a victim MM block in CM. This victim block is a least recently used block i.e. the block corresponding to the oldest CPU request. In this example MM block 4 is such a block as block 4 was the 1st CPU request. So replace block 4 in CM block frame 000 by MM block 45.</a:t>
+            </a:r>
           </a:p>
           <a:p>
             <a:pPr marL="285750" indent="-285750">
@@ -11279,19 +10582,8 @@
                 <a:latin typeface="Times New Roman" panose="02020603050405020304" pitchFamily="18" charset="0"/>
                 <a:cs typeface="Times New Roman" panose="02020603050405020304" pitchFamily="18" charset="0"/>
               </a:rPr>
-              <a:t> occurs. At this time LRU policy is used to search for a victim MM block in CM. In this example MM block 3 is the next victim block as block 3 was the 2nd CPU request. So replace block 3 in CM block frame 001 by MM block </a:t>
-            </a:r>
-            <a:r>
-              <a:rPr lang="en-IN" dirty="0" smtClean="0">
-                <a:latin typeface="Times New Roman" panose="02020603050405020304" pitchFamily="18" charset="0"/>
-                <a:cs typeface="Times New Roman" panose="02020603050405020304" pitchFamily="18" charset="0"/>
-              </a:rPr>
-              <a:t>22.</a:t>
-            </a:r>
-            <a:endParaRPr lang="en-IN" dirty="0">
-              <a:latin typeface="Times New Roman" panose="02020603050405020304" pitchFamily="18" charset="0"/>
-              <a:cs typeface="Times New Roman" panose="02020603050405020304" pitchFamily="18" charset="0"/>
-            </a:endParaRPr>
+              <a:t> occurs. At this time LRU policy is used to search for a victim MM block in CM. In this example MM block 3 is the next victim block as block 3 was the 2nd CPU request. So replace block 3 in CM block frame 001 by MM block 22.</a:t>
+            </a:r>
           </a:p>
           <a:p>
             <a:pPr marL="285750" indent="-285750">
@@ -11303,14 +10595,7 @@
                 <a:latin typeface="Times New Roman" panose="02020603050405020304" pitchFamily="18" charset="0"/>
                 <a:cs typeface="Times New Roman" panose="02020603050405020304" pitchFamily="18" charset="0"/>
               </a:rPr>
-              <a:t>13th CPU request is for MM block 8. But this block is already available in CM block frame 011 and so hit </a:t>
-            </a:r>
-            <a:r>
-              <a:rPr lang="en-IN" dirty="0" smtClean="0">
-                <a:latin typeface="Times New Roman" panose="02020603050405020304" pitchFamily="18" charset="0"/>
-                <a:cs typeface="Times New Roman" panose="02020603050405020304" pitchFamily="18" charset="0"/>
-              </a:rPr>
-              <a:t>occurs.</a:t>
+              <a:t>13th CPU request is for MM block 8. But this block is already available in CM block frame 011 and so hit occurs.</a:t>
             </a:r>
           </a:p>
           <a:p>
@@ -11351,33 +10636,8 @@
                 <a:latin typeface="Times New Roman" panose="02020603050405020304" pitchFamily="18" charset="0"/>
                 <a:cs typeface="Times New Roman" panose="02020603050405020304" pitchFamily="18" charset="0"/>
               </a:rPr>
-              <a:t> CPU </a:t>
-            </a:r>
-            <a:r>
-              <a:rPr lang="en-IN" dirty="0" smtClean="0">
-                <a:latin typeface="Times New Roman" panose="02020603050405020304" pitchFamily="18" charset="0"/>
-                <a:cs typeface="Times New Roman" panose="02020603050405020304" pitchFamily="18" charset="0"/>
-              </a:rPr>
-              <a:t>request. </a:t>
-            </a:r>
-            <a:r>
-              <a:rPr lang="en-IN" dirty="0">
-                <a:latin typeface="Times New Roman" panose="02020603050405020304" pitchFamily="18" charset="0"/>
-                <a:cs typeface="Times New Roman" panose="02020603050405020304" pitchFamily="18" charset="0"/>
-              </a:rPr>
-              <a:t>So replace block 19 in CM block frame 100 by MM block </a:t>
-            </a:r>
-            <a:r>
-              <a:rPr lang="en-IN" dirty="0" smtClean="0">
-                <a:latin typeface="Times New Roman" panose="02020603050405020304" pitchFamily="18" charset="0"/>
-                <a:cs typeface="Times New Roman" panose="02020603050405020304" pitchFamily="18" charset="0"/>
-              </a:rPr>
-              <a:t>3.</a:t>
-            </a:r>
-            <a:endParaRPr lang="en-IN" dirty="0">
-              <a:latin typeface="Times New Roman" panose="02020603050405020304" pitchFamily="18" charset="0"/>
-              <a:cs typeface="Times New Roman" panose="02020603050405020304" pitchFamily="18" charset="0"/>
-            </a:endParaRPr>
+              <a:t> CPU request. So replace block 19 in CM block frame 100 by MM block 3.</a:t>
+            </a:r>
           </a:p>
           <a:p>
             <a:pPr marL="285750" indent="-285750">
@@ -11389,14 +10649,7 @@
                 <a:latin typeface="Times New Roman" panose="02020603050405020304" pitchFamily="18" charset="0"/>
                 <a:cs typeface="Times New Roman" panose="02020603050405020304" pitchFamily="18" charset="0"/>
               </a:rPr>
-              <a:t>15th CPU request is for MM block 16. But this block is already available in CM block frame 110 and so hit </a:t>
-            </a:r>
-            <a:r>
-              <a:rPr lang="en-IN" dirty="0" smtClean="0">
-                <a:latin typeface="Times New Roman" panose="02020603050405020304" pitchFamily="18" charset="0"/>
-                <a:cs typeface="Times New Roman" panose="02020603050405020304" pitchFamily="18" charset="0"/>
-              </a:rPr>
-              <a:t>occurs.</a:t>
+              <a:t>15th CPU request is for MM block 16. But this block is already available in CM block frame 110 and so hit occurs.</a:t>
             </a:r>
           </a:p>
           <a:p>
@@ -11405,7 +10658,7 @@
               <a:buChar char="•"/>
             </a:pPr>
             <a:r>
-              <a:rPr lang="en-IN" dirty="0" smtClean="0">
+              <a:rPr lang="en-IN" dirty="0">
                 <a:latin typeface="Times New Roman" panose="02020603050405020304" pitchFamily="18" charset="0"/>
                 <a:cs typeface="Times New Roman" panose="02020603050405020304" pitchFamily="18" charset="0"/>
               </a:rPr>
@@ -11418,51 +10671,47 @@
               <a:buChar char="•"/>
             </a:pPr>
             <a:r>
-              <a:rPr lang="en-IN" dirty="0" smtClean="0">
+              <a:rPr lang="en-IN" dirty="0">
                 <a:latin typeface="Times New Roman" panose="02020603050405020304" pitchFamily="18" charset="0"/>
                 <a:cs typeface="Times New Roman" panose="02020603050405020304" pitchFamily="18" charset="0"/>
               </a:rPr>
               <a:t>17th CPU request is for MM block 7. Now all the block frames in CM are occupied. So the </a:t>
             </a:r>
             <a:r>
-              <a:rPr lang="en-IN" b="1" dirty="0" smtClean="0">
+              <a:rPr lang="en-IN" b="1" dirty="0">
                 <a:latin typeface="Times New Roman" panose="02020603050405020304" pitchFamily="18" charset="0"/>
                 <a:cs typeface="Times New Roman" panose="02020603050405020304" pitchFamily="18" charset="0"/>
               </a:rPr>
               <a:t>capacity miss </a:t>
             </a:r>
             <a:r>
-              <a:rPr lang="en-IN" dirty="0" smtClean="0">
+              <a:rPr lang="en-IN" dirty="0">
                 <a:latin typeface="Times New Roman" panose="02020603050405020304" pitchFamily="18" charset="0"/>
                 <a:cs typeface="Times New Roman" panose="02020603050405020304" pitchFamily="18" charset="0"/>
               </a:rPr>
               <a:t>occurs. At this time LRU policy is used to search for a victim block in CM. In this example MM block 6 is the next victim block as block 6 was the </a:t>
             </a:r>
             <a:r>
-              <a:rPr lang="en-IN" b="1" dirty="0" smtClean="0">
+              <a:rPr lang="en-IN" b="1" dirty="0">
                 <a:latin typeface="Times New Roman" panose="02020603050405020304" pitchFamily="18" charset="0"/>
                 <a:cs typeface="Times New Roman" panose="02020603050405020304" pitchFamily="18" charset="0"/>
               </a:rPr>
               <a:t>6th</a:t>
             </a:r>
             <a:r>
-              <a:rPr lang="en-IN" dirty="0" smtClean="0">
+              <a:rPr lang="en-IN" dirty="0">
                 <a:latin typeface="Times New Roman" panose="02020603050405020304" pitchFamily="18" charset="0"/>
                 <a:cs typeface="Times New Roman" panose="02020603050405020304" pitchFamily="18" charset="0"/>
               </a:rPr>
               <a:t> CPU request whereas the other blocks available in CM block frames at this instant of time are accessed after block 6. So replace block 6 in CM block frame 101 by MM block 7.</a:t>
             </a:r>
-            <a:endParaRPr lang="en-IN" dirty="0">
-              <a:latin typeface="Times New Roman" panose="02020603050405020304" pitchFamily="18" charset="0"/>
-              <a:cs typeface="Times New Roman" panose="02020603050405020304" pitchFamily="18" charset="0"/>
-            </a:endParaRPr>
           </a:p>
         </p:txBody>
       </p:sp>
     </p:spTree>
     <p:extLst>
       <p:ext uri="{BB962C8B-B14F-4D97-AF65-F5344CB8AC3E}">
-        <p14:creationId xmlns:p14="http://schemas.microsoft.com/office/powerpoint/2010/main" xmlns="" val="1217118710"/>
+        <p14:creationId xmlns:p14="http://schemas.microsoft.com/office/powerpoint/2010/main" val="1217118710"/>
       </p:ext>
     </p:extLst>
   </p:cSld>
@@ -11512,7 +10761,7 @@
           <a:lstStyle/>
           <a:p>
             <a:r>
-              <a:rPr lang="en-IN" dirty="0" smtClean="0">
+              <a:rPr lang="en-IN" dirty="0">
                 <a:latin typeface="Times New Roman" pitchFamily="18" charset="0"/>
                 <a:cs typeface="Times New Roman" pitchFamily="18" charset="0"/>
               </a:rPr>
@@ -11520,220 +10769,216 @@
             </a:r>
           </a:p>
           <a:p>
-            <a:endParaRPr lang="en-IN" dirty="0" smtClean="0">
-              <a:latin typeface="Times New Roman" pitchFamily="18" charset="0"/>
-              <a:cs typeface="Times New Roman" pitchFamily="18" charset="0"/>
-            </a:endParaRPr>
-          </a:p>
-          <a:p>
-            <a:pPr marL="342900" indent="-342900">
-              <a:buAutoNum type="arabicPeriod"/>
-            </a:pPr>
-            <a:r>
-              <a:rPr lang="en-IN" dirty="0" smtClean="0">
-                <a:latin typeface="Times New Roman" pitchFamily="18" charset="0"/>
-                <a:cs typeface="Times New Roman" pitchFamily="18" charset="0"/>
-              </a:rPr>
-              <a:t>Use of number of different memory devices with different cost/performance ratios organized to provide a high average performance at a low average cost/bit. The individual memories form a hierarchy of storage devices.</a:t>
-            </a:r>
-          </a:p>
-          <a:p>
-            <a:pPr marL="342900" indent="-342900">
-              <a:buAutoNum type="arabicPeriod"/>
-            </a:pPr>
-            <a:r>
-              <a:rPr lang="en-IN" dirty="0" smtClean="0">
-                <a:latin typeface="Times New Roman" pitchFamily="18" charset="0"/>
-                <a:cs typeface="Times New Roman" pitchFamily="18" charset="0"/>
-              </a:rPr>
-              <a:t>Development of automatic storage allocation methods to make more efficient use of the available memory space.</a:t>
-            </a:r>
-          </a:p>
-          <a:p>
-            <a:pPr marL="342900" indent="-342900">
-              <a:buAutoNum type="arabicPeriod"/>
-            </a:pPr>
-            <a:r>
-              <a:rPr lang="en-IN" dirty="0" smtClean="0">
-                <a:latin typeface="Times New Roman" pitchFamily="18" charset="0"/>
-                <a:cs typeface="Times New Roman" pitchFamily="18" charset="0"/>
-              </a:rPr>
-              <a:t>Development of virtual memory concepts to free the ordinary user from memory management, and make programs largely independent of the physical memory configurations used</a:t>
-            </a:r>
-          </a:p>
-          <a:p>
-            <a:pPr marL="342900" indent="-342900">
-              <a:buAutoNum type="arabicPeriod"/>
-            </a:pPr>
-            <a:r>
-              <a:rPr lang="en-IN" dirty="0" smtClean="0">
-                <a:latin typeface="Times New Roman" pitchFamily="18" charset="0"/>
-                <a:cs typeface="Times New Roman" pitchFamily="18" charset="0"/>
-              </a:rPr>
-              <a:t>Design of communication links to the memory system so that all processors connected to it can operate at or near their maximum rates. This involves increasing the effective memory processor bandwidth and also providing protection mechanisms to prevent programs from accessing or altering one another’s storage areas.</a:t>
-            </a:r>
-          </a:p>
-          <a:p>
-            <a:pPr marL="342900" indent="-342900">
-              <a:buAutoNum type="arabicPeriod"/>
-            </a:pPr>
-            <a:endParaRPr lang="en-IN" dirty="0" smtClean="0">
-              <a:latin typeface="Times New Roman" pitchFamily="18" charset="0"/>
-              <a:cs typeface="Times New Roman" pitchFamily="18" charset="0"/>
-            </a:endParaRPr>
-          </a:p>
-          <a:p>
-            <a:pPr marL="342900" indent="-342900"/>
-            <a:r>
-              <a:rPr lang="en-IN" b="1" dirty="0" smtClean="0">
-                <a:latin typeface="Times New Roman" pitchFamily="18" charset="0"/>
-                <a:cs typeface="Times New Roman" pitchFamily="18" charset="0"/>
-              </a:rPr>
-              <a:t>Memory-Device characteristics</a:t>
-            </a:r>
-          </a:p>
-          <a:p>
-            <a:pPr marL="342900" indent="-342900"/>
-            <a:r>
-              <a:rPr lang="en-IN" u="sng" dirty="0" smtClean="0">
-                <a:latin typeface="Times New Roman" pitchFamily="18" charset="0"/>
-                <a:cs typeface="Times New Roman" pitchFamily="18" charset="0"/>
-              </a:rPr>
-              <a:t>Cost</a:t>
-            </a:r>
-            <a:r>
-              <a:rPr lang="en-IN" dirty="0" smtClean="0">
-                <a:latin typeface="Times New Roman" pitchFamily="18" charset="0"/>
-                <a:cs typeface="Times New Roman" pitchFamily="18" charset="0"/>
-              </a:rPr>
-              <a:t>: Purchase price include cost of the information storage cells, cost of the peripheral equipment or access circuitry essential to the operation of the memory</a:t>
-            </a:r>
-          </a:p>
-          <a:p>
-            <a:pPr marL="342900" indent="-342900"/>
-            <a:r>
-              <a:rPr lang="en-IN" dirty="0" smtClean="0">
-                <a:latin typeface="Times New Roman" pitchFamily="18" charset="0"/>
-                <a:cs typeface="Times New Roman" pitchFamily="18" charset="0"/>
-              </a:rPr>
-              <a:t>C = Cost of a complete memory system with S bits of storage capacity, c= cost/bit = C/S</a:t>
-            </a:r>
-          </a:p>
-          <a:p>
-            <a:pPr marL="342900" indent="-342900"/>
-            <a:r>
-              <a:rPr lang="en-IN" u="sng" dirty="0" smtClean="0">
-                <a:latin typeface="Times New Roman" pitchFamily="18" charset="0"/>
-                <a:cs typeface="Times New Roman" pitchFamily="18" charset="0"/>
-              </a:rPr>
-              <a:t>Access time</a:t>
-            </a:r>
-            <a:r>
-              <a:rPr lang="en-IN" dirty="0" smtClean="0">
-                <a:latin typeface="Times New Roman" pitchFamily="18" charset="0"/>
-                <a:cs typeface="Times New Roman" pitchFamily="18" charset="0"/>
-              </a:rPr>
-              <a:t>: Performance of a memory device is primarily determined by the rate at which information can be read from or written into the memory. Read (Write) access time is the average time required to read (write) a fixed amount of information from (into) the memory. It depends on the physical characteristic of the storage medium and the type of access mechanism. Access time (</a:t>
-            </a:r>
-            <a:r>
-              <a:rPr lang="en-IN" dirty="0" err="1" smtClean="0">
-                <a:latin typeface="Times New Roman" pitchFamily="18" charset="0"/>
-                <a:cs typeface="Times New Roman" pitchFamily="18" charset="0"/>
-              </a:rPr>
-              <a:t>t</a:t>
-            </a:r>
-            <a:r>
-              <a:rPr lang="en-IN" baseline="-25000" dirty="0" err="1" smtClean="0">
-                <a:latin typeface="Times New Roman" pitchFamily="18" charset="0"/>
-                <a:cs typeface="Times New Roman" pitchFamily="18" charset="0"/>
-              </a:rPr>
-              <a:t>A</a:t>
-            </a:r>
-            <a:r>
-              <a:rPr lang="en-IN" dirty="0" smtClean="0">
-                <a:latin typeface="Times New Roman" pitchFamily="18" charset="0"/>
-                <a:cs typeface="Times New Roman" pitchFamily="18" charset="0"/>
-              </a:rPr>
-              <a:t>) is calculated from the time a read (write) request is received by the memory unit to the time at which all the requested information has been made available at the memory output terminals (written into the memory).</a:t>
-            </a:r>
-          </a:p>
-          <a:p>
-            <a:r>
-              <a:rPr lang="en-IN" u="sng" dirty="0" smtClean="0">
-                <a:latin typeface="Times New Roman" pitchFamily="18" charset="0"/>
-                <a:cs typeface="Times New Roman" pitchFamily="18" charset="0"/>
-              </a:rPr>
-              <a:t>Access rate (</a:t>
-            </a:r>
-            <a:r>
-              <a:rPr lang="en-IN" u="sng" dirty="0" err="1" smtClean="0">
-                <a:latin typeface="Times New Roman" pitchFamily="18" charset="0"/>
-                <a:cs typeface="Times New Roman" pitchFamily="18" charset="0"/>
-              </a:rPr>
-              <a:t>b</a:t>
-            </a:r>
-            <a:r>
-              <a:rPr lang="en-IN" u="sng" baseline="-25000" dirty="0" err="1" smtClean="0">
-                <a:latin typeface="Times New Roman" pitchFamily="18" charset="0"/>
-                <a:cs typeface="Times New Roman" pitchFamily="18" charset="0"/>
-              </a:rPr>
-              <a:t>A</a:t>
-            </a:r>
-            <a:r>
-              <a:rPr lang="en-IN" u="sng" dirty="0" smtClean="0">
-                <a:latin typeface="Times New Roman" pitchFamily="18" charset="0"/>
-                <a:cs typeface="Times New Roman" pitchFamily="18" charset="0"/>
-              </a:rPr>
-              <a:t>)</a:t>
-            </a:r>
-            <a:r>
-              <a:rPr lang="en-IN" dirty="0" smtClean="0">
-                <a:latin typeface="Times New Roman" pitchFamily="18" charset="0"/>
-                <a:cs typeface="Times New Roman" pitchFamily="18" charset="0"/>
-              </a:rPr>
-              <a:t>: Defined as 1/</a:t>
-            </a:r>
-            <a:r>
-              <a:rPr lang="en-IN" dirty="0" err="1" smtClean="0">
-                <a:latin typeface="Times New Roman" pitchFamily="18" charset="0"/>
-                <a:cs typeface="Times New Roman" pitchFamily="18" charset="0"/>
-              </a:rPr>
-              <a:t>t</a:t>
-            </a:r>
-            <a:r>
-              <a:rPr lang="en-IN" baseline="-25000" dirty="0" err="1" smtClean="0">
-                <a:latin typeface="Times New Roman" pitchFamily="18" charset="0"/>
-                <a:cs typeface="Times New Roman" pitchFamily="18" charset="0"/>
-              </a:rPr>
-              <a:t>A</a:t>
-            </a:r>
-            <a:r>
-              <a:rPr lang="en-IN" dirty="0" smtClean="0">
-                <a:latin typeface="Times New Roman" pitchFamily="18" charset="0"/>
-                <a:cs typeface="Times New Roman" pitchFamily="18" charset="0"/>
-              </a:rPr>
-              <a:t> and measured in words per second. </a:t>
-            </a:r>
-          </a:p>
-          <a:p>
-            <a:r>
-              <a:rPr lang="en-IN" u="sng" dirty="0" smtClean="0">
-                <a:latin typeface="Times New Roman" pitchFamily="18" charset="0"/>
-                <a:cs typeface="Times New Roman" pitchFamily="18" charset="0"/>
-              </a:rPr>
-              <a:t>Access modes</a:t>
-            </a:r>
-            <a:r>
-              <a:rPr lang="en-IN" dirty="0" smtClean="0">
-                <a:latin typeface="Times New Roman" pitchFamily="18" charset="0"/>
-                <a:cs typeface="Times New Roman" pitchFamily="18" charset="0"/>
-              </a:rPr>
-              <a:t>: An important property of a memory device is the order or sequence in which information can be accessed. </a:t>
-            </a:r>
             <a:endParaRPr lang="en-IN" dirty="0">
               <a:latin typeface="Times New Roman" pitchFamily="18" charset="0"/>
               <a:cs typeface="Times New Roman" pitchFamily="18" charset="0"/>
             </a:endParaRPr>
+          </a:p>
+          <a:p>
+            <a:pPr marL="342900" indent="-342900">
+              <a:buAutoNum type="arabicPeriod"/>
+            </a:pPr>
+            <a:r>
+              <a:rPr lang="en-IN" dirty="0">
+                <a:latin typeface="Times New Roman" pitchFamily="18" charset="0"/>
+                <a:cs typeface="Times New Roman" pitchFamily="18" charset="0"/>
+              </a:rPr>
+              <a:t>Use of number of different memory devices with different cost/performance ratios organized to provide a high average performance at a low average cost/bit. The individual memories form a hierarchy of storage devices.</a:t>
+            </a:r>
+          </a:p>
+          <a:p>
+            <a:pPr marL="342900" indent="-342900">
+              <a:buAutoNum type="arabicPeriod"/>
+            </a:pPr>
+            <a:r>
+              <a:rPr lang="en-IN" dirty="0">
+                <a:latin typeface="Times New Roman" pitchFamily="18" charset="0"/>
+                <a:cs typeface="Times New Roman" pitchFamily="18" charset="0"/>
+              </a:rPr>
+              <a:t>Development of automatic storage allocation methods to make more efficient use of the available memory space.</a:t>
+            </a:r>
+          </a:p>
+          <a:p>
+            <a:pPr marL="342900" indent="-342900">
+              <a:buAutoNum type="arabicPeriod"/>
+            </a:pPr>
+            <a:r>
+              <a:rPr lang="en-IN" dirty="0">
+                <a:latin typeface="Times New Roman" pitchFamily="18" charset="0"/>
+                <a:cs typeface="Times New Roman" pitchFamily="18" charset="0"/>
+              </a:rPr>
+              <a:t>Development of virtual memory concepts to free the ordinary user from memory management, and make programs largely independent of the physical memory configurations used</a:t>
+            </a:r>
+          </a:p>
+          <a:p>
+            <a:pPr marL="342900" indent="-342900">
+              <a:buAutoNum type="arabicPeriod"/>
+            </a:pPr>
+            <a:r>
+              <a:rPr lang="en-IN" dirty="0">
+                <a:latin typeface="Times New Roman" pitchFamily="18" charset="0"/>
+                <a:cs typeface="Times New Roman" pitchFamily="18" charset="0"/>
+              </a:rPr>
+              <a:t>Design of communication links to the memory system so that all processors connected to it can operate at or near their maximum rates. This involves increasing the effective memory processor bandwidth and also providing protection mechanisms to prevent programs from accessing or altering one another’s storage areas.</a:t>
+            </a:r>
+          </a:p>
+          <a:p>
+            <a:pPr marL="342900" indent="-342900">
+              <a:buAutoNum type="arabicPeriod"/>
+            </a:pPr>
+            <a:endParaRPr lang="en-IN" dirty="0">
+              <a:latin typeface="Times New Roman" pitchFamily="18" charset="0"/>
+              <a:cs typeface="Times New Roman" pitchFamily="18" charset="0"/>
+            </a:endParaRPr>
+          </a:p>
+          <a:p>
+            <a:pPr marL="342900" indent="-342900"/>
+            <a:r>
+              <a:rPr lang="en-IN" b="1" dirty="0">
+                <a:latin typeface="Times New Roman" pitchFamily="18" charset="0"/>
+                <a:cs typeface="Times New Roman" pitchFamily="18" charset="0"/>
+              </a:rPr>
+              <a:t>Memory-Device characteristics</a:t>
+            </a:r>
+          </a:p>
+          <a:p>
+            <a:pPr marL="342900" indent="-342900"/>
+            <a:r>
+              <a:rPr lang="en-IN" u="sng" dirty="0">
+                <a:latin typeface="Times New Roman" pitchFamily="18" charset="0"/>
+                <a:cs typeface="Times New Roman" pitchFamily="18" charset="0"/>
+              </a:rPr>
+              <a:t>Cost</a:t>
+            </a:r>
+            <a:r>
+              <a:rPr lang="en-IN" dirty="0">
+                <a:latin typeface="Times New Roman" pitchFamily="18" charset="0"/>
+                <a:cs typeface="Times New Roman" pitchFamily="18" charset="0"/>
+              </a:rPr>
+              <a:t>: Purchase price include cost of the information storage cells, cost of the peripheral equipment or access circuitry essential to the operation of the memory</a:t>
+            </a:r>
+          </a:p>
+          <a:p>
+            <a:pPr marL="342900" indent="-342900"/>
+            <a:r>
+              <a:rPr lang="en-IN" dirty="0">
+                <a:latin typeface="Times New Roman" pitchFamily="18" charset="0"/>
+                <a:cs typeface="Times New Roman" pitchFamily="18" charset="0"/>
+              </a:rPr>
+              <a:t>C = Cost of a complete memory system with S bits of storage capacity, c= cost/bit = C/S</a:t>
+            </a:r>
+          </a:p>
+          <a:p>
+            <a:pPr marL="342900" indent="-342900"/>
+            <a:r>
+              <a:rPr lang="en-IN" u="sng" dirty="0">
+                <a:latin typeface="Times New Roman" pitchFamily="18" charset="0"/>
+                <a:cs typeface="Times New Roman" pitchFamily="18" charset="0"/>
+              </a:rPr>
+              <a:t>Access time</a:t>
+            </a:r>
+            <a:r>
+              <a:rPr lang="en-IN" dirty="0">
+                <a:latin typeface="Times New Roman" pitchFamily="18" charset="0"/>
+                <a:cs typeface="Times New Roman" pitchFamily="18" charset="0"/>
+              </a:rPr>
+              <a:t>: Performance of a memory device is primarily determined by the rate at which information can be read from or written into the memory. Read (Write) access time is the average time required to read (write) a fixed amount of information from (into) the memory. It depends on the physical characteristic of the storage medium and the type of access mechanism. Access time (</a:t>
+            </a:r>
+            <a:r>
+              <a:rPr lang="en-IN" dirty="0" err="1">
+                <a:latin typeface="Times New Roman" pitchFamily="18" charset="0"/>
+                <a:cs typeface="Times New Roman" pitchFamily="18" charset="0"/>
+              </a:rPr>
+              <a:t>t</a:t>
+            </a:r>
+            <a:r>
+              <a:rPr lang="en-IN" baseline="-25000" dirty="0" err="1">
+                <a:latin typeface="Times New Roman" pitchFamily="18" charset="0"/>
+                <a:cs typeface="Times New Roman" pitchFamily="18" charset="0"/>
+              </a:rPr>
+              <a:t>A</a:t>
+            </a:r>
+            <a:r>
+              <a:rPr lang="en-IN" dirty="0">
+                <a:latin typeface="Times New Roman" pitchFamily="18" charset="0"/>
+                <a:cs typeface="Times New Roman" pitchFamily="18" charset="0"/>
+              </a:rPr>
+              <a:t>) is calculated from the time a read (write) request is received by the memory unit to the time at which all the requested information has been made available at the memory output terminals (written into the memory).</a:t>
+            </a:r>
+          </a:p>
+          <a:p>
+            <a:r>
+              <a:rPr lang="en-IN" u="sng" dirty="0">
+                <a:latin typeface="Times New Roman" pitchFamily="18" charset="0"/>
+                <a:cs typeface="Times New Roman" pitchFamily="18" charset="0"/>
+              </a:rPr>
+              <a:t>Access rate (</a:t>
+            </a:r>
+            <a:r>
+              <a:rPr lang="en-IN" u="sng" dirty="0" err="1">
+                <a:latin typeface="Times New Roman" pitchFamily="18" charset="0"/>
+                <a:cs typeface="Times New Roman" pitchFamily="18" charset="0"/>
+              </a:rPr>
+              <a:t>b</a:t>
+            </a:r>
+            <a:r>
+              <a:rPr lang="en-IN" u="sng" baseline="-25000" dirty="0" err="1">
+                <a:latin typeface="Times New Roman" pitchFamily="18" charset="0"/>
+                <a:cs typeface="Times New Roman" pitchFamily="18" charset="0"/>
+              </a:rPr>
+              <a:t>A</a:t>
+            </a:r>
+            <a:r>
+              <a:rPr lang="en-IN" u="sng" dirty="0">
+                <a:latin typeface="Times New Roman" pitchFamily="18" charset="0"/>
+                <a:cs typeface="Times New Roman" pitchFamily="18" charset="0"/>
+              </a:rPr>
+              <a:t>)</a:t>
+            </a:r>
+            <a:r>
+              <a:rPr lang="en-IN" dirty="0">
+                <a:latin typeface="Times New Roman" pitchFamily="18" charset="0"/>
+                <a:cs typeface="Times New Roman" pitchFamily="18" charset="0"/>
+              </a:rPr>
+              <a:t>: Defined as 1/</a:t>
+            </a:r>
+            <a:r>
+              <a:rPr lang="en-IN" dirty="0" err="1">
+                <a:latin typeface="Times New Roman" pitchFamily="18" charset="0"/>
+                <a:cs typeface="Times New Roman" pitchFamily="18" charset="0"/>
+              </a:rPr>
+              <a:t>t</a:t>
+            </a:r>
+            <a:r>
+              <a:rPr lang="en-IN" baseline="-25000" dirty="0" err="1">
+                <a:latin typeface="Times New Roman" pitchFamily="18" charset="0"/>
+                <a:cs typeface="Times New Roman" pitchFamily="18" charset="0"/>
+              </a:rPr>
+              <a:t>A</a:t>
+            </a:r>
+            <a:r>
+              <a:rPr lang="en-IN" dirty="0">
+                <a:latin typeface="Times New Roman" pitchFamily="18" charset="0"/>
+                <a:cs typeface="Times New Roman" pitchFamily="18" charset="0"/>
+              </a:rPr>
+              <a:t> and measured in words per second. </a:t>
+            </a:r>
+          </a:p>
+          <a:p>
+            <a:r>
+              <a:rPr lang="en-IN" u="sng" dirty="0">
+                <a:latin typeface="Times New Roman" pitchFamily="18" charset="0"/>
+                <a:cs typeface="Times New Roman" pitchFamily="18" charset="0"/>
+              </a:rPr>
+              <a:t>Access modes</a:t>
+            </a:r>
+            <a:r>
+              <a:rPr lang="en-IN" dirty="0">
+                <a:latin typeface="Times New Roman" pitchFamily="18" charset="0"/>
+                <a:cs typeface="Times New Roman" pitchFamily="18" charset="0"/>
+              </a:rPr>
+              <a:t>: An important property of a memory device is the order or sequence in which information can be accessed. </a:t>
+            </a:r>
           </a:p>
         </p:txBody>
       </p:sp>
@@ -11785,30 +11030,12 @@
           <a:lstStyle/>
           <a:p>
             <a:r>
-              <a:rPr lang="en-IN" u="sng" dirty="0" smtClean="0">
-                <a:latin typeface="Times New Roman" panose="02020603050405020304" pitchFamily="18" charset="0"/>
-                <a:cs typeface="Times New Roman" panose="02020603050405020304" pitchFamily="18" charset="0"/>
-              </a:rPr>
-              <a:t>Method </a:t>
-            </a:r>
-            <a:r>
               <a:rPr lang="en-IN" u="sng" dirty="0">
                 <a:latin typeface="Times New Roman" panose="02020603050405020304" pitchFamily="18" charset="0"/>
                 <a:cs typeface="Times New Roman" panose="02020603050405020304" pitchFamily="18" charset="0"/>
               </a:rPr>
-              <a:t>of deciding hit or </a:t>
-            </a:r>
-            <a:r>
-              <a:rPr lang="en-IN" u="sng" dirty="0" smtClean="0">
-                <a:latin typeface="Times New Roman" panose="02020603050405020304" pitchFamily="18" charset="0"/>
-                <a:cs typeface="Times New Roman" panose="02020603050405020304" pitchFamily="18" charset="0"/>
-              </a:rPr>
-              <a:t>miss</a:t>
-            </a:r>
-            <a:endParaRPr lang="en-IN" u="sng" dirty="0">
-              <a:latin typeface="Times New Roman" panose="02020603050405020304" pitchFamily="18" charset="0"/>
-              <a:cs typeface="Times New Roman" panose="02020603050405020304" pitchFamily="18" charset="0"/>
-            </a:endParaRPr>
+              <a:t>Method of deciding hit or miss</a:t>
+            </a:r>
           </a:p>
         </p:txBody>
       </p:sp>
@@ -11821,7 +11048,7 @@
           <p:nvPr>
             <p:extLst>
               <p:ext uri="{D42A27DB-BD31-4B8C-83A1-F6EECF244321}">
-                <p14:modId xmlns:p14="http://schemas.microsoft.com/office/powerpoint/2010/main" xmlns="" val="305237663"/>
+                <p14:modId xmlns:p14="http://schemas.microsoft.com/office/powerpoint/2010/main" val="305237663"/>
               </p:ext>
             </p:extLst>
           </p:nvPr>
@@ -11840,14 +11067,14 @@
                 <a:gridCol w="989477">
                   <a:extLst>
                     <a:ext uri="{9D8B030D-6E8A-4147-A177-3AD203B41FA5}">
-                      <a16:colId xmlns:a16="http://schemas.microsoft.com/office/drawing/2014/main" xmlns="" val="661623649"/>
+                      <a16:colId xmlns:a16="http://schemas.microsoft.com/office/drawing/2014/main" val="661623649"/>
                     </a:ext>
                   </a:extLst>
                 </a:gridCol>
                 <a:gridCol w="2799471">
                   <a:extLst>
                     <a:ext uri="{9D8B030D-6E8A-4147-A177-3AD203B41FA5}">
-                      <a16:colId xmlns:a16="http://schemas.microsoft.com/office/drawing/2014/main" xmlns="" val="2428440916"/>
+                      <a16:colId xmlns:a16="http://schemas.microsoft.com/office/drawing/2014/main" val="2428440916"/>
                     </a:ext>
                   </a:extLst>
                 </a:gridCol>
@@ -11917,7 +11144,7 @@
                 </a:tc>
                 <a:extLst>
                   <a:ext uri="{0D108BD9-81ED-4DB2-BD59-A6C34878D82A}">
-                    <a16:rowId xmlns:a16="http://schemas.microsoft.com/office/drawing/2014/main" xmlns="" val="649861728"/>
+                    <a16:rowId xmlns:a16="http://schemas.microsoft.com/office/drawing/2014/main" val="649861728"/>
                   </a:ext>
                 </a:extLst>
               </a:tr>
@@ -11988,7 +11215,7 @@
               </a:spcAft>
             </a:pPr>
             <a:r>
-              <a:rPr lang="en-IN" sz="1800" dirty="0" smtClean="0">
+              <a:rPr lang="en-IN" sz="1800" dirty="0">
                 <a:effectLst/>
                 <a:latin typeface="Times New Roman" panose="02020603050405020304" pitchFamily="18" charset="0"/>
                 <a:ea typeface="Calibri" panose="020F0502020204030204" pitchFamily="34" charset="0"/>
@@ -12007,7 +11234,7 @@
               </a:spcAft>
             </a:pPr>
             <a:r>
-              <a:rPr lang="en-IN" sz="1800" dirty="0" smtClean="0">
+              <a:rPr lang="en-IN" sz="1800" dirty="0">
                 <a:effectLst/>
                 <a:latin typeface="Times New Roman" panose="02020603050405020304" pitchFamily="18" charset="0"/>
                 <a:ea typeface="Calibri" panose="020F0502020204030204" pitchFamily="34" charset="0"/>
@@ -12026,7 +11253,7 @@
               </a:spcAft>
             </a:pPr>
             <a:r>
-              <a:rPr lang="en-IN" sz="1800" dirty="0" smtClean="0">
+              <a:rPr lang="en-IN" sz="1800" dirty="0">
                 <a:effectLst/>
                 <a:latin typeface="Times New Roman" panose="02020603050405020304" pitchFamily="18" charset="0"/>
                 <a:ea typeface="Calibri" panose="020F0502020204030204" pitchFamily="34" charset="0"/>
@@ -12035,7 +11262,7 @@
               <a:t>So in fully associative mapping the number of comparator is equal to the number of block frames in CM and the size of comparator depends upon the size of tag field (log</a:t>
             </a:r>
             <a:r>
-              <a:rPr lang="en-IN" sz="1800" baseline="-25000" dirty="0" smtClean="0">
+              <a:rPr lang="en-IN" sz="1800" baseline="-25000" dirty="0">
                 <a:effectLst/>
                 <a:latin typeface="Times New Roman" panose="02020603050405020304" pitchFamily="18" charset="0"/>
                 <a:ea typeface="Calibri" panose="020F0502020204030204" pitchFamily="34" charset="0"/>
@@ -12044,7 +11271,7 @@
               <a:t>2</a:t>
             </a:r>
             <a:r>
-              <a:rPr lang="en-IN" sz="1800" dirty="0" smtClean="0">
+              <a:rPr lang="en-IN" sz="1800" dirty="0">
                 <a:effectLst/>
                 <a:latin typeface="Times New Roman" panose="02020603050405020304" pitchFamily="18" charset="0"/>
                 <a:ea typeface="Calibri" panose="020F0502020204030204" pitchFamily="34" charset="0"/>
@@ -12063,7 +11290,7 @@
               </a:spcAft>
             </a:pPr>
             <a:r>
-              <a:rPr lang="en-IN" sz="1800" dirty="0" smtClean="0">
+              <a:rPr lang="en-IN" sz="1800" dirty="0">
                 <a:effectLst/>
                 <a:latin typeface="Times New Roman" panose="02020603050405020304" pitchFamily="18" charset="0"/>
                 <a:ea typeface="Calibri" panose="020F0502020204030204" pitchFamily="34" charset="0"/>
@@ -12074,23 +11301,16 @@
           </a:p>
           <a:p>
             <a:r>
-              <a:rPr lang="en-IN" dirty="0" smtClean="0">
-                <a:latin typeface="Times New Roman" pitchFamily="18" charset="0"/>
-                <a:cs typeface="Times New Roman" pitchFamily="18" charset="0"/>
-              </a:rPr>
-              <a:t>Hardwire </a:t>
-            </a:r>
-            <a:r>
-              <a:rPr lang="en-IN" dirty="0" smtClean="0">
-                <a:latin typeface="Times New Roman" pitchFamily="18" charset="0"/>
-                <a:cs typeface="Times New Roman" pitchFamily="18" charset="0"/>
-              </a:rPr>
-              <a:t>requirement</a:t>
-            </a:r>
-          </a:p>
-          <a:p>
-            <a:r>
-              <a:rPr lang="en-IN" dirty="0" smtClean="0">
+              <a:rPr lang="en-IN" dirty="0">
+                <a:latin typeface="Times New Roman" pitchFamily="18" charset="0"/>
+                <a:cs typeface="Times New Roman" pitchFamily="18" charset="0"/>
+              </a:rPr>
+              <a:t>Hardwire requirement</a:t>
+            </a:r>
+          </a:p>
+          <a:p>
+            <a:r>
+              <a:rPr lang="en-IN" dirty="0">
                 <a:latin typeface="Times New Roman" pitchFamily="18" charset="0"/>
                 <a:cs typeface="Times New Roman" pitchFamily="18" charset="0"/>
               </a:rPr>
@@ -12099,7 +11319,7 @@
           </a:p>
           <a:p>
             <a:r>
-              <a:rPr lang="en-IN" dirty="0" smtClean="0">
+              <a:rPr lang="en-IN" dirty="0">
                 <a:latin typeface="Times New Roman" pitchFamily="18" charset="0"/>
                 <a:cs typeface="Times New Roman" pitchFamily="18" charset="0"/>
               </a:rPr>
@@ -12108,7 +11328,7 @@
           </a:p>
           <a:p>
             <a:r>
-              <a:rPr lang="en-IN" dirty="0" smtClean="0">
+              <a:rPr lang="en-IN" dirty="0">
                 <a:latin typeface="Times New Roman" pitchFamily="18" charset="0"/>
                 <a:cs typeface="Times New Roman" pitchFamily="18" charset="0"/>
               </a:rPr>
@@ -12117,7 +11337,7 @@
           </a:p>
           <a:p>
             <a:r>
-              <a:rPr lang="en-IN" dirty="0" smtClean="0">
+              <a:rPr lang="en-IN" dirty="0">
                 <a:latin typeface="Times New Roman" pitchFamily="18" charset="0"/>
                 <a:cs typeface="Times New Roman" pitchFamily="18" charset="0"/>
               </a:rPr>
@@ -12126,7 +11346,7 @@
           </a:p>
           <a:p>
             <a:r>
-              <a:rPr lang="en-IN" dirty="0" smtClean="0">
+              <a:rPr lang="en-IN" dirty="0">
                 <a:latin typeface="Times New Roman" pitchFamily="18" charset="0"/>
                 <a:cs typeface="Times New Roman" pitchFamily="18" charset="0"/>
               </a:rPr>
@@ -12135,48 +11355,20 @@
           </a:p>
           <a:p>
             <a:r>
-              <a:rPr lang="en-IN" dirty="0" smtClean="0">
-                <a:latin typeface="Times New Roman" pitchFamily="18" charset="0"/>
-                <a:cs typeface="Times New Roman" pitchFamily="18" charset="0"/>
-              </a:rPr>
-              <a:t>So the </a:t>
-            </a:r>
-            <a:r>
-              <a:rPr lang="en-IN" dirty="0" smtClean="0">
-                <a:latin typeface="Times New Roman" pitchFamily="18" charset="0"/>
-                <a:cs typeface="Times New Roman" pitchFamily="18" charset="0"/>
-              </a:rPr>
-              <a:t>hardwire </a:t>
-            </a:r>
-            <a:r>
-              <a:rPr lang="en-IN" dirty="0" smtClean="0">
-                <a:latin typeface="Times New Roman" pitchFamily="18" charset="0"/>
-                <a:cs typeface="Times New Roman" pitchFamily="18" charset="0"/>
-              </a:rPr>
-              <a:t>requirement is high in Fully associative CM than direct mapped CM.</a:t>
-            </a:r>
-          </a:p>
-          <a:p>
-            <a:r>
-              <a:rPr lang="en-IN" dirty="0" smtClean="0">
-                <a:latin typeface="Times New Roman" pitchFamily="18" charset="0"/>
-                <a:cs typeface="Times New Roman" pitchFamily="18" charset="0"/>
-              </a:rPr>
-              <a:t>Set associative mapping needs less </a:t>
-            </a:r>
-            <a:r>
-              <a:rPr lang="en-IN" dirty="0" smtClean="0">
-                <a:latin typeface="Times New Roman" pitchFamily="18" charset="0"/>
-                <a:cs typeface="Times New Roman" pitchFamily="18" charset="0"/>
-              </a:rPr>
-              <a:t>hardwire </a:t>
-            </a:r>
-            <a:r>
-              <a:rPr lang="en-IN" dirty="0" smtClean="0">
-                <a:latin typeface="Times New Roman" pitchFamily="18" charset="0"/>
-                <a:cs typeface="Times New Roman" pitchFamily="18" charset="0"/>
-              </a:rPr>
-              <a:t>than fully associative mapping and more than direct mapped.</a:t>
+              <a:rPr lang="en-IN" dirty="0">
+                <a:latin typeface="Times New Roman" pitchFamily="18" charset="0"/>
+                <a:cs typeface="Times New Roman" pitchFamily="18" charset="0"/>
+              </a:rPr>
+              <a:t>So the hardwire requirement is high in Fully associative CM than direct mapped CM.</a:t>
+            </a:r>
+          </a:p>
+          <a:p>
+            <a:r>
+              <a:rPr lang="en-IN" dirty="0">
+                <a:latin typeface="Times New Roman" pitchFamily="18" charset="0"/>
+                <a:cs typeface="Times New Roman" pitchFamily="18" charset="0"/>
+              </a:rPr>
+              <a:t>Set associative mapping needs less hardwire than fully associative mapping and more than direct mapped.</a:t>
             </a:r>
             <a:endParaRPr lang="en-IN" sz="1800" dirty="0">
               <a:effectLst/>
@@ -12214,42 +11406,7 @@
                 <a:latin typeface="Times New Roman" panose="02020603050405020304" pitchFamily="18" charset="0"/>
                 <a:cs typeface="Times New Roman" panose="02020603050405020304" pitchFamily="18" charset="0"/>
               </a:rPr>
-              <a:t>Tag value and block offset value in the address are assumed as 101 and 1001010110 </a:t>
-            </a:r>
-            <a:r>
-              <a:rPr lang="en-IN" dirty="0" smtClean="0">
-                <a:latin typeface="Times New Roman" panose="02020603050405020304" pitchFamily="18" charset="0"/>
-                <a:cs typeface="Times New Roman" panose="02020603050405020304" pitchFamily="18" charset="0"/>
-              </a:rPr>
-              <a:t>respectively</a:t>
-            </a:r>
-            <a:r>
-              <a:rPr lang="en-IN" dirty="0">
-                <a:latin typeface="Times New Roman" panose="02020603050405020304" pitchFamily="18" charset="0"/>
-                <a:cs typeface="Times New Roman" panose="02020603050405020304" pitchFamily="18" charset="0"/>
-              </a:rPr>
-              <a:t>. </a:t>
-            </a:r>
-            <a:r>
-              <a:rPr lang="en-IN" dirty="0" smtClean="0">
-                <a:latin typeface="Times New Roman" panose="02020603050405020304" pitchFamily="18" charset="0"/>
-                <a:cs typeface="Times New Roman" panose="02020603050405020304" pitchFamily="18" charset="0"/>
-              </a:rPr>
-              <a:t>In fully associative CM as </a:t>
-            </a:r>
-            <a:r>
-              <a:rPr lang="en-IN" dirty="0">
-                <a:latin typeface="Times New Roman" panose="02020603050405020304" pitchFamily="18" charset="0"/>
-                <a:cs typeface="Times New Roman" panose="02020603050405020304" pitchFamily="18" charset="0"/>
-              </a:rPr>
-              <a:t>any MM block can be placed in any CM block frame so to decide hit or miss it is required to compare the tag value in the address (i.e. 101) with the tag values that are associated with the CM block </a:t>
-            </a:r>
-            <a:r>
-              <a:rPr lang="en-IN" dirty="0" smtClean="0">
-                <a:latin typeface="Times New Roman" panose="02020603050405020304" pitchFamily="18" charset="0"/>
-                <a:cs typeface="Times New Roman" panose="02020603050405020304" pitchFamily="18" charset="0"/>
-              </a:rPr>
-              <a:t>frames (shown in Fig 1).</a:t>
+              <a:t>Tag value and block offset value in the address are assumed as 101 and 1001010110 respectively. In fully associative CM as any MM block can be placed in any CM block frame so to decide hit or miss it is required to compare the tag value in the address (i.e. 101) with the tag values that are associated with the CM block frames (shown in Fig 1).</a:t>
             </a:r>
             <a:endParaRPr lang="en-IN" dirty="0"/>
           </a:p>
@@ -12258,7 +11415,7 @@
     </p:spTree>
     <p:extLst>
       <p:ext uri="{BB962C8B-B14F-4D97-AF65-F5344CB8AC3E}">
-        <p14:creationId xmlns:p14="http://schemas.microsoft.com/office/powerpoint/2010/main" xmlns="" val="548009921"/>
+        <p14:creationId xmlns:p14="http://schemas.microsoft.com/office/powerpoint/2010/main" val="548009921"/>
       </p:ext>
     </p:extLst>
   </p:cSld>
@@ -12319,21 +11476,7 @@
                 <a:latin typeface="Times New Roman" panose="02020603050405020304" pitchFamily="18" charset="0"/>
                 <a:cs typeface="Times New Roman" panose="02020603050405020304" pitchFamily="18" charset="0"/>
               </a:rPr>
-              <a:t>: A 2-way set associative CM has 4 sets and 8 block frames. MM has 128 blocks. LRU policy is used for cache block </a:t>
-            </a:r>
-            <a:r>
-              <a:rPr lang="en-IN" dirty="0" smtClean="0">
-                <a:latin typeface="Times New Roman" panose="02020603050405020304" pitchFamily="18" charset="0"/>
-                <a:cs typeface="Times New Roman" panose="02020603050405020304" pitchFamily="18" charset="0"/>
-              </a:rPr>
-              <a:t>replacement. The </a:t>
-            </a:r>
-            <a:r>
-              <a:rPr lang="en-IN" dirty="0">
-                <a:latin typeface="Times New Roman" panose="02020603050405020304" pitchFamily="18" charset="0"/>
-                <a:cs typeface="Times New Roman" panose="02020603050405020304" pitchFamily="18" charset="0"/>
-              </a:rPr>
-              <a:t>following is the sequence of memory block requests as generated by CPU during program execution.</a:t>
+              <a:t>: A 2-way set associative CM has 4 sets and 8 block frames. MM has 128 blocks. LRU policy is used for cache block replacement. The following is the sequence of memory block requests as generated by CPU during program execution.</a:t>
             </a:r>
           </a:p>
           <a:p>
@@ -12371,19 +11514,8 @@
                 <a:latin typeface="Times New Roman" panose="02020603050405020304" pitchFamily="18" charset="0"/>
                 <a:cs typeface="Times New Roman" panose="02020603050405020304" pitchFamily="18" charset="0"/>
               </a:rPr>
-              <a:t>, 16, 55</a:t>
-            </a:r>
-            <a:r>
-              <a:rPr lang="en-IN" dirty="0" smtClean="0">
-                <a:latin typeface="Times New Roman" panose="02020603050405020304" pitchFamily="18" charset="0"/>
-                <a:cs typeface="Times New Roman" panose="02020603050405020304" pitchFamily="18" charset="0"/>
-              </a:rPr>
-              <a:t>.</a:t>
-            </a:r>
-            <a:endParaRPr lang="en-IN" dirty="0">
-              <a:latin typeface="Times New Roman" panose="02020603050405020304" pitchFamily="18" charset="0"/>
-              <a:cs typeface="Times New Roman" panose="02020603050405020304" pitchFamily="18" charset="0"/>
-            </a:endParaRPr>
+              <a:t>, 16, 55.</a:t>
+            </a:r>
           </a:p>
           <a:p>
             <a:r>
@@ -12405,7 +11537,7 @@
           <p:nvPr>
             <p:extLst>
               <p:ext uri="{D42A27DB-BD31-4B8C-83A1-F6EECF244321}">
-                <p14:modId xmlns:p14="http://schemas.microsoft.com/office/powerpoint/2010/main" xmlns="" val="3681650488"/>
+                <p14:modId xmlns:p14="http://schemas.microsoft.com/office/powerpoint/2010/main" val="3681650488"/>
               </p:ext>
             </p:extLst>
           </p:nvPr>
@@ -12424,63 +11556,63 @@
                 <a:gridCol w="2165579">
                   <a:extLst>
                     <a:ext uri="{9D8B030D-6E8A-4147-A177-3AD203B41FA5}">
-                      <a16:colId xmlns:a16="http://schemas.microsoft.com/office/drawing/2014/main" xmlns="" val="3233767093"/>
+                      <a16:colId xmlns:a16="http://schemas.microsoft.com/office/drawing/2014/main" val="3233767093"/>
                     </a:ext>
                   </a:extLst>
                 </a:gridCol>
                 <a:gridCol w="637179">
                   <a:extLst>
                     <a:ext uri="{9D8B030D-6E8A-4147-A177-3AD203B41FA5}">
-                      <a16:colId xmlns:a16="http://schemas.microsoft.com/office/drawing/2014/main" xmlns="" val="2069382071"/>
+                      <a16:colId xmlns:a16="http://schemas.microsoft.com/office/drawing/2014/main" val="2069382071"/>
                     </a:ext>
                   </a:extLst>
                 </a:gridCol>
                 <a:gridCol w="582950">
                   <a:extLst>
                     <a:ext uri="{9D8B030D-6E8A-4147-A177-3AD203B41FA5}">
-                      <a16:colId xmlns:a16="http://schemas.microsoft.com/office/drawing/2014/main" xmlns="" val="3580826543"/>
+                      <a16:colId xmlns:a16="http://schemas.microsoft.com/office/drawing/2014/main" val="3580826543"/>
                     </a:ext>
                   </a:extLst>
                 </a:gridCol>
                 <a:gridCol w="596509">
                   <a:extLst>
                     <a:ext uri="{9D8B030D-6E8A-4147-A177-3AD203B41FA5}">
-                      <a16:colId xmlns:a16="http://schemas.microsoft.com/office/drawing/2014/main" xmlns="" val="1309038474"/>
+                      <a16:colId xmlns:a16="http://schemas.microsoft.com/office/drawing/2014/main" val="1309038474"/>
                     </a:ext>
                   </a:extLst>
                 </a:gridCol>
                 <a:gridCol w="528723">
                   <a:extLst>
                     <a:ext uri="{9D8B030D-6E8A-4147-A177-3AD203B41FA5}">
-                      <a16:colId xmlns:a16="http://schemas.microsoft.com/office/drawing/2014/main" xmlns="" val="3355548716"/>
+                      <a16:colId xmlns:a16="http://schemas.microsoft.com/office/drawing/2014/main" val="3355548716"/>
                     </a:ext>
                   </a:extLst>
                 </a:gridCol>
                 <a:gridCol w="528723">
                   <a:extLst>
                     <a:ext uri="{9D8B030D-6E8A-4147-A177-3AD203B41FA5}">
-                      <a16:colId xmlns:a16="http://schemas.microsoft.com/office/drawing/2014/main" xmlns="" val="2041860322"/>
+                      <a16:colId xmlns:a16="http://schemas.microsoft.com/office/drawing/2014/main" val="2041860322"/>
                     </a:ext>
                   </a:extLst>
                 </a:gridCol>
                 <a:gridCol w="582952">
                   <a:extLst>
                     <a:ext uri="{9D8B030D-6E8A-4147-A177-3AD203B41FA5}">
-                      <a16:colId xmlns:a16="http://schemas.microsoft.com/office/drawing/2014/main" xmlns="" val="652551411"/>
+                      <a16:colId xmlns:a16="http://schemas.microsoft.com/office/drawing/2014/main" val="652551411"/>
                     </a:ext>
                   </a:extLst>
                 </a:gridCol>
                 <a:gridCol w="799862">
                   <a:extLst>
                     <a:ext uri="{9D8B030D-6E8A-4147-A177-3AD203B41FA5}">
-                      <a16:colId xmlns:a16="http://schemas.microsoft.com/office/drawing/2014/main" xmlns="" val="3977461085"/>
+                      <a16:colId xmlns:a16="http://schemas.microsoft.com/office/drawing/2014/main" val="3977461085"/>
                     </a:ext>
                   </a:extLst>
                 </a:gridCol>
                 <a:gridCol w="596510">
                   <a:extLst>
                     <a:ext uri="{9D8B030D-6E8A-4147-A177-3AD203B41FA5}">
-                      <a16:colId xmlns:a16="http://schemas.microsoft.com/office/drawing/2014/main" xmlns="" val="2404229686"/>
+                      <a16:colId xmlns:a16="http://schemas.microsoft.com/office/drawing/2014/main" val="2404229686"/>
                     </a:ext>
                   </a:extLst>
                 </a:gridCol>
@@ -12683,7 +11815,7 @@
                 </a:tc>
                 <a:extLst>
                   <a:ext uri="{0D108BD9-81ED-4DB2-BD59-A6C34878D82A}">
-                    <a16:rowId xmlns:a16="http://schemas.microsoft.com/office/drawing/2014/main" xmlns="" val="2622136168"/>
+                    <a16:rowId xmlns:a16="http://schemas.microsoft.com/office/drawing/2014/main" val="2622136168"/>
                   </a:ext>
                 </a:extLst>
               </a:tr>
@@ -12969,7 +12101,7 @@
                 </a:tc>
                 <a:extLst>
                   <a:ext uri="{0D108BD9-81ED-4DB2-BD59-A6C34878D82A}">
-                    <a16:rowId xmlns:a16="http://schemas.microsoft.com/office/drawing/2014/main" xmlns="" val="3370048726"/>
+                    <a16:rowId xmlns:a16="http://schemas.microsoft.com/office/drawing/2014/main" val="3370048726"/>
                   </a:ext>
                 </a:extLst>
               </a:tr>
@@ -13263,7 +12395,7 @@
                 </a:tc>
                 <a:extLst>
                   <a:ext uri="{0D108BD9-81ED-4DB2-BD59-A6C34878D82A}">
-                    <a16:rowId xmlns:a16="http://schemas.microsoft.com/office/drawing/2014/main" xmlns="" val="3215539951"/>
+                    <a16:rowId xmlns:a16="http://schemas.microsoft.com/office/drawing/2014/main" val="3215539951"/>
                   </a:ext>
                 </a:extLst>
               </a:tr>
@@ -13298,7 +12430,7 @@
               <a:buChar char="•"/>
             </a:pPr>
             <a:r>
-              <a:rPr lang="en-IN" dirty="0" smtClean="0">
+              <a:rPr lang="en-IN" dirty="0">
                 <a:latin typeface="Times New Roman" panose="02020603050405020304" pitchFamily="18" charset="0"/>
                 <a:cs typeface="Times New Roman" panose="02020603050405020304" pitchFamily="18" charset="0"/>
               </a:rPr>
@@ -13311,7 +12443,7 @@
               <a:buChar char="•"/>
             </a:pPr>
             <a:r>
-              <a:rPr lang="en-IN" dirty="0" smtClean="0">
+              <a:rPr lang="en-IN" dirty="0">
                 <a:latin typeface="Times New Roman" panose="02020603050405020304" pitchFamily="18" charset="0"/>
                 <a:cs typeface="Times New Roman" panose="02020603050405020304" pitchFamily="18" charset="0"/>
               </a:rPr>
@@ -13324,7 +12456,7 @@
               <a:buChar char="•"/>
             </a:pPr>
             <a:r>
-              <a:rPr lang="en-IN" dirty="0" smtClean="0">
+              <a:rPr lang="en-IN" dirty="0">
                 <a:latin typeface="Times New Roman" panose="02020603050405020304" pitchFamily="18" charset="0"/>
                 <a:cs typeface="Times New Roman" panose="02020603050405020304" pitchFamily="18" charset="0"/>
               </a:rPr>
@@ -13337,7 +12469,7 @@
               <a:buChar char="•"/>
             </a:pPr>
             <a:r>
-              <a:rPr lang="en-IN" dirty="0" smtClean="0">
+              <a:rPr lang="en-IN" dirty="0">
                 <a:latin typeface="Times New Roman" panose="02020603050405020304" pitchFamily="18" charset="0"/>
                 <a:cs typeface="Times New Roman" panose="02020603050405020304" pitchFamily="18" charset="0"/>
               </a:rPr>
@@ -13350,7 +12482,7 @@
               <a:buChar char="•"/>
             </a:pPr>
             <a:r>
-              <a:rPr lang="en-IN" dirty="0" smtClean="0">
+              <a:rPr lang="en-IN" dirty="0">
                 <a:latin typeface="Times New Roman" panose="02020603050405020304" pitchFamily="18" charset="0"/>
                 <a:cs typeface="Times New Roman" panose="02020603050405020304" pitchFamily="18" charset="0"/>
               </a:rPr>
@@ -13363,7 +12495,7 @@
               <a:buChar char="•"/>
             </a:pPr>
             <a:r>
-              <a:rPr lang="en-IN" dirty="0" smtClean="0">
+              <a:rPr lang="en-IN" dirty="0">
                 <a:latin typeface="Times New Roman" panose="02020603050405020304" pitchFamily="18" charset="0"/>
                 <a:cs typeface="Times New Roman" panose="02020603050405020304" pitchFamily="18" charset="0"/>
               </a:rPr>
@@ -13376,7 +12508,7 @@
     </p:spTree>
     <p:extLst>
       <p:ext uri="{BB962C8B-B14F-4D97-AF65-F5344CB8AC3E}">
-        <p14:creationId xmlns:p14="http://schemas.microsoft.com/office/powerpoint/2010/main" xmlns="" val="1959194067"/>
+        <p14:creationId xmlns:p14="http://schemas.microsoft.com/office/powerpoint/2010/main" val="1959194067"/>
       </p:ext>
     </p:extLst>
   </p:cSld>
@@ -13426,21 +12558,21 @@
           <a:lstStyle/>
           <a:p>
             <a:r>
-              <a:rPr lang="en-IN" dirty="0" smtClean="0">
+              <a:rPr lang="en-IN" dirty="0">
                 <a:latin typeface="Times New Roman" pitchFamily="18" charset="0"/>
                 <a:cs typeface="Times New Roman" pitchFamily="18" charset="0"/>
               </a:rPr>
               <a:t>7</a:t>
             </a:r>
             <a:r>
-              <a:rPr lang="en-IN" baseline="30000" dirty="0" smtClean="0">
+              <a:rPr lang="en-IN" baseline="30000" dirty="0">
                 <a:latin typeface="Times New Roman" pitchFamily="18" charset="0"/>
                 <a:cs typeface="Times New Roman" pitchFamily="18" charset="0"/>
               </a:rPr>
               <a:t>th</a:t>
             </a:r>
             <a:r>
-              <a:rPr lang="en-IN" dirty="0" smtClean="0">
+              <a:rPr lang="en-IN" dirty="0">
                 <a:latin typeface="Times New Roman" pitchFamily="18" charset="0"/>
                 <a:cs typeface="Times New Roman" pitchFamily="18" charset="0"/>
               </a:rPr>
@@ -13449,30 +12581,26 @@
           </a:p>
           <a:p>
             <a:r>
-              <a:rPr lang="en-IN" dirty="0" smtClean="0">
+              <a:rPr lang="en-IN" dirty="0">
                 <a:latin typeface="Times New Roman" pitchFamily="18" charset="0"/>
                 <a:cs typeface="Times New Roman" pitchFamily="18" charset="0"/>
               </a:rPr>
               <a:t>8</a:t>
             </a:r>
             <a:r>
-              <a:rPr lang="en-IN" baseline="30000" dirty="0" smtClean="0">
+              <a:rPr lang="en-IN" baseline="30000" dirty="0">
                 <a:latin typeface="Times New Roman" pitchFamily="18" charset="0"/>
                 <a:cs typeface="Times New Roman" pitchFamily="18" charset="0"/>
               </a:rPr>
               <a:t>th</a:t>
             </a:r>
             <a:r>
-              <a:rPr lang="en-IN" dirty="0" smtClean="0">
+              <a:rPr lang="en-IN" dirty="0">
                 <a:latin typeface="Times New Roman" pitchFamily="18" charset="0"/>
                 <a:cs typeface="Times New Roman" pitchFamily="18" charset="0"/>
               </a:rPr>
               <a:t> CPU request is for MM block 55. The set address is computed as 55 mod 4 = 3. But both the block frames in set 11 are occupied. So conflict miss occurs among MM blocks 3, 7, 55. MM block 3 is selected as victim by LRU policy and is replaced by MM block 55.</a:t>
             </a:r>
-            <a:endParaRPr lang="en-IN" dirty="0">
-              <a:latin typeface="Times New Roman" pitchFamily="18" charset="0"/>
-              <a:cs typeface="Times New Roman" pitchFamily="18" charset="0"/>
-            </a:endParaRPr>
           </a:p>
         </p:txBody>
       </p:sp>
@@ -13534,8 +12662,8 @@
           <a:chExt cx="0" cy="0"/>
         </a:xfrm>
       </p:grpSpPr>
-      <mc:AlternateContent xmlns:mc="http://schemas.openxmlformats.org/markup-compatibility/2006">
-        <mc:Choice xmlns:a14="http://schemas.microsoft.com/office/drawing/2010/main" xmlns="" Requires="a14">
+      <mc:AlternateContent xmlns:mc="http://schemas.openxmlformats.org/markup-compatibility/2006" xmlns:a14="http://schemas.microsoft.com/office/drawing/2010/main">
+        <mc:Choice Requires="a14">
           <p:sp>
             <p:nvSpPr>
               <p:cNvPr id="11" name="TextBox 10"/>
@@ -13626,18 +12754,24 @@
                     <m:f>
                       <m:fPr>
                         <m:ctrlPr>
-                          <a:rPr lang="en-IN" i="1"/>
+                          <a:rPr lang="en-IN" i="1">
+                            <a:latin typeface="Cambria Math" panose="02040503050406030204" pitchFamily="18" charset="0"/>
+                          </a:rPr>
                         </m:ctrlPr>
                       </m:fPr>
                       <m:num>
                         <m:r>
-                          <a:rPr lang="en-IN" i="1"/>
+                          <a:rPr lang="en-IN" i="1">
+                            <a:latin typeface="Cambria Math" panose="02040503050406030204" pitchFamily="18" charset="0"/>
+                          </a:rPr>
                           <m:t>80</m:t>
                         </m:r>
                       </m:num>
                       <m:den>
                         <m:r>
-                          <a:rPr lang="en-IN" i="1"/>
+                          <a:rPr lang="en-IN" i="1">
+                            <a:latin typeface="Cambria Math" panose="02040503050406030204" pitchFamily="18" charset="0"/>
+                          </a:rPr>
                           <m:t>100</m:t>
                         </m:r>
                       </m:den>
@@ -13677,47 +12811,65 @@
                     <m:f>
                       <m:fPr>
                         <m:ctrlPr>
-                          <a:rPr lang="en-IN" i="1"/>
+                          <a:rPr lang="en-IN" i="1">
+                            <a:latin typeface="Cambria Math" panose="02040503050406030204" pitchFamily="18" charset="0"/>
+                          </a:rPr>
                         </m:ctrlPr>
                       </m:fPr>
                       <m:num>
                         <m:r>
-                          <a:rPr lang="en-IN" i="1"/>
+                          <a:rPr lang="en-IN" i="1">
+                            <a:latin typeface="Cambria Math" panose="02040503050406030204" pitchFamily="18" charset="0"/>
+                          </a:rPr>
                           <m:t>100∗</m:t>
                         </m:r>
                         <m:r>
-                          <a:rPr lang="en-IN" i="1"/>
+                          <a:rPr lang="en-IN" i="1">
+                            <a:latin typeface="Cambria Math" panose="02040503050406030204" pitchFamily="18" charset="0"/>
+                          </a:rPr>
                           <m:t>𝑡𝑐</m:t>
                         </m:r>
                         <m:r>
-                          <a:rPr lang="en-IN" i="1"/>
+                          <a:rPr lang="en-IN" i="1">
+                            <a:latin typeface="Cambria Math" panose="02040503050406030204" pitchFamily="18" charset="0"/>
+                          </a:rPr>
                           <m:t>+</m:t>
                         </m:r>
                         <m:d>
                           <m:dPr>
                             <m:ctrlPr>
-                              <a:rPr lang="en-IN" i="1"/>
+                              <a:rPr lang="en-IN" i="1">
+                                <a:latin typeface="Cambria Math" panose="02040503050406030204" pitchFamily="18" charset="0"/>
+                              </a:rPr>
                             </m:ctrlPr>
                           </m:dPr>
                           <m:e>
                             <m:r>
-                              <a:rPr lang="en-IN" i="1"/>
+                              <a:rPr lang="en-IN" i="1">
+                                <a:latin typeface="Cambria Math" panose="02040503050406030204" pitchFamily="18" charset="0"/>
+                              </a:rPr>
                               <m:t>100−80</m:t>
                             </m:r>
                           </m:e>
                         </m:d>
                         <m:r>
-                          <a:rPr lang="en-IN" i="1"/>
+                          <a:rPr lang="en-IN" i="1">
+                            <a:latin typeface="Cambria Math" panose="02040503050406030204" pitchFamily="18" charset="0"/>
+                          </a:rPr>
                           <m:t>∗</m:t>
                         </m:r>
                         <m:r>
-                          <a:rPr lang="en-IN" i="1"/>
+                          <a:rPr lang="en-IN" i="1">
+                            <a:latin typeface="Cambria Math" panose="02040503050406030204" pitchFamily="18" charset="0"/>
+                          </a:rPr>
                           <m:t>𝑡𝑚</m:t>
                         </m:r>
                       </m:num>
                       <m:den>
                         <m:r>
-                          <a:rPr lang="en-IN" i="1"/>
+                          <a:rPr lang="en-IN" i="1">
+                            <a:latin typeface="Cambria Math" panose="02040503050406030204" pitchFamily="18" charset="0"/>
+                          </a:rPr>
                           <m:t>100</m:t>
                         </m:r>
                       </m:den>
@@ -13750,18 +12902,24 @@
                     <m:f>
                       <m:fPr>
                         <m:ctrlPr>
-                          <a:rPr lang="en-IN" i="1"/>
+                          <a:rPr lang="en-IN" i="1">
+                            <a:latin typeface="Cambria Math" panose="02040503050406030204" pitchFamily="18" charset="0"/>
+                          </a:rPr>
                         </m:ctrlPr>
                       </m:fPr>
                       <m:num>
                         <m:r>
-                          <a:rPr lang="en-IN" i="1"/>
+                          <a:rPr lang="en-IN" i="1">
+                            <a:latin typeface="Cambria Math" panose="02040503050406030204" pitchFamily="18" charset="0"/>
+                          </a:rPr>
                           <m:t>80</m:t>
                         </m:r>
                       </m:num>
                       <m:den>
                         <m:r>
-                          <a:rPr lang="en-IN" i="1"/>
+                          <a:rPr lang="en-IN" i="1">
+                            <a:latin typeface="Cambria Math" panose="02040503050406030204" pitchFamily="18" charset="0"/>
+                          </a:rPr>
                           <m:t>100</m:t>
                         </m:r>
                       </m:den>
@@ -13833,18 +12991,11 @@
               </a:p>
               <a:p>
                 <a:r>
-                  <a:rPr lang="en-IN" dirty="0" smtClean="0">
-                    <a:latin typeface="Times New Roman" panose="02020603050405020304" pitchFamily="18" charset="0"/>
-                    <a:cs typeface="Times New Roman" panose="02020603050405020304" pitchFamily="18" charset="0"/>
-                  </a:rPr>
-                  <a:t>Example</a:t>
-                </a:r>
-                <a:r>
                   <a:rPr lang="en-IN" dirty="0">
                     <a:latin typeface="Times New Roman" panose="02020603050405020304" pitchFamily="18" charset="0"/>
                     <a:cs typeface="Times New Roman" panose="02020603050405020304" pitchFamily="18" charset="0"/>
                   </a:rPr>
-                  <a:t> </a:t>
+                  <a:t>Example </a:t>
                 </a:r>
               </a:p>
               <a:p>
@@ -13901,66 +13052,96 @@
                     <m:f>
                       <m:fPr>
                         <m:ctrlPr>
-                          <a:rPr lang="en-IN" i="1"/>
+                          <a:rPr lang="en-IN" i="1">
+                            <a:latin typeface="Cambria Math" panose="02040503050406030204" pitchFamily="18" charset="0"/>
+                          </a:rPr>
                         </m:ctrlPr>
                       </m:fPr>
                       <m:num>
                         <m:r>
-                          <a:rPr lang="en-IN" i="1"/>
+                          <a:rPr lang="en-IN" i="1">
+                            <a:latin typeface="Cambria Math" panose="02040503050406030204" pitchFamily="18" charset="0"/>
+                          </a:rPr>
                           <m:t>𝑆𝑖𝑧𝑒</m:t>
                         </m:r>
                         <m:r>
-                          <a:rPr lang="en-IN" i="1"/>
+                          <a:rPr lang="en-IN" i="1">
+                            <a:latin typeface="Cambria Math" panose="02040503050406030204" pitchFamily="18" charset="0"/>
+                          </a:rPr>
                           <m:t> </m:t>
                         </m:r>
                         <m:r>
-                          <a:rPr lang="en-IN" i="1"/>
+                          <a:rPr lang="en-IN" i="1">
+                            <a:latin typeface="Cambria Math" panose="02040503050406030204" pitchFamily="18" charset="0"/>
+                          </a:rPr>
                           <m:t>𝑜𝑓</m:t>
                         </m:r>
                         <m:r>
-                          <a:rPr lang="en-IN" i="1"/>
+                          <a:rPr lang="en-IN" i="1">
+                            <a:latin typeface="Cambria Math" panose="02040503050406030204" pitchFamily="18" charset="0"/>
+                          </a:rPr>
                           <m:t> </m:t>
                         </m:r>
                         <m:r>
-                          <a:rPr lang="en-IN" i="1"/>
+                          <a:rPr lang="en-IN" i="1">
+                            <a:latin typeface="Cambria Math" panose="02040503050406030204" pitchFamily="18" charset="0"/>
+                          </a:rPr>
                           <m:t>𝐶𝑀</m:t>
                         </m:r>
                       </m:num>
                       <m:den>
                         <m:r>
-                          <a:rPr lang="en-IN" i="1"/>
+                          <a:rPr lang="en-IN" i="1">
+                            <a:latin typeface="Cambria Math" panose="02040503050406030204" pitchFamily="18" charset="0"/>
+                          </a:rPr>
                           <m:t>𝑆𝑖𝑧𝑒</m:t>
                         </m:r>
                         <m:r>
-                          <a:rPr lang="en-IN" i="1"/>
+                          <a:rPr lang="en-IN" i="1">
+                            <a:latin typeface="Cambria Math" panose="02040503050406030204" pitchFamily="18" charset="0"/>
+                          </a:rPr>
                           <m:t> </m:t>
                         </m:r>
                         <m:r>
-                          <a:rPr lang="en-IN" i="1"/>
+                          <a:rPr lang="en-IN" i="1">
+                            <a:latin typeface="Cambria Math" panose="02040503050406030204" pitchFamily="18" charset="0"/>
+                          </a:rPr>
                           <m:t>𝑜𝑓</m:t>
                         </m:r>
                         <m:r>
-                          <a:rPr lang="en-IN" i="1"/>
+                          <a:rPr lang="en-IN" i="1">
+                            <a:latin typeface="Cambria Math" panose="02040503050406030204" pitchFamily="18" charset="0"/>
+                          </a:rPr>
                           <m:t> </m:t>
                         </m:r>
                         <m:r>
-                          <a:rPr lang="en-IN" i="1"/>
+                          <a:rPr lang="en-IN" i="1">
+                            <a:latin typeface="Cambria Math" panose="02040503050406030204" pitchFamily="18" charset="0"/>
+                          </a:rPr>
                           <m:t>𝑒𝑎𝑐h</m:t>
                         </m:r>
                         <m:r>
-                          <a:rPr lang="en-IN" i="1"/>
+                          <a:rPr lang="en-IN" i="1">
+                            <a:latin typeface="Cambria Math" panose="02040503050406030204" pitchFamily="18" charset="0"/>
+                          </a:rPr>
                           <m:t> </m:t>
                         </m:r>
                         <m:r>
-                          <a:rPr lang="en-IN" i="1"/>
+                          <a:rPr lang="en-IN" i="1">
+                            <a:latin typeface="Cambria Math" panose="02040503050406030204" pitchFamily="18" charset="0"/>
+                          </a:rPr>
                           <m:t>𝑏𝑙𝑜𝑐𝑘</m:t>
                         </m:r>
                         <m:r>
-                          <a:rPr lang="en-IN" i="1"/>
+                          <a:rPr lang="en-IN" i="1">
+                            <a:latin typeface="Cambria Math" panose="02040503050406030204" pitchFamily="18" charset="0"/>
+                          </a:rPr>
                           <m:t> </m:t>
                         </m:r>
                         <m:r>
-                          <a:rPr lang="en-IN" i="1"/>
+                          <a:rPr lang="en-IN" i="1">
+                            <a:latin typeface="Cambria Math" panose="02040503050406030204" pitchFamily="18" charset="0"/>
+                          </a:rPr>
                           <m:t>𝑓𝑟𝑎𝑚𝑒</m:t>
                         </m:r>
                       </m:den>
@@ -13979,26 +13160,36 @@
                     <m:f>
                       <m:fPr>
                         <m:ctrlPr>
-                          <a:rPr lang="en-IN" i="1"/>
+                          <a:rPr lang="en-IN" i="1">
+                            <a:latin typeface="Cambria Math" panose="02040503050406030204" pitchFamily="18" charset="0"/>
+                          </a:rPr>
                         </m:ctrlPr>
                       </m:fPr>
                       <m:num>
                         <m:r>
-                          <a:rPr lang="en-IN" i="1"/>
+                          <a:rPr lang="en-IN" i="1">
+                            <a:latin typeface="Cambria Math" panose="02040503050406030204" pitchFamily="18" charset="0"/>
+                          </a:rPr>
                           <m:t>32−</m:t>
                         </m:r>
                         <m:r>
-                          <a:rPr lang="en-IN" i="1"/>
+                          <a:rPr lang="en-IN" i="1">
+                            <a:latin typeface="Cambria Math" panose="02040503050406030204" pitchFamily="18" charset="0"/>
+                          </a:rPr>
                           <m:t>𝐾𝐵</m:t>
                         </m:r>
                       </m:num>
                       <m:den>
                         <m:r>
-                          <a:rPr lang="en-IN" i="1"/>
+                          <a:rPr lang="en-IN" i="1">
+                            <a:latin typeface="Cambria Math" panose="02040503050406030204" pitchFamily="18" charset="0"/>
+                          </a:rPr>
                           <m:t>32−</m:t>
                         </m:r>
                         <m:r>
-                          <a:rPr lang="en-IN" i="1"/>
+                          <a:rPr lang="en-IN" i="1">
+                            <a:latin typeface="Cambria Math" panose="02040503050406030204" pitchFamily="18" charset="0"/>
+                          </a:rPr>
                           <m:t>𝑏𝑦𝑡𝑒</m:t>
                         </m:r>
                       </m:den>
@@ -14027,7 +13218,7 @@
             </p:txBody>
           </p:sp>
         </mc:Choice>
-        <mc:Fallback>
+        <mc:Fallback xmlns="">
           <p:sp>
             <p:nvSpPr>
               <p:cNvPr id="11" name="TextBox 10"/>
@@ -14075,7 +13266,7 @@
           <p:nvPr>
             <p:extLst>
               <p:ext uri="{D42A27DB-BD31-4B8C-83A1-F6EECF244321}">
-                <p14:modId xmlns:p14="http://schemas.microsoft.com/office/powerpoint/2010/main" xmlns="" val="2465064346"/>
+                <p14:modId xmlns:p14="http://schemas.microsoft.com/office/powerpoint/2010/main" val="2465064346"/>
               </p:ext>
             </p:extLst>
           </p:nvPr>
@@ -14094,21 +13285,21 @@
                 <a:gridCol w="669703">
                   <a:extLst>
                     <a:ext uri="{9D8B030D-6E8A-4147-A177-3AD203B41FA5}">
-                      <a16:colId xmlns:a16="http://schemas.microsoft.com/office/drawing/2014/main" xmlns="" val="3758634664"/>
+                      <a16:colId xmlns:a16="http://schemas.microsoft.com/office/drawing/2014/main" val="3758634664"/>
                     </a:ext>
                   </a:extLst>
                 </a:gridCol>
                 <a:gridCol w="949008">
                   <a:extLst>
                     <a:ext uri="{9D8B030D-6E8A-4147-A177-3AD203B41FA5}">
-                      <a16:colId xmlns:a16="http://schemas.microsoft.com/office/drawing/2014/main" xmlns="" val="978839153"/>
+                      <a16:colId xmlns:a16="http://schemas.microsoft.com/office/drawing/2014/main" val="978839153"/>
                     </a:ext>
                   </a:extLst>
                 </a:gridCol>
                 <a:gridCol w="1639644">
                   <a:extLst>
                     <a:ext uri="{9D8B030D-6E8A-4147-A177-3AD203B41FA5}">
-                      <a16:colId xmlns:a16="http://schemas.microsoft.com/office/drawing/2014/main" xmlns="" val="2835983681"/>
+                      <a16:colId xmlns:a16="http://schemas.microsoft.com/office/drawing/2014/main" val="2835983681"/>
                     </a:ext>
                   </a:extLst>
                 </a:gridCol>
@@ -14209,7 +13400,7 @@
                 </a:tc>
                 <a:extLst>
                   <a:ext uri="{0D108BD9-81ED-4DB2-BD59-A6C34878D82A}">
-                    <a16:rowId xmlns:a16="http://schemas.microsoft.com/office/drawing/2014/main" xmlns="" val="1671146861"/>
+                    <a16:rowId xmlns:a16="http://schemas.microsoft.com/office/drawing/2014/main" val="1671146861"/>
                   </a:ext>
                 </a:extLst>
               </a:tr>
@@ -14226,7 +13417,7 @@
           <p:nvPr>
             <p:extLst>
               <p:ext uri="{D42A27DB-BD31-4B8C-83A1-F6EECF244321}">
-                <p14:modId xmlns:p14="http://schemas.microsoft.com/office/powerpoint/2010/main" xmlns="" val="1586800408"/>
+                <p14:modId xmlns:p14="http://schemas.microsoft.com/office/powerpoint/2010/main" val="1586800408"/>
               </p:ext>
             </p:extLst>
           </p:nvPr>
@@ -14245,7 +13436,7 @@
                 <a:gridCol w="1588077">
                   <a:extLst>
                     <a:ext uri="{9D8B030D-6E8A-4147-A177-3AD203B41FA5}">
-                      <a16:colId xmlns:a16="http://schemas.microsoft.com/office/drawing/2014/main" xmlns="" val="907670879"/>
+                      <a16:colId xmlns:a16="http://schemas.microsoft.com/office/drawing/2014/main" val="907670879"/>
                     </a:ext>
                   </a:extLst>
                 </a:gridCol>
@@ -14284,7 +13475,7 @@
                 </a:tc>
                 <a:extLst>
                   <a:ext uri="{0D108BD9-81ED-4DB2-BD59-A6C34878D82A}">
-                    <a16:rowId xmlns:a16="http://schemas.microsoft.com/office/drawing/2014/main" xmlns="" val="3500780124"/>
+                    <a16:rowId xmlns:a16="http://schemas.microsoft.com/office/drawing/2014/main" val="3500780124"/>
                   </a:ext>
                 </a:extLst>
               </a:tr>
@@ -14422,26 +13613,15 @@
                 <a:latin typeface="Times New Roman" panose="02020603050405020304" pitchFamily="18" charset="0"/>
                 <a:cs typeface="Times New Roman" panose="02020603050405020304" pitchFamily="18" charset="0"/>
               </a:rPr>
-              <a:t>So the size of tag field is (size of address-size of index field-size of block offset field)=(32-10-5)=17-bit</a:t>
-            </a:r>
-            <a:r>
-              <a:rPr lang="en-IN" dirty="0" smtClean="0">
-                <a:latin typeface="Times New Roman" panose="02020603050405020304" pitchFamily="18" charset="0"/>
-                <a:cs typeface="Times New Roman" panose="02020603050405020304" pitchFamily="18" charset="0"/>
-              </a:rPr>
-              <a:t>.</a:t>
-            </a:r>
-            <a:endParaRPr lang="en-IN" dirty="0">
-              <a:latin typeface="Times New Roman" panose="02020603050405020304" pitchFamily="18" charset="0"/>
-              <a:cs typeface="Times New Roman" panose="02020603050405020304" pitchFamily="18" charset="0"/>
-            </a:endParaRPr>
+              <a:t>So the size of tag field is (size of address-size of index field-size of block offset field)=(32-10-5)=17-bit.</a:t>
+            </a:r>
           </a:p>
         </p:txBody>
       </p:sp>
     </p:spTree>
     <p:extLst>
       <p:ext uri="{BB962C8B-B14F-4D97-AF65-F5344CB8AC3E}">
-        <p14:creationId xmlns:p14="http://schemas.microsoft.com/office/powerpoint/2010/main" xmlns="" val="1697974687"/>
+        <p14:creationId xmlns:p14="http://schemas.microsoft.com/office/powerpoint/2010/main" val="1697974687"/>
       </p:ext>
     </p:extLst>
   </p:cSld>
@@ -14468,8 +13648,8 @@
           <a:chExt cx="0" cy="0"/>
         </a:xfrm>
       </p:grpSpPr>
-      <mc:AlternateContent xmlns:mc="http://schemas.openxmlformats.org/markup-compatibility/2006">
-        <mc:Choice xmlns:a14="http://schemas.microsoft.com/office/drawing/2010/main" xmlns="" Requires="a14">
+      <mc:AlternateContent xmlns:mc="http://schemas.openxmlformats.org/markup-compatibility/2006" xmlns:a14="http://schemas.microsoft.com/office/drawing/2010/main">
+        <mc:Choice Requires="a14">
           <p:sp>
             <p:nvSpPr>
               <p:cNvPr id="2" name="TextBox 1"/>
@@ -14556,122 +13736,180 @@
                     <m:f>
                       <m:fPr>
                         <m:ctrlPr>
-                          <a:rPr lang="en-IN" i="1"/>
+                          <a:rPr lang="en-IN" i="1">
+                            <a:latin typeface="Cambria Math" panose="02040503050406030204" pitchFamily="18" charset="0"/>
+                          </a:rPr>
                         </m:ctrlPr>
                       </m:fPr>
                       <m:num>
                         <m:r>
-                          <a:rPr lang="en-IN" i="1"/>
+                          <a:rPr lang="en-IN" i="1">
+                            <a:latin typeface="Cambria Math" panose="02040503050406030204" pitchFamily="18" charset="0"/>
+                          </a:rPr>
                           <m:t>𝑁𝑢𝑚𝑏𝑒𝑟</m:t>
                         </m:r>
                         <m:r>
-                          <a:rPr lang="en-IN" i="1"/>
+                          <a:rPr lang="en-IN" i="1">
+                            <a:latin typeface="Cambria Math" panose="02040503050406030204" pitchFamily="18" charset="0"/>
+                          </a:rPr>
                           <m:t> </m:t>
                         </m:r>
                         <m:r>
-                          <a:rPr lang="en-IN" i="1"/>
+                          <a:rPr lang="en-IN" i="1">
+                            <a:latin typeface="Cambria Math" panose="02040503050406030204" pitchFamily="18" charset="0"/>
+                          </a:rPr>
                           <m:t>𝑜𝑓</m:t>
                         </m:r>
                         <m:r>
-                          <a:rPr lang="en-IN" i="1"/>
+                          <a:rPr lang="en-IN" i="1">
+                            <a:latin typeface="Cambria Math" panose="02040503050406030204" pitchFamily="18" charset="0"/>
+                          </a:rPr>
                           <m:t> </m:t>
                         </m:r>
                         <m:r>
-                          <a:rPr lang="en-IN" i="1"/>
+                          <a:rPr lang="en-IN" i="1">
+                            <a:latin typeface="Cambria Math" panose="02040503050406030204" pitchFamily="18" charset="0"/>
+                          </a:rPr>
                           <m:t>𝑏𝑙𝑜𝑐𝑘</m:t>
                         </m:r>
                         <m:r>
-                          <a:rPr lang="en-IN" i="1"/>
+                          <a:rPr lang="en-IN" i="1">
+                            <a:latin typeface="Cambria Math" panose="02040503050406030204" pitchFamily="18" charset="0"/>
+                          </a:rPr>
                           <m:t> </m:t>
                         </m:r>
                         <m:r>
-                          <a:rPr lang="en-IN" i="1"/>
+                          <a:rPr lang="en-IN" i="1">
+                            <a:latin typeface="Cambria Math" panose="02040503050406030204" pitchFamily="18" charset="0"/>
+                          </a:rPr>
                           <m:t>𝑓𝑟𝑎𝑚𝑒𝑠</m:t>
                         </m:r>
                         <m:r>
-                          <a:rPr lang="en-IN" i="1"/>
+                          <a:rPr lang="en-IN" i="1">
+                            <a:latin typeface="Cambria Math" panose="02040503050406030204" pitchFamily="18" charset="0"/>
+                          </a:rPr>
                           <m:t> </m:t>
                         </m:r>
                         <m:r>
-                          <a:rPr lang="en-IN" i="1"/>
+                          <a:rPr lang="en-IN" i="1">
+                            <a:latin typeface="Cambria Math" panose="02040503050406030204" pitchFamily="18" charset="0"/>
+                          </a:rPr>
                           <m:t>𝑖𝑛</m:t>
                         </m:r>
                         <m:r>
-                          <a:rPr lang="en-IN" i="1"/>
+                          <a:rPr lang="en-IN" i="1">
+                            <a:latin typeface="Cambria Math" panose="02040503050406030204" pitchFamily="18" charset="0"/>
+                          </a:rPr>
                           <m:t> </m:t>
                         </m:r>
                         <m:r>
-                          <a:rPr lang="en-IN" i="1"/>
+                          <a:rPr lang="en-IN" i="1">
+                            <a:latin typeface="Cambria Math" panose="02040503050406030204" pitchFamily="18" charset="0"/>
+                          </a:rPr>
                           <m:t>𝐶𝑀</m:t>
                         </m:r>
                       </m:num>
                       <m:den>
                         <m:r>
-                          <a:rPr lang="en-IN" i="1"/>
+                          <a:rPr lang="en-IN" i="1">
+                            <a:latin typeface="Cambria Math" panose="02040503050406030204" pitchFamily="18" charset="0"/>
+                          </a:rPr>
                           <m:t>𝑁𝑢𝑚𝑏𝑒𝑟</m:t>
                         </m:r>
                         <m:r>
-                          <a:rPr lang="en-IN" i="1"/>
+                          <a:rPr lang="en-IN" i="1">
+                            <a:latin typeface="Cambria Math" panose="02040503050406030204" pitchFamily="18" charset="0"/>
+                          </a:rPr>
                           <m:t> </m:t>
                         </m:r>
                         <m:r>
-                          <a:rPr lang="en-IN" i="1"/>
+                          <a:rPr lang="en-IN" i="1">
+                            <a:latin typeface="Cambria Math" panose="02040503050406030204" pitchFamily="18" charset="0"/>
+                          </a:rPr>
                           <m:t>𝑜𝑓</m:t>
                         </m:r>
                         <m:r>
-                          <a:rPr lang="en-IN" i="1"/>
+                          <a:rPr lang="en-IN" i="1">
+                            <a:latin typeface="Cambria Math" panose="02040503050406030204" pitchFamily="18" charset="0"/>
+                          </a:rPr>
                           <m:t> </m:t>
                         </m:r>
                         <m:r>
-                          <a:rPr lang="en-IN" i="1"/>
+                          <a:rPr lang="en-IN" i="1">
+                            <a:latin typeface="Cambria Math" panose="02040503050406030204" pitchFamily="18" charset="0"/>
+                          </a:rPr>
                           <m:t>𝑏𝑙𝑜𝑐𝑘</m:t>
                         </m:r>
                         <m:r>
-                          <a:rPr lang="en-IN" i="1"/>
+                          <a:rPr lang="en-IN" i="1">
+                            <a:latin typeface="Cambria Math" panose="02040503050406030204" pitchFamily="18" charset="0"/>
+                          </a:rPr>
                           <m:t> </m:t>
                         </m:r>
                         <m:r>
-                          <a:rPr lang="en-IN" i="1"/>
+                          <a:rPr lang="en-IN" i="1">
+                            <a:latin typeface="Cambria Math" panose="02040503050406030204" pitchFamily="18" charset="0"/>
+                          </a:rPr>
                           <m:t>𝑓𝑟𝑎𝑚𝑒𝑠</m:t>
                         </m:r>
                         <m:r>
-                          <a:rPr lang="en-IN" i="1"/>
+                          <a:rPr lang="en-IN" i="1">
+                            <a:latin typeface="Cambria Math" panose="02040503050406030204" pitchFamily="18" charset="0"/>
+                          </a:rPr>
                           <m:t> </m:t>
                         </m:r>
                         <m:r>
-                          <a:rPr lang="en-IN" i="1"/>
+                          <a:rPr lang="en-IN" i="1">
+                            <a:latin typeface="Cambria Math" panose="02040503050406030204" pitchFamily="18" charset="0"/>
+                          </a:rPr>
                           <m:t>𝑝𝑒𝑟</m:t>
                         </m:r>
                         <m:r>
-                          <a:rPr lang="en-IN" i="1"/>
+                          <a:rPr lang="en-IN" i="1">
+                            <a:latin typeface="Cambria Math" panose="02040503050406030204" pitchFamily="18" charset="0"/>
+                          </a:rPr>
                           <m:t> </m:t>
                         </m:r>
                         <m:r>
-                          <a:rPr lang="en-IN" i="1"/>
+                          <a:rPr lang="en-IN" i="1">
+                            <a:latin typeface="Cambria Math" panose="02040503050406030204" pitchFamily="18" charset="0"/>
+                          </a:rPr>
                           <m:t>𝑠𝑒𝑡</m:t>
                         </m:r>
                         <m:r>
-                          <a:rPr lang="en-IN" i="1"/>
+                          <a:rPr lang="en-IN" i="1">
+                            <a:latin typeface="Cambria Math" panose="02040503050406030204" pitchFamily="18" charset="0"/>
+                          </a:rPr>
                           <m:t> </m:t>
                         </m:r>
                         <m:r>
-                          <a:rPr lang="en-IN" i="1"/>
+                          <a:rPr lang="en-IN" i="1">
+                            <a:latin typeface="Cambria Math" panose="02040503050406030204" pitchFamily="18" charset="0"/>
+                          </a:rPr>
                           <m:t>𝑖</m:t>
                         </m:r>
                         <m:r>
-                          <a:rPr lang="en-IN" i="1"/>
+                          <a:rPr lang="en-IN" i="1">
+                            <a:latin typeface="Cambria Math" panose="02040503050406030204" pitchFamily="18" charset="0"/>
+                          </a:rPr>
                           <m:t>.</m:t>
                         </m:r>
                         <m:r>
-                          <a:rPr lang="en-IN" i="1"/>
+                          <a:rPr lang="en-IN" i="1">
+                            <a:latin typeface="Cambria Math" panose="02040503050406030204" pitchFamily="18" charset="0"/>
+                          </a:rPr>
                           <m:t>𝑒</m:t>
                         </m:r>
                         <m:r>
-                          <a:rPr lang="en-IN" i="1"/>
+                          <a:rPr lang="en-IN" i="1">
+                            <a:latin typeface="Cambria Math" panose="02040503050406030204" pitchFamily="18" charset="0"/>
+                          </a:rPr>
                           <m:t>.  </m:t>
                         </m:r>
                         <m:r>
-                          <a:rPr lang="en-IN" i="1"/>
+                          <a:rPr lang="en-IN" i="1">
+                            <a:latin typeface="Cambria Math" panose="02040503050406030204" pitchFamily="18" charset="0"/>
+                          </a:rPr>
                           <m:t>𝑎𝑠𝑠𝑜𝑐𝑖𝑎𝑡𝑖𝑣𝑖𝑡𝑦</m:t>
                         </m:r>
                       </m:den>
@@ -14690,18 +13928,24 @@
                     <m:f>
                       <m:fPr>
                         <m:ctrlPr>
-                          <a:rPr lang="en-IN" i="1"/>
+                          <a:rPr lang="en-IN" i="1">
+                            <a:latin typeface="Cambria Math" panose="02040503050406030204" pitchFamily="18" charset="0"/>
+                          </a:rPr>
                         </m:ctrlPr>
                       </m:fPr>
                       <m:num>
                         <m:r>
-                          <a:rPr lang="en-IN" i="1"/>
+                          <a:rPr lang="en-IN" i="1">
+                            <a:latin typeface="Cambria Math" panose="02040503050406030204" pitchFamily="18" charset="0"/>
+                          </a:rPr>
                           <m:t>128</m:t>
                         </m:r>
                       </m:num>
                       <m:den>
                         <m:r>
-                          <a:rPr lang="en-IN" i="1"/>
+                          <a:rPr lang="en-IN" i="1">
+                            <a:latin typeface="Cambria Math" panose="02040503050406030204" pitchFamily="18" charset="0"/>
+                          </a:rPr>
                           <m:t>4</m:t>
                         </m:r>
                       </m:den>
@@ -15047,19 +14291,8 @@
                     <a:latin typeface="Times New Roman" panose="02020603050405020304" pitchFamily="18" charset="0"/>
                     <a:cs typeface="Times New Roman" panose="02020603050405020304" pitchFamily="18" charset="0"/>
                   </a:rPr>
-                  <a:t>+(1-H)*tm. So 30=20+(1-H)*140 which gives H=92</a:t>
+                  <a:t>+(1-H)*tm. So 30=20+(1-H)*140 which gives H=92%</a:t>
                 </a:r>
-                <a:r>
-                  <a:rPr lang="en-IN" dirty="0" smtClean="0">
-                    <a:latin typeface="Times New Roman" panose="02020603050405020304" pitchFamily="18" charset="0"/>
-                    <a:cs typeface="Times New Roman" panose="02020603050405020304" pitchFamily="18" charset="0"/>
-                  </a:rPr>
-                  <a:t>%</a:t>
-                </a:r>
-                <a:endParaRPr lang="en-IN" dirty="0">
-                  <a:latin typeface="Times New Roman" panose="02020603050405020304" pitchFamily="18" charset="0"/>
-                  <a:cs typeface="Times New Roman" panose="02020603050405020304" pitchFamily="18" charset="0"/>
-                </a:endParaRPr>
               </a:p>
               <a:p>
                 <a:endParaRPr lang="en-IN" dirty="0">
@@ -15070,7 +14303,7 @@
             </p:txBody>
           </p:sp>
         </mc:Choice>
-        <mc:Fallback>
+        <mc:Fallback xmlns="">
           <p:sp>
             <p:nvSpPr>
               <p:cNvPr id="2" name="TextBox 1"/>
@@ -15112,7 +14345,7 @@
     </p:spTree>
     <p:extLst>
       <p:ext uri="{BB962C8B-B14F-4D97-AF65-F5344CB8AC3E}">
-        <p14:creationId xmlns:p14="http://schemas.microsoft.com/office/powerpoint/2010/main" xmlns="" val="4254146061"/>
+        <p14:creationId xmlns:p14="http://schemas.microsoft.com/office/powerpoint/2010/main" val="4254146061"/>
       </p:ext>
     </p:extLst>
   </p:cSld>
@@ -15162,16 +14395,12 @@
           <a:lstStyle/>
           <a:p>
             <a:r>
-              <a:rPr lang="en-IN" dirty="0" smtClean="0">
+              <a:rPr lang="en-IN" dirty="0">
                 <a:latin typeface="Times New Roman" panose="02020603050405020304" pitchFamily="18" charset="0"/>
                 <a:cs typeface="Times New Roman" panose="02020603050405020304" pitchFamily="18" charset="0"/>
               </a:rPr>
               <a:t>Input register</a:t>
             </a:r>
-            <a:endParaRPr lang="en-IN" dirty="0">
-              <a:latin typeface="Times New Roman" panose="02020603050405020304" pitchFamily="18" charset="0"/>
-              <a:cs typeface="Times New Roman" panose="02020603050405020304" pitchFamily="18" charset="0"/>
-            </a:endParaRPr>
           </a:p>
         </p:txBody>
       </p:sp>
@@ -15239,7 +14468,7 @@
           <a:lstStyle/>
           <a:p>
             <a:r>
-              <a:rPr lang="en-IN" dirty="0" smtClean="0">
+              <a:rPr lang="en-IN" dirty="0">
                 <a:latin typeface="Times New Roman" panose="02020603050405020304" pitchFamily="18" charset="0"/>
                 <a:cs typeface="Times New Roman" panose="02020603050405020304" pitchFamily="18" charset="0"/>
               </a:rPr>
@@ -15248,16 +14477,12 @@
           </a:p>
           <a:p>
             <a:r>
-              <a:rPr lang="en-IN" dirty="0" smtClean="0">
+              <a:rPr lang="en-IN" dirty="0">
                 <a:latin typeface="Times New Roman" panose="02020603050405020304" pitchFamily="18" charset="0"/>
                 <a:cs typeface="Times New Roman" panose="02020603050405020304" pitchFamily="18" charset="0"/>
               </a:rPr>
               <a:t>register</a:t>
             </a:r>
-            <a:endParaRPr lang="en-IN" dirty="0">
-              <a:latin typeface="Times New Roman" panose="02020603050405020304" pitchFamily="18" charset="0"/>
-              <a:cs typeface="Times New Roman" panose="02020603050405020304" pitchFamily="18" charset="0"/>
-            </a:endParaRPr>
           </a:p>
         </p:txBody>
       </p:sp>
@@ -15325,16 +14550,12 @@
           <a:lstStyle/>
           <a:p>
             <a:r>
-              <a:rPr lang="en-IN" dirty="0" smtClean="0">
+              <a:rPr lang="en-IN" dirty="0">
                 <a:latin typeface="Times New Roman" panose="02020603050405020304" pitchFamily="18" charset="0"/>
                 <a:cs typeface="Times New Roman" panose="02020603050405020304" pitchFamily="18" charset="0"/>
               </a:rPr>
               <a:t>Output register</a:t>
             </a:r>
-            <a:endParaRPr lang="en-IN" dirty="0">
-              <a:latin typeface="Times New Roman" panose="02020603050405020304" pitchFamily="18" charset="0"/>
-              <a:cs typeface="Times New Roman" panose="02020603050405020304" pitchFamily="18" charset="0"/>
-            </a:endParaRPr>
           </a:p>
         </p:txBody>
       </p:sp>
@@ -15402,16 +14623,12 @@
           <a:lstStyle/>
           <a:p>
             <a:r>
-              <a:rPr lang="en-IN" dirty="0" smtClean="0">
+              <a:rPr lang="en-IN" dirty="0">
                 <a:latin typeface="Times New Roman" panose="02020603050405020304" pitchFamily="18" charset="0"/>
                 <a:cs typeface="Times New Roman" panose="02020603050405020304" pitchFamily="18" charset="0"/>
               </a:rPr>
               <a:t>Word organized array of CAM cells</a:t>
             </a:r>
-            <a:endParaRPr lang="en-IN" dirty="0">
-              <a:latin typeface="Times New Roman" panose="02020603050405020304" pitchFamily="18" charset="0"/>
-              <a:cs typeface="Times New Roman" panose="02020603050405020304" pitchFamily="18" charset="0"/>
-            </a:endParaRPr>
           </a:p>
         </p:txBody>
       </p:sp>
@@ -15479,16 +14696,12 @@
           <a:lstStyle/>
           <a:p>
             <a:r>
-              <a:rPr lang="en-IN" dirty="0" smtClean="0">
+              <a:rPr lang="en-IN" dirty="0">
                 <a:latin typeface="Times New Roman" panose="02020603050405020304" pitchFamily="18" charset="0"/>
                 <a:cs typeface="Times New Roman" panose="02020603050405020304" pitchFamily="18" charset="0"/>
               </a:rPr>
               <a:t>Select circuit</a:t>
             </a:r>
-            <a:endParaRPr lang="en-IN" dirty="0">
-              <a:latin typeface="Times New Roman" panose="02020603050405020304" pitchFamily="18" charset="0"/>
-              <a:cs typeface="Times New Roman" panose="02020603050405020304" pitchFamily="18" charset="0"/>
-            </a:endParaRPr>
           </a:p>
         </p:txBody>
       </p:sp>
@@ -15824,16 +15037,12 @@
           <a:lstStyle/>
           <a:p>
             <a:r>
-              <a:rPr lang="en-IN" sz="1400" dirty="0" smtClean="0">
+              <a:rPr lang="en-IN" sz="1400" dirty="0">
                 <a:latin typeface="Times New Roman" panose="02020603050405020304" pitchFamily="18" charset="0"/>
                 <a:cs typeface="Times New Roman" panose="02020603050405020304" pitchFamily="18" charset="0"/>
               </a:rPr>
               <a:t>Match</a:t>
             </a:r>
-            <a:endParaRPr lang="en-IN" sz="1400" dirty="0">
-              <a:latin typeface="Times New Roman" panose="02020603050405020304" pitchFamily="18" charset="0"/>
-              <a:cs typeface="Times New Roman" panose="02020603050405020304" pitchFamily="18" charset="0"/>
-            </a:endParaRPr>
           </a:p>
         </p:txBody>
       </p:sp>
@@ -15860,16 +15069,12 @@
           <a:lstStyle/>
           <a:p>
             <a:r>
-              <a:rPr lang="en-IN" sz="1400" dirty="0" smtClean="0">
+              <a:rPr lang="en-IN" sz="1400" dirty="0">
                 <a:latin typeface="Times New Roman" panose="02020603050405020304" pitchFamily="18" charset="0"/>
                 <a:cs typeface="Times New Roman" panose="02020603050405020304" pitchFamily="18" charset="0"/>
               </a:rPr>
               <a:t>Select</a:t>
             </a:r>
-            <a:endParaRPr lang="en-IN" sz="1400" dirty="0">
-              <a:latin typeface="Times New Roman" panose="02020603050405020304" pitchFamily="18" charset="0"/>
-              <a:cs typeface="Times New Roman" panose="02020603050405020304" pitchFamily="18" charset="0"/>
-            </a:endParaRPr>
           </a:p>
         </p:txBody>
       </p:sp>
@@ -15896,16 +15101,12 @@
           <a:lstStyle/>
           <a:p>
             <a:r>
-              <a:rPr lang="en-IN" sz="1400" dirty="0" smtClean="0">
+              <a:rPr lang="en-IN" sz="1400" dirty="0">
                 <a:latin typeface="Times New Roman" panose="02020603050405020304" pitchFamily="18" charset="0"/>
                 <a:cs typeface="Times New Roman" panose="02020603050405020304" pitchFamily="18" charset="0"/>
               </a:rPr>
               <a:t>Input data is simultaneously compared with the key field of each word </a:t>
             </a:r>
-            <a:endParaRPr lang="en-IN" sz="1400" dirty="0">
-              <a:latin typeface="Times New Roman" panose="02020603050405020304" pitchFamily="18" charset="0"/>
-              <a:cs typeface="Times New Roman" panose="02020603050405020304" pitchFamily="18" charset="0"/>
-            </a:endParaRPr>
           </a:p>
         </p:txBody>
       </p:sp>
@@ -16008,16 +15209,12 @@
           <a:lstStyle/>
           <a:p>
             <a:r>
-              <a:rPr lang="en-IN" sz="1400" dirty="0" smtClean="0">
+              <a:rPr lang="en-IN" sz="1400" dirty="0">
                 <a:latin typeface="Times New Roman" panose="02020603050405020304" pitchFamily="18" charset="0"/>
                 <a:cs typeface="Times New Roman" panose="02020603050405020304" pitchFamily="18" charset="0"/>
               </a:rPr>
               <a:t>Specifies the key field</a:t>
             </a:r>
-            <a:endParaRPr lang="en-IN" sz="1400" dirty="0">
-              <a:latin typeface="Times New Roman" panose="02020603050405020304" pitchFamily="18" charset="0"/>
-              <a:cs typeface="Times New Roman" panose="02020603050405020304" pitchFamily="18" charset="0"/>
-            </a:endParaRPr>
           </a:p>
         </p:txBody>
       </p:sp>
@@ -16080,7 +15277,7 @@
           <a:lstStyle/>
           <a:p>
             <a:r>
-              <a:rPr lang="en-IN" sz="1400" dirty="0" smtClean="0">
+              <a:rPr lang="en-IN" sz="1400" dirty="0">
                 <a:latin typeface="Times New Roman" panose="02020603050405020304" pitchFamily="18" charset="0"/>
                 <a:cs typeface="Times New Roman" panose="02020603050405020304" pitchFamily="18" charset="0"/>
               </a:rPr>
@@ -16089,16 +15286,12 @@
           </a:p>
           <a:p>
             <a:r>
-              <a:rPr lang="en-IN" sz="1400" dirty="0" smtClean="0">
+              <a:rPr lang="en-IN" sz="1400" dirty="0">
                 <a:latin typeface="Times New Roman" panose="02020603050405020304" pitchFamily="18" charset="0"/>
                 <a:cs typeface="Times New Roman" panose="02020603050405020304" pitchFamily="18" charset="0"/>
               </a:rPr>
               <a:t>a pair (key, data)</a:t>
             </a:r>
-            <a:endParaRPr lang="en-IN" sz="1400" dirty="0">
-              <a:latin typeface="Times New Roman" panose="02020603050405020304" pitchFamily="18" charset="0"/>
-              <a:cs typeface="Times New Roman" panose="02020603050405020304" pitchFamily="18" charset="0"/>
-            </a:endParaRPr>
           </a:p>
         </p:txBody>
       </p:sp>
@@ -16125,16 +15318,12 @@
           <a:lstStyle/>
           <a:p>
             <a:r>
-              <a:rPr lang="en-IN" sz="1400" dirty="0" smtClean="0">
+              <a:rPr lang="en-IN" sz="1400" dirty="0">
                 <a:latin typeface="Times New Roman" panose="02020603050405020304" pitchFamily="18" charset="0"/>
                 <a:cs typeface="Times New Roman" panose="02020603050405020304" pitchFamily="18" charset="0"/>
               </a:rPr>
               <a:t>In case of match this signal is generated</a:t>
             </a:r>
-            <a:endParaRPr lang="en-IN" sz="1400" dirty="0">
-              <a:latin typeface="Times New Roman" panose="02020603050405020304" pitchFamily="18" charset="0"/>
-              <a:cs typeface="Times New Roman" panose="02020603050405020304" pitchFamily="18" charset="0"/>
-            </a:endParaRPr>
           </a:p>
         </p:txBody>
       </p:sp>
@@ -16161,7 +15350,7 @@
           <a:lstStyle/>
           <a:p>
             <a:r>
-              <a:rPr lang="en-IN" sz="1400" dirty="0" smtClean="0">
+              <a:rPr lang="en-IN" sz="1400" dirty="0">
                 <a:latin typeface="Times New Roman" panose="02020603050405020304" pitchFamily="18" charset="0"/>
                 <a:cs typeface="Times New Roman" panose="02020603050405020304" pitchFamily="18" charset="0"/>
               </a:rPr>
@@ -16170,16 +15359,12 @@
           </a:p>
           <a:p>
             <a:r>
-              <a:rPr lang="en-IN" sz="1400" dirty="0" smtClean="0">
+              <a:rPr lang="en-IN" sz="1400" dirty="0">
                 <a:latin typeface="Times New Roman" panose="02020603050405020304" pitchFamily="18" charset="0"/>
                 <a:cs typeface="Times New Roman" panose="02020603050405020304" pitchFamily="18" charset="0"/>
               </a:rPr>
               <a:t>Read out the word in a predetermined order for the match position(s)</a:t>
             </a:r>
-            <a:endParaRPr lang="en-IN" sz="1400" dirty="0">
-              <a:latin typeface="Times New Roman" panose="02020603050405020304" pitchFamily="18" charset="0"/>
-              <a:cs typeface="Times New Roman" panose="02020603050405020304" pitchFamily="18" charset="0"/>
-            </a:endParaRPr>
           </a:p>
         </p:txBody>
       </p:sp>
@@ -16307,7 +15492,7 @@
           <a:lstStyle/>
           <a:p>
             <a:r>
-              <a:rPr lang="en-IN" dirty="0" smtClean="0">
+              <a:rPr lang="en-IN" dirty="0">
                 <a:latin typeface="Times New Roman" pitchFamily="18" charset="0"/>
                 <a:cs typeface="Times New Roman" pitchFamily="18" charset="0"/>
               </a:rPr>
@@ -16316,7 +15501,7 @@
           </a:p>
           <a:p>
             <a:r>
-              <a:rPr lang="en-IN" dirty="0" smtClean="0">
+              <a:rPr lang="en-IN" dirty="0">
                 <a:latin typeface="Times New Roman" pitchFamily="18" charset="0"/>
                 <a:cs typeface="Times New Roman" pitchFamily="18" charset="0"/>
               </a:rPr>
@@ -16324,14 +15509,14 @@
             </a:r>
           </a:p>
           <a:p>
-            <a:endParaRPr lang="en-IN" dirty="0" smtClean="0">
+            <a:endParaRPr lang="en-IN" dirty="0">
               <a:latin typeface="Times New Roman" pitchFamily="18" charset="0"/>
               <a:cs typeface="Times New Roman" pitchFamily="18" charset="0"/>
             </a:endParaRPr>
           </a:p>
           <a:p>
             <a:r>
-              <a:rPr lang="en-IN" dirty="0" smtClean="0">
+              <a:rPr lang="en-IN" dirty="0">
                 <a:latin typeface="Times New Roman" pitchFamily="18" charset="0"/>
                 <a:cs typeface="Times New Roman" pitchFamily="18" charset="0"/>
               </a:rPr>
@@ -16339,14 +15524,14 @@
             </a:r>
           </a:p>
           <a:p>
-            <a:endParaRPr lang="en-IN" dirty="0" smtClean="0">
+            <a:endParaRPr lang="en-IN" dirty="0">
               <a:latin typeface="Times New Roman" pitchFamily="18" charset="0"/>
               <a:cs typeface="Times New Roman" pitchFamily="18" charset="0"/>
             </a:endParaRPr>
           </a:p>
           <a:p>
             <a:r>
-              <a:rPr lang="en-IN" dirty="0" smtClean="0">
+              <a:rPr lang="en-IN" dirty="0">
                 <a:latin typeface="Times New Roman" pitchFamily="18" charset="0"/>
                 <a:cs typeface="Times New Roman" pitchFamily="18" charset="0"/>
               </a:rPr>
@@ -16355,7 +15540,7 @@
           </a:p>
           <a:p>
             <a:r>
-              <a:rPr lang="en-IN" dirty="0" smtClean="0">
+              <a:rPr lang="en-IN" dirty="0">
                 <a:latin typeface="Times New Roman" pitchFamily="18" charset="0"/>
                 <a:cs typeface="Times New Roman" pitchFamily="18" charset="0"/>
               </a:rPr>
@@ -16387,7 +15572,7 @@
           <a:lstStyle/>
           <a:p>
             <a:r>
-              <a:rPr lang="en-IN" dirty="0" smtClean="0">
+              <a:rPr lang="en-IN" dirty="0">
                 <a:latin typeface="Times New Roman" pitchFamily="18" charset="0"/>
                 <a:cs typeface="Times New Roman" pitchFamily="18" charset="0"/>
               </a:rPr>
@@ -16396,7 +15581,7 @@
           </a:p>
           <a:p>
             <a:r>
-              <a:rPr lang="en-IN" dirty="0" smtClean="0">
+              <a:rPr lang="en-IN" dirty="0">
                 <a:latin typeface="Times New Roman" pitchFamily="18" charset="0"/>
                 <a:cs typeface="Times New Roman" pitchFamily="18" charset="0"/>
               </a:rPr>
@@ -16405,7 +15590,7 @@
           </a:p>
           <a:p>
             <a:r>
-              <a:rPr lang="en-IN" u="sng" dirty="0" smtClean="0">
+              <a:rPr lang="en-IN" u="sng" dirty="0">
                 <a:latin typeface="Times New Roman" pitchFamily="18" charset="0"/>
                 <a:cs typeface="Times New Roman" pitchFamily="18" charset="0"/>
               </a:rPr>
@@ -16414,7 +15599,7 @@
           </a:p>
           <a:p>
             <a:r>
-              <a:rPr lang="en-IN" dirty="0" smtClean="0">
+              <a:rPr lang="en-IN" dirty="0">
                 <a:latin typeface="Times New Roman" pitchFamily="18" charset="0"/>
                 <a:cs typeface="Times New Roman" pitchFamily="18" charset="0"/>
               </a:rPr>
@@ -16423,14 +15608,14 @@
           </a:p>
           <a:p>
             <a:r>
-              <a:rPr lang="en-IN" u="sng" dirty="0" smtClean="0">
+              <a:rPr lang="en-IN" u="sng" dirty="0">
                 <a:latin typeface="Times New Roman" pitchFamily="18" charset="0"/>
                 <a:cs typeface="Times New Roman" pitchFamily="18" charset="0"/>
               </a:rPr>
               <a:t>Disadvantage</a:t>
             </a:r>
             <a:r>
-              <a:rPr lang="en-IN" dirty="0" smtClean="0">
+              <a:rPr lang="en-IN" dirty="0">
                 <a:latin typeface="Times New Roman" pitchFamily="18" charset="0"/>
                 <a:cs typeface="Times New Roman" pitchFamily="18" charset="0"/>
               </a:rPr>
@@ -16439,7 +15624,7 @@
           </a:p>
           <a:p>
             <a:r>
-              <a:rPr lang="en-IN" dirty="0" smtClean="0">
+              <a:rPr lang="en-IN" dirty="0">
                 <a:latin typeface="Times New Roman" pitchFamily="18" charset="0"/>
                 <a:cs typeface="Times New Roman" pitchFamily="18" charset="0"/>
               </a:rPr>
@@ -16448,7 +15633,7 @@
           </a:p>
           <a:p>
             <a:r>
-              <a:rPr lang="en-IN" dirty="0" smtClean="0">
+              <a:rPr lang="en-IN" dirty="0">
                 <a:latin typeface="Times New Roman" pitchFamily="18" charset="0"/>
                 <a:cs typeface="Times New Roman" pitchFamily="18" charset="0"/>
               </a:rPr>
@@ -16506,7 +15691,7 @@
           <a:lstStyle/>
           <a:p>
             <a:r>
-              <a:rPr lang="en-IN" dirty="0" smtClean="0">
+              <a:rPr lang="en-IN" dirty="0">
                 <a:latin typeface="Times New Roman" pitchFamily="18" charset="0"/>
                 <a:cs typeface="Times New Roman" pitchFamily="18" charset="0"/>
               </a:rPr>
@@ -16515,7 +15700,7 @@
           </a:p>
           <a:p>
             <a:r>
-              <a:rPr lang="en-IN" dirty="0" smtClean="0">
+              <a:rPr lang="en-IN" dirty="0">
                 <a:latin typeface="Times New Roman" pitchFamily="18" charset="0"/>
                 <a:cs typeface="Times New Roman" pitchFamily="18" charset="0"/>
               </a:rPr>
@@ -16524,7 +15709,7 @@
           </a:p>
           <a:p>
             <a:r>
-              <a:rPr lang="en-IN" dirty="0" smtClean="0">
+              <a:rPr lang="en-IN" dirty="0">
                 <a:latin typeface="Times New Roman" pitchFamily="18" charset="0"/>
                 <a:cs typeface="Times New Roman" pitchFamily="18" charset="0"/>
               </a:rPr>
@@ -16532,34 +15717,34 @@
             </a:r>
           </a:p>
           <a:p>
-            <a:endParaRPr lang="en-IN" dirty="0" smtClean="0">
+            <a:endParaRPr lang="en-IN" dirty="0">
               <a:latin typeface="Times New Roman" pitchFamily="18" charset="0"/>
               <a:cs typeface="Times New Roman" pitchFamily="18" charset="0"/>
             </a:endParaRPr>
           </a:p>
           <a:p>
             <a:r>
-              <a:rPr lang="en-IN" b="1" dirty="0" smtClean="0">
+              <a:rPr lang="en-IN" b="1" dirty="0">
                 <a:latin typeface="Times New Roman" pitchFamily="18" charset="0"/>
                 <a:cs typeface="Times New Roman" pitchFamily="18" charset="0"/>
               </a:rPr>
               <a:t>Key Applications of CAM:</a:t>
             </a:r>
-            <a:endParaRPr lang="en-IN" dirty="0" smtClean="0">
+            <a:endParaRPr lang="en-IN" dirty="0">
               <a:latin typeface="Times New Roman" pitchFamily="18" charset="0"/>
               <a:cs typeface="Times New Roman" pitchFamily="18" charset="0"/>
             </a:endParaRPr>
           </a:p>
           <a:p>
             <a:r>
-              <a:rPr lang="en-IN" b="1" dirty="0" smtClean="0">
+              <a:rPr lang="en-IN" b="1" dirty="0">
                 <a:latin typeface="Times New Roman" pitchFamily="18" charset="0"/>
                 <a:cs typeface="Times New Roman" pitchFamily="18" charset="0"/>
               </a:rPr>
               <a:t>Networking Hardware:</a:t>
             </a:r>
             <a:r>
-              <a:rPr lang="en-IN" dirty="0" smtClean="0">
+              <a:rPr lang="en-IN" dirty="0">
                 <a:latin typeface="Times New Roman" pitchFamily="18" charset="0"/>
                 <a:cs typeface="Times New Roman" pitchFamily="18" charset="0"/>
               </a:rPr>
@@ -16568,14 +15753,14 @@
           </a:p>
           <a:p>
             <a:r>
-              <a:rPr lang="en-IN" b="1" dirty="0" smtClean="0">
+              <a:rPr lang="en-IN" b="1" dirty="0">
                 <a:latin typeface="Times New Roman" pitchFamily="18" charset="0"/>
                 <a:cs typeface="Times New Roman" pitchFamily="18" charset="0"/>
               </a:rPr>
               <a:t>Cache Memory Systems:</a:t>
             </a:r>
             <a:r>
-              <a:rPr lang="en-IN" dirty="0" smtClean="0">
+              <a:rPr lang="en-IN" dirty="0">
                 <a:latin typeface="Times New Roman" pitchFamily="18" charset="0"/>
                 <a:cs typeface="Times New Roman" pitchFamily="18" charset="0"/>
               </a:rPr>
@@ -16584,14 +15769,14 @@
           </a:p>
           <a:p>
             <a:r>
-              <a:rPr lang="en-IN" b="1" dirty="0" smtClean="0">
+              <a:rPr lang="en-IN" b="1" dirty="0">
                 <a:latin typeface="Times New Roman" pitchFamily="18" charset="0"/>
                 <a:cs typeface="Times New Roman" pitchFamily="18" charset="0"/>
               </a:rPr>
               <a:t>Database Accelerators:</a:t>
             </a:r>
             <a:r>
-              <a:rPr lang="en-IN" dirty="0" smtClean="0">
+              <a:rPr lang="en-IN" dirty="0">
                 <a:latin typeface="Times New Roman" pitchFamily="18" charset="0"/>
                 <a:cs typeface="Times New Roman" pitchFamily="18" charset="0"/>
               </a:rPr>
@@ -16600,14 +15785,14 @@
           </a:p>
           <a:p>
             <a:r>
-              <a:rPr lang="en-IN" b="1" dirty="0" smtClean="0">
+              <a:rPr lang="en-IN" b="1" dirty="0">
                 <a:latin typeface="Times New Roman" pitchFamily="18" charset="0"/>
                 <a:cs typeface="Times New Roman" pitchFamily="18" charset="0"/>
               </a:rPr>
               <a:t>Pattern Recognition &amp; AI:</a:t>
             </a:r>
             <a:r>
-              <a:rPr lang="en-IN" dirty="0" smtClean="0">
+              <a:rPr lang="en-IN" dirty="0">
                 <a:latin typeface="Times New Roman" pitchFamily="18" charset="0"/>
                 <a:cs typeface="Times New Roman" pitchFamily="18" charset="0"/>
               </a:rPr>
@@ -16615,25 +15800,25 @@
             </a:r>
           </a:p>
           <a:p>
-            <a:endParaRPr lang="en-IN" dirty="0" smtClean="0">
+            <a:endParaRPr lang="en-IN" dirty="0">
               <a:latin typeface="Times New Roman" pitchFamily="18" charset="0"/>
               <a:cs typeface="Times New Roman" pitchFamily="18" charset="0"/>
             </a:endParaRPr>
           </a:p>
           <a:p>
-            <a:endParaRPr lang="en-IN" dirty="0" smtClean="0">
+            <a:endParaRPr lang="en-IN" dirty="0">
               <a:latin typeface="Times New Roman" pitchFamily="18" charset="0"/>
               <a:cs typeface="Times New Roman" pitchFamily="18" charset="0"/>
             </a:endParaRPr>
           </a:p>
           <a:p>
-            <a:endParaRPr lang="en-IN" dirty="0" smtClean="0">
+            <a:endParaRPr lang="en-IN" dirty="0">
               <a:latin typeface="Times New Roman" pitchFamily="18" charset="0"/>
               <a:cs typeface="Times New Roman" pitchFamily="18" charset="0"/>
             </a:endParaRPr>
           </a:p>
           <a:p>
-            <a:endParaRPr lang="en-IN" dirty="0" smtClean="0">
+            <a:endParaRPr lang="en-IN" dirty="0">
               <a:latin typeface="Times New Roman" pitchFamily="18" charset="0"/>
               <a:cs typeface="Times New Roman" pitchFamily="18" charset="0"/>
             </a:endParaRPr>
@@ -16688,7 +15873,7 @@
           <a:lstStyle/>
           <a:p>
             <a:r>
-              <a:rPr lang="en-IN" dirty="0" smtClean="0">
+              <a:rPr lang="en-IN" dirty="0">
                 <a:latin typeface="Times New Roman" pitchFamily="18" charset="0"/>
                 <a:cs typeface="Times New Roman" pitchFamily="18" charset="0"/>
               </a:rPr>
@@ -16697,7 +15882,7 @@
           </a:p>
           <a:p>
             <a:r>
-              <a:rPr lang="en-IN" dirty="0" smtClean="0">
+              <a:rPr lang="en-IN" dirty="0">
                 <a:latin typeface="Times New Roman" pitchFamily="18" charset="0"/>
                 <a:cs typeface="Times New Roman" pitchFamily="18" charset="0"/>
               </a:rPr>
@@ -16706,7 +15891,7 @@
           </a:p>
           <a:p>
             <a:r>
-              <a:rPr lang="en-IN" dirty="0" smtClean="0">
+              <a:rPr lang="en-IN" dirty="0">
                 <a:latin typeface="Times New Roman" pitchFamily="18" charset="0"/>
                 <a:cs typeface="Times New Roman" pitchFamily="18" charset="0"/>
               </a:rPr>
@@ -16715,16 +15900,12 @@
           </a:p>
           <a:p>
             <a:r>
-              <a:rPr lang="en-IN" dirty="0" smtClean="0">
+              <a:rPr lang="en-IN" dirty="0">
                 <a:latin typeface="Times New Roman" pitchFamily="18" charset="0"/>
                 <a:cs typeface="Times New Roman" pitchFamily="18" charset="0"/>
               </a:rPr>
               <a:t>Each storage location can be accessed independently of the other locations and hence needs a separate access mechanism, or read/write head for every location.  </a:t>
             </a:r>
-            <a:endParaRPr lang="en-IN" dirty="0">
-              <a:latin typeface="Times New Roman" pitchFamily="18" charset="0"/>
-              <a:cs typeface="Times New Roman" pitchFamily="18" charset="0"/>
-            </a:endParaRPr>
           </a:p>
         </p:txBody>
       </p:sp>
@@ -16807,10 +15988,9 @@
           <a:p>
             <a:pPr algn="ctr"/>
             <a:r>
-              <a:rPr lang="en-IN" dirty="0" smtClean="0"/>
+              <a:rPr lang="en-IN" dirty="0"/>
               <a:t> </a:t>
             </a:r>
-            <a:endParaRPr lang="en-IN" dirty="0"/>
           </a:p>
         </p:txBody>
       </p:sp>
@@ -16852,10 +16032,9 @@
           <a:p>
             <a:pPr algn="ctr"/>
             <a:r>
-              <a:rPr lang="en-IN" dirty="0" smtClean="0"/>
+              <a:rPr lang="en-IN" dirty="0"/>
               <a:t> </a:t>
             </a:r>
-            <a:endParaRPr lang="en-IN" dirty="0"/>
           </a:p>
         </p:txBody>
       </p:sp>
@@ -16897,10 +16076,9 @@
           <a:p>
             <a:pPr algn="ctr"/>
             <a:r>
-              <a:rPr lang="en-IN" dirty="0" smtClean="0"/>
+              <a:rPr lang="en-IN" dirty="0"/>
               <a:t> </a:t>
             </a:r>
-            <a:endParaRPr lang="en-IN" dirty="0"/>
           </a:p>
         </p:txBody>
       </p:sp>
@@ -16983,10 +16161,9 @@
           <a:p>
             <a:pPr algn="ctr"/>
             <a:r>
-              <a:rPr lang="en-IN" dirty="0" smtClean="0"/>
+              <a:rPr lang="en-IN" dirty="0"/>
               <a:t> </a:t>
             </a:r>
-            <a:endParaRPr lang="en-IN" dirty="0"/>
           </a:p>
         </p:txBody>
       </p:sp>
@@ -17028,10 +16205,9 @@
           <a:p>
             <a:pPr algn="ctr"/>
             <a:r>
-              <a:rPr lang="en-IN" dirty="0" smtClean="0"/>
+              <a:rPr lang="en-IN" dirty="0"/>
               <a:t> </a:t>
             </a:r>
-            <a:endParaRPr lang="en-IN" dirty="0"/>
           </a:p>
         </p:txBody>
       </p:sp>
@@ -17114,10 +16290,9 @@
           <a:p>
             <a:pPr algn="ctr"/>
             <a:r>
-              <a:rPr lang="en-IN" dirty="0" smtClean="0"/>
+              <a:rPr lang="en-IN" dirty="0"/>
               <a:t> </a:t>
             </a:r>
-            <a:endParaRPr lang="en-IN" dirty="0"/>
           </a:p>
         </p:txBody>
       </p:sp>
@@ -17959,16 +17134,12 @@
           <a:lstStyle/>
           <a:p>
             <a:r>
-              <a:rPr lang="en-IN" dirty="0" smtClean="0">
+              <a:rPr lang="en-IN" dirty="0">
                 <a:latin typeface="Times New Roman" pitchFamily="18" charset="0"/>
                 <a:cs typeface="Times New Roman" pitchFamily="18" charset="0"/>
               </a:rPr>
               <a:t>Read-write head selector</a:t>
             </a:r>
-            <a:endParaRPr lang="en-IN" dirty="0">
-              <a:latin typeface="Times New Roman" pitchFamily="18" charset="0"/>
-              <a:cs typeface="Times New Roman" pitchFamily="18" charset="0"/>
-            </a:endParaRPr>
           </a:p>
         </p:txBody>
       </p:sp>
@@ -17995,7 +17166,7 @@
           <a:lstStyle/>
           <a:p>
             <a:r>
-              <a:rPr lang="en-IN" sz="1400" dirty="0" smtClean="0">
+              <a:rPr lang="en-IN" sz="1400" dirty="0">
                 <a:latin typeface="Times New Roman" pitchFamily="18" charset="0"/>
                 <a:cs typeface="Times New Roman" pitchFamily="18" charset="0"/>
               </a:rPr>
@@ -18004,16 +17175,12 @@
           </a:p>
           <a:p>
             <a:r>
-              <a:rPr lang="en-IN" sz="1400" dirty="0" smtClean="0">
+              <a:rPr lang="en-IN" sz="1400" dirty="0">
                 <a:latin typeface="Times New Roman" pitchFamily="18" charset="0"/>
                 <a:cs typeface="Times New Roman" pitchFamily="18" charset="0"/>
               </a:rPr>
               <a:t>heads  </a:t>
             </a:r>
-            <a:endParaRPr lang="en-IN" sz="1400" dirty="0">
-              <a:latin typeface="Times New Roman" pitchFamily="18" charset="0"/>
-              <a:cs typeface="Times New Roman" pitchFamily="18" charset="0"/>
-            </a:endParaRPr>
           </a:p>
         </p:txBody>
       </p:sp>
@@ -18040,16 +17207,12 @@
           <a:lstStyle/>
           <a:p>
             <a:r>
-              <a:rPr lang="en-IN" sz="1400" dirty="0" smtClean="0">
+              <a:rPr lang="en-IN" sz="1400" dirty="0">
                 <a:latin typeface="Times New Roman" pitchFamily="18" charset="0"/>
                 <a:cs typeface="Times New Roman" pitchFamily="18" charset="0"/>
               </a:rPr>
               <a:t>Storage locations</a:t>
             </a:r>
-            <a:endParaRPr lang="en-IN" sz="1400" dirty="0">
-              <a:latin typeface="Times New Roman" pitchFamily="18" charset="0"/>
-              <a:cs typeface="Times New Roman" pitchFamily="18" charset="0"/>
-            </a:endParaRPr>
           </a:p>
         </p:txBody>
       </p:sp>
@@ -18628,10 +17791,9 @@
           <a:p>
             <a:pPr algn="ctr"/>
             <a:r>
-              <a:rPr lang="en-IN" dirty="0" smtClean="0"/>
+              <a:rPr lang="en-IN" dirty="0"/>
               <a:t> </a:t>
             </a:r>
-            <a:endParaRPr lang="en-IN" dirty="0"/>
           </a:p>
         </p:txBody>
       </p:sp>
@@ -18724,7 +17886,7 @@
           <a:lstStyle/>
           <a:p>
             <a:r>
-              <a:rPr lang="en-IN" sz="1400" dirty="0" smtClean="0">
+              <a:rPr lang="en-IN" sz="1400" dirty="0">
                 <a:latin typeface="Times New Roman" pitchFamily="18" charset="0"/>
                 <a:cs typeface="Times New Roman" pitchFamily="18" charset="0"/>
               </a:rPr>
@@ -18733,16 +17895,12 @@
           </a:p>
           <a:p>
             <a:r>
-              <a:rPr lang="en-IN" sz="1400" dirty="0" smtClean="0">
+              <a:rPr lang="en-IN" sz="1400" dirty="0">
                 <a:latin typeface="Times New Roman" pitchFamily="18" charset="0"/>
                 <a:cs typeface="Times New Roman" pitchFamily="18" charset="0"/>
               </a:rPr>
               <a:t>heads  </a:t>
             </a:r>
-            <a:endParaRPr lang="en-IN" sz="1400" dirty="0">
-              <a:latin typeface="Times New Roman" pitchFamily="18" charset="0"/>
-              <a:cs typeface="Times New Roman" pitchFamily="18" charset="0"/>
-            </a:endParaRPr>
           </a:p>
         </p:txBody>
       </p:sp>
@@ -18769,16 +17927,12 @@
           <a:lstStyle/>
           <a:p>
             <a:r>
-              <a:rPr lang="en-IN" sz="1400" dirty="0" smtClean="0">
+              <a:rPr lang="en-IN" sz="1400" dirty="0">
                 <a:latin typeface="Times New Roman" pitchFamily="18" charset="0"/>
                 <a:cs typeface="Times New Roman" pitchFamily="18" charset="0"/>
               </a:rPr>
               <a:t>Storage locations </a:t>
             </a:r>
-            <a:endParaRPr lang="en-IN" sz="1400" dirty="0">
-              <a:latin typeface="Times New Roman" pitchFamily="18" charset="0"/>
-              <a:cs typeface="Times New Roman" pitchFamily="18" charset="0"/>
-            </a:endParaRPr>
           </a:p>
         </p:txBody>
       </p:sp>
@@ -18805,16 +17959,12 @@
           <a:lstStyle/>
           <a:p>
             <a:r>
-              <a:rPr lang="en-IN" sz="1400" dirty="0" smtClean="0">
+              <a:rPr lang="en-IN" sz="1400" dirty="0">
                 <a:latin typeface="Times New Roman" pitchFamily="18" charset="0"/>
                 <a:cs typeface="Times New Roman" pitchFamily="18" charset="0"/>
               </a:rPr>
               <a:t>Motions</a:t>
             </a:r>
-            <a:endParaRPr lang="en-IN" sz="1400" dirty="0">
-              <a:latin typeface="Times New Roman" pitchFamily="18" charset="0"/>
-              <a:cs typeface="Times New Roman" pitchFamily="18" charset="0"/>
-            </a:endParaRPr>
           </a:p>
         </p:txBody>
       </p:sp>
@@ -18885,7 +18035,7 @@
           <a:lstStyle/>
           <a:p>
             <a:r>
-              <a:rPr lang="en-IN" dirty="0" smtClean="0">
+              <a:rPr lang="en-IN" dirty="0">
                 <a:latin typeface="Times New Roman" pitchFamily="18" charset="0"/>
                 <a:cs typeface="Times New Roman" pitchFamily="18" charset="0"/>
               </a:rPr>
@@ -18894,7 +18044,7 @@
           </a:p>
           <a:p>
             <a:r>
-              <a:rPr lang="en-IN" dirty="0" smtClean="0">
+              <a:rPr lang="en-IN" dirty="0">
                 <a:latin typeface="Times New Roman" pitchFamily="18" charset="0"/>
                 <a:cs typeface="Times New Roman" pitchFamily="18" charset="0"/>
               </a:rPr>
@@ -18903,7 +18053,7 @@
           </a:p>
           <a:p>
             <a:r>
-              <a:rPr lang="en-IN" dirty="0" smtClean="0">
+              <a:rPr lang="en-IN" dirty="0">
                 <a:latin typeface="Times New Roman" pitchFamily="18" charset="0"/>
                 <a:cs typeface="Times New Roman" pitchFamily="18" charset="0"/>
               </a:rPr>
@@ -18912,7 +18062,7 @@
           </a:p>
           <a:p>
             <a:r>
-              <a:rPr lang="en-IN" dirty="0" smtClean="0">
+              <a:rPr lang="en-IN" dirty="0">
                 <a:latin typeface="Times New Roman" pitchFamily="18" charset="0"/>
                 <a:cs typeface="Times New Roman" pitchFamily="18" charset="0"/>
               </a:rPr>
@@ -18921,7 +18071,7 @@
           </a:p>
           <a:p>
             <a:r>
-              <a:rPr lang="en-IN" dirty="0" smtClean="0">
+              <a:rPr lang="en-IN" dirty="0">
                 <a:latin typeface="Times New Roman" pitchFamily="18" charset="0"/>
                 <a:cs typeface="Times New Roman" pitchFamily="18" charset="0"/>
               </a:rPr>
@@ -18954,16 +18104,12 @@
           <a:lstStyle/>
           <a:p>
             <a:r>
-              <a:rPr lang="en-IN" dirty="0" smtClean="0">
+              <a:rPr lang="en-IN" dirty="0">
                 <a:latin typeface="Times New Roman" pitchFamily="18" charset="0"/>
                 <a:cs typeface="Times New Roman" pitchFamily="18" charset="0"/>
               </a:rPr>
               <a:t>Fig. Conceptual model of RAM </a:t>
             </a:r>
-            <a:endParaRPr lang="en-IN" dirty="0">
-              <a:latin typeface="Times New Roman" pitchFamily="18" charset="0"/>
-              <a:cs typeface="Times New Roman" pitchFamily="18" charset="0"/>
-            </a:endParaRPr>
           </a:p>
         </p:txBody>
       </p:sp>
@@ -18990,16 +18136,12 @@
           <a:lstStyle/>
           <a:p>
             <a:r>
-              <a:rPr lang="en-IN" dirty="0" smtClean="0">
+              <a:rPr lang="en-IN" dirty="0">
                 <a:latin typeface="Times New Roman" pitchFamily="18" charset="0"/>
                 <a:cs typeface="Times New Roman" pitchFamily="18" charset="0"/>
               </a:rPr>
               <a:t>Fig. Conceptual model of SAM</a:t>
             </a:r>
-            <a:endParaRPr lang="en-IN" dirty="0">
-              <a:latin typeface="Times New Roman" pitchFamily="18" charset="0"/>
-              <a:cs typeface="Times New Roman" pitchFamily="18" charset="0"/>
-            </a:endParaRPr>
           </a:p>
         </p:txBody>
       </p:sp>
@@ -19084,7 +18226,7 @@
           <a:lstStyle/>
           <a:p>
             <a:r>
-              <a:rPr lang="en-IN" dirty="0" smtClean="0">
+              <a:rPr lang="en-IN" dirty="0">
                 <a:latin typeface="Times New Roman" pitchFamily="18" charset="0"/>
                 <a:cs typeface="Times New Roman" pitchFamily="18" charset="0"/>
               </a:rPr>
@@ -19093,7 +18235,7 @@
           </a:p>
           <a:p>
             <a:r>
-              <a:rPr lang="en-IN" dirty="0" smtClean="0">
+              <a:rPr lang="en-IN" dirty="0">
                 <a:latin typeface="Times New Roman" pitchFamily="18" charset="0"/>
                 <a:cs typeface="Times New Roman" pitchFamily="18" charset="0"/>
               </a:rPr>
@@ -19102,7 +18244,7 @@
           </a:p>
           <a:p>
             <a:r>
-              <a:rPr lang="en-IN" dirty="0" smtClean="0">
+              <a:rPr lang="en-IN" dirty="0">
                 <a:latin typeface="Times New Roman" pitchFamily="18" charset="0"/>
                 <a:cs typeface="Times New Roman" pitchFamily="18" charset="0"/>
               </a:rPr>
@@ -19111,7 +18253,7 @@
           </a:p>
           <a:p>
             <a:r>
-              <a:rPr lang="en-IN" dirty="0" smtClean="0">
+              <a:rPr lang="en-IN" dirty="0">
                 <a:latin typeface="Times New Roman" pitchFamily="18" charset="0"/>
                 <a:cs typeface="Times New Roman" pitchFamily="18" charset="0"/>
               </a:rPr>
@@ -19120,7 +18262,7 @@
           </a:p>
           <a:p>
             <a:r>
-              <a:rPr lang="en-IN" dirty="0" smtClean="0">
+              <a:rPr lang="en-IN" dirty="0">
                 <a:latin typeface="Times New Roman" pitchFamily="18" charset="0"/>
                 <a:cs typeface="Times New Roman" pitchFamily="18" charset="0"/>
               </a:rPr>
@@ -19129,7 +18271,7 @@
           </a:p>
           <a:p>
             <a:r>
-              <a:rPr lang="en-IN" dirty="0" smtClean="0">
+              <a:rPr lang="en-IN" dirty="0">
                 <a:latin typeface="Times New Roman" pitchFamily="18" charset="0"/>
                 <a:cs typeface="Times New Roman" pitchFamily="18" charset="0"/>
               </a:rPr>
@@ -19138,7 +18280,7 @@
           </a:p>
           <a:p>
             <a:r>
-              <a:rPr lang="en-IN" dirty="0" smtClean="0">
+              <a:rPr lang="en-IN" dirty="0">
                 <a:latin typeface="Times New Roman" pitchFamily="18" charset="0"/>
                 <a:cs typeface="Times New Roman" pitchFamily="18" charset="0"/>
               </a:rPr>
@@ -19147,7 +18289,7 @@
           </a:p>
           <a:p>
             <a:r>
-              <a:rPr lang="en-IN" dirty="0" smtClean="0">
+              <a:rPr lang="en-IN" dirty="0">
                 <a:latin typeface="Times New Roman" pitchFamily="18" charset="0"/>
                 <a:cs typeface="Times New Roman" pitchFamily="18" charset="0"/>
               </a:rPr>
@@ -19155,14 +18297,14 @@
             </a:r>
           </a:p>
           <a:p>
-            <a:endParaRPr lang="en-IN" dirty="0" smtClean="0">
+            <a:endParaRPr lang="en-IN" dirty="0">
               <a:latin typeface="Times New Roman" pitchFamily="18" charset="0"/>
               <a:cs typeface="Times New Roman" pitchFamily="18" charset="0"/>
             </a:endParaRPr>
           </a:p>
           <a:p>
             <a:r>
-              <a:rPr lang="en-IN" dirty="0" smtClean="0">
+              <a:rPr lang="en-IN" dirty="0">
                 <a:latin typeface="Times New Roman" pitchFamily="18" charset="0"/>
                 <a:cs typeface="Times New Roman" pitchFamily="18" charset="0"/>
               </a:rPr>
@@ -19171,7 +18313,7 @@
           </a:p>
           <a:p>
             <a:r>
-              <a:rPr lang="en-IN" dirty="0" smtClean="0">
+              <a:rPr lang="en-IN" dirty="0">
                 <a:latin typeface="Times New Roman" pitchFamily="18" charset="0"/>
                 <a:cs typeface="Times New Roman" pitchFamily="18" charset="0"/>
               </a:rPr>
@@ -19180,14 +18322,14 @@
           </a:p>
           <a:p>
             <a:r>
-              <a:rPr lang="en-IN" dirty="0" err="1" smtClean="0">
+              <a:rPr lang="en-IN" dirty="0" err="1">
                 <a:latin typeface="Times New Roman" pitchFamily="18" charset="0"/>
                 <a:cs typeface="Times New Roman" pitchFamily="18" charset="0"/>
               </a:rPr>
               <a:t>Nonerasable</a:t>
             </a:r>
             <a:r>
-              <a:rPr lang="en-IN" dirty="0" smtClean="0">
+              <a:rPr lang="en-IN" dirty="0">
                 <a:latin typeface="Times New Roman" pitchFamily="18" charset="0"/>
                 <a:cs typeface="Times New Roman" pitchFamily="18" charset="0"/>
               </a:rPr>
@@ -19196,21 +18338,21 @@
           </a:p>
           <a:p>
             <a:r>
-              <a:rPr lang="en-IN" dirty="0" smtClean="0">
+              <a:rPr lang="en-IN" dirty="0">
                 <a:latin typeface="Times New Roman" pitchFamily="18" charset="0"/>
                 <a:cs typeface="Times New Roman" pitchFamily="18" charset="0"/>
               </a:rPr>
               <a:t>Widely used for storing control programs such as </a:t>
             </a:r>
             <a:r>
-              <a:rPr lang="en-IN" dirty="0" err="1" smtClean="0">
+              <a:rPr lang="en-IN" dirty="0" err="1">
                 <a:latin typeface="Times New Roman" pitchFamily="18" charset="0"/>
                 <a:cs typeface="Times New Roman" pitchFamily="18" charset="0"/>
               </a:rPr>
               <a:t>microprograms</a:t>
             </a:r>
             <a:r>
-              <a:rPr lang="en-IN" dirty="0" smtClean="0">
+              <a:rPr lang="en-IN" dirty="0">
                 <a:latin typeface="Times New Roman" pitchFamily="18" charset="0"/>
                 <a:cs typeface="Times New Roman" pitchFamily="18" charset="0"/>
               </a:rPr>
@@ -19219,7 +18361,7 @@
           </a:p>
           <a:p>
             <a:r>
-              <a:rPr lang="en-IN" dirty="0" smtClean="0">
+              <a:rPr lang="en-IN" dirty="0">
                 <a:latin typeface="Times New Roman" pitchFamily="18" charset="0"/>
                 <a:cs typeface="Times New Roman" pitchFamily="18" charset="0"/>
               </a:rPr>
@@ -19228,7 +18370,7 @@
           </a:p>
           <a:p>
             <a:r>
-              <a:rPr lang="en-IN" dirty="0" smtClean="0">
+              <a:rPr lang="en-IN" dirty="0">
                 <a:latin typeface="Times New Roman" pitchFamily="18" charset="0"/>
                 <a:cs typeface="Times New Roman" pitchFamily="18" charset="0"/>
               </a:rPr>
@@ -19237,7 +18379,7 @@
           </a:p>
           <a:p>
             <a:r>
-              <a:rPr lang="en-IN" dirty="0" smtClean="0">
+              <a:rPr lang="en-IN" dirty="0">
                 <a:latin typeface="Times New Roman" pitchFamily="18" charset="0"/>
                 <a:cs typeface="Times New Roman" pitchFamily="18" charset="0"/>
               </a:rPr>
@@ -19246,7 +18388,7 @@
           </a:p>
           <a:p>
             <a:r>
-              <a:rPr lang="en-IN" dirty="0" smtClean="0">
+              <a:rPr lang="en-IN" dirty="0">
                 <a:latin typeface="Times New Roman" pitchFamily="18" charset="0"/>
                 <a:cs typeface="Times New Roman" pitchFamily="18" charset="0"/>
               </a:rPr>
@@ -19255,7 +18397,7 @@
           </a:p>
           <a:p>
             <a:r>
-              <a:rPr lang="en-IN" dirty="0" smtClean="0">
+              <a:rPr lang="en-IN" dirty="0">
                 <a:latin typeface="Times New Roman" pitchFamily="18" charset="0"/>
                 <a:cs typeface="Times New Roman" pitchFamily="18" charset="0"/>
               </a:rPr>
@@ -19263,7 +18405,7 @@
             </a:r>
           </a:p>
           <a:p>
-            <a:endParaRPr lang="en-IN" dirty="0" smtClean="0">
+            <a:endParaRPr lang="en-IN" dirty="0">
               <a:latin typeface="Times New Roman" pitchFamily="18" charset="0"/>
               <a:cs typeface="Times New Roman" pitchFamily="18" charset="0"/>
             </a:endParaRPr>
@@ -19324,7 +18466,7 @@
           <a:lstStyle/>
           <a:p>
             <a:r>
-              <a:rPr lang="en-IN" dirty="0" smtClean="0">
+              <a:rPr lang="en-IN" dirty="0">
                 <a:latin typeface="Times New Roman" pitchFamily="18" charset="0"/>
                 <a:cs typeface="Times New Roman" pitchFamily="18" charset="0"/>
               </a:rPr>
@@ -19333,7 +18475,7 @@
           </a:p>
           <a:p>
             <a:r>
-              <a:rPr lang="en-IN" dirty="0" smtClean="0">
+              <a:rPr lang="en-IN" dirty="0">
                 <a:latin typeface="Times New Roman" pitchFamily="18" charset="0"/>
                 <a:cs typeface="Times New Roman" pitchFamily="18" charset="0"/>
               </a:rPr>
@@ -19342,7 +18484,7 @@
           </a:p>
           <a:p>
             <a:r>
-              <a:rPr lang="en-IN" dirty="0" smtClean="0">
+              <a:rPr lang="en-IN" dirty="0">
                 <a:latin typeface="Times New Roman" pitchFamily="18" charset="0"/>
                 <a:cs typeface="Times New Roman" pitchFamily="18" charset="0"/>
               </a:rPr>
@@ -19351,7 +18493,7 @@
           </a:p>
           <a:p>
             <a:r>
-              <a:rPr lang="en-IN" u="sng" dirty="0" smtClean="0">
+              <a:rPr lang="en-IN" u="sng" dirty="0">
                 <a:latin typeface="Times New Roman" pitchFamily="18" charset="0"/>
                 <a:cs typeface="Times New Roman" pitchFamily="18" charset="0"/>
               </a:rPr>
@@ -19360,7 +18502,7 @@
           </a:p>
           <a:p>
             <a:r>
-              <a:rPr lang="en-IN" dirty="0" smtClean="0">
+              <a:rPr lang="en-IN" dirty="0">
                 <a:latin typeface="Times New Roman" pitchFamily="18" charset="0"/>
                 <a:cs typeface="Times New Roman" pitchFamily="18" charset="0"/>
               </a:rPr>
@@ -19369,7 +18511,7 @@
           </a:p>
           <a:p>
             <a:r>
-              <a:rPr lang="en-IN" dirty="0" smtClean="0">
+              <a:rPr lang="en-IN" dirty="0">
                 <a:latin typeface="Times New Roman" pitchFamily="18" charset="0"/>
                 <a:cs typeface="Times New Roman" pitchFamily="18" charset="0"/>
               </a:rPr>
@@ -19377,153 +18519,149 @@
             </a:r>
           </a:p>
           <a:p>
-            <a:endParaRPr lang="en-IN" dirty="0" smtClean="0">
-              <a:latin typeface="Times New Roman" pitchFamily="18" charset="0"/>
-              <a:cs typeface="Times New Roman" pitchFamily="18" charset="0"/>
-            </a:endParaRPr>
-          </a:p>
-          <a:p>
-            <a:r>
-              <a:rPr lang="en-IN" u="sng" dirty="0" smtClean="0">
-                <a:latin typeface="Times New Roman" pitchFamily="18" charset="0"/>
-                <a:cs typeface="Times New Roman" pitchFamily="18" charset="0"/>
-              </a:rPr>
-              <a:t>NDRO</a:t>
-            </a:r>
-            <a:r>
-              <a:rPr lang="en-IN" dirty="0" smtClean="0">
-                <a:latin typeface="Times New Roman" pitchFamily="18" charset="0"/>
-                <a:cs typeface="Times New Roman" pitchFamily="18" charset="0"/>
-              </a:rPr>
-              <a:t>: Memories in which reading does not affect the stored data are said to have </a:t>
-            </a:r>
-            <a:r>
-              <a:rPr lang="en-IN" dirty="0" err="1" smtClean="0">
-                <a:latin typeface="Times New Roman" pitchFamily="18" charset="0"/>
-                <a:cs typeface="Times New Roman" pitchFamily="18" charset="0"/>
-              </a:rPr>
-              <a:t>nondestructive</a:t>
-            </a:r>
-            <a:r>
-              <a:rPr lang="en-IN" dirty="0" smtClean="0">
-                <a:latin typeface="Times New Roman" pitchFamily="18" charset="0"/>
-                <a:cs typeface="Times New Roman" pitchFamily="18" charset="0"/>
-              </a:rPr>
-              <a:t> readout (NDRO).</a:t>
-            </a:r>
-          </a:p>
-          <a:p>
-            <a:r>
-              <a:rPr lang="en-IN" u="sng" dirty="0" smtClean="0">
-                <a:latin typeface="Times New Roman" pitchFamily="18" charset="0"/>
-                <a:cs typeface="Times New Roman" pitchFamily="18" charset="0"/>
-              </a:rPr>
-              <a:t>Dynamic memory</a:t>
-            </a:r>
-            <a:r>
-              <a:rPr lang="en-IN" dirty="0" smtClean="0">
-                <a:latin typeface="Times New Roman" pitchFamily="18" charset="0"/>
-                <a:cs typeface="Times New Roman" pitchFamily="18" charset="0"/>
-              </a:rPr>
-              <a:t>:</a:t>
-            </a:r>
-          </a:p>
-          <a:p>
-            <a:r>
-              <a:rPr lang="en-IN" dirty="0" smtClean="0">
-                <a:latin typeface="Times New Roman" pitchFamily="18" charset="0"/>
-                <a:cs typeface="Times New Roman" pitchFamily="18" charset="0"/>
-              </a:rPr>
-              <a:t>Certain memory devices have the property that a stored 1 tends to become a 0, or vice versa, due to some physical decay process. </a:t>
-            </a:r>
-          </a:p>
-          <a:p>
-            <a:r>
-              <a:rPr lang="en-IN" dirty="0" smtClean="0">
-                <a:latin typeface="Times New Roman" pitchFamily="18" charset="0"/>
-                <a:cs typeface="Times New Roman" pitchFamily="18" charset="0"/>
-              </a:rPr>
-              <a:t>Requires periodic refreshing to avoid the loss of information. </a:t>
-            </a:r>
-          </a:p>
-          <a:p>
-            <a:r>
-              <a:rPr lang="en-IN" dirty="0" smtClean="0">
-                <a:latin typeface="Times New Roman" pitchFamily="18" charset="0"/>
-                <a:cs typeface="Times New Roman" pitchFamily="18" charset="0"/>
-              </a:rPr>
-              <a:t>Memories using magnetic storage techniques are static.</a:t>
-            </a:r>
-          </a:p>
-          <a:p>
-            <a:r>
-              <a:rPr lang="en-IN" dirty="0" smtClean="0">
-                <a:latin typeface="Times New Roman" pitchFamily="18" charset="0"/>
-                <a:cs typeface="Times New Roman" pitchFamily="18" charset="0"/>
-              </a:rPr>
-              <a:t> </a:t>
-            </a:r>
-          </a:p>
-          <a:p>
-            <a:r>
-              <a:rPr lang="en-IN" u="sng" dirty="0" smtClean="0">
-                <a:latin typeface="Times New Roman" pitchFamily="18" charset="0"/>
-                <a:cs typeface="Times New Roman" pitchFamily="18" charset="0"/>
-              </a:rPr>
-              <a:t>Volatile</a:t>
-            </a:r>
-            <a:r>
-              <a:rPr lang="en-IN" dirty="0" smtClean="0">
-                <a:latin typeface="Times New Roman" pitchFamily="18" charset="0"/>
-                <a:cs typeface="Times New Roman" pitchFamily="18" charset="0"/>
-              </a:rPr>
-              <a:t>:</a:t>
-            </a:r>
-          </a:p>
-          <a:p>
-            <a:r>
-              <a:rPr lang="en-IN" dirty="0" smtClean="0">
-                <a:latin typeface="Times New Roman" pitchFamily="18" charset="0"/>
-                <a:cs typeface="Times New Roman" pitchFamily="18" charset="0"/>
-              </a:rPr>
-              <a:t>Physical process that can destroy the contents of a memory is the failure of its power supply. </a:t>
-            </a:r>
-          </a:p>
-          <a:p>
-            <a:r>
-              <a:rPr lang="en-IN" dirty="0" smtClean="0">
-                <a:latin typeface="Times New Roman" pitchFamily="18" charset="0"/>
-                <a:cs typeface="Times New Roman" pitchFamily="18" charset="0"/>
-              </a:rPr>
-              <a:t>A memory is said to be volatile if the stored information can be destroyed by a power failure. </a:t>
-            </a:r>
-          </a:p>
-          <a:p>
-            <a:r>
-              <a:rPr lang="en-IN" dirty="0" smtClean="0">
-                <a:latin typeface="Times New Roman" pitchFamily="18" charset="0"/>
-                <a:cs typeface="Times New Roman" pitchFamily="18" charset="0"/>
-              </a:rPr>
-              <a:t>Most semiconductor memories are </a:t>
-            </a:r>
-            <a:r>
-              <a:rPr lang="en-IN" dirty="0" err="1" smtClean="0">
-                <a:latin typeface="Times New Roman" pitchFamily="18" charset="0"/>
-                <a:cs typeface="Times New Roman" pitchFamily="18" charset="0"/>
-              </a:rPr>
-              <a:t>nonvolatile</a:t>
-            </a:r>
-            <a:r>
-              <a:rPr lang="en-IN" dirty="0" smtClean="0">
-                <a:latin typeface="Times New Roman" pitchFamily="18" charset="0"/>
-                <a:cs typeface="Times New Roman" pitchFamily="18" charset="0"/>
-              </a:rPr>
-              <a:t>.</a:t>
-            </a:r>
             <a:endParaRPr lang="en-IN" dirty="0">
               <a:latin typeface="Times New Roman" pitchFamily="18" charset="0"/>
               <a:cs typeface="Times New Roman" pitchFamily="18" charset="0"/>
             </a:endParaRPr>
+          </a:p>
+          <a:p>
+            <a:r>
+              <a:rPr lang="en-IN" u="sng" dirty="0">
+                <a:latin typeface="Times New Roman" pitchFamily="18" charset="0"/>
+                <a:cs typeface="Times New Roman" pitchFamily="18" charset="0"/>
+              </a:rPr>
+              <a:t>NDRO</a:t>
+            </a:r>
+            <a:r>
+              <a:rPr lang="en-IN" dirty="0">
+                <a:latin typeface="Times New Roman" pitchFamily="18" charset="0"/>
+                <a:cs typeface="Times New Roman" pitchFamily="18" charset="0"/>
+              </a:rPr>
+              <a:t>: Memories in which reading does not affect the stored data are said to have </a:t>
+            </a:r>
+            <a:r>
+              <a:rPr lang="en-IN" dirty="0" err="1">
+                <a:latin typeface="Times New Roman" pitchFamily="18" charset="0"/>
+                <a:cs typeface="Times New Roman" pitchFamily="18" charset="0"/>
+              </a:rPr>
+              <a:t>nondestructive</a:t>
+            </a:r>
+            <a:r>
+              <a:rPr lang="en-IN" dirty="0">
+                <a:latin typeface="Times New Roman" pitchFamily="18" charset="0"/>
+                <a:cs typeface="Times New Roman" pitchFamily="18" charset="0"/>
+              </a:rPr>
+              <a:t> readout (NDRO).</a:t>
+            </a:r>
+          </a:p>
+          <a:p>
+            <a:r>
+              <a:rPr lang="en-IN" u="sng" dirty="0">
+                <a:latin typeface="Times New Roman" pitchFamily="18" charset="0"/>
+                <a:cs typeface="Times New Roman" pitchFamily="18" charset="0"/>
+              </a:rPr>
+              <a:t>Dynamic memory</a:t>
+            </a:r>
+            <a:r>
+              <a:rPr lang="en-IN" dirty="0">
+                <a:latin typeface="Times New Roman" pitchFamily="18" charset="0"/>
+                <a:cs typeface="Times New Roman" pitchFamily="18" charset="0"/>
+              </a:rPr>
+              <a:t>:</a:t>
+            </a:r>
+          </a:p>
+          <a:p>
+            <a:r>
+              <a:rPr lang="en-IN" dirty="0">
+                <a:latin typeface="Times New Roman" pitchFamily="18" charset="0"/>
+                <a:cs typeface="Times New Roman" pitchFamily="18" charset="0"/>
+              </a:rPr>
+              <a:t>Certain memory devices have the property that a stored 1 tends to become a 0, or vice versa, due to some physical decay process. </a:t>
+            </a:r>
+          </a:p>
+          <a:p>
+            <a:r>
+              <a:rPr lang="en-IN" dirty="0">
+                <a:latin typeface="Times New Roman" pitchFamily="18" charset="0"/>
+                <a:cs typeface="Times New Roman" pitchFamily="18" charset="0"/>
+              </a:rPr>
+              <a:t>Requires periodic refreshing to avoid the loss of information. </a:t>
+            </a:r>
+          </a:p>
+          <a:p>
+            <a:r>
+              <a:rPr lang="en-IN" dirty="0">
+                <a:latin typeface="Times New Roman" pitchFamily="18" charset="0"/>
+                <a:cs typeface="Times New Roman" pitchFamily="18" charset="0"/>
+              </a:rPr>
+              <a:t>Memories using magnetic storage techniques are static.</a:t>
+            </a:r>
+          </a:p>
+          <a:p>
+            <a:r>
+              <a:rPr lang="en-IN" dirty="0">
+                <a:latin typeface="Times New Roman" pitchFamily="18" charset="0"/>
+                <a:cs typeface="Times New Roman" pitchFamily="18" charset="0"/>
+              </a:rPr>
+              <a:t> </a:t>
+            </a:r>
+          </a:p>
+          <a:p>
+            <a:r>
+              <a:rPr lang="en-IN" u="sng" dirty="0">
+                <a:latin typeface="Times New Roman" pitchFamily="18" charset="0"/>
+                <a:cs typeface="Times New Roman" pitchFamily="18" charset="0"/>
+              </a:rPr>
+              <a:t>Volatile</a:t>
+            </a:r>
+            <a:r>
+              <a:rPr lang="en-IN" dirty="0">
+                <a:latin typeface="Times New Roman" pitchFamily="18" charset="0"/>
+                <a:cs typeface="Times New Roman" pitchFamily="18" charset="0"/>
+              </a:rPr>
+              <a:t>:</a:t>
+            </a:r>
+          </a:p>
+          <a:p>
+            <a:r>
+              <a:rPr lang="en-IN" dirty="0">
+                <a:latin typeface="Times New Roman" pitchFamily="18" charset="0"/>
+                <a:cs typeface="Times New Roman" pitchFamily="18" charset="0"/>
+              </a:rPr>
+              <a:t>Physical process that can destroy the contents of a memory is the failure of its power supply. </a:t>
+            </a:r>
+          </a:p>
+          <a:p>
+            <a:r>
+              <a:rPr lang="en-IN" dirty="0">
+                <a:latin typeface="Times New Roman" pitchFamily="18" charset="0"/>
+                <a:cs typeface="Times New Roman" pitchFamily="18" charset="0"/>
+              </a:rPr>
+              <a:t>A memory is said to be volatile if the stored information can be destroyed by a power failure. </a:t>
+            </a:r>
+          </a:p>
+          <a:p>
+            <a:r>
+              <a:rPr lang="en-IN" dirty="0">
+                <a:latin typeface="Times New Roman" pitchFamily="18" charset="0"/>
+                <a:cs typeface="Times New Roman" pitchFamily="18" charset="0"/>
+              </a:rPr>
+              <a:t>Most semiconductor memories are </a:t>
+            </a:r>
+            <a:r>
+              <a:rPr lang="en-IN" dirty="0" err="1">
+                <a:latin typeface="Times New Roman" pitchFamily="18" charset="0"/>
+                <a:cs typeface="Times New Roman" pitchFamily="18" charset="0"/>
+              </a:rPr>
+              <a:t>nonvolatile</a:t>
+            </a:r>
+            <a:r>
+              <a:rPr lang="en-IN" dirty="0">
+                <a:latin typeface="Times New Roman" pitchFamily="18" charset="0"/>
+                <a:cs typeface="Times New Roman" pitchFamily="18" charset="0"/>
+              </a:rPr>
+              <a:t>.</a:t>
+            </a:r>
           </a:p>
         </p:txBody>
       </p:sp>
@@ -19575,14 +18713,14 @@
           <a:lstStyle/>
           <a:p>
             <a:r>
-              <a:rPr lang="en-IN" u="sng" dirty="0" smtClean="0">
+              <a:rPr lang="en-IN" u="sng" dirty="0">
                 <a:latin typeface="Times New Roman" pitchFamily="18" charset="0"/>
                 <a:cs typeface="Times New Roman" pitchFamily="18" charset="0"/>
               </a:rPr>
               <a:t>Cycle time</a:t>
             </a:r>
             <a:r>
-              <a:rPr lang="en-IN" dirty="0" smtClean="0">
+              <a:rPr lang="en-IN" dirty="0">
                 <a:latin typeface="Times New Roman" pitchFamily="18" charset="0"/>
                 <a:cs typeface="Times New Roman" pitchFamily="18" charset="0"/>
               </a:rPr>
@@ -19591,28 +18729,28 @@
           </a:p>
           <a:p>
             <a:r>
-              <a:rPr lang="en-IN" dirty="0" smtClean="0">
+              <a:rPr lang="en-IN" dirty="0">
                 <a:latin typeface="Times New Roman" pitchFamily="18" charset="0"/>
                 <a:cs typeface="Times New Roman" pitchFamily="18" charset="0"/>
               </a:rPr>
               <a:t>Time needed to complete any read or write operation in the memory is the cycle time (</a:t>
             </a:r>
             <a:r>
-              <a:rPr lang="en-IN" dirty="0" err="1" smtClean="0">
+              <a:rPr lang="en-IN" dirty="0" err="1">
                 <a:latin typeface="Times New Roman" pitchFamily="18" charset="0"/>
                 <a:cs typeface="Times New Roman" pitchFamily="18" charset="0"/>
               </a:rPr>
               <a:t>t</a:t>
             </a:r>
             <a:r>
-              <a:rPr lang="en-IN" baseline="-25000" dirty="0" err="1" smtClean="0">
+              <a:rPr lang="en-IN" baseline="-25000" dirty="0" err="1">
                 <a:latin typeface="Times New Roman" pitchFamily="18" charset="0"/>
                 <a:cs typeface="Times New Roman" pitchFamily="18" charset="0"/>
               </a:rPr>
               <a:t>M</a:t>
             </a:r>
             <a:r>
-              <a:rPr lang="en-IN" dirty="0" smtClean="0">
+              <a:rPr lang="en-IN" dirty="0">
                 <a:latin typeface="Times New Roman" pitchFamily="18" charset="0"/>
                 <a:cs typeface="Times New Roman" pitchFamily="18" charset="0"/>
               </a:rPr>
@@ -19621,49 +18759,49 @@
           </a:p>
           <a:p>
             <a:r>
-              <a:rPr lang="en-IN" dirty="0" smtClean="0">
+              <a:rPr lang="en-IN" dirty="0">
                 <a:latin typeface="Times New Roman" pitchFamily="18" charset="0"/>
                 <a:cs typeface="Times New Roman" pitchFamily="18" charset="0"/>
               </a:rPr>
               <a:t>Data transfer rate or bandwidth (</a:t>
             </a:r>
             <a:r>
-              <a:rPr lang="en-IN" dirty="0" err="1" smtClean="0">
+              <a:rPr lang="en-IN" dirty="0" err="1">
                 <a:latin typeface="Times New Roman" pitchFamily="18" charset="0"/>
                 <a:cs typeface="Times New Roman" pitchFamily="18" charset="0"/>
               </a:rPr>
               <a:t>b</a:t>
             </a:r>
             <a:r>
-              <a:rPr lang="en-IN" baseline="-25000" dirty="0" err="1" smtClean="0">
+              <a:rPr lang="en-IN" baseline="-25000" dirty="0" err="1">
                 <a:latin typeface="Times New Roman" pitchFamily="18" charset="0"/>
                 <a:cs typeface="Times New Roman" pitchFamily="18" charset="0"/>
               </a:rPr>
               <a:t>M</a:t>
             </a:r>
             <a:r>
-              <a:rPr lang="en-IN" dirty="0" smtClean="0">
+              <a:rPr lang="en-IN" dirty="0">
                 <a:latin typeface="Times New Roman" pitchFamily="18" charset="0"/>
                 <a:cs typeface="Times New Roman" pitchFamily="18" charset="0"/>
               </a:rPr>
               <a:t>=1/</a:t>
             </a:r>
             <a:r>
-              <a:rPr lang="en-IN" dirty="0" err="1" smtClean="0">
+              <a:rPr lang="en-IN" dirty="0" err="1">
                 <a:latin typeface="Times New Roman" pitchFamily="18" charset="0"/>
                 <a:cs typeface="Times New Roman" pitchFamily="18" charset="0"/>
               </a:rPr>
               <a:t>t</a:t>
             </a:r>
             <a:r>
-              <a:rPr lang="en-IN" baseline="-25000" dirty="0" err="1" smtClean="0">
+              <a:rPr lang="en-IN" baseline="-25000" dirty="0" err="1">
                 <a:latin typeface="Times New Roman" pitchFamily="18" charset="0"/>
                 <a:cs typeface="Times New Roman" pitchFamily="18" charset="0"/>
               </a:rPr>
               <a:t>M</a:t>
             </a:r>
             <a:r>
-              <a:rPr lang="en-IN" dirty="0" smtClean="0">
+              <a:rPr lang="en-IN" dirty="0">
                 <a:latin typeface="Times New Roman" pitchFamily="18" charset="0"/>
                 <a:cs typeface="Times New Roman" pitchFamily="18" charset="0"/>
               </a:rPr>
@@ -19672,7 +18810,7 @@
           </a:p>
           <a:p>
             <a:r>
-              <a:rPr lang="en-IN" dirty="0" smtClean="0">
+              <a:rPr lang="en-IN" dirty="0">
                 <a:latin typeface="Times New Roman" pitchFamily="18" charset="0"/>
                 <a:cs typeface="Times New Roman" pitchFamily="18" charset="0"/>
               </a:rPr>
@@ -19681,7 +18819,7 @@
           </a:p>
           <a:p>
             <a:r>
-              <a:rPr lang="en-IN" dirty="0" smtClean="0">
+              <a:rPr lang="en-IN" dirty="0">
                 <a:latin typeface="Times New Roman" pitchFamily="18" charset="0"/>
                 <a:cs typeface="Times New Roman" pitchFamily="18" charset="0"/>
               </a:rPr>
@@ -19690,7 +18828,7 @@
           </a:p>
           <a:p>
             <a:r>
-              <a:rPr lang="en-IN" dirty="0" smtClean="0">
+              <a:rPr lang="en-IN" dirty="0">
                 <a:latin typeface="Times New Roman" pitchFamily="18" charset="0"/>
                 <a:cs typeface="Times New Roman" pitchFamily="18" charset="0"/>
               </a:rPr>
@@ -19699,49 +18837,49 @@
           </a:p>
           <a:p>
             <a:r>
-              <a:rPr lang="en-IN" dirty="0" smtClean="0">
+              <a:rPr lang="en-IN" dirty="0">
                 <a:latin typeface="Times New Roman" pitchFamily="18" charset="0"/>
                 <a:cs typeface="Times New Roman" pitchFamily="18" charset="0"/>
               </a:rPr>
               <a:t>In DRO and dynamic memories, it may not be possible to initiate another memory access until a restore or refresh operation has been carried out. In such cases </a:t>
             </a:r>
             <a:r>
-              <a:rPr lang="en-IN" dirty="0" err="1" smtClean="0">
+              <a:rPr lang="en-IN" dirty="0" err="1">
                 <a:latin typeface="Times New Roman" pitchFamily="18" charset="0"/>
                 <a:cs typeface="Times New Roman" pitchFamily="18" charset="0"/>
               </a:rPr>
               <a:t>t</a:t>
             </a:r>
             <a:r>
-              <a:rPr lang="en-IN" baseline="-25000" dirty="0" err="1" smtClean="0">
+              <a:rPr lang="en-IN" baseline="-25000" dirty="0" err="1">
                 <a:latin typeface="Times New Roman" pitchFamily="18" charset="0"/>
                 <a:cs typeface="Times New Roman" pitchFamily="18" charset="0"/>
               </a:rPr>
               <a:t>A</a:t>
             </a:r>
             <a:r>
-              <a:rPr lang="en-IN" dirty="0" smtClean="0">
+              <a:rPr lang="en-IN" dirty="0">
                 <a:latin typeface="Times New Roman" pitchFamily="18" charset="0"/>
                 <a:cs typeface="Times New Roman" pitchFamily="18" charset="0"/>
               </a:rPr>
               <a:t>≠ </a:t>
             </a:r>
             <a:r>
-              <a:rPr lang="en-IN" dirty="0" err="1" smtClean="0">
+              <a:rPr lang="en-IN" dirty="0" err="1">
                 <a:latin typeface="Times New Roman" pitchFamily="18" charset="0"/>
                 <a:cs typeface="Times New Roman" pitchFamily="18" charset="0"/>
               </a:rPr>
               <a:t>t</a:t>
             </a:r>
             <a:r>
-              <a:rPr lang="en-IN" baseline="-25000" dirty="0" err="1" smtClean="0">
+              <a:rPr lang="en-IN" baseline="-25000" dirty="0" err="1">
                 <a:latin typeface="Times New Roman" pitchFamily="18" charset="0"/>
                 <a:cs typeface="Times New Roman" pitchFamily="18" charset="0"/>
               </a:rPr>
               <a:t>M</a:t>
             </a:r>
             <a:r>
-              <a:rPr lang="en-IN" dirty="0" smtClean="0">
+              <a:rPr lang="en-IN" dirty="0">
                 <a:latin typeface="Times New Roman" pitchFamily="18" charset="0"/>
                 <a:cs typeface="Times New Roman" pitchFamily="18" charset="0"/>
               </a:rPr>
@@ -19750,7 +18888,7 @@
           </a:p>
           <a:p>
             <a:r>
-              <a:rPr lang="en-IN" dirty="0" smtClean="0">
+              <a:rPr lang="en-IN" dirty="0">
                 <a:latin typeface="Times New Roman" pitchFamily="18" charset="0"/>
                 <a:cs typeface="Times New Roman" pitchFamily="18" charset="0"/>
               </a:rPr>
@@ -19759,147 +18897,147 @@
           </a:p>
           <a:p>
             <a:r>
-              <a:rPr lang="en-IN" dirty="0" smtClean="0">
+              <a:rPr lang="en-IN" dirty="0">
                 <a:latin typeface="Times New Roman" pitchFamily="18" charset="0"/>
                 <a:cs typeface="Times New Roman" pitchFamily="18" charset="0"/>
               </a:rPr>
               <a:t>If </a:t>
             </a:r>
             <a:r>
-              <a:rPr lang="en-IN" dirty="0" err="1" smtClean="0">
+              <a:rPr lang="en-IN" dirty="0" err="1">
                 <a:latin typeface="Times New Roman" pitchFamily="18" charset="0"/>
                 <a:cs typeface="Times New Roman" pitchFamily="18" charset="0"/>
               </a:rPr>
               <a:t>t</a:t>
             </a:r>
             <a:r>
-              <a:rPr lang="en-IN" baseline="-25000" dirty="0" err="1" smtClean="0">
+              <a:rPr lang="en-IN" baseline="-25000" dirty="0" err="1">
                 <a:latin typeface="Times New Roman" pitchFamily="18" charset="0"/>
                 <a:cs typeface="Times New Roman" pitchFamily="18" charset="0"/>
               </a:rPr>
               <a:t>A</a:t>
             </a:r>
             <a:r>
-              <a:rPr lang="en-IN" dirty="0" smtClean="0">
+              <a:rPr lang="en-IN" dirty="0">
                 <a:latin typeface="Times New Roman" pitchFamily="18" charset="0"/>
                 <a:cs typeface="Times New Roman" pitchFamily="18" charset="0"/>
               </a:rPr>
               <a:t> ≠ </a:t>
             </a:r>
             <a:r>
-              <a:rPr lang="en-IN" dirty="0" err="1" smtClean="0">
+              <a:rPr lang="en-IN" dirty="0" err="1">
                 <a:latin typeface="Times New Roman" pitchFamily="18" charset="0"/>
                 <a:cs typeface="Times New Roman" pitchFamily="18" charset="0"/>
               </a:rPr>
               <a:t>t</a:t>
             </a:r>
             <a:r>
-              <a:rPr lang="en-IN" baseline="-25000" dirty="0" err="1" smtClean="0">
+              <a:rPr lang="en-IN" baseline="-25000" dirty="0" err="1">
                 <a:latin typeface="Times New Roman" pitchFamily="18" charset="0"/>
                 <a:cs typeface="Times New Roman" pitchFamily="18" charset="0"/>
               </a:rPr>
               <a:t>M</a:t>
             </a:r>
             <a:r>
-              <a:rPr lang="en-IN" baseline="-25000" dirty="0" smtClean="0">
+              <a:rPr lang="en-IN" baseline="-25000" dirty="0">
                 <a:latin typeface="Times New Roman" pitchFamily="18" charset="0"/>
                 <a:cs typeface="Times New Roman" pitchFamily="18" charset="0"/>
               </a:rPr>
               <a:t>, </a:t>
             </a:r>
             <a:r>
-              <a:rPr lang="en-IN" dirty="0" smtClean="0">
+              <a:rPr lang="en-IN" dirty="0">
                 <a:latin typeface="Times New Roman" pitchFamily="18" charset="0"/>
                 <a:cs typeface="Times New Roman" pitchFamily="18" charset="0"/>
               </a:rPr>
               <a:t>then </a:t>
             </a:r>
             <a:r>
-              <a:rPr lang="en-IN" dirty="0" err="1" smtClean="0">
+              <a:rPr lang="en-IN" dirty="0" err="1">
                 <a:latin typeface="Times New Roman" pitchFamily="18" charset="0"/>
                 <a:cs typeface="Times New Roman" pitchFamily="18" charset="0"/>
               </a:rPr>
               <a:t>b</a:t>
             </a:r>
             <a:r>
-              <a:rPr lang="en-IN" baseline="-25000" dirty="0" err="1" smtClean="0">
+              <a:rPr lang="en-IN" baseline="-25000" dirty="0" err="1">
                 <a:latin typeface="Times New Roman" pitchFamily="18" charset="0"/>
                 <a:cs typeface="Times New Roman" pitchFamily="18" charset="0"/>
               </a:rPr>
               <a:t>A</a:t>
             </a:r>
             <a:r>
-              <a:rPr lang="en-IN" dirty="0" smtClean="0">
+              <a:rPr lang="en-IN" dirty="0">
                 <a:latin typeface="Times New Roman" pitchFamily="18" charset="0"/>
                 <a:cs typeface="Times New Roman" pitchFamily="18" charset="0"/>
               </a:rPr>
               <a:t> ≠ </a:t>
             </a:r>
             <a:r>
-              <a:rPr lang="en-IN" dirty="0" err="1" smtClean="0">
+              <a:rPr lang="en-IN" dirty="0" err="1">
                 <a:latin typeface="Times New Roman" pitchFamily="18" charset="0"/>
                 <a:cs typeface="Times New Roman" pitchFamily="18" charset="0"/>
               </a:rPr>
               <a:t>b</a:t>
             </a:r>
             <a:r>
-              <a:rPr lang="en-IN" baseline="-25000" dirty="0" err="1" smtClean="0">
+              <a:rPr lang="en-IN" baseline="-25000" dirty="0" err="1">
                 <a:latin typeface="Times New Roman" pitchFamily="18" charset="0"/>
                 <a:cs typeface="Times New Roman" pitchFamily="18" charset="0"/>
               </a:rPr>
               <a:t>M</a:t>
             </a:r>
             <a:r>
-              <a:rPr lang="en-IN" baseline="-25000" dirty="0" smtClean="0">
+              <a:rPr lang="en-IN" baseline="-25000" dirty="0">
                 <a:latin typeface="Times New Roman" pitchFamily="18" charset="0"/>
                 <a:cs typeface="Times New Roman" pitchFamily="18" charset="0"/>
               </a:rPr>
               <a:t> </a:t>
             </a:r>
             <a:r>
-              <a:rPr lang="en-IN" dirty="0" smtClean="0">
+              <a:rPr lang="en-IN" dirty="0">
                 <a:latin typeface="Times New Roman" pitchFamily="18" charset="0"/>
                 <a:cs typeface="Times New Roman" pitchFamily="18" charset="0"/>
               </a:rPr>
               <a:t>and </a:t>
             </a:r>
             <a:r>
-              <a:rPr lang="en-IN" dirty="0" err="1" smtClean="0">
+              <a:rPr lang="en-IN" dirty="0" err="1">
                 <a:latin typeface="Times New Roman" pitchFamily="18" charset="0"/>
                 <a:cs typeface="Times New Roman" pitchFamily="18" charset="0"/>
               </a:rPr>
               <a:t>b</a:t>
             </a:r>
             <a:r>
-              <a:rPr lang="en-IN" baseline="-25000" dirty="0" err="1" smtClean="0">
+              <a:rPr lang="en-IN" baseline="-25000" dirty="0" err="1">
                 <a:latin typeface="Times New Roman" pitchFamily="18" charset="0"/>
                 <a:cs typeface="Times New Roman" pitchFamily="18" charset="0"/>
               </a:rPr>
               <a:t>A</a:t>
             </a:r>
             <a:r>
-              <a:rPr lang="en-IN" dirty="0" smtClean="0">
+              <a:rPr lang="en-IN" dirty="0">
                 <a:latin typeface="Times New Roman" pitchFamily="18" charset="0"/>
                 <a:cs typeface="Times New Roman" pitchFamily="18" charset="0"/>
               </a:rPr>
               <a:t> does not represent the actual number of accesses that can be carried out per second, whereas </a:t>
             </a:r>
             <a:r>
-              <a:rPr lang="en-IN" dirty="0" err="1" smtClean="0">
+              <a:rPr lang="en-IN" dirty="0" err="1">
                 <a:latin typeface="Times New Roman" pitchFamily="18" charset="0"/>
                 <a:cs typeface="Times New Roman" pitchFamily="18" charset="0"/>
               </a:rPr>
               <a:t>b</a:t>
             </a:r>
             <a:r>
-              <a:rPr lang="en-IN" baseline="-25000" dirty="0" err="1" smtClean="0">
+              <a:rPr lang="en-IN" baseline="-25000" dirty="0" err="1">
                 <a:latin typeface="Times New Roman" pitchFamily="18" charset="0"/>
                 <a:cs typeface="Times New Roman" pitchFamily="18" charset="0"/>
               </a:rPr>
               <a:t>M</a:t>
             </a:r>
             <a:r>
-              <a:rPr lang="en-IN" dirty="0" smtClean="0">
+              <a:rPr lang="en-IN" dirty="0">
                 <a:latin typeface="Times New Roman" pitchFamily="18" charset="0"/>
                 <a:cs typeface="Times New Roman" pitchFamily="18" charset="0"/>
               </a:rPr>
@@ -19962,7 +19100,7 @@
           <a:lstStyle/>
           <a:p>
             <a:r>
-              <a:rPr lang="en-IN" dirty="0" smtClean="0">
+              <a:rPr lang="en-IN" dirty="0">
                 <a:latin typeface="Times New Roman" pitchFamily="18" charset="0"/>
                 <a:cs typeface="Times New Roman" pitchFamily="18" charset="0"/>
               </a:rPr>
@@ -19971,7 +19109,7 @@
           </a:p>
           <a:p>
             <a:r>
-              <a:rPr lang="en-IN" dirty="0" smtClean="0">
+              <a:rPr lang="en-IN" dirty="0">
                 <a:latin typeface="Times New Roman" pitchFamily="18" charset="0"/>
                 <a:cs typeface="Times New Roman" pitchFamily="18" charset="0"/>
               </a:rPr>
@@ -19980,7 +19118,7 @@
           </a:p>
           <a:p>
             <a:r>
-              <a:rPr lang="en-IN" dirty="0" smtClean="0">
+              <a:rPr lang="en-IN" dirty="0">
                 <a:latin typeface="Times New Roman" pitchFamily="18" charset="0"/>
                 <a:cs typeface="Times New Roman" pitchFamily="18" charset="0"/>
               </a:rPr>
@@ -19989,7 +19127,7 @@
           </a:p>
           <a:p>
             <a:r>
-              <a:rPr lang="en-IN" dirty="0" smtClean="0">
+              <a:rPr lang="en-IN" dirty="0">
                 <a:latin typeface="Times New Roman" pitchFamily="18" charset="0"/>
                 <a:cs typeface="Times New Roman" pitchFamily="18" charset="0"/>
               </a:rPr>
@@ -19998,7 +19136,7 @@
           </a:p>
           <a:p>
             <a:r>
-              <a:rPr lang="en-IN" dirty="0" smtClean="0">
+              <a:rPr lang="en-IN" dirty="0">
                 <a:latin typeface="Times New Roman" pitchFamily="18" charset="0"/>
                 <a:cs typeface="Times New Roman" pitchFamily="18" charset="0"/>
               </a:rPr>
@@ -20007,35 +19145,35 @@
           </a:p>
           <a:p>
             <a:r>
-              <a:rPr lang="en-IN" dirty="0" smtClean="0">
+              <a:rPr lang="en-IN" dirty="0">
                 <a:latin typeface="Times New Roman" pitchFamily="18" charset="0"/>
                 <a:cs typeface="Times New Roman" pitchFamily="18" charset="0"/>
               </a:rPr>
               <a:t>All data in N</a:t>
             </a:r>
             <a:r>
-              <a:rPr lang="en-IN" baseline="30000" dirty="0" smtClean="0">
+              <a:rPr lang="en-IN" baseline="30000" dirty="0">
                 <a:latin typeface="Times New Roman" pitchFamily="18" charset="0"/>
                 <a:cs typeface="Times New Roman" pitchFamily="18" charset="0"/>
               </a:rPr>
               <a:t>th</a:t>
             </a:r>
             <a:r>
-              <a:rPr lang="en-IN" dirty="0" smtClean="0">
+              <a:rPr lang="en-IN" dirty="0">
                 <a:latin typeface="Times New Roman" pitchFamily="18" charset="0"/>
                 <a:cs typeface="Times New Roman" pitchFamily="18" charset="0"/>
               </a:rPr>
               <a:t> level is also available in (N+1)</a:t>
             </a:r>
             <a:r>
-              <a:rPr lang="en-IN" baseline="30000" dirty="0" err="1" smtClean="0">
+              <a:rPr lang="en-IN" baseline="30000" dirty="0" err="1">
                 <a:latin typeface="Times New Roman" pitchFamily="18" charset="0"/>
                 <a:cs typeface="Times New Roman" pitchFamily="18" charset="0"/>
               </a:rPr>
               <a:t>th</a:t>
             </a:r>
             <a:r>
-              <a:rPr lang="en-IN" dirty="0" smtClean="0">
+              <a:rPr lang="en-IN" dirty="0">
                 <a:latin typeface="Times New Roman" pitchFamily="18" charset="0"/>
                 <a:cs typeface="Times New Roman" pitchFamily="18" charset="0"/>
               </a:rPr>
@@ -20142,16 +19280,12 @@
           <a:lstStyle/>
           <a:p>
             <a:r>
-              <a:rPr lang="en-IN" dirty="0" smtClean="0">
+              <a:rPr lang="en-IN" dirty="0">
                 <a:latin typeface="Times New Roman" pitchFamily="18" charset="0"/>
                 <a:cs typeface="Times New Roman" pitchFamily="18" charset="0"/>
               </a:rPr>
               <a:t>Registers </a:t>
             </a:r>
-            <a:endParaRPr lang="en-IN" dirty="0">
-              <a:latin typeface="Times New Roman" pitchFamily="18" charset="0"/>
-              <a:cs typeface="Times New Roman" pitchFamily="18" charset="0"/>
-            </a:endParaRPr>
           </a:p>
         </p:txBody>
       </p:sp>
@@ -20178,16 +19312,12 @@
           <a:lstStyle/>
           <a:p>
             <a:r>
-              <a:rPr lang="en-IN" dirty="0" smtClean="0">
+              <a:rPr lang="en-IN" dirty="0">
                 <a:latin typeface="Times New Roman" pitchFamily="18" charset="0"/>
                 <a:cs typeface="Times New Roman" pitchFamily="18" charset="0"/>
               </a:rPr>
               <a:t>CPU </a:t>
             </a:r>
-            <a:endParaRPr lang="en-IN" dirty="0">
-              <a:latin typeface="Times New Roman" pitchFamily="18" charset="0"/>
-              <a:cs typeface="Times New Roman" pitchFamily="18" charset="0"/>
-            </a:endParaRPr>
           </a:p>
         </p:txBody>
       </p:sp>
@@ -20214,16 +19344,12 @@
           <a:lstStyle/>
           <a:p>
             <a:r>
-              <a:rPr lang="en-IN" dirty="0" smtClean="0">
+              <a:rPr lang="en-IN" dirty="0">
                 <a:latin typeface="Times New Roman" pitchFamily="18" charset="0"/>
                 <a:cs typeface="Times New Roman" pitchFamily="18" charset="0"/>
               </a:rPr>
               <a:t>CM  </a:t>
             </a:r>
-            <a:endParaRPr lang="en-IN" dirty="0">
-              <a:latin typeface="Times New Roman" pitchFamily="18" charset="0"/>
-              <a:cs typeface="Times New Roman" pitchFamily="18" charset="0"/>
-            </a:endParaRPr>
           </a:p>
         </p:txBody>
       </p:sp>
@@ -20250,16 +19376,12 @@
           <a:lstStyle/>
           <a:p>
             <a:r>
-              <a:rPr lang="en-IN" dirty="0" smtClean="0">
+              <a:rPr lang="en-IN" dirty="0">
                 <a:latin typeface="Times New Roman" pitchFamily="18" charset="0"/>
                 <a:cs typeface="Times New Roman" pitchFamily="18" charset="0"/>
               </a:rPr>
               <a:t>MM</a:t>
             </a:r>
-            <a:endParaRPr lang="en-IN" dirty="0">
-              <a:latin typeface="Times New Roman" pitchFamily="18" charset="0"/>
-              <a:cs typeface="Times New Roman" pitchFamily="18" charset="0"/>
-            </a:endParaRPr>
           </a:p>
         </p:txBody>
       </p:sp>
@@ -20342,10 +19464,9 @@
           <a:p>
             <a:pPr algn="ctr"/>
             <a:r>
-              <a:rPr lang="en-IN" dirty="0" smtClean="0"/>
+              <a:rPr lang="en-IN" dirty="0"/>
               <a:t> </a:t>
             </a:r>
-            <a:endParaRPr lang="en-IN" dirty="0"/>
           </a:p>
         </p:txBody>
       </p:sp>
@@ -20387,10 +19508,9 @@
           <a:p>
             <a:pPr algn="ctr"/>
             <a:r>
-              <a:rPr lang="en-IN" dirty="0" smtClean="0"/>
+              <a:rPr lang="en-IN" dirty="0"/>
               <a:t> </a:t>
             </a:r>
-            <a:endParaRPr lang="en-IN" dirty="0"/>
           </a:p>
         </p:txBody>
       </p:sp>
@@ -20458,7 +19578,7 @@
           <a:lstStyle/>
           <a:p>
             <a:r>
-              <a:rPr lang="en-IN" sz="1400" dirty="0" smtClean="0">
+              <a:rPr lang="en-IN" sz="1400" dirty="0">
                 <a:latin typeface="Times New Roman" pitchFamily="18" charset="0"/>
                 <a:cs typeface="Times New Roman" pitchFamily="18" charset="0"/>
               </a:rPr>
@@ -20467,16 +19587,12 @@
           </a:p>
           <a:p>
             <a:r>
-              <a:rPr lang="en-IN" sz="1400" dirty="0" smtClean="0">
+              <a:rPr lang="en-IN" sz="1400" dirty="0">
                 <a:latin typeface="Times New Roman" pitchFamily="18" charset="0"/>
                 <a:cs typeface="Times New Roman" pitchFamily="18" charset="0"/>
               </a:rPr>
               <a:t>reference  </a:t>
             </a:r>
-            <a:endParaRPr lang="en-IN" sz="1400" dirty="0">
-              <a:latin typeface="Times New Roman" pitchFamily="18" charset="0"/>
-              <a:cs typeface="Times New Roman" pitchFamily="18" charset="0"/>
-            </a:endParaRPr>
           </a:p>
         </p:txBody>
       </p:sp>
@@ -20503,7 +19619,7 @@
           <a:lstStyle/>
           <a:p>
             <a:r>
-              <a:rPr lang="en-IN" sz="1400" dirty="0" smtClean="0">
+              <a:rPr lang="en-IN" sz="1400" dirty="0">
                 <a:latin typeface="Times New Roman" pitchFamily="18" charset="0"/>
                 <a:cs typeface="Times New Roman" pitchFamily="18" charset="0"/>
               </a:rPr>
@@ -20512,16 +19628,12 @@
           </a:p>
           <a:p>
             <a:r>
-              <a:rPr lang="en-IN" sz="1400" dirty="0" smtClean="0">
+              <a:rPr lang="en-IN" sz="1400" dirty="0">
                 <a:latin typeface="Times New Roman" pitchFamily="18" charset="0"/>
                 <a:cs typeface="Times New Roman" pitchFamily="18" charset="0"/>
               </a:rPr>
               <a:t>reference</a:t>
             </a:r>
-            <a:endParaRPr lang="en-IN" sz="1400" dirty="0">
-              <a:latin typeface="Times New Roman" pitchFamily="18" charset="0"/>
-              <a:cs typeface="Times New Roman" pitchFamily="18" charset="0"/>
-            </a:endParaRPr>
           </a:p>
         </p:txBody>
       </p:sp>
@@ -20548,7 +19660,7 @@
           <a:lstStyle/>
           <a:p>
             <a:r>
-              <a:rPr lang="en-IN" sz="1400" dirty="0" smtClean="0">
+              <a:rPr lang="en-IN" sz="1400" dirty="0">
                 <a:latin typeface="Times New Roman" pitchFamily="18" charset="0"/>
                 <a:cs typeface="Times New Roman" pitchFamily="18" charset="0"/>
               </a:rPr>
@@ -20557,16 +19669,12 @@
           </a:p>
           <a:p>
             <a:r>
-              <a:rPr lang="en-IN" sz="1400" dirty="0" smtClean="0">
+              <a:rPr lang="en-IN" sz="1400" dirty="0">
                 <a:latin typeface="Times New Roman" pitchFamily="18" charset="0"/>
                 <a:cs typeface="Times New Roman" pitchFamily="18" charset="0"/>
               </a:rPr>
               <a:t>reference </a:t>
             </a:r>
-            <a:endParaRPr lang="en-IN" sz="1400" dirty="0">
-              <a:latin typeface="Times New Roman" pitchFamily="18" charset="0"/>
-              <a:cs typeface="Times New Roman" pitchFamily="18" charset="0"/>
-            </a:endParaRPr>
           </a:p>
         </p:txBody>
       </p:sp>
@@ -20593,16 +19701,12 @@
           <a:lstStyle/>
           <a:p>
             <a:r>
-              <a:rPr lang="en-IN" sz="1400" dirty="0" smtClean="0">
+              <a:rPr lang="en-IN" sz="1400" dirty="0">
                 <a:latin typeface="Times New Roman" pitchFamily="18" charset="0"/>
                 <a:cs typeface="Times New Roman" pitchFamily="18" charset="0"/>
               </a:rPr>
               <a:t>IO bus </a:t>
             </a:r>
-            <a:endParaRPr lang="en-IN" sz="1400" dirty="0">
-              <a:latin typeface="Times New Roman" pitchFamily="18" charset="0"/>
-              <a:cs typeface="Times New Roman" pitchFamily="18" charset="0"/>
-            </a:endParaRPr>
           </a:p>
         </p:txBody>
       </p:sp>
@@ -20629,16 +19733,12 @@
           <a:lstStyle/>
           <a:p>
             <a:r>
-              <a:rPr lang="en-IN" sz="1400" dirty="0" smtClean="0">
+              <a:rPr lang="en-IN" sz="1400" dirty="0">
                 <a:latin typeface="Times New Roman" pitchFamily="18" charset="0"/>
                 <a:cs typeface="Times New Roman" pitchFamily="18" charset="0"/>
               </a:rPr>
               <a:t>MM bus</a:t>
             </a:r>
-            <a:endParaRPr lang="en-IN" sz="1400" dirty="0">
-              <a:latin typeface="Times New Roman" pitchFamily="18" charset="0"/>
-              <a:cs typeface="Times New Roman" pitchFamily="18" charset="0"/>
-            </a:endParaRPr>
           </a:p>
         </p:txBody>
       </p:sp>
@@ -20665,16 +19765,12 @@
           <a:lstStyle/>
           <a:p>
             <a:r>
-              <a:rPr lang="en-IN" dirty="0" smtClean="0">
+              <a:rPr lang="en-IN" dirty="0">
                 <a:latin typeface="Times New Roman" pitchFamily="18" charset="0"/>
                 <a:cs typeface="Times New Roman" pitchFamily="18" charset="0"/>
               </a:rPr>
               <a:t>IO devices</a:t>
             </a:r>
-            <a:endParaRPr lang="en-IN" dirty="0">
-              <a:latin typeface="Times New Roman" pitchFamily="18" charset="0"/>
-              <a:cs typeface="Times New Roman" pitchFamily="18" charset="0"/>
-            </a:endParaRPr>
           </a:p>
         </p:txBody>
       </p:sp>
@@ -20909,7 +20005,7 @@
           <a:lstStyle/>
           <a:p>
             <a:r>
-              <a:rPr lang="en-IN" sz="1400" dirty="0" smtClean="0">
+              <a:rPr lang="en-IN" sz="1400" dirty="0">
                 <a:latin typeface="Times New Roman" pitchFamily="18" charset="0"/>
                 <a:cs typeface="Times New Roman" pitchFamily="18" charset="0"/>
               </a:rPr>
@@ -20918,16 +20014,12 @@
           </a:p>
           <a:p>
             <a:r>
-              <a:rPr lang="en-IN" sz="1400" dirty="0" smtClean="0">
+              <a:rPr lang="en-IN" sz="1400" dirty="0">
                 <a:latin typeface="Times New Roman" pitchFamily="18" charset="0"/>
                 <a:cs typeface="Times New Roman" pitchFamily="18" charset="0"/>
               </a:rPr>
               <a:t>reference</a:t>
             </a:r>
-            <a:endParaRPr lang="en-IN" sz="1400" dirty="0">
-              <a:latin typeface="Times New Roman" pitchFamily="18" charset="0"/>
-              <a:cs typeface="Times New Roman" pitchFamily="18" charset="0"/>
-            </a:endParaRPr>
           </a:p>
         </p:txBody>
       </p:sp>
@@ -20954,7 +20046,7 @@
           <a:lstStyle/>
           <a:p>
             <a:r>
-              <a:rPr lang="en-IN" dirty="0" smtClean="0">
+              <a:rPr lang="en-IN" dirty="0">
                 <a:latin typeface="Times New Roman" pitchFamily="18" charset="0"/>
                 <a:cs typeface="Times New Roman" pitchFamily="18" charset="0"/>
               </a:rPr>
@@ -20963,7 +20055,7 @@
           </a:p>
           <a:p>
             <a:r>
-              <a:rPr lang="en-IN" dirty="0" smtClean="0">
+              <a:rPr lang="en-IN" dirty="0">
                 <a:latin typeface="Times New Roman" pitchFamily="18" charset="0"/>
                 <a:cs typeface="Times New Roman" pitchFamily="18" charset="0"/>
               </a:rPr>
@@ -20972,7 +20064,7 @@
           </a:p>
           <a:p>
             <a:r>
-              <a:rPr lang="en-IN" dirty="0" smtClean="0">
+              <a:rPr lang="en-IN" dirty="0">
                 <a:latin typeface="Times New Roman" pitchFamily="18" charset="0"/>
                 <a:cs typeface="Times New Roman" pitchFamily="18" charset="0"/>
               </a:rPr>
@@ -20981,23 +20073,19 @@
           </a:p>
           <a:p>
             <a:r>
-              <a:rPr lang="en-IN" dirty="0" smtClean="0">
+              <a:rPr lang="en-IN" dirty="0">
                 <a:latin typeface="Times New Roman" pitchFamily="18" charset="0"/>
                 <a:cs typeface="Times New Roman" pitchFamily="18" charset="0"/>
               </a:rPr>
               <a:t>C1 and C2 are cost/bit of level 1 and level 2 of memory</a:t>
             </a:r>
-            <a:endParaRPr lang="en-IN" dirty="0">
-              <a:latin typeface="Times New Roman" pitchFamily="18" charset="0"/>
-              <a:cs typeface="Times New Roman" pitchFamily="18" charset="0"/>
-            </a:endParaRPr>
           </a:p>
         </p:txBody>
       </p:sp>
     </p:spTree>
     <p:extLst>
       <p:ext uri="{BB962C8B-B14F-4D97-AF65-F5344CB8AC3E}">
-        <p14:creationId xmlns:p14="http://schemas.microsoft.com/office/powerpoint/2010/main" xmlns="" val="2490162677"/>
+        <p14:creationId xmlns:p14="http://schemas.microsoft.com/office/powerpoint/2010/main" val="2490162677"/>
       </p:ext>
     </p:extLst>
   </p:cSld>
@@ -21047,7 +20135,7 @@
           <a:lstStyle/>
           <a:p>
             <a:r>
-              <a:rPr lang="en-IN" dirty="0" smtClean="0">
+              <a:rPr lang="en-IN" dirty="0">
                 <a:latin typeface="Times New Roman" pitchFamily="18" charset="0"/>
                 <a:cs typeface="Times New Roman" pitchFamily="18" charset="0"/>
               </a:rPr>
@@ -21056,7 +20144,7 @@
           </a:p>
           <a:p>
             <a:r>
-              <a:rPr lang="en-IN" dirty="0" smtClean="0">
+              <a:rPr lang="en-IN" dirty="0">
                 <a:latin typeface="Times New Roman" pitchFamily="18" charset="0"/>
                 <a:cs typeface="Times New Roman" pitchFamily="18" charset="0"/>
               </a:rPr>
@@ -21065,7 +20153,7 @@
           </a:p>
           <a:p>
             <a:r>
-              <a:rPr lang="en-IN" dirty="0" smtClean="0">
+              <a:rPr lang="en-IN" dirty="0">
                 <a:latin typeface="Times New Roman" pitchFamily="18" charset="0"/>
                 <a:cs typeface="Times New Roman" pitchFamily="18" charset="0"/>
               </a:rPr>
@@ -21074,16 +20162,12 @@
           </a:p>
           <a:p>
             <a:r>
-              <a:rPr lang="en-IN" dirty="0" smtClean="0">
+              <a:rPr lang="en-IN" dirty="0">
                 <a:latin typeface="Times New Roman" pitchFamily="18" charset="0"/>
                 <a:cs typeface="Times New Roman" pitchFamily="18" charset="0"/>
               </a:rPr>
               <a:t>Virtual memory reduces the burden of the programmer by automatically managing the two levels of the memory hierarchy represented by main memory and secondary memory </a:t>
             </a:r>
-            <a:endParaRPr lang="en-IN" dirty="0">
-              <a:latin typeface="Times New Roman" pitchFamily="18" charset="0"/>
-              <a:cs typeface="Times New Roman" pitchFamily="18" charset="0"/>
-            </a:endParaRPr>
           </a:p>
         </p:txBody>
       </p:sp>
@@ -21125,10 +20209,9 @@
           <a:p>
             <a:pPr algn="ctr"/>
             <a:r>
-              <a:rPr lang="en-IN" dirty="0" smtClean="0"/>
+              <a:rPr lang="en-IN" dirty="0"/>
               <a:t> </a:t>
             </a:r>
-            <a:endParaRPr lang="en-IN" dirty="0"/>
           </a:p>
         </p:txBody>
       </p:sp>
@@ -21263,10 +20346,9 @@
           <a:p>
             <a:pPr algn="ctr"/>
             <a:r>
-              <a:rPr lang="en-IN" dirty="0" smtClean="0"/>
+              <a:rPr lang="en-IN" dirty="0"/>
               <a:t> </a:t>
             </a:r>
-            <a:endParaRPr lang="en-IN" dirty="0"/>
           </a:p>
         </p:txBody>
       </p:sp>
@@ -21506,16 +20588,12 @@
           <a:lstStyle/>
           <a:p>
             <a:r>
-              <a:rPr lang="en-IN" sz="1400" dirty="0" smtClean="0">
+              <a:rPr lang="en-IN" sz="1400" dirty="0">
                 <a:latin typeface="Times New Roman" pitchFamily="18" charset="0"/>
                 <a:cs typeface="Times New Roman" pitchFamily="18" charset="0"/>
               </a:rPr>
               <a:t>0   </a:t>
             </a:r>
-            <a:endParaRPr lang="en-IN" sz="1400" dirty="0">
-              <a:latin typeface="Times New Roman" pitchFamily="18" charset="0"/>
-              <a:cs typeface="Times New Roman" pitchFamily="18" charset="0"/>
-            </a:endParaRPr>
           </a:p>
         </p:txBody>
       </p:sp>
@@ -21542,16 +20620,12 @@
           <a:lstStyle/>
           <a:p>
             <a:r>
-              <a:rPr lang="en-IN" sz="1400" dirty="0" smtClean="0">
+              <a:rPr lang="en-IN" sz="1400" dirty="0">
                 <a:latin typeface="Times New Roman" pitchFamily="18" charset="0"/>
                 <a:cs typeface="Times New Roman" pitchFamily="18" charset="0"/>
               </a:rPr>
               <a:t>4K  </a:t>
             </a:r>
-            <a:endParaRPr lang="en-IN" sz="1400" dirty="0">
-              <a:latin typeface="Times New Roman" pitchFamily="18" charset="0"/>
-              <a:cs typeface="Times New Roman" pitchFamily="18" charset="0"/>
-            </a:endParaRPr>
           </a:p>
         </p:txBody>
       </p:sp>
@@ -21578,16 +20652,12 @@
           <a:lstStyle/>
           <a:p>
             <a:r>
-              <a:rPr lang="en-IN" sz="1400" dirty="0" smtClean="0">
+              <a:rPr lang="en-IN" sz="1400" dirty="0">
                 <a:latin typeface="Times New Roman" pitchFamily="18" charset="0"/>
                 <a:cs typeface="Times New Roman" pitchFamily="18" charset="0"/>
               </a:rPr>
               <a:t>8K</a:t>
             </a:r>
-            <a:endParaRPr lang="en-IN" sz="1400" dirty="0">
-              <a:latin typeface="Times New Roman" pitchFamily="18" charset="0"/>
-              <a:cs typeface="Times New Roman" pitchFamily="18" charset="0"/>
-            </a:endParaRPr>
           </a:p>
         </p:txBody>
       </p:sp>
@@ -21614,16 +20684,12 @@
           <a:lstStyle/>
           <a:p>
             <a:r>
-              <a:rPr lang="en-IN" sz="1400" dirty="0" smtClean="0">
+              <a:rPr lang="en-IN" sz="1400" dirty="0">
                 <a:latin typeface="Times New Roman" pitchFamily="18" charset="0"/>
                 <a:cs typeface="Times New Roman" pitchFamily="18" charset="0"/>
               </a:rPr>
               <a:t>12K  </a:t>
             </a:r>
-            <a:endParaRPr lang="en-IN" sz="1400" dirty="0">
-              <a:latin typeface="Times New Roman" pitchFamily="18" charset="0"/>
-              <a:cs typeface="Times New Roman" pitchFamily="18" charset="0"/>
-            </a:endParaRPr>
           </a:p>
         </p:txBody>
       </p:sp>
@@ -21650,16 +20716,12 @@
           <a:lstStyle/>
           <a:p>
             <a:r>
-              <a:rPr lang="en-IN" sz="1400" dirty="0" smtClean="0">
+              <a:rPr lang="en-IN" sz="1400" dirty="0">
                 <a:latin typeface="Times New Roman" pitchFamily="18" charset="0"/>
                 <a:cs typeface="Times New Roman" pitchFamily="18" charset="0"/>
               </a:rPr>
               <a:t>16K</a:t>
             </a:r>
-            <a:endParaRPr lang="en-IN" sz="1400" dirty="0">
-              <a:latin typeface="Times New Roman" pitchFamily="18" charset="0"/>
-              <a:cs typeface="Times New Roman" pitchFamily="18" charset="0"/>
-            </a:endParaRPr>
           </a:p>
         </p:txBody>
       </p:sp>
@@ -21686,16 +20748,12 @@
           <a:lstStyle/>
           <a:p>
             <a:r>
-              <a:rPr lang="en-IN" sz="1400" dirty="0" smtClean="0">
+              <a:rPr lang="en-IN" sz="1400" dirty="0">
                 <a:latin typeface="Times New Roman" pitchFamily="18" charset="0"/>
                 <a:cs typeface="Times New Roman" pitchFamily="18" charset="0"/>
               </a:rPr>
               <a:t>20K</a:t>
             </a:r>
-            <a:endParaRPr lang="en-IN" sz="1400" dirty="0">
-              <a:latin typeface="Times New Roman" pitchFamily="18" charset="0"/>
-              <a:cs typeface="Times New Roman" pitchFamily="18" charset="0"/>
-            </a:endParaRPr>
           </a:p>
         </p:txBody>
       </p:sp>
@@ -21722,16 +20780,12 @@
           <a:lstStyle/>
           <a:p>
             <a:r>
-              <a:rPr lang="en-IN" sz="1400" dirty="0" smtClean="0">
+              <a:rPr lang="en-IN" sz="1400" dirty="0">
                 <a:latin typeface="Times New Roman" pitchFamily="18" charset="0"/>
                 <a:cs typeface="Times New Roman" pitchFamily="18" charset="0"/>
               </a:rPr>
               <a:t>24K</a:t>
             </a:r>
-            <a:endParaRPr lang="en-IN" sz="1400" dirty="0">
-              <a:latin typeface="Times New Roman" pitchFamily="18" charset="0"/>
-              <a:cs typeface="Times New Roman" pitchFamily="18" charset="0"/>
-            </a:endParaRPr>
           </a:p>
         </p:txBody>
       </p:sp>
@@ -21758,16 +20812,12 @@
           <a:lstStyle/>
           <a:p>
             <a:r>
-              <a:rPr lang="en-IN" sz="1400" dirty="0" smtClean="0">
+              <a:rPr lang="en-IN" sz="1400" dirty="0">
                 <a:latin typeface="Times New Roman" pitchFamily="18" charset="0"/>
                 <a:cs typeface="Times New Roman" pitchFamily="18" charset="0"/>
               </a:rPr>
               <a:t>28K</a:t>
             </a:r>
-            <a:endParaRPr lang="en-IN" sz="1400" dirty="0">
-              <a:latin typeface="Times New Roman" pitchFamily="18" charset="0"/>
-              <a:cs typeface="Times New Roman" pitchFamily="18" charset="0"/>
-            </a:endParaRPr>
           </a:p>
         </p:txBody>
       </p:sp>
@@ -21794,16 +20844,12 @@
           <a:lstStyle/>
           <a:p>
             <a:r>
-              <a:rPr lang="en-IN" sz="1400" dirty="0" smtClean="0">
+              <a:rPr lang="en-IN" sz="1400" dirty="0">
                 <a:latin typeface="Times New Roman" pitchFamily="18" charset="0"/>
                 <a:cs typeface="Times New Roman" pitchFamily="18" charset="0"/>
               </a:rPr>
               <a:t>C   </a:t>
             </a:r>
-            <a:endParaRPr lang="en-IN" sz="1400" dirty="0">
-              <a:latin typeface="Times New Roman" pitchFamily="18" charset="0"/>
-              <a:cs typeface="Times New Roman" pitchFamily="18" charset="0"/>
-            </a:endParaRPr>
           </a:p>
         </p:txBody>
       </p:sp>
@@ -21830,16 +20876,12 @@
           <a:lstStyle/>
           <a:p>
             <a:r>
-              <a:rPr lang="en-IN" sz="1400" dirty="0" smtClean="0">
+              <a:rPr lang="en-IN" sz="1400" dirty="0">
                 <a:latin typeface="Times New Roman" pitchFamily="18" charset="0"/>
                 <a:cs typeface="Times New Roman" pitchFamily="18" charset="0"/>
               </a:rPr>
               <a:t>A  </a:t>
             </a:r>
-            <a:endParaRPr lang="en-IN" sz="1400" dirty="0">
-              <a:latin typeface="Times New Roman" pitchFamily="18" charset="0"/>
-              <a:cs typeface="Times New Roman" pitchFamily="18" charset="0"/>
-            </a:endParaRPr>
           </a:p>
         </p:txBody>
       </p:sp>
@@ -21866,16 +20908,12 @@
           <a:lstStyle/>
           <a:p>
             <a:r>
-              <a:rPr lang="en-IN" sz="1400" dirty="0" smtClean="0">
+              <a:rPr lang="en-IN" sz="1400" dirty="0">
                 <a:latin typeface="Times New Roman" pitchFamily="18" charset="0"/>
                 <a:cs typeface="Times New Roman" pitchFamily="18" charset="0"/>
               </a:rPr>
               <a:t>B  </a:t>
             </a:r>
-            <a:endParaRPr lang="en-IN" sz="1400" dirty="0">
-              <a:latin typeface="Times New Roman" pitchFamily="18" charset="0"/>
-              <a:cs typeface="Times New Roman" pitchFamily="18" charset="0"/>
-            </a:endParaRPr>
           </a:p>
         </p:txBody>
       </p:sp>
@@ -21902,16 +20940,12 @@
           <a:lstStyle/>
           <a:p>
             <a:r>
-              <a:rPr lang="en-IN" sz="1400" dirty="0" smtClean="0">
+              <a:rPr lang="en-IN" sz="1400" dirty="0">
                 <a:latin typeface="Times New Roman" pitchFamily="18" charset="0"/>
                 <a:cs typeface="Times New Roman" pitchFamily="18" charset="0"/>
               </a:rPr>
               <a:t>D  </a:t>
             </a:r>
-            <a:endParaRPr lang="en-IN" sz="1400" dirty="0">
-              <a:latin typeface="Times New Roman" pitchFamily="18" charset="0"/>
-              <a:cs typeface="Times New Roman" pitchFamily="18" charset="0"/>
-            </a:endParaRPr>
           </a:p>
         </p:txBody>
       </p:sp>
@@ -21938,16 +20972,12 @@
           <a:lstStyle/>
           <a:p>
             <a:r>
-              <a:rPr lang="en-IN" sz="1400" dirty="0" smtClean="0">
+              <a:rPr lang="en-IN" sz="1400" dirty="0">
                 <a:latin typeface="Times New Roman" pitchFamily="18" charset="0"/>
                 <a:cs typeface="Times New Roman" pitchFamily="18" charset="0"/>
               </a:rPr>
               <a:t>0  </a:t>
             </a:r>
-            <a:endParaRPr lang="en-IN" sz="1400" dirty="0">
-              <a:latin typeface="Times New Roman" pitchFamily="18" charset="0"/>
-              <a:cs typeface="Times New Roman" pitchFamily="18" charset="0"/>
-            </a:endParaRPr>
           </a:p>
         </p:txBody>
       </p:sp>
@@ -21974,16 +21004,12 @@
           <a:lstStyle/>
           <a:p>
             <a:r>
-              <a:rPr lang="en-IN" sz="1400" dirty="0" smtClean="0">
+              <a:rPr lang="en-IN" sz="1400" dirty="0">
                 <a:latin typeface="Times New Roman" pitchFamily="18" charset="0"/>
                 <a:cs typeface="Times New Roman" pitchFamily="18" charset="0"/>
               </a:rPr>
               <a:t>4K  </a:t>
             </a:r>
-            <a:endParaRPr lang="en-IN" sz="1400" dirty="0">
-              <a:latin typeface="Times New Roman" pitchFamily="18" charset="0"/>
-              <a:cs typeface="Times New Roman" pitchFamily="18" charset="0"/>
-            </a:endParaRPr>
           </a:p>
         </p:txBody>
       </p:sp>
@@ -22010,16 +21036,12 @@
           <a:lstStyle/>
           <a:p>
             <a:r>
-              <a:rPr lang="en-IN" sz="1400" dirty="0" smtClean="0">
+              <a:rPr lang="en-IN" sz="1400" dirty="0">
                 <a:latin typeface="Times New Roman" pitchFamily="18" charset="0"/>
                 <a:cs typeface="Times New Roman" pitchFamily="18" charset="0"/>
               </a:rPr>
               <a:t>8K </a:t>
             </a:r>
-            <a:endParaRPr lang="en-IN" sz="1400" dirty="0">
-              <a:latin typeface="Times New Roman" pitchFamily="18" charset="0"/>
-              <a:cs typeface="Times New Roman" pitchFamily="18" charset="0"/>
-            </a:endParaRPr>
           </a:p>
         </p:txBody>
       </p:sp>
@@ -22046,16 +21068,12 @@
           <a:lstStyle/>
           <a:p>
             <a:r>
-              <a:rPr lang="en-IN" sz="1400" dirty="0" smtClean="0">
+              <a:rPr lang="en-IN" sz="1400" dirty="0">
                 <a:latin typeface="Times New Roman" pitchFamily="18" charset="0"/>
                 <a:cs typeface="Times New Roman" pitchFamily="18" charset="0"/>
               </a:rPr>
               <a:t>12K </a:t>
             </a:r>
-            <a:endParaRPr lang="en-IN" sz="1400" dirty="0">
-              <a:latin typeface="Times New Roman" pitchFamily="18" charset="0"/>
-              <a:cs typeface="Times New Roman" pitchFamily="18" charset="0"/>
-            </a:endParaRPr>
           </a:p>
         </p:txBody>
       </p:sp>
@@ -22082,16 +21100,12 @@
           <a:lstStyle/>
           <a:p>
             <a:r>
-              <a:rPr lang="en-IN" sz="1400" dirty="0" smtClean="0">
+              <a:rPr lang="en-IN" sz="1400" dirty="0">
                 <a:latin typeface="Times New Roman" pitchFamily="18" charset="0"/>
                 <a:cs typeface="Times New Roman" pitchFamily="18" charset="0"/>
               </a:rPr>
               <a:t>A </a:t>
             </a:r>
-            <a:endParaRPr lang="en-IN" sz="1400" dirty="0">
-              <a:latin typeface="Times New Roman" pitchFamily="18" charset="0"/>
-              <a:cs typeface="Times New Roman" pitchFamily="18" charset="0"/>
-            </a:endParaRPr>
           </a:p>
         </p:txBody>
       </p:sp>
@@ -22118,16 +21132,12 @@
           <a:lstStyle/>
           <a:p>
             <a:r>
-              <a:rPr lang="en-IN" sz="1400" dirty="0" smtClean="0">
+              <a:rPr lang="en-IN" sz="1400" dirty="0">
                 <a:latin typeface="Times New Roman" pitchFamily="18" charset="0"/>
                 <a:cs typeface="Times New Roman" pitchFamily="18" charset="0"/>
               </a:rPr>
               <a:t>B </a:t>
             </a:r>
-            <a:endParaRPr lang="en-IN" sz="1400" dirty="0">
-              <a:latin typeface="Times New Roman" pitchFamily="18" charset="0"/>
-              <a:cs typeface="Times New Roman" pitchFamily="18" charset="0"/>
-            </a:endParaRPr>
           </a:p>
         </p:txBody>
       </p:sp>
@@ -22154,16 +21164,12 @@
           <a:lstStyle/>
           <a:p>
             <a:r>
-              <a:rPr lang="en-IN" sz="1400" dirty="0" smtClean="0">
+              <a:rPr lang="en-IN" sz="1400" dirty="0">
                 <a:latin typeface="Times New Roman" pitchFamily="18" charset="0"/>
                 <a:cs typeface="Times New Roman" pitchFamily="18" charset="0"/>
               </a:rPr>
               <a:t>C  </a:t>
             </a:r>
-            <a:endParaRPr lang="en-IN" sz="1400" dirty="0">
-              <a:latin typeface="Times New Roman" pitchFamily="18" charset="0"/>
-              <a:cs typeface="Times New Roman" pitchFamily="18" charset="0"/>
-            </a:endParaRPr>
           </a:p>
         </p:txBody>
       </p:sp>
@@ -22246,10 +21252,9 @@
           <a:p>
             <a:pPr algn="ctr"/>
             <a:r>
-              <a:rPr lang="en-IN" dirty="0" smtClean="0"/>
+              <a:rPr lang="en-IN" dirty="0"/>
               <a:t> </a:t>
             </a:r>
-            <a:endParaRPr lang="en-IN" dirty="0"/>
           </a:p>
         </p:txBody>
       </p:sp>
@@ -22276,16 +21281,12 @@
           <a:lstStyle/>
           <a:p>
             <a:r>
-              <a:rPr lang="en-IN" sz="1400" dirty="0" smtClean="0">
+              <a:rPr lang="en-IN" sz="1400" dirty="0">
                 <a:latin typeface="Times New Roman" pitchFamily="18" charset="0"/>
                 <a:cs typeface="Times New Roman" pitchFamily="18" charset="0"/>
               </a:rPr>
               <a:t>D </a:t>
             </a:r>
-            <a:endParaRPr lang="en-IN" sz="1400" dirty="0">
-              <a:latin typeface="Times New Roman" pitchFamily="18" charset="0"/>
-              <a:cs typeface="Times New Roman" pitchFamily="18" charset="0"/>
-            </a:endParaRPr>
           </a:p>
         </p:txBody>
       </p:sp>
@@ -22806,16 +21807,12 @@
           <a:lstStyle/>
           <a:p>
             <a:r>
-              <a:rPr lang="en-IN" sz="1400" dirty="0" smtClean="0">
+              <a:rPr lang="en-IN" sz="1400" dirty="0">
                 <a:latin typeface="Times New Roman" pitchFamily="18" charset="0"/>
                 <a:cs typeface="Times New Roman" pitchFamily="18" charset="0"/>
               </a:rPr>
               <a:t>Virtual address</a:t>
             </a:r>
-            <a:endParaRPr lang="en-IN" sz="1400" dirty="0">
-              <a:latin typeface="Times New Roman" pitchFamily="18" charset="0"/>
-              <a:cs typeface="Times New Roman" pitchFamily="18" charset="0"/>
-            </a:endParaRPr>
           </a:p>
         </p:txBody>
       </p:sp>
@@ -22842,16 +21839,12 @@
           <a:lstStyle/>
           <a:p>
             <a:r>
-              <a:rPr lang="en-IN" sz="1400" dirty="0" smtClean="0">
+              <a:rPr lang="en-IN" sz="1400" dirty="0">
                 <a:latin typeface="Times New Roman" pitchFamily="18" charset="0"/>
                 <a:cs typeface="Times New Roman" pitchFamily="18" charset="0"/>
               </a:rPr>
               <a:t>Physical address</a:t>
             </a:r>
-            <a:endParaRPr lang="en-IN" sz="1400" dirty="0">
-              <a:latin typeface="Times New Roman" pitchFamily="18" charset="0"/>
-              <a:cs typeface="Times New Roman" pitchFamily="18" charset="0"/>
-            </a:endParaRPr>
           </a:p>
         </p:txBody>
       </p:sp>
@@ -22878,16 +21871,12 @@
           <a:lstStyle/>
           <a:p>
             <a:r>
-              <a:rPr lang="en-IN" sz="1400" dirty="0" smtClean="0">
+              <a:rPr lang="en-IN" sz="1400" dirty="0">
                 <a:latin typeface="Times New Roman" pitchFamily="18" charset="0"/>
                 <a:cs typeface="Times New Roman" pitchFamily="18" charset="0"/>
               </a:rPr>
               <a:t>Disk</a:t>
             </a:r>
-            <a:endParaRPr lang="en-IN" sz="1400" dirty="0">
-              <a:latin typeface="Times New Roman" pitchFamily="18" charset="0"/>
-              <a:cs typeface="Times New Roman" pitchFamily="18" charset="0"/>
-            </a:endParaRPr>
           </a:p>
         </p:txBody>
       </p:sp>
@@ -23022,16 +22011,12 @@
           <a:lstStyle/>
           <a:p>
             <a:r>
-              <a:rPr lang="en-IN" dirty="0" smtClean="0">
+              <a:rPr lang="en-IN" dirty="0">
                 <a:latin typeface="Times New Roman" pitchFamily="18" charset="0"/>
                 <a:cs typeface="Times New Roman" pitchFamily="18" charset="0"/>
               </a:rPr>
               <a:t>Mapping of virtual memory to physical memory for a program with 4 pages </a:t>
             </a:r>
-            <a:endParaRPr lang="en-IN" dirty="0">
-              <a:latin typeface="Times New Roman" pitchFamily="18" charset="0"/>
-              <a:cs typeface="Times New Roman" pitchFamily="18" charset="0"/>
-            </a:endParaRPr>
           </a:p>
         </p:txBody>
       </p:sp>
@@ -23058,7 +22043,7 @@
           <a:lstStyle/>
           <a:p>
             <a:r>
-              <a:rPr lang="en-IN" dirty="0" smtClean="0">
+              <a:rPr lang="en-IN" dirty="0">
                 <a:latin typeface="Times New Roman" pitchFamily="18" charset="0"/>
                 <a:cs typeface="Times New Roman" pitchFamily="18" charset="0"/>
               </a:rPr>
@@ -23067,7 +22052,7 @@
           </a:p>
           <a:p>
             <a:r>
-              <a:rPr lang="en-IN" dirty="0" smtClean="0">
+              <a:rPr lang="en-IN" dirty="0">
                 <a:latin typeface="Times New Roman" pitchFamily="18" charset="0"/>
                 <a:cs typeface="Times New Roman" pitchFamily="18" charset="0"/>
               </a:rPr>
@@ -23076,7 +22061,7 @@
           </a:p>
           <a:p>
             <a:r>
-              <a:rPr lang="en-IN" dirty="0" smtClean="0">
+              <a:rPr lang="en-IN" dirty="0">
                 <a:latin typeface="Times New Roman" pitchFamily="18" charset="0"/>
                 <a:cs typeface="Times New Roman" pitchFamily="18" charset="0"/>
               </a:rPr>
@@ -23085,16 +22070,12 @@
           </a:p>
           <a:p>
             <a:r>
-              <a:rPr lang="en-IN" dirty="0" smtClean="0">
+              <a:rPr lang="en-IN" dirty="0">
                 <a:latin typeface="Times New Roman" pitchFamily="18" charset="0"/>
                 <a:cs typeface="Times New Roman" pitchFamily="18" charset="0"/>
               </a:rPr>
               <a:t>In presence of virtual memory CPU generates virtual addresses during the program execution. The virtual address is translated by a combination of hardware and software to physical address for accessing the physical memory. This process is called memory mapping or address translation.</a:t>
             </a:r>
-            <a:endParaRPr lang="en-IN" dirty="0">
-              <a:latin typeface="Times New Roman" pitchFamily="18" charset="0"/>
-              <a:cs typeface="Times New Roman" pitchFamily="18" charset="0"/>
-            </a:endParaRPr>
           </a:p>
         </p:txBody>
       </p:sp>
@@ -23172,79 +22153,26 @@
                 <a:latin typeface="Times New Roman" panose="02020603050405020304" pitchFamily="18" charset="0"/>
                 <a:cs typeface="Times New Roman" panose="02020603050405020304" pitchFamily="18" charset="0"/>
               </a:rPr>
-              <a:t>F</a:t>
-            </a:r>
-            <a:r>
-              <a:rPr lang="en-IN" dirty="0" smtClean="0">
+              <a:t>First level of memory hierarchy</a:t>
+            </a:r>
+          </a:p>
+          <a:p>
+            <a:r>
+              <a:rPr lang="en-IN" dirty="0">
                 <a:latin typeface="Times New Roman" panose="02020603050405020304" pitchFamily="18" charset="0"/>
                 <a:cs typeface="Times New Roman" panose="02020603050405020304" pitchFamily="18" charset="0"/>
               </a:rPr>
-              <a:t>irst </a:t>
-            </a:r>
+              <a:t>CPU has direct access to both cache memory (CM) and main memory (MM)</a:t>
+            </a:r>
+          </a:p>
+          <a:p>
             <a:r>
               <a:rPr lang="en-IN" dirty="0">
                 <a:latin typeface="Times New Roman" panose="02020603050405020304" pitchFamily="18" charset="0"/>
                 <a:cs typeface="Times New Roman" panose="02020603050405020304" pitchFamily="18" charset="0"/>
               </a:rPr>
-              <a:t>level of memory </a:t>
-            </a:r>
-            <a:r>
-              <a:rPr lang="en-IN" dirty="0" smtClean="0">
-                <a:latin typeface="Times New Roman" panose="02020603050405020304" pitchFamily="18" charset="0"/>
-                <a:cs typeface="Times New Roman" panose="02020603050405020304" pitchFamily="18" charset="0"/>
-              </a:rPr>
-              <a:t>hierarchy</a:t>
-            </a:r>
-          </a:p>
-          <a:p>
-            <a:r>
-              <a:rPr lang="en-IN" dirty="0" smtClean="0">
-                <a:latin typeface="Times New Roman" panose="02020603050405020304" pitchFamily="18" charset="0"/>
-                <a:cs typeface="Times New Roman" panose="02020603050405020304" pitchFamily="18" charset="0"/>
-              </a:rPr>
-              <a:t>CPU </a:t>
-            </a:r>
-            <a:r>
-              <a:rPr lang="en-IN" dirty="0">
-                <a:latin typeface="Times New Roman" panose="02020603050405020304" pitchFamily="18" charset="0"/>
-                <a:cs typeface="Times New Roman" panose="02020603050405020304" pitchFamily="18" charset="0"/>
-              </a:rPr>
-              <a:t>has direct access to both cache memory (CM) and main memory (MM</a:t>
-            </a:r>
-            <a:r>
-              <a:rPr lang="en-IN" dirty="0" smtClean="0">
-                <a:latin typeface="Times New Roman" panose="02020603050405020304" pitchFamily="18" charset="0"/>
-                <a:cs typeface="Times New Roman" panose="02020603050405020304" pitchFamily="18" charset="0"/>
-              </a:rPr>
-              <a:t>)</a:t>
-            </a:r>
-          </a:p>
-          <a:p>
-            <a:r>
-              <a:rPr lang="en-IN" dirty="0" smtClean="0">
-                <a:latin typeface="Times New Roman" panose="02020603050405020304" pitchFamily="18" charset="0"/>
-                <a:cs typeface="Times New Roman" panose="02020603050405020304" pitchFamily="18" charset="0"/>
-              </a:rPr>
-              <a:t>Both </a:t>
-            </a:r>
-            <a:r>
-              <a:rPr lang="en-IN" dirty="0">
-                <a:latin typeface="Times New Roman" panose="02020603050405020304" pitchFamily="18" charset="0"/>
-                <a:cs typeface="Times New Roman" panose="02020603050405020304" pitchFamily="18" charset="0"/>
-              </a:rPr>
-              <a:t>CM and MM are divided into equal sized units, called block in case of MM and block frame in case of </a:t>
-            </a:r>
-            <a:r>
-              <a:rPr lang="en-IN" dirty="0" smtClean="0">
-                <a:latin typeface="Times New Roman" panose="02020603050405020304" pitchFamily="18" charset="0"/>
-                <a:cs typeface="Times New Roman" panose="02020603050405020304" pitchFamily="18" charset="0"/>
-              </a:rPr>
-              <a:t>CM for uniformity of reference </a:t>
-            </a:r>
-            <a:endParaRPr lang="en-IN" dirty="0">
-              <a:latin typeface="Times New Roman" panose="02020603050405020304" pitchFamily="18" charset="0"/>
-              <a:cs typeface="Times New Roman" panose="02020603050405020304" pitchFamily="18" charset="0"/>
-            </a:endParaRPr>
+              <a:t>Both CM and MM are divided into equal sized units, called block in case of MM and block frame in case of CM for uniformity of reference </a:t>
+            </a:r>
           </a:p>
         </p:txBody>
       </p:sp>
@@ -23257,7 +22185,7 @@
           <p:nvPr>
             <p:extLst>
               <p:ext uri="{D42A27DB-BD31-4B8C-83A1-F6EECF244321}">
-                <p14:modId xmlns:p14="http://schemas.microsoft.com/office/powerpoint/2010/main" xmlns="" val="1165920284"/>
+                <p14:modId xmlns:p14="http://schemas.microsoft.com/office/powerpoint/2010/main" val="1165920284"/>
               </p:ext>
             </p:extLst>
           </p:nvPr>
@@ -23276,7 +22204,7 @@
                 <a:gridCol w="488950">
                   <a:extLst>
                     <a:ext uri="{9D8B030D-6E8A-4147-A177-3AD203B41FA5}">
-                      <a16:colId xmlns:a16="http://schemas.microsoft.com/office/drawing/2014/main" xmlns="" val="4021038650"/>
+                      <a16:colId xmlns:a16="http://schemas.microsoft.com/office/drawing/2014/main" val="4021038650"/>
                     </a:ext>
                   </a:extLst>
                 </a:gridCol>
@@ -23315,7 +22243,7 @@
                 </a:tc>
                 <a:extLst>
                   <a:ext uri="{0D108BD9-81ED-4DB2-BD59-A6C34878D82A}">
-                    <a16:rowId xmlns:a16="http://schemas.microsoft.com/office/drawing/2014/main" xmlns="" val="1107749614"/>
+                    <a16:rowId xmlns:a16="http://schemas.microsoft.com/office/drawing/2014/main" val="1107749614"/>
                   </a:ext>
                 </a:extLst>
               </a:tr>
@@ -23390,16 +22318,12 @@
           <a:lstStyle/>
           <a:p>
             <a:r>
-              <a:rPr lang="en-IN" dirty="0" smtClean="0">
+              <a:rPr lang="en-IN" dirty="0">
                 <a:latin typeface="Times New Roman" panose="02020603050405020304" pitchFamily="18" charset="0"/>
                 <a:cs typeface="Times New Roman" panose="02020603050405020304" pitchFamily="18" charset="0"/>
               </a:rPr>
               <a:t>CM</a:t>
             </a:r>
-            <a:endParaRPr lang="en-IN" dirty="0">
-              <a:latin typeface="Times New Roman" panose="02020603050405020304" pitchFamily="18" charset="0"/>
-              <a:cs typeface="Times New Roman" panose="02020603050405020304" pitchFamily="18" charset="0"/>
-            </a:endParaRPr>
           </a:p>
         </p:txBody>
       </p:sp>
@@ -23474,19 +22398,8 @@
                 <a:latin typeface="Times New Roman" panose="02020603050405020304" pitchFamily="18" charset="0"/>
                 <a:cs typeface="Times New Roman" panose="02020603050405020304" pitchFamily="18" charset="0"/>
               </a:rPr>
-              <a:t>M</a:t>
-            </a:r>
-            <a:r>
-              <a:rPr lang="en-IN" dirty="0" smtClean="0">
-                <a:latin typeface="Times New Roman" panose="02020603050405020304" pitchFamily="18" charset="0"/>
-                <a:cs typeface="Times New Roman" panose="02020603050405020304" pitchFamily="18" charset="0"/>
-              </a:rPr>
-              <a:t>M</a:t>
-            </a:r>
-            <a:endParaRPr lang="en-IN" dirty="0">
-              <a:latin typeface="Times New Roman" panose="02020603050405020304" pitchFamily="18" charset="0"/>
-              <a:cs typeface="Times New Roman" panose="02020603050405020304" pitchFamily="18" charset="0"/>
-            </a:endParaRPr>
+              <a:t>MM</a:t>
+            </a:r>
           </a:p>
         </p:txBody>
       </p:sp>
@@ -23557,16 +22470,12 @@
           <a:lstStyle/>
           <a:p>
             <a:r>
-              <a:rPr lang="en-IN" dirty="0" smtClean="0">
+              <a:rPr lang="en-IN" dirty="0">
                 <a:latin typeface="Times New Roman" panose="02020603050405020304" pitchFamily="18" charset="0"/>
                 <a:cs typeface="Times New Roman" panose="02020603050405020304" pitchFamily="18" charset="0"/>
               </a:rPr>
               <a:t>CPU</a:t>
             </a:r>
-            <a:endParaRPr lang="en-IN" dirty="0">
-              <a:latin typeface="Times New Roman" panose="02020603050405020304" pitchFamily="18" charset="0"/>
-              <a:cs typeface="Times New Roman" panose="02020603050405020304" pitchFamily="18" charset="0"/>
-            </a:endParaRPr>
           </a:p>
         </p:txBody>
       </p:sp>
@@ -23890,108 +22799,47 @@
                 <a:latin typeface="Times New Roman" panose="02020603050405020304" pitchFamily="18" charset="0"/>
                 <a:cs typeface="Times New Roman" panose="02020603050405020304" pitchFamily="18" charset="0"/>
               </a:rPr>
-              <a:t>N</a:t>
-            </a:r>
-            <a:r>
-              <a:rPr lang="en-IN" dirty="0" smtClean="0">
+              <a:t>Number of blocks in MM (Fig 1(b)) and block frames in CM (Fig 1(a)) are assumed as 8 and 4 respectively </a:t>
+            </a:r>
+          </a:p>
+          <a:p>
+            <a:pPr lvl="0"/>
+            <a:r>
+              <a:rPr lang="en-IN" dirty="0">
                 <a:latin typeface="Times New Roman" panose="02020603050405020304" pitchFamily="18" charset="0"/>
                 <a:cs typeface="Times New Roman" panose="02020603050405020304" pitchFamily="18" charset="0"/>
               </a:rPr>
-              <a:t>umber </a:t>
-            </a:r>
+              <a:t>So at any instant of time 4 blocks of MM can be placed in 4 block frames of CM</a:t>
+            </a:r>
+          </a:p>
+          <a:p>
+            <a:pPr lvl="0"/>
             <a:r>
               <a:rPr lang="en-IN" dirty="0">
                 <a:latin typeface="Times New Roman" panose="02020603050405020304" pitchFamily="18" charset="0"/>
                 <a:cs typeface="Times New Roman" panose="02020603050405020304" pitchFamily="18" charset="0"/>
               </a:rPr>
-              <a:t>of blocks in MM (Fig 1(b)) and block frames in CM (Fig 1(a)) are assumed as 8 and 4 respectively </a:t>
-            </a:r>
-            <a:endParaRPr lang="en-IN" dirty="0" smtClean="0">
-              <a:latin typeface="Times New Roman" panose="02020603050405020304" pitchFamily="18" charset="0"/>
-              <a:cs typeface="Times New Roman" panose="02020603050405020304" pitchFamily="18" charset="0"/>
-            </a:endParaRPr>
+              <a:t>Size of block address and block frame address are 3-bit (000 to 111 shown in Fig 1(b)) and 2-bit (00 to 11 shown in Fig 1(a)) respectively. </a:t>
+            </a:r>
           </a:p>
           <a:p>
             <a:pPr lvl="0"/>
             <a:r>
-              <a:rPr lang="en-IN" dirty="0" smtClean="0">
+              <a:rPr lang="en-IN" dirty="0">
                 <a:latin typeface="Times New Roman" panose="02020603050405020304" pitchFamily="18" charset="0"/>
                 <a:cs typeface="Times New Roman" panose="02020603050405020304" pitchFamily="18" charset="0"/>
               </a:rPr>
-              <a:t>So </a:t>
-            </a:r>
+              <a:t>Size of block and block frame is assumed as 1-Kbyte i.e. each block and block frame has 1024-byte. </a:t>
+            </a:r>
+          </a:p>
+          <a:p>
+            <a:pPr lvl="0"/>
             <a:r>
               <a:rPr lang="en-IN" dirty="0">
                 <a:latin typeface="Times New Roman" panose="02020603050405020304" pitchFamily="18" charset="0"/>
                 <a:cs typeface="Times New Roman" panose="02020603050405020304" pitchFamily="18" charset="0"/>
               </a:rPr>
-              <a:t>at any instant of time 4 blocks of MM can be placed in 4 block frames of </a:t>
-            </a:r>
-            <a:r>
-              <a:rPr lang="en-IN" dirty="0" smtClean="0">
-                <a:latin typeface="Times New Roman" panose="02020603050405020304" pitchFamily="18" charset="0"/>
-                <a:cs typeface="Times New Roman" panose="02020603050405020304" pitchFamily="18" charset="0"/>
-              </a:rPr>
-              <a:t>CM</a:t>
-            </a:r>
-          </a:p>
-          <a:p>
-            <a:pPr lvl="0"/>
-            <a:r>
-              <a:rPr lang="en-IN" dirty="0" smtClean="0">
-                <a:latin typeface="Times New Roman" panose="02020603050405020304" pitchFamily="18" charset="0"/>
-                <a:cs typeface="Times New Roman" panose="02020603050405020304" pitchFamily="18" charset="0"/>
-              </a:rPr>
-              <a:t>Size </a:t>
-            </a:r>
-            <a:r>
-              <a:rPr lang="en-IN" dirty="0">
-                <a:latin typeface="Times New Roman" panose="02020603050405020304" pitchFamily="18" charset="0"/>
-                <a:cs typeface="Times New Roman" panose="02020603050405020304" pitchFamily="18" charset="0"/>
-              </a:rPr>
-              <a:t>of block address and block frame address are 3-bit (000 to 111 shown in Fig 1(b)) and 2-bit (00 to 11 shown in Fig 1(a)) respectively. </a:t>
-            </a:r>
-            <a:endParaRPr lang="en-IN" dirty="0" smtClean="0">
-              <a:latin typeface="Times New Roman" panose="02020603050405020304" pitchFamily="18" charset="0"/>
-              <a:cs typeface="Times New Roman" panose="02020603050405020304" pitchFamily="18" charset="0"/>
-            </a:endParaRPr>
-          </a:p>
-          <a:p>
-            <a:pPr lvl="0"/>
-            <a:r>
-              <a:rPr lang="en-IN" dirty="0" smtClean="0">
-                <a:latin typeface="Times New Roman" panose="02020603050405020304" pitchFamily="18" charset="0"/>
-                <a:cs typeface="Times New Roman" panose="02020603050405020304" pitchFamily="18" charset="0"/>
-              </a:rPr>
-              <a:t>Size </a:t>
-            </a:r>
-            <a:r>
-              <a:rPr lang="en-IN" dirty="0">
-                <a:latin typeface="Times New Roman" panose="02020603050405020304" pitchFamily="18" charset="0"/>
-                <a:cs typeface="Times New Roman" panose="02020603050405020304" pitchFamily="18" charset="0"/>
-              </a:rPr>
-              <a:t>of block and block frame is assumed as 1-Kbyte i.e. each block and block frame has 1024-byte. </a:t>
-            </a:r>
-            <a:endParaRPr lang="en-IN" dirty="0" smtClean="0">
-              <a:latin typeface="Times New Roman" panose="02020603050405020304" pitchFamily="18" charset="0"/>
-              <a:cs typeface="Times New Roman" panose="02020603050405020304" pitchFamily="18" charset="0"/>
-            </a:endParaRPr>
-          </a:p>
-          <a:p>
-            <a:pPr lvl="0"/>
-            <a:r>
-              <a:rPr lang="en-IN" dirty="0" smtClean="0">
-                <a:latin typeface="Times New Roman" panose="02020603050405020304" pitchFamily="18" charset="0"/>
-                <a:cs typeface="Times New Roman" panose="02020603050405020304" pitchFamily="18" charset="0"/>
-              </a:rPr>
-              <a:t>Size </a:t>
-            </a:r>
-            <a:r>
-              <a:rPr lang="en-IN" dirty="0">
-                <a:latin typeface="Times New Roman" panose="02020603050405020304" pitchFamily="18" charset="0"/>
-                <a:cs typeface="Times New Roman" panose="02020603050405020304" pitchFamily="18" charset="0"/>
-              </a:rPr>
-              <a:t>of byte address (Block offset) for accessing a byte from 1024-byte in a block is 10-bit.</a:t>
+              <a:t>Size of byte address (Block offset) for accessing a byte from 1024-byte in a block is 10-bit.</a:t>
             </a:r>
           </a:p>
           <a:p>
@@ -24008,28 +22856,14 @@
                 <a:latin typeface="Times New Roman" panose="02020603050405020304" pitchFamily="18" charset="0"/>
                 <a:cs typeface="Times New Roman" panose="02020603050405020304" pitchFamily="18" charset="0"/>
               </a:rPr>
-              <a:t>MM address generated by CPU during program execution is assumed as 101 </a:t>
-            </a:r>
-            <a:r>
-              <a:rPr lang="en-IN" b="1" dirty="0" smtClean="0">
+              <a:t>MM address generated by CPU during program execution is assumed as 101 1001010110 </a:t>
+            </a:r>
+            <a:r>
+              <a:rPr lang="en-IN" dirty="0">
                 <a:latin typeface="Times New Roman" panose="02020603050405020304" pitchFamily="18" charset="0"/>
                 <a:cs typeface="Times New Roman" panose="02020603050405020304" pitchFamily="18" charset="0"/>
               </a:rPr>
-              <a:t>1001010110 </a:t>
-            </a:r>
-            <a:r>
-              <a:rPr lang="en-IN" dirty="0" smtClean="0">
-                <a:latin typeface="Times New Roman" panose="02020603050405020304" pitchFamily="18" charset="0"/>
-                <a:cs typeface="Times New Roman" panose="02020603050405020304" pitchFamily="18" charset="0"/>
-              </a:rPr>
-              <a:t>i.e. </a:t>
-            </a:r>
-            <a:r>
-              <a:rPr lang="en-IN" dirty="0">
-                <a:latin typeface="Times New Roman" panose="02020603050405020304" pitchFamily="18" charset="0"/>
-                <a:cs typeface="Times New Roman" panose="02020603050405020304" pitchFamily="18" charset="0"/>
-              </a:rPr>
-              <a:t>the CPU generates a request for byte number 1001010110 from MM block number 101.</a:t>
+              <a:t>i.e. the CPU generates a request for byte number 1001010110 from MM block number 101.</a:t>
             </a:r>
           </a:p>
           <a:p>
@@ -24043,7 +22877,7 @@
     </p:spTree>
     <p:extLst>
       <p:ext uri="{BB962C8B-B14F-4D97-AF65-F5344CB8AC3E}">
-        <p14:creationId xmlns:p14="http://schemas.microsoft.com/office/powerpoint/2010/main" xmlns="" val="2490162677"/>
+        <p14:creationId xmlns:p14="http://schemas.microsoft.com/office/powerpoint/2010/main" val="2490162677"/>
       </p:ext>
     </p:extLst>
   </p:cSld>
@@ -24308,7 +23142,7 @@
   <a:extraClrSchemeLst/>
   <a:extLst>
     <a:ext uri="{05A4C25C-085E-4340-85A3-A5531E510DB2}">
-      <thm15:themeFamily xmlns:thm15="http://schemas.microsoft.com/office/thememl/2012/main" xmlns="" name="Office Theme" id="{62F939B6-93AF-4DB8-9C6B-D6C7DFDC589F}" vid="{4A3C46E8-61CC-4603-A589-7422A47A8E4A}"/>
+      <thm15:themeFamily xmlns:thm15="http://schemas.microsoft.com/office/thememl/2012/main" name="Office Theme" id="{62F939B6-93AF-4DB8-9C6B-D6C7DFDC589F}" vid="{4A3C46E8-61CC-4603-A589-7422A47A8E4A}"/>
     </a:ext>
   </a:extLst>
 </a:theme>
